--- a/presentations/office-client/Продай_за_меня_ОФИСЫ_клиентская.pptx
+++ b/presentations/office-client/Продай_за_меня_ОФИСЫ_клиентская.pptx
@@ -2039,31 +2039,9 @@
           <a:chExt cx="0" cy="0"/>
         </a:xfrm>
       </p:grpSpPr>
-      <p:sp>
-        <p:nvSpPr>
-          <p:cNvPr id="2" name="Shape 0"/>
-          <p:cNvSpPr/>
-          <p:nvPr/>
-        </p:nvSpPr>
-        <p:spPr>
-          <a:xfrm>
-            <a:off x="0" y="0"/>
-            <a:ext cx="12191695" cy="6858000"/>
-          </a:xfrm>
-          <a:prstGeom prst="rect">
-            <a:avLst/>
-          </a:prstGeom>
-          <a:solidFill>
-            <a:srgbClr val="0C1D28">
-              <a:alpha val="75000"/>
-            </a:srgbClr>
-          </a:solidFill>
-          <a:ln/>
-        </p:spPr>
-      </p:sp>
       <p:pic>
         <p:nvPicPr>
-          <p:cNvPr id="3" name="Image 0" descr="/home/user/mysteryslavic-2026-07-19_16-47-00/presentations/office-client/assets/logo.png">    </p:cNvPr>
+          <p:cNvPr id="2" name="Image 0" descr="/home/user/mysteryslavic-2026-07-19_16-47-00/presentations/office-client/assets/logo.png">    </p:cNvPr>
           <p:cNvPicPr>
             <a:picLocks noChangeAspect="1"/>
           </p:cNvPicPr>
@@ -2087,7 +2065,7 @@
       </p:pic>
       <p:sp>
         <p:nvSpPr>
-          <p:cNvPr id="4" name="Text 1"/>
+          <p:cNvPr id="3" name="Text 0"/>
           <p:cNvSpPr txBox="1"/>
           <p:nvPr/>
         </p:nvSpPr>
@@ -2126,7 +2104,7 @@
       </p:sp>
       <p:sp>
         <p:nvSpPr>
-          <p:cNvPr id="5" name="Text 2"/>
+          <p:cNvPr id="4" name="Text 1"/>
           <p:cNvSpPr txBox="1"/>
           <p:nvPr/>
         </p:nvSpPr>
@@ -2208,7 +2186,7 @@
       </p:sp>
       <p:sp>
         <p:nvSpPr>
-          <p:cNvPr id="6" name="Shape 3"/>
+          <p:cNvPr id="5" name="Shape 2"/>
           <p:cNvSpPr/>
           <p:nvPr/>
         </p:nvSpPr>
@@ -2228,7 +2206,7 @@
       </p:sp>
       <p:sp>
         <p:nvSpPr>
-          <p:cNvPr id="7" name="Text 4"/>
+          <p:cNvPr id="6" name="Text 3"/>
           <p:cNvSpPr txBox="1"/>
           <p:nvPr/>
         </p:nvSpPr>
@@ -2267,7 +2245,7 @@
       </p:sp>
       <p:sp>
         <p:nvSpPr>
-          <p:cNvPr id="8" name="Text 5"/>
+          <p:cNvPr id="7" name="Text 4"/>
           <p:cNvSpPr txBox="1"/>
           <p:nvPr/>
         </p:nvSpPr>
@@ -2301,72 +2279,6 @@
               <a:t>ОДИН ПОДРЯДЧИК ВМЕСТО ДЕСЯТИ</a:t>
             </a:r>
             <a:endParaRPr lang="en-US" sz="1500" dirty="0"/>
-          </a:p>
-        </p:txBody>
-      </p:sp>
-      <p:sp>
-        <p:nvSpPr>
-          <p:cNvPr id="9" name="Shape 6"/>
-          <p:cNvSpPr/>
-          <p:nvPr/>
-        </p:nvSpPr>
-        <p:spPr>
-          <a:xfrm>
-            <a:off x="10710367" y="6291072"/>
-            <a:ext cx="704088" cy="274320"/>
-          </a:xfrm>
-          <a:prstGeom prst="roundRect">
-            <a:avLst>
-              <a:gd name="adj" fmla="val 16667"/>
-            </a:avLst>
-          </a:prstGeom>
-          <a:solidFill>
-            <a:srgbClr val="13252F"/>
-          </a:solidFill>
-          <a:ln w="9525">
-            <a:solidFill>
-              <a:srgbClr val="6E5426"/>
-            </a:solidFill>
-            <a:prstDash val="solid"/>
-          </a:ln>
-        </p:spPr>
-      </p:sp>
-      <p:sp>
-        <p:nvSpPr>
-          <p:cNvPr id="10" name="Text 7"/>
-          <p:cNvSpPr txBox="1"/>
-          <p:nvPr/>
-        </p:nvSpPr>
-        <p:spPr>
-          <a:xfrm>
-            <a:off x="10710367" y="6291072"/>
-            <a:ext cx="704088" cy="274320"/>
-          </a:xfrm>
-          <a:prstGeom prst="rect">
-            <a:avLst/>
-          </a:prstGeom>
-          <a:noFill/>
-          <a:ln/>
-        </p:spPr>
-        <p:txBody>
-          <a:bodyPr wrap="square" lIns="0" tIns="0" rIns="0" bIns="0" rtlCol="0" anchor="ctr"/>
-          <a:lstStyle/>
-          <a:p>
-            <a:pPr algn="ctr" indent="0" marL="0">
-              <a:buNone/>
-            </a:pPr>
-            <a:r>
-              <a:rPr lang="en-US" sz="1000" b="1" spc="150" kern="0" dirty="0">
-                <a:solidFill>
-                  <a:srgbClr val="C89B45"/>
-                </a:solidFill>
-                <a:latin typeface="Inter" pitchFamily="34" charset="0"/>
-                <a:ea typeface="Inter" pitchFamily="34" charset="-122"/>
-                <a:cs typeface="Inter" pitchFamily="34" charset="-120"/>
-              </a:rPr>
-              <a:t>P1</a:t>
-            </a:r>
-            <a:endParaRPr lang="en-US" sz="1000" dirty="0"/>
           </a:p>
         </p:txBody>
       </p:sp>
@@ -5642,31 +5554,9 @@
           <a:chExt cx="0" cy="0"/>
         </a:xfrm>
       </p:grpSpPr>
-      <p:sp>
-        <p:nvSpPr>
-          <p:cNvPr id="2" name="Shape 0"/>
-          <p:cNvSpPr/>
-          <p:nvPr/>
-        </p:nvSpPr>
-        <p:spPr>
-          <a:xfrm>
-            <a:off x="0" y="0"/>
-            <a:ext cx="12191695" cy="6858000"/>
-          </a:xfrm>
-          <a:prstGeom prst="rect">
-            <a:avLst/>
-          </a:prstGeom>
-          <a:solidFill>
-            <a:srgbClr val="0C1D28">
-              <a:alpha val="82000"/>
-            </a:srgbClr>
-          </a:solidFill>
-          <a:ln/>
-        </p:spPr>
-      </p:sp>
       <p:pic>
         <p:nvPicPr>
-          <p:cNvPr id="3" name="Image 0" descr="/home/user/mysteryslavic-2026-07-19_16-47-00/presentations/office-client/assets/logo.png">    </p:cNvPr>
+          <p:cNvPr id="2" name="Image 0" descr="/home/user/mysteryslavic-2026-07-19_16-47-00/presentations/office-client/assets/logo.png">    </p:cNvPr>
           <p:cNvPicPr>
             <a:picLocks noChangeAspect="1"/>
           </p:cNvPicPr>
@@ -5690,7 +5580,7 @@
       </p:pic>
       <p:sp>
         <p:nvSpPr>
-          <p:cNvPr id="4" name="Text 1"/>
+          <p:cNvPr id="3" name="Text 0"/>
           <p:cNvSpPr txBox="1"/>
           <p:nvPr/>
         </p:nvSpPr>
@@ -5729,7 +5619,7 @@
       </p:sp>
       <p:sp>
         <p:nvSpPr>
-          <p:cNvPr id="5" name="Text 2"/>
+          <p:cNvPr id="4" name="Text 1"/>
           <p:cNvSpPr txBox="1"/>
           <p:nvPr/>
         </p:nvSpPr>
@@ -5768,7 +5658,7 @@
       </p:sp>
       <p:sp>
         <p:nvSpPr>
-          <p:cNvPr id="6" name="Text 3"/>
+          <p:cNvPr id="5" name="Text 2"/>
           <p:cNvSpPr txBox="1"/>
           <p:nvPr/>
         </p:nvSpPr>
@@ -5830,7 +5720,7 @@
       </p:sp>
       <p:sp>
         <p:nvSpPr>
-          <p:cNvPr id="7" name="Shape 4"/>
+          <p:cNvPr id="6" name="Shape 3"/>
           <p:cNvSpPr/>
           <p:nvPr/>
         </p:nvSpPr>
@@ -5850,7 +5740,7 @@
       </p:sp>
       <p:sp>
         <p:nvSpPr>
-          <p:cNvPr id="8" name="Text 5"/>
+          <p:cNvPr id="7" name="Text 4"/>
           <p:cNvSpPr txBox="1"/>
           <p:nvPr/>
         </p:nvSpPr>
@@ -5912,7 +5802,7 @@
       </p:sp>
       <p:pic>
         <p:nvPicPr>
-          <p:cNvPr id="9" name="Image 1" descr="/home/user/mysteryslavic-2026-07-19_16-47-00/presentations/office-client/assets/ic-phone.png">    </p:cNvPr>
+          <p:cNvPr id="8" name="Image 1" descr="/home/user/mysteryslavic-2026-07-19_16-47-00/presentations/office-client/assets/ic-phone.png">    </p:cNvPr>
           <p:cNvPicPr>
             <a:picLocks noChangeAspect="1"/>
           </p:cNvPicPr>
@@ -5936,7 +5826,7 @@
       </p:pic>
       <p:sp>
         <p:nvSpPr>
-          <p:cNvPr id="10" name="Text 6"/>
+          <p:cNvPr id="9" name="Text 5"/>
           <p:cNvSpPr txBox="1"/>
           <p:nvPr/>
         </p:nvSpPr>
@@ -5975,7 +5865,7 @@
       </p:sp>
       <p:pic>
         <p:nvPicPr>
-          <p:cNvPr id="11" name="Image 2" descr="/home/user/mysteryslavic-2026-07-19_16-47-00/presentations/office-client/assets/ic-mail.png">    </p:cNvPr>
+          <p:cNvPr id="10" name="Image 2" descr="/home/user/mysteryslavic-2026-07-19_16-47-00/presentations/office-client/assets/ic-mail.png">    </p:cNvPr>
           <p:cNvPicPr>
             <a:picLocks noChangeAspect="1"/>
           </p:cNvPicPr>
@@ -5999,7 +5889,7 @@
       </p:pic>
       <p:sp>
         <p:nvSpPr>
-          <p:cNvPr id="12" name="Text 7"/>
+          <p:cNvPr id="11" name="Text 6"/>
           <p:cNvSpPr txBox="1"/>
           <p:nvPr/>
         </p:nvSpPr>
@@ -6038,34 +5928,34 @@
       </p:sp>
       <p:sp>
         <p:nvSpPr>
-          <p:cNvPr id="13" name="Shape 8"/>
+          <p:cNvPr id="12" name="Shape 7"/>
           <p:cNvSpPr/>
           <p:nvPr/>
         </p:nvSpPr>
         <p:spPr>
           <a:xfrm>
-            <a:off x="6969100" y="2615184"/>
-            <a:ext cx="1783080" cy="1783080"/>
+            <a:off x="6713068" y="2487168"/>
+            <a:ext cx="2121408" cy="2761488"/>
           </a:xfrm>
           <a:prstGeom prst="roundRect">
             <a:avLst>
-              <a:gd name="adj" fmla="val 2564"/>
+              <a:gd name="adj" fmla="val 2586"/>
             </a:avLst>
           </a:prstGeom>
           <a:solidFill>
-            <a:srgbClr val="13252F"/>
+            <a:srgbClr val="0C1D28"/>
           </a:solidFill>
           <a:ln w="12700">
             <a:solidFill>
               <a:srgbClr val="6E5426"/>
             </a:solidFill>
-            <a:prstDash val="dash"/>
+            <a:prstDash val="solid"/>
           </a:ln>
         </p:spPr>
       </p:sp>
       <p:pic>
         <p:nvPicPr>
-          <p:cNvPr id="14" name="Image 3" descr="/home/user/mysteryslavic-2026-07-19_16-47-00/presentations/office-client/assets/ic-send.png">    </p:cNvPr>
+          <p:cNvPr id="13" name="Image 3" descr="/home/user/mysteryslavic-2026-07-19_16-47-00/presentations/office-client/assets/ic-send.png">    </p:cNvPr>
           <p:cNvPicPr>
             <a:picLocks noChangeAspect="1"/>
           </p:cNvPicPr>
@@ -6079,122 +5969,17 @@
         </p:blipFill>
         <p:spPr>
           <a:xfrm>
-            <a:off x="7641184" y="3145536"/>
-            <a:ext cx="438912" cy="438912"/>
+            <a:off x="7600036" y="2724912"/>
+            <a:ext cx="347472" cy="347472"/>
           </a:xfrm>
           <a:prstGeom prst="rect">
             <a:avLst/>
           </a:prstGeom>
         </p:spPr>
       </p:pic>
-      <p:sp>
-        <p:nvSpPr>
-          <p:cNvPr id="15" name="Text 9"/>
-          <p:cNvSpPr txBox="1"/>
-          <p:nvPr/>
-        </p:nvSpPr>
-        <p:spPr>
-          <a:xfrm>
-            <a:off x="6969100" y="3730752"/>
-            <a:ext cx="1783080" cy="256032"/>
-          </a:xfrm>
-          <a:prstGeom prst="rect">
-            <a:avLst/>
-          </a:prstGeom>
-          <a:noFill/>
-          <a:ln/>
-        </p:spPr>
-        <p:txBody>
-          <a:bodyPr wrap="square" lIns="0" tIns="0" rIns="0" bIns="0" rtlCol="0" anchor="t"/>
-          <a:lstStyle/>
-          <a:p>
-            <a:pPr algn="ctr" indent="0" marL="0">
-              <a:buNone/>
-            </a:pPr>
-            <a:r>
-              <a:rPr lang="en-US" sz="1300" b="1" spc="200" kern="0" dirty="0">
-                <a:solidFill>
-                  <a:srgbClr val="C89B45"/>
-                </a:solidFill>
-                <a:latin typeface="Inter" pitchFamily="34" charset="0"/>
-                <a:ea typeface="Inter" pitchFamily="34" charset="-122"/>
-                <a:cs typeface="Inter" pitchFamily="34" charset="-120"/>
-              </a:rPr>
-              <a:t>QR</a:t>
-            </a:r>
-            <a:endParaRPr lang="en-US" sz="1300" dirty="0"/>
-          </a:p>
-        </p:txBody>
-      </p:sp>
-      <p:sp>
-        <p:nvSpPr>
-          <p:cNvPr id="16" name="Text 10"/>
-          <p:cNvSpPr txBox="1"/>
-          <p:nvPr/>
-        </p:nvSpPr>
-        <p:spPr>
-          <a:xfrm>
-            <a:off x="6969100" y="4590288"/>
-            <a:ext cx="1783080" cy="256032"/>
-          </a:xfrm>
-          <a:prstGeom prst="rect">
-            <a:avLst/>
-          </a:prstGeom>
-          <a:noFill/>
-          <a:ln/>
-        </p:spPr>
-        <p:txBody>
-          <a:bodyPr wrap="square" lIns="0" tIns="0" rIns="0" bIns="0" rtlCol="0" anchor="t"/>
-          <a:lstStyle/>
-          <a:p>
-            <a:pPr algn="ctr" indent="0" marL="0">
-              <a:buNone/>
-            </a:pPr>
-            <a:r>
-              <a:rPr lang="en-US" sz="1300" b="1" spc="200" kern="0" dirty="0">
-                <a:solidFill>
-                  <a:srgbClr val="F7F1E7"/>
-                </a:solidFill>
-                <a:latin typeface="Inter" pitchFamily="34" charset="0"/>
-                <a:ea typeface="Inter" pitchFamily="34" charset="-122"/>
-                <a:cs typeface="Inter" pitchFamily="34" charset="-120"/>
-              </a:rPr>
-              <a:t>TELEGRAM</a:t>
-            </a:r>
-            <a:endParaRPr lang="en-US" sz="1300" dirty="0"/>
-          </a:p>
-        </p:txBody>
-      </p:sp>
-      <p:sp>
-        <p:nvSpPr>
-          <p:cNvPr id="17" name="Shape 11"/>
-          <p:cNvSpPr/>
-          <p:nvPr/>
-        </p:nvSpPr>
-        <p:spPr>
-          <a:xfrm>
-            <a:off x="9319108" y="2615184"/>
-            <a:ext cx="1783080" cy="1783080"/>
-          </a:xfrm>
-          <a:prstGeom prst="roundRect">
-            <a:avLst>
-              <a:gd name="adj" fmla="val 2564"/>
-            </a:avLst>
-          </a:prstGeom>
-          <a:solidFill>
-            <a:srgbClr val="13252F"/>
-          </a:solidFill>
-          <a:ln w="12700">
-            <a:solidFill>
-              <a:srgbClr val="6E5426"/>
-            </a:solidFill>
-            <a:prstDash val="dash"/>
-          </a:ln>
-        </p:spPr>
-      </p:sp>
       <p:pic>
         <p:nvPicPr>
-          <p:cNvPr id="18" name="Image 4" descr="/home/user/mysteryslavic-2026-07-19_16-47-00/presentations/office-client/assets/ic-messagecircle.png">    </p:cNvPr>
+          <p:cNvPr id="14" name="Image 4" descr="/home/user/mysteryslavic-2026-07-19_16-47-00/presentations/office-client/assets/qr-telegram.png">    </p:cNvPr>
           <p:cNvPicPr>
             <a:picLocks noChangeAspect="1"/>
           </p:cNvPicPr>
@@ -6208,8 +5993,8 @@
         </p:blipFill>
         <p:spPr>
           <a:xfrm>
-            <a:off x="9991192" y="3145536"/>
-            <a:ext cx="438912" cy="438912"/>
+            <a:off x="6987388" y="3200400"/>
+            <a:ext cx="1572768" cy="1572768"/>
           </a:xfrm>
           <a:prstGeom prst="rect">
             <a:avLst/>
@@ -6218,14 +6003,14 @@
       </p:pic>
       <p:sp>
         <p:nvSpPr>
-          <p:cNvPr id="19" name="Text 12"/>
-          <p:cNvSpPr txBox="1"/>
-          <p:nvPr/>
-        </p:nvSpPr>
-        <p:spPr>
-          <a:xfrm>
-            <a:off x="9319108" y="3730752"/>
-            <a:ext cx="1783080" cy="256032"/>
+          <p:cNvPr id="15" name="Text 8"/>
+          <p:cNvSpPr txBox="1"/>
+          <p:nvPr/>
+        </p:nvSpPr>
+        <p:spPr>
+          <a:xfrm>
+            <a:off x="6713068" y="4882896"/>
+            <a:ext cx="2121408" cy="256032"/>
           </a:xfrm>
           <a:prstGeom prst="rect">
             <a:avLst/>
@@ -6241,93 +6026,15 @@
               <a:buNone/>
             </a:pPr>
             <a:r>
-              <a:rPr lang="en-US" sz="1300" b="1" spc="200" kern="0" dirty="0">
-                <a:solidFill>
-                  <a:srgbClr val="C89B45"/>
-                </a:solidFill>
-                <a:latin typeface="Inter" pitchFamily="34" charset="0"/>
-                <a:ea typeface="Inter" pitchFamily="34" charset="-122"/>
-                <a:cs typeface="Inter" pitchFamily="34" charset="-120"/>
-              </a:rPr>
-              <a:t>QR</a:t>
-            </a:r>
-            <a:endParaRPr lang="en-US" sz="1300" dirty="0"/>
-          </a:p>
-        </p:txBody>
-      </p:sp>
-      <p:sp>
-        <p:nvSpPr>
-          <p:cNvPr id="20" name="Text 13"/>
-          <p:cNvSpPr txBox="1"/>
-          <p:nvPr/>
-        </p:nvSpPr>
-        <p:spPr>
-          <a:xfrm>
-            <a:off x="9319108" y="4590288"/>
-            <a:ext cx="1783080" cy="256032"/>
-          </a:xfrm>
-          <a:prstGeom prst="rect">
-            <a:avLst/>
-          </a:prstGeom>
-          <a:noFill/>
-          <a:ln/>
-        </p:spPr>
-        <p:txBody>
-          <a:bodyPr wrap="square" lIns="0" tIns="0" rIns="0" bIns="0" rtlCol="0" anchor="t"/>
-          <a:lstStyle/>
-          <a:p>
-            <a:pPr algn="ctr" indent="0" marL="0">
-              <a:buNone/>
-            </a:pPr>
-            <a:r>
-              <a:rPr lang="en-US" sz="1300" b="1" spc="200" kern="0" dirty="0">
-                <a:solidFill>
-                  <a:srgbClr val="F7F1E7"/>
-                </a:solidFill>
-                <a:latin typeface="Inter" pitchFamily="34" charset="0"/>
-                <a:ea typeface="Inter" pitchFamily="34" charset="-122"/>
-                <a:cs typeface="Inter" pitchFamily="34" charset="-120"/>
-              </a:rPr>
-              <a:t>WHATSAPP</a:t>
-            </a:r>
-            <a:endParaRPr lang="en-US" sz="1300" dirty="0"/>
-          </a:p>
-        </p:txBody>
-      </p:sp>
-      <p:sp>
-        <p:nvSpPr>
-          <p:cNvPr id="21" name="Text 14"/>
-          <p:cNvSpPr txBox="1"/>
-          <p:nvPr/>
-        </p:nvSpPr>
-        <p:spPr>
-          <a:xfrm>
-            <a:off x="6656832" y="5138928"/>
-            <a:ext cx="4757623" cy="274320"/>
-          </a:xfrm>
-          <a:prstGeom prst="rect">
-            <a:avLst/>
-          </a:prstGeom>
-          <a:noFill/>
-          <a:ln/>
-        </p:spPr>
-        <p:txBody>
-          <a:bodyPr wrap="square" lIns="0" tIns="0" rIns="0" bIns="0" rtlCol="0" anchor="t"/>
-          <a:lstStyle/>
-          <a:p>
-            <a:pPr algn="ctr" indent="0" marL="0">
-              <a:buNone/>
-            </a:pPr>
-            <a:r>
-              <a:rPr lang="en-US" sz="1250" dirty="0">
-                <a:solidFill>
-                  <a:srgbClr val="9CAAB1"/>
-                </a:solidFill>
-                <a:latin typeface="Inter" pitchFamily="34" charset="0"/>
-                <a:ea typeface="Inter" pitchFamily="34" charset="-122"/>
-                <a:cs typeface="Inter" pitchFamily="34" charset="-120"/>
-              </a:rPr>
-              <a:t>Предварительная оценка — бесплатно</a:t>
+              <a:rPr lang="en-US" sz="1250" b="1" spc="200" kern="0" dirty="0">
+                <a:solidFill>
+                  <a:srgbClr val="D9BC7A"/>
+                </a:solidFill>
+                <a:latin typeface="Inter" pitchFamily="34" charset="0"/>
+                <a:ea typeface="Inter" pitchFamily="34" charset="-122"/>
+                <a:cs typeface="Inter" pitchFamily="34" charset="-120"/>
+              </a:rPr>
+              <a:t>TELEGRAM</a:t>
             </a:r>
             <a:endParaRPr lang="en-US" sz="1250" dirty="0"/>
           </a:p>
@@ -6335,24 +6042,24 @@
       </p:sp>
       <p:sp>
         <p:nvSpPr>
-          <p:cNvPr id="22" name="Shape 15"/>
+          <p:cNvPr id="16" name="Shape 9"/>
           <p:cNvSpPr/>
           <p:nvPr/>
         </p:nvSpPr>
         <p:spPr>
           <a:xfrm>
-            <a:off x="10710367" y="6291072"/>
-            <a:ext cx="704088" cy="274320"/>
+            <a:off x="9218524" y="2487168"/>
+            <a:ext cx="2121408" cy="2761488"/>
           </a:xfrm>
           <a:prstGeom prst="roundRect">
             <a:avLst>
-              <a:gd name="adj" fmla="val 16667"/>
+              <a:gd name="adj" fmla="val 2586"/>
             </a:avLst>
           </a:prstGeom>
           <a:solidFill>
-            <a:srgbClr val="13252F"/>
+            <a:srgbClr val="0C1D28"/>
           </a:solidFill>
-          <a:ln w="9525">
+          <a:ln w="12700">
             <a:solidFill>
               <a:srgbClr val="6E5426"/>
             </a:solidFill>
@@ -6360,16 +6067,127 @@
           </a:ln>
         </p:spPr>
       </p:sp>
-      <p:sp>
-        <p:nvSpPr>
-          <p:cNvPr id="23" name="Text 16"/>
-          <p:cNvSpPr txBox="1"/>
-          <p:nvPr/>
-        </p:nvSpPr>
-        <p:spPr>
-          <a:xfrm>
-            <a:off x="10710367" y="6291072"/>
-            <a:ext cx="704088" cy="274320"/>
+      <p:pic>
+        <p:nvPicPr>
+          <p:cNvPr id="17" name="Image 5" descr="/home/user/mysteryslavic-2026-07-19_16-47-00/presentations/office-client/assets/ic-messagecircle.png">    </p:cNvPr>
+          <p:cNvPicPr>
+            <a:picLocks noChangeAspect="1"/>
+          </p:cNvPicPr>
+          <p:nvPr/>
+        </p:nvPicPr>
+        <p:blipFill>
+          <a:blip r:embed="rId7"/>
+          <a:stretch>
+            <a:fillRect/>
+          </a:stretch>
+        </p:blipFill>
+        <p:spPr>
+          <a:xfrm>
+            <a:off x="10105492" y="2724912"/>
+            <a:ext cx="347472" cy="347472"/>
+          </a:xfrm>
+          <a:prstGeom prst="rect">
+            <a:avLst/>
+          </a:prstGeom>
+        </p:spPr>
+      </p:pic>
+      <p:pic>
+        <p:nvPicPr>
+          <p:cNvPr id="18" name="Image 6" descr="/home/user/mysteryslavic-2026-07-19_16-47-00/presentations/office-client/assets/qr-whatsapp.png">    </p:cNvPr>
+          <p:cNvPicPr>
+            <a:picLocks noChangeAspect="1"/>
+          </p:cNvPicPr>
+          <p:nvPr/>
+        </p:nvPicPr>
+        <p:blipFill>
+          <a:blip r:embed="rId8"/>
+          <a:stretch>
+            <a:fillRect/>
+          </a:stretch>
+        </p:blipFill>
+        <p:spPr>
+          <a:xfrm>
+            <a:off x="9492844" y="3200400"/>
+            <a:ext cx="1572768" cy="1572768"/>
+          </a:xfrm>
+          <a:prstGeom prst="rect">
+            <a:avLst/>
+          </a:prstGeom>
+        </p:spPr>
+      </p:pic>
+      <p:sp>
+        <p:nvSpPr>
+          <p:cNvPr id="19" name="Text 10"/>
+          <p:cNvSpPr txBox="1"/>
+          <p:nvPr/>
+        </p:nvSpPr>
+        <p:spPr>
+          <a:xfrm>
+            <a:off x="9218524" y="4882896"/>
+            <a:ext cx="2121408" cy="256032"/>
+          </a:xfrm>
+          <a:prstGeom prst="rect">
+            <a:avLst/>
+          </a:prstGeom>
+          <a:noFill/>
+          <a:ln/>
+        </p:spPr>
+        <p:txBody>
+          <a:bodyPr wrap="square" lIns="0" tIns="0" rIns="0" bIns="0" rtlCol="0" anchor="t"/>
+          <a:lstStyle/>
+          <a:p>
+            <a:pPr algn="ctr" indent="0" marL="0">
+              <a:buNone/>
+            </a:pPr>
+            <a:r>
+              <a:rPr lang="en-US" sz="1250" b="1" spc="200" kern="0" dirty="0">
+                <a:solidFill>
+                  <a:srgbClr val="D9BC7A"/>
+                </a:solidFill>
+                <a:latin typeface="Inter" pitchFamily="34" charset="0"/>
+                <a:ea typeface="Inter" pitchFamily="34" charset="-122"/>
+                <a:cs typeface="Inter" pitchFamily="34" charset="-120"/>
+              </a:rPr>
+              <a:t>WHATSAPP</a:t>
+            </a:r>
+            <a:endParaRPr lang="en-US" sz="1250" dirty="0"/>
+          </a:p>
+        </p:txBody>
+      </p:sp>
+      <p:sp>
+        <p:nvSpPr>
+          <p:cNvPr id="20" name="Shape 11"/>
+          <p:cNvSpPr/>
+          <p:nvPr/>
+        </p:nvSpPr>
+        <p:spPr>
+          <a:xfrm>
+            <a:off x="6713068" y="5468112"/>
+            <a:ext cx="4626864" cy="420624"/>
+          </a:xfrm>
+          <a:prstGeom prst="roundRect">
+            <a:avLst>
+              <a:gd name="adj" fmla="val 13043"/>
+            </a:avLst>
+          </a:prstGeom>
+          <a:solidFill>
+            <a:srgbClr val="0C1D28">
+              <a:alpha val="88000"/>
+            </a:srgbClr>
+          </a:solidFill>
+          <a:ln/>
+        </p:spPr>
+      </p:sp>
+      <p:sp>
+        <p:nvSpPr>
+          <p:cNvPr id="21" name="Text 12"/>
+          <p:cNvSpPr txBox="1"/>
+          <p:nvPr/>
+        </p:nvSpPr>
+        <p:spPr>
+          <a:xfrm>
+            <a:off x="6713068" y="5468112"/>
+            <a:ext cx="4626864" cy="420624"/>
           </a:xfrm>
           <a:prstGeom prst="rect">
             <a:avLst/>
@@ -6385,17 +6203,17 @@
               <a:buNone/>
             </a:pPr>
             <a:r>
-              <a:rPr lang="en-US" sz="1000" b="1" spc="150" kern="0" dirty="0">
-                <a:solidFill>
-                  <a:srgbClr val="C89B45"/>
-                </a:solidFill>
-                <a:latin typeface="Inter" pitchFamily="34" charset="0"/>
-                <a:ea typeface="Inter" pitchFamily="34" charset="-122"/>
-                <a:cs typeface="Inter" pitchFamily="34" charset="-120"/>
-              </a:rPr>
-              <a:t>P7</a:t>
-            </a:r>
-            <a:endParaRPr lang="en-US" sz="1000" dirty="0"/>
+              <a:rPr lang="en-US" sz="1250" dirty="0">
+                <a:solidFill>
+                  <a:srgbClr val="F7F1E7"/>
+                </a:solidFill>
+                <a:latin typeface="Inter" pitchFamily="34" charset="0"/>
+                <a:ea typeface="Inter" pitchFamily="34" charset="-122"/>
+                <a:cs typeface="Inter" pitchFamily="34" charset="-120"/>
+              </a:rPr>
+              <a:t>Наведите камеру — напишите нам в мессенджер</a:t>
+            </a:r>
+            <a:endParaRPr lang="en-US" sz="1250" dirty="0"/>
           </a:p>
         </p:txBody>
       </p:sp>
@@ -6440,29 +6258,7 @@
       </p:grpSpPr>
       <p:sp>
         <p:nvSpPr>
-          <p:cNvPr id="2" name="Shape 0"/>
-          <p:cNvSpPr/>
-          <p:nvPr/>
-        </p:nvSpPr>
-        <p:spPr>
-          <a:xfrm>
-            <a:off x="0" y="0"/>
-            <a:ext cx="12191695" cy="6858000"/>
-          </a:xfrm>
-          <a:prstGeom prst="rect">
-            <a:avLst/>
-          </a:prstGeom>
-          <a:solidFill>
-            <a:srgbClr val="0C1D28">
-              <a:alpha val="80000"/>
-            </a:srgbClr>
-          </a:solidFill>
-          <a:ln/>
-        </p:spPr>
-      </p:sp>
-      <p:sp>
-        <p:nvSpPr>
-          <p:cNvPr id="3" name="Text 1"/>
+          <p:cNvPr id="2" name="Text 0"/>
           <p:cNvSpPr txBox="1"/>
           <p:nvPr/>
         </p:nvSpPr>
@@ -6501,7 +6297,7 @@
       </p:sp>
       <p:sp>
         <p:nvSpPr>
-          <p:cNvPr id="4" name="Text 2"/>
+          <p:cNvPr id="3" name="Text 1"/>
           <p:cNvSpPr txBox="1"/>
           <p:nvPr/>
         </p:nvSpPr>
@@ -6563,7 +6359,7 @@
       </p:sp>
       <p:sp>
         <p:nvSpPr>
-          <p:cNvPr id="5" name="Shape 3"/>
+          <p:cNvPr id="4" name="Shape 2"/>
           <p:cNvSpPr/>
           <p:nvPr/>
         </p:nvSpPr>
@@ -6583,7 +6379,7 @@
       </p:sp>
       <p:sp>
         <p:nvSpPr>
-          <p:cNvPr id="6" name="Text 4"/>
+          <p:cNvPr id="5" name="Text 3"/>
           <p:cNvSpPr txBox="1"/>
           <p:nvPr/>
         </p:nvSpPr>
@@ -6645,7 +6441,7 @@
       </p:sp>
       <p:sp>
         <p:nvSpPr>
-          <p:cNvPr id="7" name="Text 5"/>
+          <p:cNvPr id="6" name="Text 4"/>
           <p:cNvSpPr txBox="1"/>
           <p:nvPr/>
         </p:nvSpPr>
@@ -6684,7 +6480,7 @@
       </p:sp>
       <p:sp>
         <p:nvSpPr>
-          <p:cNvPr id="8" name="Text 6"/>
+          <p:cNvPr id="7" name="Text 5"/>
           <p:cNvSpPr txBox="1"/>
           <p:nvPr/>
         </p:nvSpPr>
@@ -6746,7 +6542,7 @@
       </p:sp>
       <p:sp>
         <p:nvSpPr>
-          <p:cNvPr id="9" name="Shape 7"/>
+          <p:cNvPr id="8" name="Shape 6"/>
           <p:cNvSpPr/>
           <p:nvPr/>
         </p:nvSpPr>
@@ -6766,7 +6562,7 @@
       </p:sp>
       <p:sp>
         <p:nvSpPr>
-          <p:cNvPr id="10" name="Text 8"/>
+          <p:cNvPr id="9" name="Text 7"/>
           <p:cNvSpPr txBox="1"/>
           <p:nvPr/>
         </p:nvSpPr>
@@ -6805,7 +6601,7 @@
       </p:sp>
       <p:sp>
         <p:nvSpPr>
-          <p:cNvPr id="11" name="Text 9"/>
+          <p:cNvPr id="10" name="Text 8"/>
           <p:cNvSpPr txBox="1"/>
           <p:nvPr/>
         </p:nvSpPr>
@@ -6867,7 +6663,7 @@
       </p:sp>
       <p:sp>
         <p:nvSpPr>
-          <p:cNvPr id="12" name="Shape 10"/>
+          <p:cNvPr id="11" name="Shape 9"/>
           <p:cNvSpPr/>
           <p:nvPr/>
         </p:nvSpPr>
@@ -6887,7 +6683,7 @@
       </p:sp>
       <p:sp>
         <p:nvSpPr>
-          <p:cNvPr id="13" name="Text 11"/>
+          <p:cNvPr id="12" name="Text 10"/>
           <p:cNvSpPr txBox="1"/>
           <p:nvPr/>
         </p:nvSpPr>
@@ -6926,7 +6722,7 @@
       </p:sp>
       <p:sp>
         <p:nvSpPr>
-          <p:cNvPr id="14" name="Text 12"/>
+          <p:cNvPr id="13" name="Text 11"/>
           <p:cNvSpPr txBox="1"/>
           <p:nvPr/>
         </p:nvSpPr>
@@ -6988,7 +6784,7 @@
       </p:sp>
       <p:sp>
         <p:nvSpPr>
-          <p:cNvPr id="15" name="Shape 13"/>
+          <p:cNvPr id="14" name="Shape 12"/>
           <p:cNvSpPr/>
           <p:nvPr/>
         </p:nvSpPr>
@@ -7008,7 +6804,7 @@
       </p:sp>
       <p:sp>
         <p:nvSpPr>
-          <p:cNvPr id="16" name="Text 14"/>
+          <p:cNvPr id="15" name="Text 13"/>
           <p:cNvSpPr txBox="1"/>
           <p:nvPr/>
         </p:nvSpPr>
@@ -7047,7 +6843,7 @@
       </p:sp>
       <p:sp>
         <p:nvSpPr>
-          <p:cNvPr id="17" name="Text 15"/>
+          <p:cNvPr id="16" name="Text 14"/>
           <p:cNvSpPr txBox="1"/>
           <p:nvPr/>
         </p:nvSpPr>
@@ -7104,72 +6900,6 @@
               <a:t>высвобождаются</a:t>
             </a:r>
             <a:endParaRPr lang="en-US" sz="1250" dirty="0"/>
-          </a:p>
-        </p:txBody>
-      </p:sp>
-      <p:sp>
-        <p:nvSpPr>
-          <p:cNvPr id="18" name="Shape 16"/>
-          <p:cNvSpPr/>
-          <p:nvPr/>
-        </p:nvSpPr>
-        <p:spPr>
-          <a:xfrm>
-            <a:off x="10710367" y="6291072"/>
-            <a:ext cx="704088" cy="274320"/>
-          </a:xfrm>
-          <a:prstGeom prst="roundRect">
-            <a:avLst>
-              <a:gd name="adj" fmla="val 16667"/>
-            </a:avLst>
-          </a:prstGeom>
-          <a:solidFill>
-            <a:srgbClr val="13252F"/>
-          </a:solidFill>
-          <a:ln w="9525">
-            <a:solidFill>
-              <a:srgbClr val="6E5426"/>
-            </a:solidFill>
-            <a:prstDash val="solid"/>
-          </a:ln>
-        </p:spPr>
-      </p:sp>
-      <p:sp>
-        <p:nvSpPr>
-          <p:cNvPr id="19" name="Text 17"/>
-          <p:cNvSpPr txBox="1"/>
-          <p:nvPr/>
-        </p:nvSpPr>
-        <p:spPr>
-          <a:xfrm>
-            <a:off x="10710367" y="6291072"/>
-            <a:ext cx="704088" cy="274320"/>
-          </a:xfrm>
-          <a:prstGeom prst="rect">
-            <a:avLst/>
-          </a:prstGeom>
-          <a:noFill/>
-          <a:ln/>
-        </p:spPr>
-        <p:txBody>
-          <a:bodyPr wrap="square" lIns="0" tIns="0" rIns="0" bIns="0" rtlCol="0" anchor="ctr"/>
-          <a:lstStyle/>
-          <a:p>
-            <a:pPr algn="ctr" indent="0" marL="0">
-              <a:buNone/>
-            </a:pPr>
-            <a:r>
-              <a:rPr lang="en-US" sz="1000" b="1" spc="150" kern="0" dirty="0">
-                <a:solidFill>
-                  <a:srgbClr val="C89B45"/>
-                </a:solidFill>
-                <a:latin typeface="Inter" pitchFamily="34" charset="0"/>
-                <a:ea typeface="Inter" pitchFamily="34" charset="-122"/>
-                <a:cs typeface="Inter" pitchFamily="34" charset="-120"/>
-              </a:rPr>
-              <a:t>P2</a:t>
-            </a:r>
-            <a:endParaRPr lang="en-US" sz="1000" dirty="0"/>
           </a:p>
         </p:txBody>
       </p:sp>
@@ -7260,7 +6990,7 @@
         <p:spPr>
           <a:xfrm>
             <a:off x="777240" y="1060704"/>
-            <a:ext cx="5760720" cy="2194560"/>
+            <a:ext cx="5394960" cy="2194560"/>
           </a:xfrm>
           <a:prstGeom prst="rect">
             <a:avLst/>
@@ -7279,7 +7009,7 @@
               <a:buNone/>
             </a:pPr>
             <a:r>
-              <a:rPr lang="en-US" sz="3300" b="1" dirty="0">
+              <a:rPr lang="en-US" sz="3200" b="1" dirty="0">
                 <a:solidFill>
                   <a:srgbClr val="0C1D28"/>
                 </a:solidFill>
@@ -7289,7 +7019,7 @@
               </a:rPr>
               <a:t>ПОСЛЕДНИЙ ШКАФ</a:t>
             </a:r>
-            <a:endParaRPr lang="en-US" sz="3300" dirty="0"/>
+            <a:endParaRPr lang="en-US" sz="3200" dirty="0"/>
           </a:p>
           <a:p>
             <a:pPr indent="0" marL="0">
@@ -7299,7 +7029,7 @@
               <a:buNone/>
             </a:pPr>
             <a:r>
-              <a:rPr lang="en-US" sz="3300" b="1" dirty="0">
+              <a:rPr lang="en-US" sz="3200" b="1" dirty="0">
                 <a:solidFill>
                   <a:srgbClr val="0C1D28"/>
                 </a:solidFill>
@@ -7309,7 +7039,7 @@
               </a:rPr>
               <a:t>БЛОКИРУЕТ АКТ</a:t>
             </a:r>
-            <a:endParaRPr lang="en-US" sz="3300" dirty="0"/>
+            <a:endParaRPr lang="en-US" sz="3200" dirty="0"/>
           </a:p>
           <a:p>
             <a:pPr indent="0" marL="0">
@@ -7319,7 +7049,7 @@
               <a:buNone/>
             </a:pPr>
             <a:r>
-              <a:rPr lang="en-US" sz="3300" b="1" dirty="0">
+              <a:rPr lang="en-US" sz="3200" b="1" dirty="0">
                 <a:solidFill>
                   <a:srgbClr val="0C1D28"/>
                 </a:solidFill>
@@ -7329,7 +7059,7 @@
               </a:rPr>
               <a:t>ТАК ЖЕ, КАК ВЕСЬ ОФИС</a:t>
             </a:r>
-            <a:endParaRPr lang="en-US" sz="3300" dirty="0"/>
+            <a:endParaRPr lang="en-US" sz="3200" dirty="0"/>
           </a:p>
         </p:txBody>
       </p:sp>
@@ -7341,8 +7071,8 @@
         </p:nvSpPr>
         <p:spPr>
           <a:xfrm>
-            <a:off x="777240" y="3401568"/>
-            <a:ext cx="5577840" cy="310896"/>
+            <a:off x="777240" y="3127248"/>
+            <a:ext cx="5394960" cy="310896"/>
           </a:xfrm>
           <a:prstGeom prst="rect">
             <a:avLst/>
@@ -7380,8 +7110,8 @@
         </p:nvSpPr>
         <p:spPr>
           <a:xfrm>
-            <a:off x="777240" y="3840480"/>
-            <a:ext cx="5577840" cy="1417320"/>
+            <a:off x="777240" y="3584448"/>
+            <a:ext cx="5212080" cy="1280160"/>
           </a:xfrm>
           <a:prstGeom prst="rect">
             <a:avLst/>
@@ -7395,7 +7125,7 @@
           <a:p>
             <a:pPr indent="0" marL="0">
               <a:lnSpc>
-                <a:spcPts val="2700"/>
+                <a:spcPts val="2800"/>
               </a:lnSpc>
               <a:buNone/>
             </a:pPr>
@@ -7408,7 +7138,47 @@
                 <a:ea typeface="Inter" pitchFamily="34" charset="-122"/>
                 <a:cs typeface="Inter" pitchFamily="34" charset="-120"/>
               </a:rPr>
-              <a:t>12 столов  ·  17 кресел  ·  3 шкафа  ·  2 тумбы  ·  МФУ  ·  микроволновка  ·  стойка ресепшен  ·  ковролин  ·  доска  ·  кабели  ·  коробки</a:t>
+              <a:t>12 столов · 17 кресел · 3 шкафа · 2 тумбы</a:t>
+            </a:r>
+            <a:endParaRPr lang="en-US" sz="1500" dirty="0"/>
+          </a:p>
+          <a:p>
+            <a:pPr indent="0" marL="0">
+              <a:lnSpc>
+                <a:spcPts val="2800"/>
+              </a:lnSpc>
+              <a:buNone/>
+            </a:pPr>
+            <a:r>
+              <a:rPr lang="en-US" sz="1500" b="1" dirty="0">
+                <a:solidFill>
+                  <a:srgbClr val="0C1D28"/>
+                </a:solidFill>
+                <a:latin typeface="Inter" pitchFamily="34" charset="0"/>
+                <a:ea typeface="Inter" pitchFamily="34" charset="-122"/>
+                <a:cs typeface="Inter" pitchFamily="34" charset="-120"/>
+              </a:rPr>
+              <a:t>МФУ · микроволновка · стойка ресепшен</a:t>
+            </a:r>
+            <a:endParaRPr lang="en-US" sz="1500" dirty="0"/>
+          </a:p>
+          <a:p>
+            <a:pPr indent="0" marL="0">
+              <a:lnSpc>
+                <a:spcPts val="2800"/>
+              </a:lnSpc>
+              <a:buNone/>
+            </a:pPr>
+            <a:r>
+              <a:rPr lang="en-US" sz="1500" b="1" dirty="0">
+                <a:solidFill>
+                  <a:srgbClr val="0C1D28"/>
+                </a:solidFill>
+                <a:latin typeface="Inter" pitchFamily="34" charset="0"/>
+                <a:ea typeface="Inter" pitchFamily="34" charset="-122"/>
+                <a:cs typeface="Inter" pitchFamily="34" charset="-120"/>
+              </a:rPr>
+              <a:t>ковролин · доска · кабели · коробки</a:t>
             </a:r>
             <a:endParaRPr lang="en-US" sz="1500" dirty="0"/>
           </a:p>
@@ -7422,8 +7192,8 @@
         </p:nvSpPr>
         <p:spPr>
           <a:xfrm>
-            <a:off x="777240" y="5486400"/>
-            <a:ext cx="5577840" cy="10973"/>
+            <a:off x="777240" y="5175504"/>
+            <a:ext cx="5212080" cy="10973"/>
           </a:xfrm>
           <a:prstGeom prst="rect">
             <a:avLst/>
@@ -7442,8 +7212,8 @@
         </p:nvSpPr>
         <p:spPr>
           <a:xfrm>
-            <a:off x="777240" y="5687568"/>
-            <a:ext cx="5577840" cy="658368"/>
+            <a:off x="777240" y="5394960"/>
+            <a:ext cx="5394960" cy="658368"/>
           </a:xfrm>
           <a:prstGeom prst="rect">
             <a:avLst/>
@@ -7493,128 +7263,6 @@
               <a:t>Вместе — десятки решений и сорванный срок.</a:t>
             </a:r>
             <a:endParaRPr lang="en-US" sz="1400" dirty="0"/>
-          </a:p>
-        </p:txBody>
-      </p:sp>
-      <p:sp>
-        <p:nvSpPr>
-          <p:cNvPr id="8" name="Shape 6"/>
-          <p:cNvSpPr/>
-          <p:nvPr/>
-        </p:nvSpPr>
-        <p:spPr>
-          <a:xfrm>
-            <a:off x="6903720" y="777240"/>
-            <a:ext cx="4507992" cy="5303520"/>
-          </a:xfrm>
-          <a:prstGeom prst="roundRect">
-            <a:avLst>
-              <a:gd name="adj" fmla="val 1217"/>
-            </a:avLst>
-          </a:prstGeom>
-          <a:solidFill>
-            <a:srgbClr val="13252F"/>
-          </a:solidFill>
-          <a:ln w="12700">
-            <a:solidFill>
-              <a:srgbClr val="6E5426"/>
-            </a:solidFill>
-            <a:prstDash val="dash"/>
-          </a:ln>
-        </p:spPr>
-      </p:sp>
-      <p:sp>
-        <p:nvSpPr>
-          <p:cNvPr id="9" name="Text 7"/>
-          <p:cNvSpPr txBox="1"/>
-          <p:nvPr/>
-        </p:nvSpPr>
-        <p:spPr>
-          <a:xfrm>
-            <a:off x="6903720" y="3044952"/>
-            <a:ext cx="4507992" cy="310896"/>
-          </a:xfrm>
-          <a:prstGeom prst="rect">
-            <a:avLst/>
-          </a:prstGeom>
-          <a:noFill/>
-          <a:ln/>
-        </p:spPr>
-        <p:txBody>
-          <a:bodyPr wrap="square" lIns="0" tIns="0" rIns="0" bIns="0" rtlCol="0" anchor="ctr"/>
-          <a:lstStyle/>
-          <a:p>
-            <a:pPr algn="ctr" indent="0" marL="0">
-              <a:buNone/>
-            </a:pPr>
-            <a:r>
-              <a:rPr lang="en-US" sz="1500" b="1" spc="300" kern="0" dirty="0">
-                <a:solidFill>
-                  <a:srgbClr val="C89B45"/>
-                </a:solidFill>
-                <a:latin typeface="Inter" pitchFamily="34" charset="0"/>
-                <a:ea typeface="Inter" pitchFamily="34" charset="-122"/>
-                <a:cs typeface="Inter" pitchFamily="34" charset="-120"/>
-              </a:rPr>
-              <a:t>P3</a:t>
-            </a:r>
-            <a:endParaRPr lang="en-US" sz="1500" dirty="0"/>
-          </a:p>
-        </p:txBody>
-      </p:sp>
-      <p:sp>
-        <p:nvSpPr>
-          <p:cNvPr id="10" name="Text 8"/>
-          <p:cNvSpPr txBox="1"/>
-          <p:nvPr/>
-        </p:nvSpPr>
-        <p:spPr>
-          <a:xfrm>
-            <a:off x="7178040" y="3429000"/>
-            <a:ext cx="3959352" cy="457200"/>
-          </a:xfrm>
-          <a:prstGeom prst="rect">
-            <a:avLst/>
-          </a:prstGeom>
-          <a:noFill/>
-          <a:ln/>
-        </p:spPr>
-        <p:txBody>
-          <a:bodyPr wrap="square" lIns="0" tIns="0" rIns="0" bIns="0" rtlCol="0" anchor="t"/>
-          <a:lstStyle/>
-          <a:p>
-            <a:pPr algn="ctr" indent="0" marL="0">
-              <a:buNone/>
-            </a:pPr>
-            <a:r>
-              <a:rPr lang="en-US" sz="1100" dirty="0">
-                <a:solidFill>
-                  <a:srgbClr val="9CAAB1"/>
-                </a:solidFill>
-                <a:latin typeface="Inter" pitchFamily="34" charset="0"/>
-                <a:ea typeface="Inter" pitchFamily="34" charset="-122"/>
-                <a:cs typeface="Inter" pitchFamily="34" charset="-120"/>
-              </a:rPr>
-              <a:t>почти пустой офис</a:t>
-            </a:r>
-            <a:endParaRPr lang="en-US" sz="1100" dirty="0"/>
-          </a:p>
-          <a:p>
-            <a:pPr algn="ctr" indent="0" marL="0">
-              <a:buNone/>
-            </a:pPr>
-            <a:r>
-              <a:rPr lang="en-US" sz="1100" dirty="0">
-                <a:solidFill>
-                  <a:srgbClr val="9CAAB1"/>
-                </a:solidFill>
-                <a:latin typeface="Inter" pitchFamily="34" charset="0"/>
-                <a:ea typeface="Inter" pitchFamily="34" charset="-122"/>
-                <a:cs typeface="Inter" pitchFamily="34" charset="-120"/>
-              </a:rPr>
-              <a:t>и оставшийся хвост в углу</a:t>
-            </a:r>
-            <a:endParaRPr lang="en-US" sz="1100" dirty="0"/>
           </a:p>
         </p:txBody>
       </p:sp>
@@ -7759,7 +7407,7 @@
       </p:sp>
       <p:pic>
         <p:nvPicPr>
-          <p:cNvPr id="5" name="Image 0" descr="/home/user/mysteryslavic-2026-07-19_16-47-00/presentations/office-client/assets/illus-P4-sami.png">    </p:cNvPr>
+          <p:cNvPr id="5" name="Image 0" descr="/home/user/mysteryslavic-2026-07-19_16-47-00/presentations/office-client/assets/ill-vyvezti.png">    </p:cNvPr>
           <p:cNvPicPr>
             <a:picLocks noChangeAspect="1"/>
           </p:cNvPicPr>
@@ -7814,7 +7462,7 @@
                 <a:ea typeface="Inter" pitchFamily="34" charset="-122"/>
                 <a:cs typeface="Inter" pitchFamily="34" charset="-120"/>
               </a:rPr>
-              <a:t>РАЗБИРАТЬСЯ САМИМ</a:t>
+              <a:t>ВЫВЕЗТИ ВСЁ</a:t>
             </a:r>
             <a:endParaRPr lang="en-US" sz="1700" dirty="0"/>
           </a:p>
@@ -7856,7 +7504,7 @@
                 <a:ea typeface="Inter" pitchFamily="34" charset="-122"/>
                 <a:cs typeface="Inter" pitchFamily="34" charset="-120"/>
               </a:rPr>
-              <a:t>5–10 подрядчиков и десятки</a:t>
+              <a:t>Заплатить за вывоз</a:t>
             </a:r>
             <a:endParaRPr lang="en-US" sz="1300" dirty="0"/>
           </a:p>
@@ -7876,7 +7524,7 @@
                 <a:ea typeface="Inter" pitchFamily="34" charset="-122"/>
                 <a:cs typeface="Inter" pitchFamily="34" charset="-120"/>
               </a:rPr>
-              <a:t>часов ваших сотрудников</a:t>
+              <a:t>и не вернуть ничего</a:t>
             </a:r>
             <a:endParaRPr lang="en-US" sz="1300" dirty="0"/>
           </a:p>
@@ -7884,7 +7532,7 @@
       </p:sp>
       <p:pic>
         <p:nvPicPr>
-          <p:cNvPr id="8" name="Image 1" descr="/home/user/mysteryslavic-2026-07-19_16-47-00/presentations/office-client/assets/illus-P5-odnim-lotom.png">    </p:cNvPr>
+          <p:cNvPr id="8" name="Image 1" descr="/home/user/mysteryslavic-2026-07-19_16-47-00/presentations/office-client/assets/ill-sami.png">    </p:cNvPr>
           <p:cNvPicPr>
             <a:picLocks noChangeAspect="1"/>
           </p:cNvPicPr>
@@ -7939,7 +7587,7 @@
                 <a:ea typeface="Inter" pitchFamily="34" charset="-122"/>
                 <a:cs typeface="Inter" pitchFamily="34" charset="-120"/>
               </a:rPr>
-              <a:t>ОТДАТЬ ОДНИМ ЛОТОМ</a:t>
+              <a:t>ПРОДАВАТЬ САМИМ</a:t>
             </a:r>
             <a:endParaRPr lang="en-US" sz="1700" dirty="0"/>
           </a:p>
@@ -7981,7 +7629,7 @@
                 <a:ea typeface="Inter" pitchFamily="34" charset="-122"/>
                 <a:cs typeface="Inter" pitchFamily="34" charset="-120"/>
               </a:rPr>
-              <a:t>Быстро, но по цене вывоза:</a:t>
+              <a:t>Опись, фото, объявления, звонки,</a:t>
             </a:r>
             <a:endParaRPr lang="en-US" sz="1300" dirty="0"/>
           </a:p>
@@ -8001,7 +7649,7 @@
                 <a:ea typeface="Inter" pitchFamily="34" charset="-122"/>
                 <a:cs typeface="Inter" pitchFamily="34" charset="-120"/>
               </a:rPr>
-              <a:t>ликвидное уходит вместе с хламом</a:t>
+              <a:t>показы — и хвост к дедлайну</a:t>
             </a:r>
             <a:endParaRPr lang="en-US" sz="1300" dirty="0"/>
           </a:p>
@@ -8038,7 +7686,7 @@
       </p:sp>
       <p:pic>
         <p:nvPicPr>
-          <p:cNvPr id="12" name="Image 2" descr="/home/user/mysteryslavic-2026-07-19_16-47-00/presentations/office-client/assets/illus-P6-nam.png">    </p:cNvPr>
+          <p:cNvPr id="12" name="Image 2" descr="/home/user/mysteryslavic-2026-07-19_16-47-00/presentations/office-client/assets/ill-nam.png">    </p:cNvPr>
           <p:cNvPicPr>
             <a:picLocks noChangeAspect="1"/>
           </p:cNvPicPr>
@@ -8155,7 +7803,7 @@
                 <a:ea typeface="Inter" pitchFamily="34" charset="-122"/>
                 <a:cs typeface="Inter" pitchFamily="34" charset="-120"/>
               </a:rPr>
-              <a:t>и деньги за ликвидное</a:t>
+              <a:t>и деньги за всё ликвидное</a:t>
             </a:r>
             <a:endParaRPr lang="en-US" sz="1300" dirty="0"/>
           </a:p>
@@ -8221,7 +7869,7 @@
                 <a:ea typeface="Inter" pitchFamily="34" charset="-122"/>
                 <a:cs typeface="Inter" pitchFamily="34" charset="-120"/>
               </a:rPr>
-              <a:t>ВАРИАНТ 2 И ВАРИАНТ 3 МЫ СЧИТАЕМ ДЛЯ ВАС ДО СТАРТА — РАЗНИЦУ В ДЕНЬГАХ ВЫ ВИДИТЕ ЗАРАНЕЕ</a:t>
+              <a:t>ПОСЧИТАЕМ ЭТИ ТРИ ПУТИ ДЛЯ ВАШЕГО ОФИСА — В ДЕНЬГАХ И В ЧАСАХ ВАШИХ СОТРУДНИКОВ</a:t>
             </a:r>
             <a:endParaRPr lang="en-US" sz="1250" dirty="0"/>
           </a:p>
@@ -10607,7 +10255,7 @@
         </p:nvSpPr>
         <p:spPr>
           <a:xfrm>
-            <a:off x="777240" y="548640"/>
+            <a:off x="777240" y="530352"/>
             <a:ext cx="10637215" cy="219456"/>
           </a:xfrm>
           <a:prstGeom prst="rect">
@@ -10632,7 +10280,7 @@
                 <a:ea typeface="Inter" pitchFamily="34" charset="-122"/>
                 <a:cs typeface="Inter" pitchFamily="34" charset="-120"/>
               </a:rPr>
-              <a:t>ЭКОНОМИКА</a:t>
+              <a:t>ПРИМЕР · ОФИС 300 м², 25 РАБОЧИХ МЕСТ, ОСВОБОДИТЬ ЗА 5 ДНЕЙ</a:t>
             </a:r>
             <a:endParaRPr lang="en-US" sz="1050" dirty="0"/>
           </a:p>
@@ -10646,24 +10294,24 @@
         </p:nvSpPr>
         <p:spPr>
           <a:xfrm>
-            <a:off x="777240" y="877824"/>
-            <a:ext cx="7315200" cy="640080"/>
-          </a:xfrm>
-          <a:prstGeom prst="rect">
-            <a:avLst/>
-          </a:prstGeom>
-          <a:noFill/>
-          <a:ln/>
-        </p:spPr>
-        <p:txBody>
-          <a:bodyPr wrap="square" lIns="0" tIns="0" rIns="0" bIns="0" rtlCol="0" anchor="t"/>
-          <a:lstStyle/>
-          <a:p>
-            <a:pPr indent="0" marL="0">
-              <a:buNone/>
-            </a:pPr>
-            <a:r>
-              <a:rPr lang="en-US" sz="3800" b="1" dirty="0">
+            <a:off x="777240" y="841248"/>
+            <a:ext cx="10424160" cy="658368"/>
+          </a:xfrm>
+          <a:prstGeom prst="rect">
+            <a:avLst/>
+          </a:prstGeom>
+          <a:noFill/>
+          <a:ln/>
+        </p:spPr>
+        <p:txBody>
+          <a:bodyPr wrap="square" lIns="0" tIns="0" rIns="0" bIns="0" rtlCol="0" anchor="t"/>
+          <a:lstStyle/>
+          <a:p>
+            <a:pPr indent="0" marL="0">
+              <a:buNone/>
+            </a:pPr>
+            <a:r>
+              <a:rPr lang="en-US" sz="3600" b="1" dirty="0">
                 <a:solidFill>
                   <a:srgbClr val="0C1D28"/>
                 </a:solidFill>
@@ -10671,65 +10319,26 @@
                 <a:ea typeface="Inter" pitchFamily="34" charset="-122"/>
                 <a:cs typeface="Inter" pitchFamily="34" charset="-120"/>
               </a:rPr>
-              <a:t>ПРИМЕР РАСЧЁТА</a:t>
-            </a:r>
-            <a:endParaRPr lang="en-US" sz="3800" dirty="0"/>
-          </a:p>
-        </p:txBody>
-      </p:sp>
-      <p:sp>
-        <p:nvSpPr>
-          <p:cNvPr id="4" name="Text 2"/>
-          <p:cNvSpPr txBox="1"/>
-          <p:nvPr/>
-        </p:nvSpPr>
-        <p:spPr>
-          <a:xfrm>
-            <a:off x="777240" y="1536192"/>
-            <a:ext cx="8229600" cy="292608"/>
-          </a:xfrm>
-          <a:prstGeom prst="rect">
-            <a:avLst/>
-          </a:prstGeom>
-          <a:noFill/>
-          <a:ln/>
-        </p:spPr>
-        <p:txBody>
-          <a:bodyPr wrap="square" lIns="0" tIns="0" rIns="0" bIns="0" rtlCol="0" anchor="t"/>
-          <a:lstStyle/>
-          <a:p>
-            <a:pPr indent="0" marL="0">
-              <a:buNone/>
-            </a:pPr>
-            <a:r>
-              <a:rPr lang="en-US" sz="1450" dirty="0">
-                <a:solidFill>
-                  <a:srgbClr val="6F6A62"/>
-                </a:solidFill>
-                <a:latin typeface="Inter" pitchFamily="34" charset="0"/>
-                <a:ea typeface="Inter" pitchFamily="34" charset="-122"/>
-                <a:cs typeface="Inter" pitchFamily="34" charset="-120"/>
-              </a:rPr>
-              <a:t>Офис ~300 м², 25 рабочих мест, срок 5 дней. Формат B.</a:t>
-            </a:r>
-            <a:endParaRPr lang="en-US" sz="1450" dirty="0"/>
-          </a:p>
-        </p:txBody>
-      </p:sp>
-      <p:sp>
-        <p:nvSpPr>
-          <p:cNvPr id="5" name="Shape 3"/>
+              <a:t>ТЕ ЖЕ ТРИ ПУТИ — В ДЕНЬГАХ И ЧАСАХ</a:t>
+            </a:r>
+            <a:endParaRPr lang="en-US" sz="3600" dirty="0"/>
+          </a:p>
+        </p:txBody>
+      </p:sp>
+      <p:sp>
+        <p:nvSpPr>
+          <p:cNvPr id="4" name="Shape 2"/>
           <p:cNvSpPr/>
           <p:nvPr/>
         </p:nvSpPr>
         <p:spPr>
           <a:xfrm>
-            <a:off x="777240" y="2066544"/>
-            <a:ext cx="3063240" cy="1481328"/>
+            <a:off x="777240" y="1645920"/>
+            <a:ext cx="6675120" cy="530352"/>
           </a:xfrm>
           <a:prstGeom prst="roundRect">
             <a:avLst>
-              <a:gd name="adj" fmla="val 3086"/>
+              <a:gd name="adj" fmla="val 8621"/>
             </a:avLst>
           </a:prstGeom>
           <a:solidFill>
@@ -10745,30 +10354,69 @@
       </p:sp>
       <p:sp>
         <p:nvSpPr>
+          <p:cNvPr id="5" name="Text 3"/>
+          <p:cNvSpPr txBox="1"/>
+          <p:nvPr/>
+        </p:nvSpPr>
+        <p:spPr>
+          <a:xfrm>
+            <a:off x="1088136" y="1645920"/>
+            <a:ext cx="4114800" cy="530352"/>
+          </a:xfrm>
+          <a:prstGeom prst="rect">
+            <a:avLst/>
+          </a:prstGeom>
+          <a:noFill/>
+          <a:ln/>
+        </p:spPr>
+        <p:txBody>
+          <a:bodyPr wrap="square" lIns="0" tIns="0" rIns="0" bIns="0" rtlCol="0" anchor="ctr"/>
+          <a:lstStyle/>
+          <a:p>
+            <a:pPr indent="0" marL="0">
+              <a:buNone/>
+            </a:pPr>
+            <a:r>
+              <a:rPr lang="en-US" sz="1100" b="1" spc="120" kern="0" dirty="0">
+                <a:solidFill>
+                  <a:srgbClr val="6F6A62"/>
+                </a:solidFill>
+                <a:latin typeface="Inter" pitchFamily="34" charset="0"/>
+                <a:ea typeface="Inter" pitchFamily="34" charset="-122"/>
+                <a:cs typeface="Inter" pitchFamily="34" charset="-120"/>
+              </a:rPr>
+              <a:t>ЛИКВИДНОЕ ИМУЩЕСТВО ПО ОЦЕНКЕ</a:t>
+            </a:r>
+            <a:endParaRPr lang="en-US" sz="1100" dirty="0"/>
+          </a:p>
+        </p:txBody>
+      </p:sp>
+      <p:sp>
+        <p:nvSpPr>
           <p:cNvPr id="6" name="Text 4"/>
           <p:cNvSpPr txBox="1"/>
           <p:nvPr/>
         </p:nvSpPr>
         <p:spPr>
           <a:xfrm>
-            <a:off x="777240" y="2414016"/>
-            <a:ext cx="3063240" cy="566928"/>
-          </a:xfrm>
-          <a:prstGeom prst="rect">
-            <a:avLst/>
-          </a:prstGeom>
-          <a:noFill/>
-          <a:ln/>
-        </p:spPr>
-        <p:txBody>
-          <a:bodyPr wrap="square" lIns="0" tIns="0" rIns="0" bIns="0" rtlCol="0" anchor="t"/>
-          <a:lstStyle/>
-          <a:p>
-            <a:pPr algn="ctr" indent="0" marL="0">
-              <a:buNone/>
-            </a:pPr>
-            <a:r>
-              <a:rPr lang="en-US" sz="3000" b="1" dirty="0">
+            <a:off x="5257800" y="1645920"/>
+            <a:ext cx="1920240" cy="530352"/>
+          </a:xfrm>
+          <a:prstGeom prst="rect">
+            <a:avLst/>
+          </a:prstGeom>
+          <a:noFill/>
+          <a:ln/>
+        </p:spPr>
+        <p:txBody>
+          <a:bodyPr wrap="square" lIns="0" tIns="0" rIns="0" bIns="0" rtlCol="0" anchor="ctr"/>
+          <a:lstStyle/>
+          <a:p>
+            <a:pPr algn="r" indent="0" marL="0">
+              <a:buNone/>
+            </a:pPr>
+            <a:r>
+              <a:rPr lang="en-US" sz="1900" b="1" dirty="0">
                 <a:solidFill>
                   <a:srgbClr val="0C1D28"/>
                 </a:solidFill>
@@ -10776,104 +10424,26 @@
                 <a:ea typeface="Inter" pitchFamily="34" charset="-122"/>
                 <a:cs typeface="Inter" pitchFamily="34" charset="-120"/>
               </a:rPr>
-              <a:t>380 000 ₽</a:t>
-            </a:r>
-            <a:endParaRPr lang="en-US" sz="3000" dirty="0"/>
-          </a:p>
-        </p:txBody>
-      </p:sp>
-      <p:sp>
-        <p:nvSpPr>
-          <p:cNvPr id="7" name="Text 5"/>
-          <p:cNvSpPr txBox="1"/>
-          <p:nvPr/>
-        </p:nvSpPr>
-        <p:spPr>
-          <a:xfrm>
-            <a:off x="923544" y="3035808"/>
-            <a:ext cx="2770632" cy="310896"/>
-          </a:xfrm>
-          <a:prstGeom prst="rect">
-            <a:avLst/>
-          </a:prstGeom>
-          <a:noFill/>
-          <a:ln/>
-        </p:spPr>
-        <p:txBody>
-          <a:bodyPr wrap="square" lIns="0" tIns="0" rIns="0" bIns="0" rtlCol="0" anchor="t"/>
-          <a:lstStyle/>
-          <a:p>
-            <a:pPr algn="ctr" indent="0" marL="0">
-              <a:buNone/>
-            </a:pPr>
-            <a:r>
-              <a:rPr lang="en-US" sz="1050" b="1" spc="140" kern="0" dirty="0">
-                <a:solidFill>
-                  <a:srgbClr val="6F6A62"/>
-                </a:solidFill>
-                <a:latin typeface="Inter" pitchFamily="34" charset="0"/>
-                <a:ea typeface="Inter" pitchFamily="34" charset="-122"/>
-                <a:cs typeface="Inter" pitchFamily="34" charset="-120"/>
-              </a:rPr>
-              <a:t>ПРОДАНО</a:t>
-            </a:r>
-            <a:endParaRPr lang="en-US" sz="1050" dirty="0"/>
-          </a:p>
-        </p:txBody>
-      </p:sp>
-      <p:sp>
-        <p:nvSpPr>
-          <p:cNvPr id="8" name="Text 6"/>
-          <p:cNvSpPr txBox="1"/>
-          <p:nvPr/>
-        </p:nvSpPr>
-        <p:spPr>
-          <a:xfrm>
-            <a:off x="3895344" y="2505456"/>
-            <a:ext cx="420624" cy="457200"/>
-          </a:xfrm>
-          <a:prstGeom prst="rect">
-            <a:avLst/>
-          </a:prstGeom>
-          <a:noFill/>
-          <a:ln/>
-        </p:spPr>
-        <p:txBody>
-          <a:bodyPr wrap="square" lIns="0" tIns="0" rIns="0" bIns="0" rtlCol="0" anchor="t"/>
-          <a:lstStyle/>
-          <a:p>
-            <a:pPr algn="ctr" indent="0" marL="0">
-              <a:buNone/>
-            </a:pPr>
-            <a:r>
-              <a:rPr lang="en-US" sz="2600" b="1" dirty="0">
-                <a:solidFill>
-                  <a:srgbClr val="C89B45"/>
-                </a:solidFill>
-                <a:latin typeface="Inter" pitchFamily="34" charset="0"/>
-                <a:ea typeface="Inter" pitchFamily="34" charset="-122"/>
-                <a:cs typeface="Inter" pitchFamily="34" charset="-120"/>
-              </a:rPr>
-              <a:t>−</a:t>
-            </a:r>
-            <a:endParaRPr lang="en-US" sz="2600" dirty="0"/>
-          </a:p>
-        </p:txBody>
-      </p:sp>
-      <p:sp>
-        <p:nvSpPr>
-          <p:cNvPr id="9" name="Shape 7"/>
+              <a:t>420 000 ₽</a:t>
+            </a:r>
+            <a:endParaRPr lang="en-US" sz="1900" dirty="0"/>
+          </a:p>
+        </p:txBody>
+      </p:sp>
+      <p:sp>
+        <p:nvSpPr>
+          <p:cNvPr id="7" name="Shape 5"/>
           <p:cNvSpPr/>
           <p:nvPr/>
         </p:nvSpPr>
         <p:spPr>
           <a:xfrm>
-            <a:off x="4370832" y="2066544"/>
-            <a:ext cx="3063240" cy="1481328"/>
+            <a:off x="777240" y="2395728"/>
+            <a:ext cx="3362858" cy="3200400"/>
           </a:xfrm>
           <a:prstGeom prst="roundRect">
             <a:avLst>
-              <a:gd name="adj" fmla="val 3086"/>
+              <a:gd name="adj" fmla="val 1429"/>
             </a:avLst>
           </a:prstGeom>
           <a:solidFill>
@@ -10889,30 +10459,206 @@
       </p:sp>
       <p:sp>
         <p:nvSpPr>
+          <p:cNvPr id="8" name="Text 6"/>
+          <p:cNvSpPr txBox="1"/>
+          <p:nvPr/>
+        </p:nvSpPr>
+        <p:spPr>
+          <a:xfrm>
+            <a:off x="1161288" y="2706624"/>
+            <a:ext cx="365760" cy="237744"/>
+          </a:xfrm>
+          <a:prstGeom prst="rect">
+            <a:avLst/>
+          </a:prstGeom>
+          <a:noFill/>
+          <a:ln/>
+        </p:spPr>
+        <p:txBody>
+          <a:bodyPr wrap="square" lIns="0" tIns="0" rIns="0" bIns="0" rtlCol="0" anchor="t"/>
+          <a:lstStyle/>
+          <a:p>
+            <a:pPr indent="0" marL="0">
+              <a:buNone/>
+            </a:pPr>
+            <a:r>
+              <a:rPr lang="en-US" sz="1100" b="1" spc="140" kern="0" dirty="0">
+                <a:solidFill>
+                  <a:srgbClr val="6E5426"/>
+                </a:solidFill>
+                <a:latin typeface="Inter" pitchFamily="34" charset="0"/>
+                <a:ea typeface="Inter" pitchFamily="34" charset="-122"/>
+                <a:cs typeface="Inter" pitchFamily="34" charset="-120"/>
+              </a:rPr>
+              <a:t>A</a:t>
+            </a:r>
+            <a:endParaRPr lang="en-US" sz="1100" dirty="0"/>
+          </a:p>
+        </p:txBody>
+      </p:sp>
+      <p:sp>
+        <p:nvSpPr>
+          <p:cNvPr id="9" name="Text 7"/>
+          <p:cNvSpPr txBox="1"/>
+          <p:nvPr/>
+        </p:nvSpPr>
+        <p:spPr>
+          <a:xfrm>
+            <a:off x="1563624" y="2706624"/>
+            <a:ext cx="2192426" cy="237744"/>
+          </a:xfrm>
+          <a:prstGeom prst="rect">
+            <a:avLst/>
+          </a:prstGeom>
+          <a:noFill/>
+          <a:ln/>
+        </p:spPr>
+        <p:txBody>
+          <a:bodyPr wrap="square" lIns="0" tIns="0" rIns="0" bIns="0" rtlCol="0" anchor="t"/>
+          <a:lstStyle/>
+          <a:p>
+            <a:pPr indent="0" marL="0">
+              <a:buNone/>
+            </a:pPr>
+            <a:r>
+              <a:rPr lang="en-US" sz="1100" b="1" spc="140" kern="0" dirty="0">
+                <a:solidFill>
+                  <a:srgbClr val="6E5426"/>
+                </a:solidFill>
+                <a:latin typeface="Inter" pitchFamily="34" charset="0"/>
+                <a:ea typeface="Inter" pitchFamily="34" charset="-122"/>
+                <a:cs typeface="Inter" pitchFamily="34" charset="-120"/>
+              </a:rPr>
+              <a:t>ВЫВЕЗТИ ВСЁ</a:t>
+            </a:r>
+            <a:endParaRPr lang="en-US" sz="1100" dirty="0"/>
+          </a:p>
+        </p:txBody>
+      </p:sp>
+      <p:sp>
+        <p:nvSpPr>
           <p:cNvPr id="10" name="Text 8"/>
           <p:cNvSpPr txBox="1"/>
           <p:nvPr/>
         </p:nvSpPr>
         <p:spPr>
           <a:xfrm>
-            <a:off x="4370832" y="2414016"/>
-            <a:ext cx="3063240" cy="566928"/>
-          </a:xfrm>
-          <a:prstGeom prst="rect">
-            <a:avLst/>
-          </a:prstGeom>
-          <a:noFill/>
-          <a:ln/>
-        </p:spPr>
-        <p:txBody>
-          <a:bodyPr wrap="square" lIns="0" tIns="0" rIns="0" bIns="0" rtlCol="0" anchor="t"/>
-          <a:lstStyle/>
-          <a:p>
-            <a:pPr algn="ctr" indent="0" marL="0">
-              <a:buNone/>
-            </a:pPr>
-            <a:r>
-              <a:rPr lang="en-US" sz="3000" b="1" dirty="0">
+            <a:off x="1161288" y="3145536"/>
+            <a:ext cx="2594762" cy="566928"/>
+          </a:xfrm>
+          <a:prstGeom prst="rect">
+            <a:avLst/>
+          </a:prstGeom>
+          <a:noFill/>
+          <a:ln/>
+        </p:spPr>
+        <p:txBody>
+          <a:bodyPr wrap="square" lIns="0" tIns="0" rIns="0" bIns="0" rtlCol="0" anchor="t"/>
+          <a:lstStyle/>
+          <a:p>
+            <a:pPr indent="0" marL="0">
+              <a:buNone/>
+            </a:pPr>
+            <a:r>
+              <a:rPr lang="en-US" sz="3100" b="1" dirty="0">
+                <a:solidFill>
+                  <a:srgbClr val="6F6A62"/>
+                </a:solidFill>
+                <a:latin typeface="Inter" pitchFamily="34" charset="0"/>
+                <a:ea typeface="Inter" pitchFamily="34" charset="-122"/>
+                <a:cs typeface="Inter" pitchFamily="34" charset="-120"/>
+              </a:rPr>
+              <a:t>− 28 000 ₽</a:t>
+            </a:r>
+            <a:endParaRPr lang="en-US" sz="3100" dirty="0"/>
+          </a:p>
+        </p:txBody>
+      </p:sp>
+      <p:sp>
+        <p:nvSpPr>
+          <p:cNvPr id="11" name="Shape 9"/>
+          <p:cNvSpPr/>
+          <p:nvPr/>
+        </p:nvSpPr>
+        <p:spPr>
+          <a:xfrm>
+            <a:off x="1161288" y="3913632"/>
+            <a:ext cx="2594762" cy="10973"/>
+          </a:xfrm>
+          <a:prstGeom prst="rect">
+            <a:avLst/>
+          </a:prstGeom>
+          <a:solidFill>
+            <a:srgbClr val="DCD3C4"/>
+          </a:solidFill>
+          <a:ln/>
+        </p:spPr>
+      </p:sp>
+      <p:sp>
+        <p:nvSpPr>
+          <p:cNvPr id="12" name="Text 10"/>
+          <p:cNvSpPr txBox="1"/>
+          <p:nvPr/>
+        </p:nvSpPr>
+        <p:spPr>
+          <a:xfrm>
+            <a:off x="1161288" y="4114800"/>
+            <a:ext cx="2594762" cy="219456"/>
+          </a:xfrm>
+          <a:prstGeom prst="rect">
+            <a:avLst/>
+          </a:prstGeom>
+          <a:noFill/>
+          <a:ln/>
+        </p:spPr>
+        <p:txBody>
+          <a:bodyPr wrap="square" lIns="0" tIns="0" rIns="0" bIns="0" rtlCol="0" anchor="t"/>
+          <a:lstStyle/>
+          <a:p>
+            <a:pPr indent="0" marL="0">
+              <a:buNone/>
+            </a:pPr>
+            <a:r>
+              <a:rPr lang="en-US" sz="1000" b="1" spc="160" kern="0" dirty="0">
+                <a:solidFill>
+                  <a:srgbClr val="6F6A62"/>
+                </a:solidFill>
+                <a:latin typeface="Inter" pitchFamily="34" charset="0"/>
+                <a:ea typeface="Inter" pitchFamily="34" charset="-122"/>
+                <a:cs typeface="Inter" pitchFamily="34" charset="-120"/>
+              </a:rPr>
+              <a:t>ВАШЕ ВРЕМЯ</a:t>
+            </a:r>
+            <a:endParaRPr lang="en-US" sz="1000" dirty="0"/>
+          </a:p>
+        </p:txBody>
+      </p:sp>
+      <p:sp>
+        <p:nvSpPr>
+          <p:cNvPr id="13" name="Text 11"/>
+          <p:cNvSpPr txBox="1"/>
+          <p:nvPr/>
+        </p:nvSpPr>
+        <p:spPr>
+          <a:xfrm>
+            <a:off x="1161288" y="4389120"/>
+            <a:ext cx="2594762" cy="310896"/>
+          </a:xfrm>
+          <a:prstGeom prst="rect">
+            <a:avLst/>
+          </a:prstGeom>
+          <a:noFill/>
+          <a:ln/>
+        </p:spPr>
+        <p:txBody>
+          <a:bodyPr wrap="square" lIns="0" tIns="0" rIns="0" bIns="0" rtlCol="0" anchor="t"/>
+          <a:lstStyle/>
+          <a:p>
+            <a:pPr indent="0" marL="0">
+              <a:buNone/>
+            </a:pPr>
+            <a:r>
+              <a:rPr lang="en-US" sz="1700" b="1" dirty="0">
                 <a:solidFill>
                   <a:srgbClr val="0C1D28"/>
                 </a:solidFill>
@@ -10920,38 +10666,41 @@
                 <a:ea typeface="Inter" pitchFamily="34" charset="-122"/>
                 <a:cs typeface="Inter" pitchFamily="34" charset="-120"/>
               </a:rPr>
-              <a:t>158 000 ₽</a:t>
-            </a:r>
-            <a:endParaRPr lang="en-US" sz="3000" dirty="0"/>
-          </a:p>
-        </p:txBody>
-      </p:sp>
-      <p:sp>
-        <p:nvSpPr>
-          <p:cNvPr id="11" name="Text 9"/>
-          <p:cNvSpPr txBox="1"/>
-          <p:nvPr/>
-        </p:nvSpPr>
-        <p:spPr>
-          <a:xfrm>
-            <a:off x="4517136" y="3035808"/>
-            <a:ext cx="2770632" cy="310896"/>
-          </a:xfrm>
-          <a:prstGeom prst="rect">
-            <a:avLst/>
-          </a:prstGeom>
-          <a:noFill/>
-          <a:ln/>
-        </p:spPr>
-        <p:txBody>
-          <a:bodyPr wrap="square" lIns="0" tIns="0" rIns="0" bIns="0" rtlCol="0" anchor="t"/>
-          <a:lstStyle/>
-          <a:p>
-            <a:pPr algn="ctr" indent="0" marL="0">
-              <a:buNone/>
-            </a:pPr>
-            <a:r>
-              <a:rPr lang="en-US" sz="1050" b="1" spc="140" kern="0" dirty="0">
+              <a:t>~ 1 день</a:t>
+            </a:r>
+            <a:endParaRPr lang="en-US" sz="1700" dirty="0"/>
+          </a:p>
+        </p:txBody>
+      </p:sp>
+      <p:sp>
+        <p:nvSpPr>
+          <p:cNvPr id="14" name="Text 12"/>
+          <p:cNvSpPr txBox="1"/>
+          <p:nvPr/>
+        </p:nvSpPr>
+        <p:spPr>
+          <a:xfrm>
+            <a:off x="1161288" y="4773168"/>
+            <a:ext cx="2594762" cy="713232"/>
+          </a:xfrm>
+          <a:prstGeom prst="rect">
+            <a:avLst/>
+          </a:prstGeom>
+          <a:noFill/>
+          <a:ln/>
+        </p:spPr>
+        <p:txBody>
+          <a:bodyPr wrap="square" lIns="0" tIns="0" rIns="0" bIns="0" rtlCol="0" anchor="t"/>
+          <a:lstStyle/>
+          <a:p>
+            <a:pPr indent="0" marL="0">
+              <a:lnSpc>
+                <a:spcPts val="1550"/>
+              </a:lnSpc>
+              <a:buNone/>
+            </a:pPr>
+            <a:r>
+              <a:rPr lang="en-US" sz="1100" dirty="0">
                 <a:solidFill>
                   <a:srgbClr val="6F6A62"/>
                 </a:solidFill>
@@ -10959,65 +10708,390 @@
                 <a:ea typeface="Inter" pitchFamily="34" charset="-122"/>
                 <a:cs typeface="Inter" pitchFamily="34" charset="-120"/>
               </a:rPr>
-              <a:t>25 000 ₽ + 35% · НАША УСЛУГА</a:t>
-            </a:r>
-            <a:endParaRPr lang="en-US" sz="1050" dirty="0"/>
-          </a:p>
-        </p:txBody>
-      </p:sp>
-      <p:sp>
-        <p:nvSpPr>
-          <p:cNvPr id="12" name="Text 10"/>
-          <p:cNvSpPr txBox="1"/>
-          <p:nvPr/>
-        </p:nvSpPr>
-        <p:spPr>
-          <a:xfrm>
-            <a:off x="7507224" y="2505456"/>
-            <a:ext cx="420624" cy="457200"/>
-          </a:xfrm>
-          <a:prstGeom prst="rect">
-            <a:avLst/>
-          </a:prstGeom>
-          <a:noFill/>
-          <a:ln/>
-        </p:spPr>
-        <p:txBody>
-          <a:bodyPr wrap="square" lIns="0" tIns="0" rIns="0" bIns="0" rtlCol="0" anchor="t"/>
-          <a:lstStyle/>
-          <a:p>
-            <a:pPr algn="ctr" indent="0" marL="0">
-              <a:buNone/>
-            </a:pPr>
-            <a:r>
-              <a:rPr lang="en-US" sz="2600" b="1" dirty="0">
-                <a:solidFill>
-                  <a:srgbClr val="C89B45"/>
-                </a:solidFill>
-                <a:latin typeface="Inter" pitchFamily="34" charset="0"/>
-                <a:ea typeface="Inter" pitchFamily="34" charset="-122"/>
-                <a:cs typeface="Inter" pitchFamily="34" charset="-120"/>
-              </a:rPr>
-              <a:t>=</a:t>
-            </a:r>
-            <a:endParaRPr lang="en-US" sz="2600" dirty="0"/>
-          </a:p>
-        </p:txBody>
-      </p:sp>
-      <p:sp>
-        <p:nvSpPr>
-          <p:cNvPr id="13" name="Shape 11"/>
+              <a:t>Демонтаж, машины</a:t>
+            </a:r>
+            <a:endParaRPr lang="en-US" sz="1100" dirty="0"/>
+          </a:p>
+          <a:p>
+            <a:pPr indent="0" marL="0">
+              <a:lnSpc>
+                <a:spcPts val="1550"/>
+              </a:lnSpc>
+              <a:buNone/>
+            </a:pPr>
+            <a:r>
+              <a:rPr lang="en-US" sz="1100" dirty="0">
+                <a:solidFill>
+                  <a:srgbClr val="6F6A62"/>
+                </a:solidFill>
+                <a:latin typeface="Inter" pitchFamily="34" charset="0"/>
+                <a:ea typeface="Inter" pitchFamily="34" charset="-122"/>
+                <a:cs typeface="Inter" pitchFamily="34" charset="-120"/>
+              </a:rPr>
+              <a:t>и утилизация — за ваш счёт.</a:t>
+            </a:r>
+            <a:endParaRPr lang="en-US" sz="1100" dirty="0"/>
+          </a:p>
+          <a:p>
+            <a:pPr indent="0" marL="0">
+              <a:lnSpc>
+                <a:spcPts val="1550"/>
+              </a:lnSpc>
+              <a:buNone/>
+            </a:pPr>
+            <a:r>
+              <a:rPr lang="en-US" sz="1100" dirty="0">
+                <a:solidFill>
+                  <a:srgbClr val="6F6A62"/>
+                </a:solidFill>
+                <a:latin typeface="Inter" pitchFamily="34" charset="0"/>
+                <a:ea typeface="Inter" pitchFamily="34" charset="-122"/>
+                <a:cs typeface="Inter" pitchFamily="34" charset="-120"/>
+              </a:rPr>
+              <a:t>Ликвидное уезжает в мусор.</a:t>
+            </a:r>
+            <a:endParaRPr lang="en-US" sz="1100" dirty="0"/>
+          </a:p>
+        </p:txBody>
+      </p:sp>
+      <p:sp>
+        <p:nvSpPr>
+          <p:cNvPr id="15" name="Shape 13"/>
           <p:cNvSpPr/>
           <p:nvPr/>
         </p:nvSpPr>
         <p:spPr>
           <a:xfrm>
-            <a:off x="7982712" y="2066544"/>
-            <a:ext cx="3429000" cy="1481328"/>
+            <a:off x="4414418" y="2395728"/>
+            <a:ext cx="3362858" cy="3200400"/>
           </a:xfrm>
           <a:prstGeom prst="roundRect">
             <a:avLst>
-              <a:gd name="adj" fmla="val 3086"/>
+              <a:gd name="adj" fmla="val 1429"/>
+            </a:avLst>
+          </a:prstGeom>
+          <a:solidFill>
+            <a:srgbClr val="FFFFFF"/>
+          </a:solidFill>
+          <a:ln w="12700">
+            <a:solidFill>
+              <a:srgbClr val="DCD3C4"/>
+            </a:solidFill>
+            <a:prstDash val="solid"/>
+          </a:ln>
+        </p:spPr>
+      </p:sp>
+      <p:sp>
+        <p:nvSpPr>
+          <p:cNvPr id="16" name="Text 14"/>
+          <p:cNvSpPr txBox="1"/>
+          <p:nvPr/>
+        </p:nvSpPr>
+        <p:spPr>
+          <a:xfrm>
+            <a:off x="4798466" y="2706624"/>
+            <a:ext cx="365760" cy="237744"/>
+          </a:xfrm>
+          <a:prstGeom prst="rect">
+            <a:avLst/>
+          </a:prstGeom>
+          <a:noFill/>
+          <a:ln/>
+        </p:spPr>
+        <p:txBody>
+          <a:bodyPr wrap="square" lIns="0" tIns="0" rIns="0" bIns="0" rtlCol="0" anchor="t"/>
+          <a:lstStyle/>
+          <a:p>
+            <a:pPr indent="0" marL="0">
+              <a:buNone/>
+            </a:pPr>
+            <a:r>
+              <a:rPr lang="en-US" sz="1100" b="1" spc="140" kern="0" dirty="0">
+                <a:solidFill>
+                  <a:srgbClr val="6E5426"/>
+                </a:solidFill>
+                <a:latin typeface="Inter" pitchFamily="34" charset="0"/>
+                <a:ea typeface="Inter" pitchFamily="34" charset="-122"/>
+                <a:cs typeface="Inter" pitchFamily="34" charset="-120"/>
+              </a:rPr>
+              <a:t>B</a:t>
+            </a:r>
+            <a:endParaRPr lang="en-US" sz="1100" dirty="0"/>
+          </a:p>
+        </p:txBody>
+      </p:sp>
+      <p:sp>
+        <p:nvSpPr>
+          <p:cNvPr id="17" name="Text 15"/>
+          <p:cNvSpPr txBox="1"/>
+          <p:nvPr/>
+        </p:nvSpPr>
+        <p:spPr>
+          <a:xfrm>
+            <a:off x="5200802" y="2706624"/>
+            <a:ext cx="2192426" cy="237744"/>
+          </a:xfrm>
+          <a:prstGeom prst="rect">
+            <a:avLst/>
+          </a:prstGeom>
+          <a:noFill/>
+          <a:ln/>
+        </p:spPr>
+        <p:txBody>
+          <a:bodyPr wrap="square" lIns="0" tIns="0" rIns="0" bIns="0" rtlCol="0" anchor="t"/>
+          <a:lstStyle/>
+          <a:p>
+            <a:pPr indent="0" marL="0">
+              <a:buNone/>
+            </a:pPr>
+            <a:r>
+              <a:rPr lang="en-US" sz="1100" b="1" spc="140" kern="0" dirty="0">
+                <a:solidFill>
+                  <a:srgbClr val="6E5426"/>
+                </a:solidFill>
+                <a:latin typeface="Inter" pitchFamily="34" charset="0"/>
+                <a:ea typeface="Inter" pitchFamily="34" charset="-122"/>
+                <a:cs typeface="Inter" pitchFamily="34" charset="-120"/>
+              </a:rPr>
+              <a:t>ПРОДАТЬ САМИМ</a:t>
+            </a:r>
+            <a:endParaRPr lang="en-US" sz="1100" dirty="0"/>
+          </a:p>
+        </p:txBody>
+      </p:sp>
+      <p:sp>
+        <p:nvSpPr>
+          <p:cNvPr id="18" name="Text 16"/>
+          <p:cNvSpPr txBox="1"/>
+          <p:nvPr/>
+        </p:nvSpPr>
+        <p:spPr>
+          <a:xfrm>
+            <a:off x="4798466" y="3145536"/>
+            <a:ext cx="2594762" cy="566928"/>
+          </a:xfrm>
+          <a:prstGeom prst="rect">
+            <a:avLst/>
+          </a:prstGeom>
+          <a:noFill/>
+          <a:ln/>
+        </p:spPr>
+        <p:txBody>
+          <a:bodyPr wrap="square" lIns="0" tIns="0" rIns="0" bIns="0" rtlCol="0" anchor="t"/>
+          <a:lstStyle/>
+          <a:p>
+            <a:pPr indent="0" marL="0">
+              <a:buNone/>
+            </a:pPr>
+            <a:r>
+              <a:rPr lang="en-US" sz="3100" b="1" dirty="0">
+                <a:solidFill>
+                  <a:srgbClr val="0C1D28"/>
+                </a:solidFill>
+                <a:latin typeface="Inter" pitchFamily="34" charset="0"/>
+                <a:ea typeface="Inter" pitchFamily="34" charset="-122"/>
+                <a:cs typeface="Inter" pitchFamily="34" charset="-120"/>
+              </a:rPr>
+              <a:t>+ 73 000 ₽</a:t>
+            </a:r>
+            <a:endParaRPr lang="en-US" sz="3100" dirty="0"/>
+          </a:p>
+        </p:txBody>
+      </p:sp>
+      <p:sp>
+        <p:nvSpPr>
+          <p:cNvPr id="19" name="Shape 17"/>
+          <p:cNvSpPr/>
+          <p:nvPr/>
+        </p:nvSpPr>
+        <p:spPr>
+          <a:xfrm>
+            <a:off x="4798466" y="3913632"/>
+            <a:ext cx="2594762" cy="10973"/>
+          </a:xfrm>
+          <a:prstGeom prst="rect">
+            <a:avLst/>
+          </a:prstGeom>
+          <a:solidFill>
+            <a:srgbClr val="DCD3C4"/>
+          </a:solidFill>
+          <a:ln/>
+        </p:spPr>
+      </p:sp>
+      <p:sp>
+        <p:nvSpPr>
+          <p:cNvPr id="20" name="Text 18"/>
+          <p:cNvSpPr txBox="1"/>
+          <p:nvPr/>
+        </p:nvSpPr>
+        <p:spPr>
+          <a:xfrm>
+            <a:off x="4798466" y="4114800"/>
+            <a:ext cx="2594762" cy="219456"/>
+          </a:xfrm>
+          <a:prstGeom prst="rect">
+            <a:avLst/>
+          </a:prstGeom>
+          <a:noFill/>
+          <a:ln/>
+        </p:spPr>
+        <p:txBody>
+          <a:bodyPr wrap="square" lIns="0" tIns="0" rIns="0" bIns="0" rtlCol="0" anchor="t"/>
+          <a:lstStyle/>
+          <a:p>
+            <a:pPr indent="0" marL="0">
+              <a:buNone/>
+            </a:pPr>
+            <a:r>
+              <a:rPr lang="en-US" sz="1000" b="1" spc="160" kern="0" dirty="0">
+                <a:solidFill>
+                  <a:srgbClr val="6F6A62"/>
+                </a:solidFill>
+                <a:latin typeface="Inter" pitchFamily="34" charset="0"/>
+                <a:ea typeface="Inter" pitchFamily="34" charset="-122"/>
+                <a:cs typeface="Inter" pitchFamily="34" charset="-120"/>
+              </a:rPr>
+              <a:t>ВАШЕ ВРЕМЯ</a:t>
+            </a:r>
+            <a:endParaRPr lang="en-US" sz="1000" dirty="0"/>
+          </a:p>
+        </p:txBody>
+      </p:sp>
+      <p:sp>
+        <p:nvSpPr>
+          <p:cNvPr id="21" name="Text 19"/>
+          <p:cNvSpPr txBox="1"/>
+          <p:nvPr/>
+        </p:nvSpPr>
+        <p:spPr>
+          <a:xfrm>
+            <a:off x="4798466" y="4389120"/>
+            <a:ext cx="2594762" cy="310896"/>
+          </a:xfrm>
+          <a:prstGeom prst="rect">
+            <a:avLst/>
+          </a:prstGeom>
+          <a:noFill/>
+          <a:ln/>
+        </p:spPr>
+        <p:txBody>
+          <a:bodyPr wrap="square" lIns="0" tIns="0" rIns="0" bIns="0" rtlCol="0" anchor="t"/>
+          <a:lstStyle/>
+          <a:p>
+            <a:pPr indent="0" marL="0">
+              <a:buNone/>
+            </a:pPr>
+            <a:r>
+              <a:rPr lang="en-US" sz="1700" b="1" dirty="0">
+                <a:solidFill>
+                  <a:srgbClr val="0C1D28"/>
+                </a:solidFill>
+                <a:latin typeface="Inter" pitchFamily="34" charset="0"/>
+                <a:ea typeface="Inter" pitchFamily="34" charset="-122"/>
+                <a:cs typeface="Inter" pitchFamily="34" charset="-120"/>
+              </a:rPr>
+              <a:t>~ 30 часов</a:t>
+            </a:r>
+            <a:endParaRPr lang="en-US" sz="1700" dirty="0"/>
+          </a:p>
+        </p:txBody>
+      </p:sp>
+      <p:sp>
+        <p:nvSpPr>
+          <p:cNvPr id="22" name="Text 20"/>
+          <p:cNvSpPr txBox="1"/>
+          <p:nvPr/>
+        </p:nvSpPr>
+        <p:spPr>
+          <a:xfrm>
+            <a:off x="4798466" y="4773168"/>
+            <a:ext cx="2594762" cy="713232"/>
+          </a:xfrm>
+          <a:prstGeom prst="rect">
+            <a:avLst/>
+          </a:prstGeom>
+          <a:noFill/>
+          <a:ln/>
+        </p:spPr>
+        <p:txBody>
+          <a:bodyPr wrap="square" lIns="0" tIns="0" rIns="0" bIns="0" rtlCol="0" anchor="t"/>
+          <a:lstStyle/>
+          <a:p>
+            <a:pPr indent="0" marL="0">
+              <a:lnSpc>
+                <a:spcPts val="1550"/>
+              </a:lnSpc>
+              <a:buNone/>
+            </a:pPr>
+            <a:r>
+              <a:rPr lang="en-US" sz="1100" dirty="0">
+                <a:solidFill>
+                  <a:srgbClr val="6F6A62"/>
+                </a:solidFill>
+                <a:latin typeface="Inter" pitchFamily="34" charset="0"/>
+                <a:ea typeface="Inter" pitchFamily="34" charset="-122"/>
+                <a:cs typeface="Inter" pitchFamily="34" charset="-120"/>
+              </a:rPr>
+              <a:t>ИТ — одним лотом за полцены.</a:t>
+            </a:r>
+            <a:endParaRPr lang="en-US" sz="1100" dirty="0"/>
+          </a:p>
+          <a:p>
+            <a:pPr indent="0" marL="0">
+              <a:lnSpc>
+                <a:spcPts val="1550"/>
+              </a:lnSpc>
+              <a:buNone/>
+            </a:pPr>
+            <a:r>
+              <a:rPr lang="en-US" sz="1100" dirty="0">
+                <a:solidFill>
+                  <a:srgbClr val="6F6A62"/>
+                </a:solidFill>
+                <a:latin typeface="Inter" pitchFamily="34" charset="0"/>
+                <a:ea typeface="Inter" pitchFamily="34" charset="-122"/>
+                <a:cs typeface="Inter" pitchFamily="34" charset="-120"/>
+              </a:rPr>
+              <a:t>Мебель и кухня — на вывоз</a:t>
+            </a:r>
+            <a:endParaRPr lang="en-US" sz="1100" dirty="0"/>
+          </a:p>
+          <a:p>
+            <a:pPr indent="0" marL="0">
+              <a:lnSpc>
+                <a:spcPts val="1550"/>
+              </a:lnSpc>
+              <a:buNone/>
+            </a:pPr>
+            <a:r>
+              <a:rPr lang="en-US" sz="1100" dirty="0">
+                <a:solidFill>
+                  <a:srgbClr val="6F6A62"/>
+                </a:solidFill>
+                <a:latin typeface="Inter" pitchFamily="34" charset="0"/>
+                <a:ea typeface="Inter" pitchFamily="34" charset="-122"/>
+                <a:cs typeface="Inter" pitchFamily="34" charset="-120"/>
+              </a:rPr>
+              <a:t>за 22 000 ₽.</a:t>
+            </a:r>
+            <a:endParaRPr lang="en-US" sz="1100" dirty="0"/>
+          </a:p>
+        </p:txBody>
+      </p:sp>
+      <p:sp>
+        <p:nvSpPr>
+          <p:cNvPr id="23" name="Shape 21"/>
+          <p:cNvSpPr/>
+          <p:nvPr/>
+        </p:nvSpPr>
+        <p:spPr>
+          <a:xfrm>
+            <a:off x="8051597" y="2395728"/>
+            <a:ext cx="3362858" cy="3200400"/>
+          </a:xfrm>
+          <a:prstGeom prst="roundRect">
+            <a:avLst>
+              <a:gd name="adj" fmla="val 1429"/>
             </a:avLst>
           </a:prstGeom>
           <a:solidFill>
@@ -11033,30 +11107,108 @@
       </p:sp>
       <p:sp>
         <p:nvSpPr>
-          <p:cNvPr id="14" name="Text 12"/>
-          <p:cNvSpPr txBox="1"/>
-          <p:nvPr/>
-        </p:nvSpPr>
-        <p:spPr>
-          <a:xfrm>
-            <a:off x="7982712" y="2414016"/>
-            <a:ext cx="3429000" cy="566928"/>
-          </a:xfrm>
-          <a:prstGeom prst="rect">
-            <a:avLst/>
-          </a:prstGeom>
-          <a:noFill/>
-          <a:ln/>
-        </p:spPr>
-        <p:txBody>
-          <a:bodyPr wrap="square" lIns="0" tIns="0" rIns="0" bIns="0" rtlCol="0" anchor="t"/>
-          <a:lstStyle/>
-          <a:p>
-            <a:pPr algn="ctr" indent="0" marL="0">
-              <a:buNone/>
-            </a:pPr>
-            <a:r>
-              <a:rPr lang="en-US" sz="3000" b="1" dirty="0">
+          <p:cNvPr id="24" name="Text 22"/>
+          <p:cNvSpPr txBox="1"/>
+          <p:nvPr/>
+        </p:nvSpPr>
+        <p:spPr>
+          <a:xfrm>
+            <a:off x="8435645" y="2706624"/>
+            <a:ext cx="365760" cy="237744"/>
+          </a:xfrm>
+          <a:prstGeom prst="rect">
+            <a:avLst/>
+          </a:prstGeom>
+          <a:noFill/>
+          <a:ln/>
+        </p:spPr>
+        <p:txBody>
+          <a:bodyPr wrap="square" lIns="0" tIns="0" rIns="0" bIns="0" rtlCol="0" anchor="t"/>
+          <a:lstStyle/>
+          <a:p>
+            <a:pPr indent="0" marL="0">
+              <a:buNone/>
+            </a:pPr>
+            <a:r>
+              <a:rPr lang="en-US" sz="1100" b="1" spc="140" kern="0" dirty="0">
+                <a:solidFill>
+                  <a:srgbClr val="C89B45"/>
+                </a:solidFill>
+                <a:latin typeface="Inter" pitchFamily="34" charset="0"/>
+                <a:ea typeface="Inter" pitchFamily="34" charset="-122"/>
+                <a:cs typeface="Inter" pitchFamily="34" charset="-120"/>
+              </a:rPr>
+              <a:t>C</a:t>
+            </a:r>
+            <a:endParaRPr lang="en-US" sz="1100" dirty="0"/>
+          </a:p>
+        </p:txBody>
+      </p:sp>
+      <p:sp>
+        <p:nvSpPr>
+          <p:cNvPr id="25" name="Text 23"/>
+          <p:cNvSpPr txBox="1"/>
+          <p:nvPr/>
+        </p:nvSpPr>
+        <p:spPr>
+          <a:xfrm>
+            <a:off x="8837981" y="2706624"/>
+            <a:ext cx="2192426" cy="237744"/>
+          </a:xfrm>
+          <a:prstGeom prst="rect">
+            <a:avLst/>
+          </a:prstGeom>
+          <a:noFill/>
+          <a:ln/>
+        </p:spPr>
+        <p:txBody>
+          <a:bodyPr wrap="square" lIns="0" tIns="0" rIns="0" bIns="0" rtlCol="0" anchor="t"/>
+          <a:lstStyle/>
+          <a:p>
+            <a:pPr indent="0" marL="0">
+              <a:buNone/>
+            </a:pPr>
+            <a:r>
+              <a:rPr lang="en-US" sz="1100" b="1" spc="140" kern="0" dirty="0">
+                <a:solidFill>
+                  <a:srgbClr val="C89B45"/>
+                </a:solidFill>
+                <a:latin typeface="Inter" pitchFamily="34" charset="0"/>
+                <a:ea typeface="Inter" pitchFamily="34" charset="-122"/>
+                <a:cs typeface="Inter" pitchFamily="34" charset="-120"/>
+              </a:rPr>
+              <a:t>ОТДАТЬ НАМ</a:t>
+            </a:r>
+            <a:endParaRPr lang="en-US" sz="1100" dirty="0"/>
+          </a:p>
+        </p:txBody>
+      </p:sp>
+      <p:sp>
+        <p:nvSpPr>
+          <p:cNvPr id="26" name="Text 24"/>
+          <p:cNvSpPr txBox="1"/>
+          <p:nvPr/>
+        </p:nvSpPr>
+        <p:spPr>
+          <a:xfrm>
+            <a:off x="8435645" y="3145536"/>
+            <a:ext cx="2594762" cy="566928"/>
+          </a:xfrm>
+          <a:prstGeom prst="rect">
+            <a:avLst/>
+          </a:prstGeom>
+          <a:noFill/>
+          <a:ln/>
+        </p:spPr>
+        <p:txBody>
+          <a:bodyPr wrap="square" lIns="0" tIns="0" rIns="0" bIns="0" rtlCol="0" anchor="t"/>
+          <a:lstStyle/>
+          <a:p>
+            <a:pPr indent="0" marL="0">
+              <a:buNone/>
+            </a:pPr>
+            <a:r>
+              <a:rPr lang="en-US" sz="3100" b="1" dirty="0">
                 <a:solidFill>
                   <a:srgbClr val="D9BC7A"/>
                 </a:solidFill>
@@ -11064,38 +11216,58 @@
                 <a:ea typeface="Inter" pitchFamily="34" charset="-122"/>
                 <a:cs typeface="Inter" pitchFamily="34" charset="-120"/>
               </a:rPr>
-              <a:t>222 000 ₽</a:t>
-            </a:r>
-            <a:endParaRPr lang="en-US" sz="3000" dirty="0"/>
-          </a:p>
-        </p:txBody>
-      </p:sp>
-      <p:sp>
-        <p:nvSpPr>
-          <p:cNvPr id="15" name="Text 13"/>
-          <p:cNvSpPr txBox="1"/>
-          <p:nvPr/>
-        </p:nvSpPr>
-        <p:spPr>
-          <a:xfrm>
-            <a:off x="8129016" y="3035808"/>
-            <a:ext cx="3136392" cy="310896"/>
-          </a:xfrm>
-          <a:prstGeom prst="rect">
-            <a:avLst/>
-          </a:prstGeom>
-          <a:noFill/>
-          <a:ln/>
-        </p:spPr>
-        <p:txBody>
-          <a:bodyPr wrap="square" lIns="0" tIns="0" rIns="0" bIns="0" rtlCol="0" anchor="t"/>
-          <a:lstStyle/>
-          <a:p>
-            <a:pPr algn="ctr" indent="0" marL="0">
-              <a:buNone/>
-            </a:pPr>
-            <a:r>
-              <a:rPr lang="en-US" sz="1050" b="1" spc="140" kern="0" dirty="0">
+              <a:t>+ 248 000 ₽</a:t>
+            </a:r>
+            <a:endParaRPr lang="en-US" sz="3100" dirty="0"/>
+          </a:p>
+        </p:txBody>
+      </p:sp>
+      <p:sp>
+        <p:nvSpPr>
+          <p:cNvPr id="27" name="Shape 25"/>
+          <p:cNvSpPr/>
+          <p:nvPr/>
+        </p:nvSpPr>
+        <p:spPr>
+          <a:xfrm>
+            <a:off x="8435645" y="3913632"/>
+            <a:ext cx="2594762" cy="10973"/>
+          </a:xfrm>
+          <a:prstGeom prst="rect">
+            <a:avLst/>
+          </a:prstGeom>
+          <a:solidFill>
+            <a:srgbClr val="6E5426"/>
+          </a:solidFill>
+          <a:ln/>
+        </p:spPr>
+      </p:sp>
+      <p:sp>
+        <p:nvSpPr>
+          <p:cNvPr id="28" name="Text 26"/>
+          <p:cNvSpPr txBox="1"/>
+          <p:nvPr/>
+        </p:nvSpPr>
+        <p:spPr>
+          <a:xfrm>
+            <a:off x="8435645" y="4114800"/>
+            <a:ext cx="2594762" cy="219456"/>
+          </a:xfrm>
+          <a:prstGeom prst="rect">
+            <a:avLst/>
+          </a:prstGeom>
+          <a:noFill/>
+          <a:ln/>
+        </p:spPr>
+        <p:txBody>
+          <a:bodyPr wrap="square" lIns="0" tIns="0" rIns="0" bIns="0" rtlCol="0" anchor="t"/>
+          <a:lstStyle/>
+          <a:p>
+            <a:pPr indent="0" marL="0">
+              <a:buNone/>
+            </a:pPr>
+            <a:r>
+              <a:rPr lang="en-US" sz="1000" b="1" spc="160" kern="0" dirty="0">
                 <a:solidFill>
                   <a:srgbClr val="9CAAB1"/>
                 </a:solidFill>
@@ -11103,73 +11275,22 @@
                 <a:ea typeface="Inter" pitchFamily="34" charset="-122"/>
                 <a:cs typeface="Inter" pitchFamily="34" charset="-120"/>
               </a:rPr>
-              <a:t>ВАМ</a:t>
-            </a:r>
-            <a:endParaRPr lang="en-US" sz="1050" dirty="0"/>
-          </a:p>
-        </p:txBody>
-      </p:sp>
-      <p:sp>
-        <p:nvSpPr>
-          <p:cNvPr id="16" name="Shape 14"/>
-          <p:cNvSpPr/>
-          <p:nvPr/>
-        </p:nvSpPr>
-        <p:spPr>
-          <a:xfrm>
-            <a:off x="777240" y="3913632"/>
-            <a:ext cx="6309360" cy="1517904"/>
-          </a:xfrm>
-          <a:prstGeom prst="roundRect">
-            <a:avLst>
-              <a:gd name="adj" fmla="val 3012"/>
-            </a:avLst>
-          </a:prstGeom>
-          <a:solidFill>
-            <a:srgbClr val="FFFFFF"/>
-          </a:solidFill>
-          <a:ln w="12700">
-            <a:solidFill>
-              <a:srgbClr val="DCD3C4"/>
-            </a:solidFill>
-            <a:prstDash val="solid"/>
-          </a:ln>
-        </p:spPr>
-      </p:sp>
-      <p:pic>
-        <p:nvPicPr>
-          <p:cNvPr id="17" name="Image 0" descr="/home/user/mysteryslavic-2026-07-19_16-47-00/presentations/office-client/assets/ic-checkcircle.png">    </p:cNvPr>
-          <p:cNvPicPr>
-            <a:picLocks noChangeAspect="1"/>
-          </p:cNvPicPr>
-          <p:nvPr/>
-        </p:nvPicPr>
-        <p:blipFill>
-          <a:blip r:embed="rId2"/>
-          <a:stretch>
-            <a:fillRect/>
-          </a:stretch>
-        </p:blipFill>
-        <p:spPr>
-          <a:xfrm>
-            <a:off x="1161288" y="4279392"/>
-            <a:ext cx="438912" cy="438912"/>
-          </a:xfrm>
-          <a:prstGeom prst="rect">
-            <a:avLst/>
-          </a:prstGeom>
-        </p:spPr>
-      </p:pic>
-      <p:sp>
-        <p:nvSpPr>
-          <p:cNvPr id="18" name="Text 15"/>
-          <p:cNvSpPr txBox="1"/>
-          <p:nvPr/>
-        </p:nvSpPr>
-        <p:spPr>
-          <a:xfrm>
-            <a:off x="1764792" y="4315968"/>
-            <a:ext cx="4937760" cy="292608"/>
+              <a:t>ВАШЕ ВРЕМЯ</a:t>
+            </a:r>
+            <a:endParaRPr lang="en-US" sz="1000" dirty="0"/>
+          </a:p>
+        </p:txBody>
+      </p:sp>
+      <p:sp>
+        <p:nvSpPr>
+          <p:cNvPr id="29" name="Text 27"/>
+          <p:cNvSpPr txBox="1"/>
+          <p:nvPr/>
+        </p:nvSpPr>
+        <p:spPr>
+          <a:xfrm>
+            <a:off x="8435645" y="4389120"/>
+            <a:ext cx="2594762" cy="310896"/>
           </a:xfrm>
           <a:prstGeom prst="rect">
             <a:avLst/>
@@ -11187,13 +11308,13 @@
             <a:r>
               <a:rPr lang="en-US" sz="1700" b="1" dirty="0">
                 <a:solidFill>
-                  <a:srgbClr val="0C1D28"/>
-                </a:solidFill>
-                <a:latin typeface="Inter" pitchFamily="34" charset="0"/>
-                <a:ea typeface="Inter" pitchFamily="34" charset="-122"/>
-                <a:cs typeface="Inter" pitchFamily="34" charset="-120"/>
-              </a:rPr>
-              <a:t>ПОМЕЩЕНИЕ СВОБОДНО К ВАШЕЙ ДАТЕ</a:t>
+                  <a:srgbClr val="F7F1E7"/>
+                </a:solidFill>
+                <a:latin typeface="Inter" pitchFamily="34" charset="0"/>
+                <a:ea typeface="Inter" pitchFamily="34" charset="-122"/>
+                <a:cs typeface="Inter" pitchFamily="34" charset="-120"/>
+              </a:rPr>
+              <a:t>до 90 минут</a:t>
             </a:r>
             <a:endParaRPr lang="en-US" sz="1700" dirty="0"/>
           </a:p>
@@ -11201,14 +11322,14 @@
       </p:sp>
       <p:sp>
         <p:nvSpPr>
-          <p:cNvPr id="19" name="Text 16"/>
-          <p:cNvSpPr txBox="1"/>
-          <p:nvPr/>
-        </p:nvSpPr>
-        <p:spPr>
-          <a:xfrm>
-            <a:off x="1764792" y="4718304"/>
-            <a:ext cx="4937760" cy="548640"/>
+          <p:cNvPr id="30" name="Text 28"/>
+          <p:cNvSpPr txBox="1"/>
+          <p:nvPr/>
+        </p:nvSpPr>
+        <p:spPr>
+          <a:xfrm>
+            <a:off x="8435645" y="4773168"/>
+            <a:ext cx="2594762" cy="713232"/>
           </a:xfrm>
           <a:prstGeom prst="rect">
             <a:avLst/>
@@ -11222,12 +11343,91 @@
           <a:p>
             <a:pPr indent="0" marL="0">
               <a:lnSpc>
-                <a:spcPts val="1800"/>
+                <a:spcPts val="1550"/>
               </a:lnSpc>
               <a:buNone/>
             </a:pPr>
             <a:r>
-              <a:rPr lang="en-US" sz="1250" dirty="0">
+              <a:rPr lang="en-US" sz="1100" dirty="0">
+                <a:solidFill>
+                  <a:srgbClr val="9CAAB1"/>
+                </a:solidFill>
+                <a:latin typeface="Inter" pitchFamily="34" charset="0"/>
+                <a:ea typeface="Inter" pitchFamily="34" charset="-122"/>
+                <a:cs typeface="Inter" pitchFamily="34" charset="-120"/>
+              </a:rPr>
+              <a:t>Продано 420 000 ₽</a:t>
+            </a:r>
+            <a:endParaRPr lang="en-US" sz="1100" dirty="0"/>
+          </a:p>
+          <a:p>
+            <a:pPr indent="0" marL="0">
+              <a:lnSpc>
+                <a:spcPts val="1550"/>
+              </a:lnSpc>
+              <a:buNone/>
+            </a:pPr>
+            <a:r>
+              <a:rPr lang="en-US" sz="1100" dirty="0">
+                <a:solidFill>
+                  <a:srgbClr val="9CAAB1"/>
+                </a:solidFill>
+                <a:latin typeface="Inter" pitchFamily="34" charset="0"/>
+                <a:ea typeface="Inter" pitchFamily="34" charset="-122"/>
+                <a:cs typeface="Inter" pitchFamily="34" charset="-120"/>
+              </a:rPr>
+              <a:t>минус наша услуга 172 000 ₽</a:t>
+            </a:r>
+            <a:endParaRPr lang="en-US" sz="1100" dirty="0"/>
+          </a:p>
+          <a:p>
+            <a:pPr indent="0" marL="0">
+              <a:lnSpc>
+                <a:spcPts val="1550"/>
+              </a:lnSpc>
+              <a:buNone/>
+            </a:pPr>
+            <a:r>
+              <a:rPr lang="en-US" sz="1100" dirty="0">
+                <a:solidFill>
+                  <a:srgbClr val="9CAAB1"/>
+                </a:solidFill>
+                <a:latin typeface="Inter" pitchFamily="34" charset="0"/>
+                <a:ea typeface="Inter" pitchFamily="34" charset="-122"/>
+                <a:cs typeface="Inter" pitchFamily="34" charset="-120"/>
+              </a:rPr>
+              <a:t>(25 000 ₽ + 35%).</a:t>
+            </a:r>
+            <a:endParaRPr lang="en-US" sz="1100" dirty="0"/>
+          </a:p>
+        </p:txBody>
+      </p:sp>
+      <p:sp>
+        <p:nvSpPr>
+          <p:cNvPr id="31" name="Text 29"/>
+          <p:cNvSpPr txBox="1"/>
+          <p:nvPr/>
+        </p:nvSpPr>
+        <p:spPr>
+          <a:xfrm>
+            <a:off x="777240" y="5870448"/>
+            <a:ext cx="10637215" cy="274320"/>
+          </a:xfrm>
+          <a:prstGeom prst="rect">
+            <a:avLst/>
+          </a:prstGeom>
+          <a:noFill/>
+          <a:ln/>
+        </p:spPr>
+        <p:txBody>
+          <a:bodyPr wrap="square" lIns="0" tIns="0" rIns="0" bIns="0" rtlCol="0" anchor="t"/>
+          <a:lstStyle/>
+          <a:p>
+            <a:pPr indent="0" marL="0">
+              <a:buNone/>
+            </a:pPr>
+            <a:r>
+              <a:rPr lang="en-US" sz="1200" i="1" dirty="0">
                 <a:solidFill>
                   <a:srgbClr val="6F6A62"/>
                 </a:solidFill>
@@ -11235,233 +11435,7 @@
                 <a:ea typeface="Inter" pitchFamily="34" charset="-122"/>
                 <a:cs typeface="Inter" pitchFamily="34" charset="-120"/>
               </a:rPr>
-              <a:t>Продажи продолжаются и после даты —</a:t>
-            </a:r>
-            <a:endParaRPr lang="en-US" sz="1250" dirty="0"/>
-          </a:p>
-          <a:p>
-            <a:pPr indent="0" marL="0">
-              <a:lnSpc>
-                <a:spcPts val="1800"/>
-              </a:lnSpc>
-              <a:buNone/>
-            </a:pPr>
-            <a:r>
-              <a:rPr lang="en-US" sz="1250" dirty="0">
-                <a:solidFill>
-                  <a:srgbClr val="6F6A62"/>
-                </a:solidFill>
-                <a:latin typeface="Inter" pitchFamily="34" charset="0"/>
-                <a:ea typeface="Inter" pitchFamily="34" charset="-122"/>
-                <a:cs typeface="Inter" pitchFamily="34" charset="-120"/>
-              </a:rPr>
-              <a:t>уже без вашего участия</a:t>
-            </a:r>
-            <a:endParaRPr lang="en-US" sz="1250" dirty="0"/>
-          </a:p>
-        </p:txBody>
-      </p:sp>
-      <p:sp>
-        <p:nvSpPr>
-          <p:cNvPr id="20" name="Shape 17"/>
-          <p:cNvSpPr/>
-          <p:nvPr/>
-        </p:nvSpPr>
-        <p:spPr>
-          <a:xfrm>
-            <a:off x="7360920" y="3913632"/>
-            <a:ext cx="4050792" cy="1517904"/>
-          </a:xfrm>
-          <a:prstGeom prst="roundRect">
-            <a:avLst>
-              <a:gd name="adj" fmla="val 3012"/>
-            </a:avLst>
-          </a:prstGeom>
-          <a:solidFill>
-            <a:srgbClr val="FFFFFF"/>
-          </a:solidFill>
-          <a:ln w="12700">
-            <a:solidFill>
-              <a:srgbClr val="DCD3C4"/>
-            </a:solidFill>
-            <a:prstDash val="solid"/>
-          </a:ln>
-        </p:spPr>
-      </p:sp>
-      <p:sp>
-        <p:nvSpPr>
-          <p:cNvPr id="21" name="Text 18"/>
-          <p:cNvSpPr txBox="1"/>
-          <p:nvPr/>
-        </p:nvSpPr>
-        <p:spPr>
-          <a:xfrm>
-            <a:off x="7699248" y="4160520"/>
-            <a:ext cx="3474720" cy="237744"/>
-          </a:xfrm>
-          <a:prstGeom prst="rect">
-            <a:avLst/>
-          </a:prstGeom>
-          <a:noFill/>
-          <a:ln/>
-        </p:spPr>
-        <p:txBody>
-          <a:bodyPr wrap="square" lIns="0" tIns="0" rIns="0" bIns="0" rtlCol="0" anchor="t"/>
-          <a:lstStyle/>
-          <a:p>
-            <a:pPr indent="0" marL="0">
-              <a:buNone/>
-            </a:pPr>
-            <a:r>
-              <a:rPr lang="en-US" sz="1050" b="1" spc="140" kern="0" dirty="0">
-                <a:solidFill>
-                  <a:srgbClr val="6E5426"/>
-                </a:solidFill>
-                <a:latin typeface="Inter" pitchFamily="34" charset="0"/>
-                <a:ea typeface="Inter" pitchFamily="34" charset="-122"/>
-                <a:cs typeface="Inter" pitchFamily="34" charset="-120"/>
-              </a:rPr>
-              <a:t>ТОТ ЖЕ ОБЪЁМ В ФОРМАТЕ A</a:t>
-            </a:r>
-            <a:endParaRPr lang="en-US" sz="1050" dirty="0"/>
-          </a:p>
-        </p:txBody>
-      </p:sp>
-      <p:sp>
-        <p:nvSpPr>
-          <p:cNvPr id="22" name="Text 19"/>
-          <p:cNvSpPr txBox="1"/>
-          <p:nvPr/>
-        </p:nvSpPr>
-        <p:spPr>
-          <a:xfrm>
-            <a:off x="7699248" y="4507992"/>
-            <a:ext cx="3474720" cy="310896"/>
-          </a:xfrm>
-          <a:prstGeom prst="rect">
-            <a:avLst/>
-          </a:prstGeom>
-          <a:noFill/>
-          <a:ln/>
-        </p:spPr>
-        <p:txBody>
-          <a:bodyPr wrap="square" lIns="0" tIns="0" rIns="0" bIns="0" rtlCol="0" anchor="t"/>
-          <a:lstStyle/>
-          <a:p>
-            <a:pPr indent="0" marL="0">
-              <a:buNone/>
-            </a:pPr>
-            <a:r>
-              <a:rPr lang="en-US" sz="1500" b="1" dirty="0">
-                <a:solidFill>
-                  <a:srgbClr val="0C1D28"/>
-                </a:solidFill>
-                <a:latin typeface="Inter" pitchFamily="34" charset="0"/>
-                <a:ea typeface="Inter" pitchFamily="34" charset="-122"/>
-                <a:cs typeface="Inter" pitchFamily="34" charset="-120"/>
-              </a:rPr>
-              <a:t>услуга 105 000 ₽ · вам 275 000 ₽</a:t>
-            </a:r>
-            <a:endParaRPr lang="en-US" sz="1500" dirty="0"/>
-          </a:p>
-        </p:txBody>
-      </p:sp>
-      <p:sp>
-        <p:nvSpPr>
-          <p:cNvPr id="23" name="Text 20"/>
-          <p:cNvSpPr txBox="1"/>
-          <p:nvPr/>
-        </p:nvSpPr>
-        <p:spPr>
-          <a:xfrm>
-            <a:off x="7699248" y="4864608"/>
-            <a:ext cx="3474720" cy="457200"/>
-          </a:xfrm>
-          <a:prstGeom prst="rect">
-            <a:avLst/>
-          </a:prstGeom>
-          <a:noFill/>
-          <a:ln/>
-        </p:spPr>
-        <p:txBody>
-          <a:bodyPr wrap="square" lIns="0" tIns="0" rIns="0" bIns="0" rtlCol="0" anchor="t"/>
-          <a:lstStyle/>
-          <a:p>
-            <a:pPr indent="0" marL="0">
-              <a:lnSpc>
-                <a:spcPts val="1700"/>
-              </a:lnSpc>
-              <a:buNone/>
-            </a:pPr>
-            <a:r>
-              <a:rPr lang="en-US" sz="1250" dirty="0">
-                <a:solidFill>
-                  <a:srgbClr val="6F6A62"/>
-                </a:solidFill>
-                <a:latin typeface="Inter" pitchFamily="34" charset="0"/>
-                <a:ea typeface="Inter" pitchFamily="34" charset="-122"/>
-                <a:cs typeface="Inter" pitchFamily="34" charset="-120"/>
-              </a:rPr>
-              <a:t>но вещи остаются в офисе</a:t>
-            </a:r>
-            <a:endParaRPr lang="en-US" sz="1250" dirty="0"/>
-          </a:p>
-          <a:p>
-            <a:pPr indent="0" marL="0">
-              <a:lnSpc>
-                <a:spcPts val="1700"/>
-              </a:lnSpc>
-              <a:buNone/>
-            </a:pPr>
-            <a:r>
-              <a:rPr lang="en-US" sz="1250" dirty="0">
-                <a:solidFill>
-                  <a:srgbClr val="6F6A62"/>
-                </a:solidFill>
-                <a:latin typeface="Inter" pitchFamily="34" charset="0"/>
-                <a:ea typeface="Inter" pitchFamily="34" charset="-122"/>
-                <a:cs typeface="Inter" pitchFamily="34" charset="-120"/>
-              </a:rPr>
-              <a:t>до момента продажи</a:t>
-            </a:r>
-            <a:endParaRPr lang="en-US" sz="1250" dirty="0"/>
-          </a:p>
-        </p:txBody>
-      </p:sp>
-      <p:sp>
-        <p:nvSpPr>
-          <p:cNvPr id="24" name="Text 21"/>
-          <p:cNvSpPr txBox="1"/>
-          <p:nvPr/>
-        </p:nvSpPr>
-        <p:spPr>
-          <a:xfrm>
-            <a:off x="777240" y="5797296"/>
-            <a:ext cx="10637215" cy="274320"/>
-          </a:xfrm>
-          <a:prstGeom prst="rect">
-            <a:avLst/>
-          </a:prstGeom>
-          <a:noFill/>
-          <a:ln/>
-        </p:spPr>
-        <p:txBody>
-          <a:bodyPr wrap="square" lIns="0" tIns="0" rIns="0" bIns="0" rtlCol="0" anchor="t"/>
-          <a:lstStyle/>
-          <a:p>
-            <a:pPr indent="0" marL="0">
-              <a:buNone/>
-            </a:pPr>
-            <a:r>
-              <a:rPr lang="en-US" sz="1200" i="1" dirty="0">
-                <a:solidFill>
-                  <a:srgbClr val="6F6A62"/>
-                </a:solidFill>
-                <a:latin typeface="Inter" pitchFamily="34" charset="0"/>
-                <a:ea typeface="Inter" pitchFamily="34" charset="-122"/>
-                <a:cs typeface="Inter" pitchFamily="34" charset="-120"/>
-              </a:rPr>
-              <a:t>Пример. Итог зависит от состава имущества и срока — считаем по вашему видео.</a:t>
+              <a:t>Пример по референсному объекту. Цены на б/у имущество и объём работ считаем по вашему видео.</a:t>
             </a:r>
             <a:endParaRPr lang="en-US" sz="1200" dirty="0"/>
           </a:p>
@@ -12607,131 +12581,62 @@
           </a:p>
         </p:txBody>
       </p:sp>
-      <p:sp>
-        <p:nvSpPr>
-          <p:cNvPr id="12" name="Shape 9"/>
-          <p:cNvSpPr/>
-          <p:nvPr/>
-        </p:nvSpPr>
+      <p:pic>
+        <p:nvPicPr>
+          <p:cNvPr id="12" name="Image 1" descr="/home/user/mysteryslavic-2026-07-19_16-47-00/presentations/office-client/assets/ph-P8-chair.jpg">    </p:cNvPr>
+          <p:cNvPicPr>
+            <a:picLocks noChangeAspect="1"/>
+          </p:cNvPicPr>
+          <p:nvPr/>
+        </p:nvPicPr>
+        <p:blipFill>
+          <a:blip r:embed="rId3"/>
+          <a:stretch>
+            <a:fillRect/>
+          </a:stretch>
+        </p:blipFill>
         <p:spPr>
           <a:xfrm>
             <a:off x="6876288" y="1517904"/>
             <a:ext cx="4151376" cy="1572768"/>
           </a:xfrm>
+          <a:prstGeom prst="rect">
+            <a:avLst/>
+          </a:prstGeom>
+        </p:spPr>
+      </p:pic>
+      <p:sp>
+        <p:nvSpPr>
+          <p:cNvPr id="13" name="Shape 9"/>
+          <p:cNvSpPr/>
+          <p:nvPr/>
+        </p:nvSpPr>
+        <p:spPr>
+          <a:xfrm>
+            <a:off x="6876288" y="1517904"/>
+            <a:ext cx="4151376" cy="1572768"/>
+          </a:xfrm>
           <a:prstGeom prst="roundRect">
             <a:avLst>
-              <a:gd name="adj" fmla="val 3488"/>
+              <a:gd name="adj" fmla="val 2326"/>
             </a:avLst>
           </a:prstGeom>
           <a:solidFill>
-            <a:srgbClr val="13252F"/>
+            <a:srgbClr val="FFFFFF">
+              <a:alpha val="0"/>
+            </a:srgbClr>
           </a:solidFill>
           <a:ln w="12700">
             <a:solidFill>
-              <a:srgbClr val="6E5426"/>
+              <a:srgbClr val="DCD3C4"/>
             </a:solidFill>
-            <a:prstDash val="dash"/>
+            <a:prstDash val="solid"/>
           </a:ln>
         </p:spPr>
       </p:sp>
       <p:sp>
         <p:nvSpPr>
-          <p:cNvPr id="13" name="Text 10"/>
-          <p:cNvSpPr txBox="1"/>
-          <p:nvPr/>
-        </p:nvSpPr>
-        <p:spPr>
-          <a:xfrm>
-            <a:off x="6876288" y="1920240"/>
-            <a:ext cx="4151376" cy="310896"/>
-          </a:xfrm>
-          <a:prstGeom prst="rect">
-            <a:avLst/>
-          </a:prstGeom>
-          <a:noFill/>
-          <a:ln/>
-        </p:spPr>
-        <p:txBody>
-          <a:bodyPr wrap="square" lIns="0" tIns="0" rIns="0" bIns="0" rtlCol="0" anchor="ctr"/>
-          <a:lstStyle/>
-          <a:p>
-            <a:pPr algn="ctr" indent="0" marL="0">
-              <a:buNone/>
-            </a:pPr>
-            <a:r>
-              <a:rPr lang="en-US" sz="1500" b="1" spc="300" kern="0" dirty="0">
-                <a:solidFill>
-                  <a:srgbClr val="C89B45"/>
-                </a:solidFill>
-                <a:latin typeface="Inter" pitchFamily="34" charset="0"/>
-                <a:ea typeface="Inter" pitchFamily="34" charset="-122"/>
-                <a:cs typeface="Inter" pitchFamily="34" charset="-120"/>
-              </a:rPr>
-              <a:t>P8</a:t>
-            </a:r>
-            <a:endParaRPr lang="en-US" sz="1500" dirty="0"/>
-          </a:p>
-        </p:txBody>
-      </p:sp>
-      <p:sp>
-        <p:nvSpPr>
-          <p:cNvPr id="14" name="Text 11"/>
-          <p:cNvSpPr txBox="1"/>
-          <p:nvPr/>
-        </p:nvSpPr>
-        <p:spPr>
-          <a:xfrm>
-            <a:off x="7150608" y="2304288"/>
-            <a:ext cx="3602736" cy="457200"/>
-          </a:xfrm>
-          <a:prstGeom prst="rect">
-            <a:avLst/>
-          </a:prstGeom>
-          <a:noFill/>
-          <a:ln/>
-        </p:spPr>
-        <p:txBody>
-          <a:bodyPr wrap="square" lIns="0" tIns="0" rIns="0" bIns="0" rtlCol="0" anchor="t"/>
-          <a:lstStyle/>
-          <a:p>
-            <a:pPr algn="ctr" indent="0" marL="0">
-              <a:buNone/>
-            </a:pPr>
-            <a:r>
-              <a:rPr lang="en-US" sz="1100" dirty="0">
-                <a:solidFill>
-                  <a:srgbClr val="9CAAB1"/>
-                </a:solidFill>
-                <a:latin typeface="Inter" pitchFamily="34" charset="0"/>
-                <a:ea typeface="Inter" pitchFamily="34" charset="-122"/>
-                <a:cs typeface="Inter" pitchFamily="34" charset="-120"/>
-              </a:rPr>
-              <a:t>фото позиции</a:t>
-            </a:r>
-            <a:endParaRPr lang="en-US" sz="1100" dirty="0"/>
-          </a:p>
-          <a:p>
-            <a:pPr algn="ctr" indent="0" marL="0">
-              <a:buNone/>
-            </a:pPr>
-            <a:r>
-              <a:rPr lang="en-US" sz="1100" dirty="0">
-                <a:solidFill>
-                  <a:srgbClr val="9CAAB1"/>
-                </a:solidFill>
-                <a:latin typeface="Inter" pitchFamily="34" charset="0"/>
-                <a:ea typeface="Inter" pitchFamily="34" charset="-122"/>
-                <a:cs typeface="Inter" pitchFamily="34" charset="-120"/>
-              </a:rPr>
-              <a:t>(офисное кресло)</a:t>
-            </a:r>
-            <a:endParaRPr lang="en-US" sz="1100" dirty="0"/>
-          </a:p>
-        </p:txBody>
-      </p:sp>
-      <p:sp>
-        <p:nvSpPr>
-          <p:cNvPr id="15" name="Text 12"/>
+          <p:cNvPr id="14" name="Text 10"/>
           <p:cNvSpPr txBox="1"/>
           <p:nvPr/>
         </p:nvSpPr>
@@ -12770,7 +12675,7 @@
       </p:sp>
       <p:sp>
         <p:nvSpPr>
-          <p:cNvPr id="16" name="Text 13"/>
+          <p:cNvPr id="15" name="Text 11"/>
           <p:cNvSpPr txBox="1"/>
           <p:nvPr/>
         </p:nvSpPr>
@@ -12809,7 +12714,7 @@
       </p:sp>
       <p:sp>
         <p:nvSpPr>
-          <p:cNvPr id="17" name="Text 14"/>
+          <p:cNvPr id="16" name="Text 12"/>
           <p:cNvSpPr txBox="1"/>
           <p:nvPr/>
         </p:nvSpPr>
@@ -12848,7 +12753,7 @@
       </p:sp>
       <p:sp>
         <p:nvSpPr>
-          <p:cNvPr id="18" name="Shape 15"/>
+          <p:cNvPr id="17" name="Shape 13"/>
           <p:cNvSpPr/>
           <p:nvPr/>
         </p:nvSpPr>
@@ -12868,7 +12773,7 @@
       </p:sp>
       <p:sp>
         <p:nvSpPr>
-          <p:cNvPr id="19" name="Text 16"/>
+          <p:cNvPr id="18" name="Text 14"/>
           <p:cNvSpPr txBox="1"/>
           <p:nvPr/>
         </p:nvSpPr>
@@ -12907,7 +12812,7 @@
       </p:sp>
       <p:sp>
         <p:nvSpPr>
-          <p:cNvPr id="20" name="Text 17"/>
+          <p:cNvPr id="19" name="Text 15"/>
           <p:cNvSpPr txBox="1"/>
           <p:nvPr/>
         </p:nvSpPr>
@@ -12946,7 +12851,7 @@
       </p:sp>
       <p:sp>
         <p:nvSpPr>
-          <p:cNvPr id="21" name="Shape 18"/>
+          <p:cNvPr id="20" name="Shape 16"/>
           <p:cNvSpPr/>
           <p:nvPr/>
         </p:nvSpPr>
@@ -12966,7 +12871,7 @@
       </p:sp>
       <p:sp>
         <p:nvSpPr>
-          <p:cNvPr id="22" name="Text 19"/>
+          <p:cNvPr id="21" name="Text 17"/>
           <p:cNvSpPr txBox="1"/>
           <p:nvPr/>
         </p:nvSpPr>
@@ -13005,7 +12910,7 @@
       </p:sp>
       <p:sp>
         <p:nvSpPr>
-          <p:cNvPr id="23" name="Text 20"/>
+          <p:cNvPr id="22" name="Text 18"/>
           <p:cNvSpPr txBox="1"/>
           <p:nvPr/>
         </p:nvSpPr>
@@ -13044,7 +12949,7 @@
       </p:sp>
       <p:sp>
         <p:nvSpPr>
-          <p:cNvPr id="24" name="Shape 21"/>
+          <p:cNvPr id="23" name="Shape 19"/>
           <p:cNvSpPr/>
           <p:nvPr/>
         </p:nvSpPr>
@@ -13064,7 +12969,7 @@
       </p:sp>
       <p:sp>
         <p:nvSpPr>
-          <p:cNvPr id="25" name="Text 22"/>
+          <p:cNvPr id="24" name="Text 20"/>
           <p:cNvSpPr txBox="1"/>
           <p:nvPr/>
         </p:nvSpPr>
@@ -13103,7 +13008,7 @@
       </p:sp>
       <p:sp>
         <p:nvSpPr>
-          <p:cNvPr id="26" name="Text 23"/>
+          <p:cNvPr id="25" name="Text 21"/>
           <p:cNvSpPr txBox="1"/>
           <p:nvPr/>
         </p:nvSpPr>
@@ -13142,7 +13047,7 @@
       </p:sp>
       <p:sp>
         <p:nvSpPr>
-          <p:cNvPr id="27" name="Shape 24"/>
+          <p:cNvPr id="26" name="Shape 22"/>
           <p:cNvSpPr/>
           <p:nvPr/>
         </p:nvSpPr>
@@ -13162,7 +13067,7 @@
       </p:sp>
       <p:sp>
         <p:nvSpPr>
-          <p:cNvPr id="28" name="Shape 25"/>
+          <p:cNvPr id="27" name="Shape 23"/>
           <p:cNvSpPr/>
           <p:nvPr/>
         </p:nvSpPr>
@@ -13184,7 +13089,7 @@
       </p:sp>
       <p:sp>
         <p:nvSpPr>
-          <p:cNvPr id="29" name="Text 26"/>
+          <p:cNvPr id="28" name="Text 24"/>
           <p:cNvSpPr txBox="1"/>
           <p:nvPr/>
         </p:nvSpPr>

--- a/presentations/office-client/Продай_за_меня_ОФИСЫ_клиентская.pptx
+++ b/presentations/office-client/Продай_за_меня_ОФИСЫ_клиентская.pptx
@@ -5977,9 +5977,31 @@
           </a:prstGeom>
         </p:spPr>
       </p:pic>
+      <p:sp>
+        <p:nvSpPr>
+          <p:cNvPr id="14" name="Shape 8"/>
+          <p:cNvSpPr/>
+          <p:nvPr/>
+        </p:nvSpPr>
+        <p:spPr>
+          <a:xfrm>
+            <a:off x="6932524" y="3145536"/>
+            <a:ext cx="1682496" cy="1682496"/>
+          </a:xfrm>
+          <a:prstGeom prst="roundRect">
+            <a:avLst>
+              <a:gd name="adj" fmla="val 2717"/>
+            </a:avLst>
+          </a:prstGeom>
+          <a:solidFill>
+            <a:srgbClr val="F7F1E7"/>
+          </a:solidFill>
+          <a:ln/>
+        </p:spPr>
+      </p:sp>
       <p:pic>
         <p:nvPicPr>
-          <p:cNvPr id="14" name="Image 4" descr="/home/user/mysteryslavic-2026-07-19_16-47-00/presentations/office-client/assets/qr-telegram.png">    </p:cNvPr>
+          <p:cNvPr id="15" name="Image 4" descr="/home/user/mysteryslavic-2026-07-19_16-47-00/presentations/office-client/assets/qr-telegram.png">    </p:cNvPr>
           <p:cNvPicPr>
             <a:picLocks noChangeAspect="1"/>
           </p:cNvPicPr>
@@ -6003,7 +6025,7 @@
       </p:pic>
       <p:sp>
         <p:nvSpPr>
-          <p:cNvPr id="15" name="Text 8"/>
+          <p:cNvPr id="16" name="Text 9"/>
           <p:cNvSpPr txBox="1"/>
           <p:nvPr/>
         </p:nvSpPr>
@@ -6042,7 +6064,7 @@
       </p:sp>
       <p:sp>
         <p:nvSpPr>
-          <p:cNvPr id="16" name="Shape 9"/>
+          <p:cNvPr id="17" name="Shape 10"/>
           <p:cNvSpPr/>
           <p:nvPr/>
         </p:nvSpPr>
@@ -6069,7 +6091,7 @@
       </p:sp>
       <p:pic>
         <p:nvPicPr>
-          <p:cNvPr id="17" name="Image 5" descr="/home/user/mysteryslavic-2026-07-19_16-47-00/presentations/office-client/assets/ic-messagecircle.png">    </p:cNvPr>
+          <p:cNvPr id="18" name="Image 5" descr="/home/user/mysteryslavic-2026-07-19_16-47-00/presentations/office-client/assets/ic-messagecircle.png">    </p:cNvPr>
           <p:cNvPicPr>
             <a:picLocks noChangeAspect="1"/>
           </p:cNvPicPr>
@@ -6091,9 +6113,31 @@
           </a:prstGeom>
         </p:spPr>
       </p:pic>
+      <p:sp>
+        <p:nvSpPr>
+          <p:cNvPr id="19" name="Shape 11"/>
+          <p:cNvSpPr/>
+          <p:nvPr/>
+        </p:nvSpPr>
+        <p:spPr>
+          <a:xfrm>
+            <a:off x="9437980" y="3145536"/>
+            <a:ext cx="1682496" cy="1682496"/>
+          </a:xfrm>
+          <a:prstGeom prst="roundRect">
+            <a:avLst>
+              <a:gd name="adj" fmla="val 2717"/>
+            </a:avLst>
+          </a:prstGeom>
+          <a:solidFill>
+            <a:srgbClr val="F7F1E7"/>
+          </a:solidFill>
+          <a:ln/>
+        </p:spPr>
+      </p:sp>
       <p:pic>
         <p:nvPicPr>
-          <p:cNvPr id="18" name="Image 6" descr="/home/user/mysteryslavic-2026-07-19_16-47-00/presentations/office-client/assets/qr-whatsapp.png">    </p:cNvPr>
+          <p:cNvPr id="20" name="Image 6" descr="/home/user/mysteryslavic-2026-07-19_16-47-00/presentations/office-client/assets/qr-max.png">    </p:cNvPr>
           <p:cNvPicPr>
             <a:picLocks noChangeAspect="1"/>
           </p:cNvPicPr>
@@ -6117,7 +6161,7 @@
       </p:pic>
       <p:sp>
         <p:nvSpPr>
-          <p:cNvPr id="19" name="Text 10"/>
+          <p:cNvPr id="21" name="Text 12"/>
           <p:cNvSpPr txBox="1"/>
           <p:nvPr/>
         </p:nvSpPr>
@@ -6148,7 +6192,7 @@
                 <a:ea typeface="Inter" pitchFamily="34" charset="-122"/>
                 <a:cs typeface="Inter" pitchFamily="34" charset="-120"/>
               </a:rPr>
-              <a:t>WHATSAPP</a:t>
+              <a:t>MAX</a:t>
             </a:r>
             <a:endParaRPr lang="en-US" sz="1250" dirty="0"/>
           </a:p>
@@ -6156,7 +6200,7 @@
       </p:sp>
       <p:sp>
         <p:nvSpPr>
-          <p:cNvPr id="20" name="Shape 11"/>
+          <p:cNvPr id="22" name="Shape 13"/>
           <p:cNvSpPr/>
           <p:nvPr/>
         </p:nvSpPr>
@@ -6180,7 +6224,7 @@
       </p:sp>
       <p:sp>
         <p:nvSpPr>
-          <p:cNvPr id="21" name="Text 12"/>
+          <p:cNvPr id="23" name="Text 14"/>
           <p:cNvSpPr txBox="1"/>
           <p:nvPr/>
         </p:nvSpPr>

--- a/presentations/office-client/Продай_за_меня_ОФИСЫ_клиентская.pptx
+++ b/presentations/office-client/Продай_за_меня_ОФИСЫ_клиентская.pptx
@@ -5,7 +5,7 @@
     <p:sldMasterId id="2147483648" r:id="rId1"/>
   </p:sldMasterIdLst>
   <p:notesMasterIdLst>
-    <p:notesMasterId r:id="rId14"/>
+    <p:notesMasterId r:id="rId12"/>
   </p:notesMasterIdLst>
   <p:sldIdLst>
     <p:sldId id="256" r:id="rId2"/>
@@ -15,11 +15,9 @@
     <p:sldId id="260" r:id="rId6"/>
     <p:sldId id="261" r:id="rId7"/>
     <p:sldId id="264" r:id="rId8"/>
-    <p:sldId id="265" r:id="rId9"/>
-    <p:sldId id="266" r:id="rId10"/>
-    <p:sldId id="267" r:id="rId11"/>
-    <p:sldId id="268" r:id="rId12"/>
-    <p:sldId id="269" r:id="rId13"/>
+    <p:sldId id="266" r:id="rId9"/>
+    <p:sldId id="269" r:id="rId10"/>
+    <p:sldId id="268" r:id="rId11"/>
   </p:sldIdLst>
   <p:sldSz cx="12192000" cy="6858000"/>
   <p:notesSz cx="6858000" cy="12192000"/>
@@ -398,174 +396,6 @@
             <a:fld id="{F7021451-1387-4CA6-816F-3879F97B5CBC}" type="slidenum">
               <a:rPr lang="en-US"/>
               <a:t>10</a:t>
-            </a:fld>
-            <a:endParaRPr lang="en-US"/>
-          </a:p>
-        </p:txBody>
-      </p:sp>
-    </p:spTree>
-    <p:extLst>
-      <p:ext uri="{BB962C8B-B14F-4D97-AF65-F5344CB8AC3E}">
-        <p14:creationId xmlns:p14="http://schemas.microsoft.com/office/powerpoint/2010/main" val="1024086991"/>
-      </p:ext>
-    </p:extLst>
-  </p:cSld>
-  <p:clrMapOvr>
-    <a:masterClrMapping/>
-  </p:clrMapOvr>
-</p:notes>
-</file>
-
-<file path=ppt/notesSlides/notesSlide11.xml><?xml version="1.0" encoding="utf-8"?>
-<p:notes xmlns:a="http://schemas.openxmlformats.org/drawingml/2006/main" xmlns:r="http://schemas.openxmlformats.org/officeDocument/2006/relationships" xmlns:p="http://schemas.openxmlformats.org/presentationml/2006/main">
-  <p:cSld>
-    <p:spTree>
-      <p:nvGrpSpPr>
-        <p:cNvPr id="1" name=""/>
-        <p:cNvGrpSpPr/>
-        <p:nvPr/>
-      </p:nvGrpSpPr>
-      <p:grpSpPr>
-        <a:xfrm>
-          <a:off x="0" y="0"/>
-          <a:ext cx="0" cy="0"/>
-          <a:chOff x="0" y="0"/>
-          <a:chExt cx="0" cy="0"/>
-        </a:xfrm>
-      </p:grpSpPr>
-      <p:sp>
-        <p:nvSpPr>
-          <p:cNvPr id="2" name="Slide Image Placeholder 1"/>
-          <p:cNvSpPr>
-            <a:spLocks noGrp="1" noRot="1" noChangeAspect="1"/>
-          </p:cNvSpPr>
-          <p:nvPr>
-            <p:ph type="sldImg"/>
-          </p:nvPr>
-        </p:nvSpPr>
-        <p:spPr/>
-      </p:sp>
-      <p:sp>
-        <p:nvSpPr>
-          <p:cNvPr id="3" name="Notes Placeholder 2"/>
-          <p:cNvSpPr>
-            <a:spLocks noGrp="1"/>
-          </p:cNvSpPr>
-          <p:nvPr>
-            <p:ph type="body" idx="1"/>
-          </p:nvPr>
-        </p:nvSpPr>
-        <p:spPr/>
-        <p:txBody>
-          <a:bodyPr/>
-          <a:lstStyle/>
-          <a:p>
-            <a:endParaRPr lang="en-US" dirty="0"/>
-          </a:p>
-        </p:txBody>
-      </p:sp>
-      <p:sp>
-        <p:nvSpPr>
-          <p:cNvPr id="4" name="Slide Number Placeholder 3"/>
-          <p:cNvSpPr>
-            <a:spLocks noGrp="1"/>
-          </p:cNvSpPr>
-          <p:nvPr>
-            <p:ph type="sldNum" sz="quarter" idx="10"/>
-          </p:nvPr>
-        </p:nvSpPr>
-        <p:spPr/>
-        <p:txBody>
-          <a:bodyPr/>
-          <a:lstStyle/>
-          <a:p>
-            <a:fld id="{F7021451-1387-4CA6-816F-3879F97B5CBC}" type="slidenum">
-              <a:rPr lang="en-US"/>
-              <a:t>11</a:t>
-            </a:fld>
-            <a:endParaRPr lang="en-US"/>
-          </a:p>
-        </p:txBody>
-      </p:sp>
-    </p:spTree>
-    <p:extLst>
-      <p:ext uri="{BB962C8B-B14F-4D97-AF65-F5344CB8AC3E}">
-        <p14:creationId xmlns:p14="http://schemas.microsoft.com/office/powerpoint/2010/main" val="1024086991"/>
-      </p:ext>
-    </p:extLst>
-  </p:cSld>
-  <p:clrMapOvr>
-    <a:masterClrMapping/>
-  </p:clrMapOvr>
-</p:notes>
-</file>
-
-<file path=ppt/notesSlides/notesSlide12.xml><?xml version="1.0" encoding="utf-8"?>
-<p:notes xmlns:a="http://schemas.openxmlformats.org/drawingml/2006/main" xmlns:r="http://schemas.openxmlformats.org/officeDocument/2006/relationships" xmlns:p="http://schemas.openxmlformats.org/presentationml/2006/main">
-  <p:cSld>
-    <p:spTree>
-      <p:nvGrpSpPr>
-        <p:cNvPr id="1" name=""/>
-        <p:cNvGrpSpPr/>
-        <p:nvPr/>
-      </p:nvGrpSpPr>
-      <p:grpSpPr>
-        <a:xfrm>
-          <a:off x="0" y="0"/>
-          <a:ext cx="0" cy="0"/>
-          <a:chOff x="0" y="0"/>
-          <a:chExt cx="0" cy="0"/>
-        </a:xfrm>
-      </p:grpSpPr>
-      <p:sp>
-        <p:nvSpPr>
-          <p:cNvPr id="2" name="Slide Image Placeholder 1"/>
-          <p:cNvSpPr>
-            <a:spLocks noGrp="1" noRot="1" noChangeAspect="1"/>
-          </p:cNvSpPr>
-          <p:nvPr>
-            <p:ph type="sldImg"/>
-          </p:nvPr>
-        </p:nvSpPr>
-        <p:spPr/>
-      </p:sp>
-      <p:sp>
-        <p:nvSpPr>
-          <p:cNvPr id="3" name="Notes Placeholder 2"/>
-          <p:cNvSpPr>
-            <a:spLocks noGrp="1"/>
-          </p:cNvSpPr>
-          <p:nvPr>
-            <p:ph type="body" idx="1"/>
-          </p:nvPr>
-        </p:nvSpPr>
-        <p:spPr/>
-        <p:txBody>
-          <a:bodyPr/>
-          <a:lstStyle/>
-          <a:p>
-            <a:endParaRPr lang="en-US" dirty="0"/>
-          </a:p>
-        </p:txBody>
-      </p:sp>
-      <p:sp>
-        <p:nvSpPr>
-          <p:cNvPr id="4" name="Slide Number Placeholder 3"/>
-          <p:cNvSpPr>
-            <a:spLocks noGrp="1"/>
-          </p:cNvSpPr>
-          <p:nvPr>
-            <p:ph type="sldNum" sz="quarter" idx="10"/>
-          </p:nvPr>
-        </p:nvSpPr>
-        <p:spPr/>
-        <p:txBody>
-          <a:bodyPr/>
-          <a:lstStyle/>
-          <a:p>
-            <a:fld id="{F7021451-1387-4CA6-816F-3879F97B5CBC}" type="slidenum">
-              <a:rPr lang="en-US"/>
-              <a:t>12</a:t>
             </a:fld>
             <a:endParaRPr lang="en-US"/>
           </a:p>
@@ -1904,606 +1734,6 @@
 
 <file path=ppt/slides/slide10.xml><?xml version="1.0" encoding="utf-8"?>
 <p:sld xmlns:a="http://schemas.openxmlformats.org/drawingml/2006/main" xmlns:r="http://schemas.openxmlformats.org/officeDocument/2006/relationships" xmlns:p="http://schemas.openxmlformats.org/presentationml/2006/main">
-  <p:cSld name="Slide 12">
-    <p:bg>
-      <p:bgPr>
-        <a:blipFill dpi="0" rotWithShape="1">
-          <a:blip r:embed="rId3">
-            <a:lum/>
-          </a:blip>
-          <a:srcRect/>
-          <a:stretch>
-            <a:fillRect/>
-          </a:stretch>
-        </a:blipFill>
-        <a:effectLst/>
-      </p:bgPr>
-    </p:bg>
-    <p:spTree>
-      <p:nvGrpSpPr>
-        <p:cNvPr id="1" name=""/>
-        <p:cNvGrpSpPr/>
-        <p:nvPr/>
-      </p:nvGrpSpPr>
-      <p:grpSpPr>
-        <a:xfrm>
-          <a:off x="0" y="0"/>
-          <a:ext cx="0" cy="0"/>
-          <a:chOff x="0" y="0"/>
-          <a:chExt cx="0" cy="0"/>
-        </a:xfrm>
-      </p:grpSpPr>
-      <p:sp>
-        <p:nvSpPr>
-          <p:cNvPr id="2" name="Shape 0"/>
-          <p:cNvSpPr/>
-          <p:nvPr/>
-        </p:nvSpPr>
-        <p:spPr>
-          <a:xfrm>
-            <a:off x="0" y="0"/>
-            <a:ext cx="12191695" cy="6858000"/>
-          </a:xfrm>
-          <a:prstGeom prst="rect">
-            <a:avLst/>
-          </a:prstGeom>
-          <a:solidFill>
-            <a:srgbClr val="0C1D28">
-              <a:alpha val="88000"/>
-            </a:srgbClr>
-          </a:solidFill>
-          <a:ln/>
-        </p:spPr>
-        <p:txBody>
-          <a:bodyPr/>
-          <a:p/>
-        </p:txBody>
-      </p:sp>
-      <p:sp>
-        <p:nvSpPr>
-          <p:cNvPr id="3" name="Text 1"/>
-          <p:cNvSpPr txBox="1"/>
-          <p:nvPr/>
-        </p:nvSpPr>
-        <p:spPr>
-          <a:xfrm>
-            <a:off x="777240" y="603504"/>
-            <a:ext cx="10637215" cy="219456"/>
-          </a:xfrm>
-          <a:prstGeom prst="rect">
-            <a:avLst/>
-          </a:prstGeom>
-          <a:noFill/>
-          <a:ln/>
-        </p:spPr>
-        <p:txBody>
-          <a:bodyPr wrap="square" lIns="0" tIns="0" rIns="0" bIns="0" rtlCol="0" anchor="t"/>
-          <a:lstStyle/>
-          <a:p>
-            <a:pPr marL="0" indent="0">
-              <a:buNone/>
-            </a:pPr>
-            <a:r>
-              <a:rPr lang="en-US" sz="1050" b="1" kern="0" spc="240" dirty="0">
-                <a:solidFill>
-                  <a:srgbClr val="C89B45"/>
-                </a:solidFill>
-                <a:latin typeface="Inter" pitchFamily="34" charset="0"/>
-                <a:ea typeface="Inter" pitchFamily="34" charset="-122"/>
-                <a:cs typeface="Inter" pitchFamily="34" charset="-120"/>
-              </a:rPr>
-              <a:t>ПЕРВЫЙ ШАГ</a:t>
-            </a:r>
-            <a:endParaRPr lang="en-US" sz="1050" dirty="0"/>
-          </a:p>
-        </p:txBody>
-      </p:sp>
-      <p:sp>
-        <p:nvSpPr>
-          <p:cNvPr id="4" name="Text 2"/>
-          <p:cNvSpPr txBox="1"/>
-          <p:nvPr/>
-        </p:nvSpPr>
-        <p:spPr>
-          <a:xfrm>
-            <a:off x="777240" y="950976"/>
-            <a:ext cx="7315200" cy="694944"/>
-          </a:xfrm>
-          <a:prstGeom prst="rect">
-            <a:avLst/>
-          </a:prstGeom>
-          <a:noFill/>
-          <a:ln/>
-        </p:spPr>
-        <p:txBody>
-          <a:bodyPr wrap="square" lIns="0" tIns="0" rIns="0" bIns="0" rtlCol="0" anchor="t"/>
-          <a:lstStyle/>
-          <a:p>
-            <a:pPr marL="0" indent="0">
-              <a:buNone/>
-            </a:pPr>
-            <a:r>
-              <a:rPr lang="en-US" sz="4000" b="1" dirty="0">
-                <a:solidFill>
-                  <a:srgbClr val="F7F1E7"/>
-                </a:solidFill>
-                <a:latin typeface="Inter" pitchFamily="34" charset="0"/>
-                <a:ea typeface="Inter" pitchFamily="34" charset="-122"/>
-                <a:cs typeface="Inter" pitchFamily="34" charset="-120"/>
-              </a:rPr>
-              <a:t>РАСЧЁТ — БЕСПЛАТНО</a:t>
-            </a:r>
-            <a:endParaRPr lang="en-US" sz="4000" dirty="0"/>
-          </a:p>
-        </p:txBody>
-      </p:sp>
-      <p:sp>
-        <p:nvSpPr>
-          <p:cNvPr id="5" name="Shape 3"/>
-          <p:cNvSpPr/>
-          <p:nvPr/>
-        </p:nvSpPr>
-        <p:spPr>
-          <a:xfrm>
-            <a:off x="777240" y="2779776"/>
-            <a:ext cx="694944" cy="694944"/>
-          </a:xfrm>
-          <a:prstGeom prst="ellipse">
-            <a:avLst/>
-          </a:prstGeom>
-          <a:solidFill>
-            <a:srgbClr val="1A2F3B"/>
-          </a:solidFill>
-          <a:ln w="17780">
-            <a:solidFill>
-              <a:srgbClr val="C89B45"/>
-            </a:solidFill>
-            <a:prstDash val="solid"/>
-          </a:ln>
-        </p:spPr>
-        <p:txBody>
-          <a:bodyPr/>
-          <a:p/>
-        </p:txBody>
-      </p:sp>
-      <p:sp>
-        <p:nvSpPr>
-          <p:cNvPr id="6" name="Text 4"/>
-          <p:cNvSpPr txBox="1"/>
-          <p:nvPr/>
-        </p:nvSpPr>
-        <p:spPr>
-          <a:xfrm>
-            <a:off x="777240" y="2962656"/>
-            <a:ext cx="694944" cy="329184"/>
-          </a:xfrm>
-          <a:prstGeom prst="rect">
-            <a:avLst/>
-          </a:prstGeom>
-          <a:noFill/>
-          <a:ln/>
-        </p:spPr>
-        <p:txBody>
-          <a:bodyPr wrap="square" lIns="0" tIns="0" rIns="0" bIns="0" rtlCol="0" anchor="t"/>
-          <a:lstStyle/>
-          <a:p>
-            <a:pPr marL="0" indent="0" algn="ctr">
-              <a:buNone/>
-            </a:pPr>
-            <a:r>
-              <a:rPr lang="en-US" sz="1600" b="1" dirty="0">
-                <a:solidFill>
-                  <a:srgbClr val="D9BC7A"/>
-                </a:solidFill>
-                <a:latin typeface="Inter" pitchFamily="34" charset="0"/>
-                <a:ea typeface="Inter" pitchFamily="34" charset="-122"/>
-                <a:cs typeface="Inter" pitchFamily="34" charset="-120"/>
-              </a:rPr>
-              <a:t>01</a:t>
-            </a:r>
-            <a:endParaRPr lang="en-US" sz="1600" dirty="0"/>
-          </a:p>
-        </p:txBody>
-      </p:sp>
-      <p:sp>
-        <p:nvSpPr>
-          <p:cNvPr id="7" name="Text 5"/>
-          <p:cNvSpPr txBox="1"/>
-          <p:nvPr/>
-        </p:nvSpPr>
-        <p:spPr>
-          <a:xfrm>
-            <a:off x="1801368" y="2798064"/>
-            <a:ext cx="4937760" cy="365760"/>
-          </a:xfrm>
-          <a:prstGeom prst="rect">
-            <a:avLst/>
-          </a:prstGeom>
-          <a:noFill/>
-          <a:ln/>
-        </p:spPr>
-        <p:txBody>
-          <a:bodyPr wrap="square" lIns="0" tIns="0" rIns="0" bIns="0" rtlCol="0" anchor="t"/>
-          <a:lstStyle/>
-          <a:p>
-            <a:pPr marL="0" indent="0">
-              <a:buNone/>
-            </a:pPr>
-            <a:r>
-              <a:rPr lang="en-US" sz="2100" b="1" kern="0" spc="120" dirty="0">
-                <a:solidFill>
-                  <a:srgbClr val="F7F1E7"/>
-                </a:solidFill>
-                <a:latin typeface="Inter" pitchFamily="34" charset="0"/>
-                <a:ea typeface="Inter" pitchFamily="34" charset="-122"/>
-                <a:cs typeface="Inter" pitchFamily="34" charset="-120"/>
-              </a:rPr>
-              <a:t>ОТПРАВЬТЕ</a:t>
-            </a:r>
-            <a:endParaRPr lang="en-US" sz="2100" dirty="0"/>
-          </a:p>
-        </p:txBody>
-      </p:sp>
-      <p:sp>
-        <p:nvSpPr>
-          <p:cNvPr id="8" name="Text 6"/>
-          <p:cNvSpPr txBox="1"/>
-          <p:nvPr/>
-        </p:nvSpPr>
-        <p:spPr>
-          <a:xfrm>
-            <a:off x="1801368" y="3255264"/>
-            <a:ext cx="5120640" cy="603504"/>
-          </a:xfrm>
-          <a:prstGeom prst="rect">
-            <a:avLst/>
-          </a:prstGeom>
-          <a:noFill/>
-          <a:ln/>
-        </p:spPr>
-        <p:txBody>
-          <a:bodyPr wrap="square" lIns="0" tIns="0" rIns="0" bIns="0" rtlCol="0" anchor="t"/>
-          <a:lstStyle/>
-          <a:p>
-            <a:pPr marL="0" indent="0">
-              <a:lnSpc>
-                <a:spcPts val="2100"/>
-              </a:lnSpc>
-              <a:buNone/>
-            </a:pPr>
-            <a:r>
-              <a:rPr lang="en-US" sz="1500" dirty="0">
-                <a:solidFill>
-                  <a:srgbClr val="9CAAB1"/>
-                </a:solidFill>
-                <a:latin typeface="Inter" pitchFamily="34" charset="0"/>
-                <a:ea typeface="Inter" pitchFamily="34" charset="-122"/>
-                <a:cs typeface="Inter" pitchFamily="34" charset="-120"/>
-              </a:rPr>
-              <a:t>фото или просто названия того,</a:t>
-            </a:r>
-            <a:endParaRPr lang="en-US" sz="1500" dirty="0"/>
-          </a:p>
-          <a:p>
-            <a:pPr marL="0" indent="0">
-              <a:lnSpc>
-                <a:spcPts val="2100"/>
-              </a:lnSpc>
-              <a:buNone/>
-            </a:pPr>
-            <a:r>
-              <a:rPr lang="en-US" sz="1500" dirty="0">
-                <a:solidFill>
-                  <a:srgbClr val="9CAAB1"/>
-                </a:solidFill>
-                <a:latin typeface="Inter" pitchFamily="34" charset="0"/>
-                <a:ea typeface="Inter" pitchFamily="34" charset="-122"/>
-                <a:cs typeface="Inter" pitchFamily="34" charset="-120"/>
-              </a:rPr>
-              <a:t>что нужно продать</a:t>
-            </a:r>
-            <a:endParaRPr lang="en-US" sz="1500" dirty="0"/>
-          </a:p>
-        </p:txBody>
-      </p:sp>
-      <p:sp>
-        <p:nvSpPr>
-          <p:cNvPr id="9" name="Shape 7"/>
-          <p:cNvSpPr/>
-          <p:nvPr/>
-        </p:nvSpPr>
-        <p:spPr>
-          <a:xfrm>
-            <a:off x="777240" y="4590288"/>
-            <a:ext cx="694944" cy="694944"/>
-          </a:xfrm>
-          <a:prstGeom prst="ellipse">
-            <a:avLst/>
-          </a:prstGeom>
-          <a:solidFill>
-            <a:srgbClr val="1A2F3B"/>
-          </a:solidFill>
-          <a:ln w="17780">
-            <a:solidFill>
-              <a:srgbClr val="C89B45"/>
-            </a:solidFill>
-            <a:prstDash val="solid"/>
-          </a:ln>
-        </p:spPr>
-        <p:txBody>
-          <a:bodyPr/>
-          <a:p/>
-        </p:txBody>
-      </p:sp>
-      <p:sp>
-        <p:nvSpPr>
-          <p:cNvPr id="10" name="Text 8"/>
-          <p:cNvSpPr txBox="1"/>
-          <p:nvPr/>
-        </p:nvSpPr>
-        <p:spPr>
-          <a:xfrm>
-            <a:off x="777240" y="4773168"/>
-            <a:ext cx="694944" cy="329184"/>
-          </a:xfrm>
-          <a:prstGeom prst="rect">
-            <a:avLst/>
-          </a:prstGeom>
-          <a:noFill/>
-          <a:ln/>
-        </p:spPr>
-        <p:txBody>
-          <a:bodyPr wrap="square" lIns="0" tIns="0" rIns="0" bIns="0" rtlCol="0" anchor="t"/>
-          <a:lstStyle/>
-          <a:p>
-            <a:pPr marL="0" indent="0" algn="ctr">
-              <a:buNone/>
-            </a:pPr>
-            <a:r>
-              <a:rPr lang="en-US" sz="1600" b="1" dirty="0">
-                <a:solidFill>
-                  <a:srgbClr val="D9BC7A"/>
-                </a:solidFill>
-                <a:latin typeface="Inter" pitchFamily="34" charset="0"/>
-                <a:ea typeface="Inter" pitchFamily="34" charset="-122"/>
-                <a:cs typeface="Inter" pitchFamily="34" charset="-120"/>
-              </a:rPr>
-              <a:t>02</a:t>
-            </a:r>
-            <a:endParaRPr lang="en-US" sz="1600" dirty="0"/>
-          </a:p>
-        </p:txBody>
-      </p:sp>
-      <p:sp>
-        <p:nvSpPr>
-          <p:cNvPr id="11" name="Text 9"/>
-          <p:cNvSpPr txBox="1"/>
-          <p:nvPr/>
-        </p:nvSpPr>
-        <p:spPr>
-          <a:xfrm>
-            <a:off x="1801368" y="4608576"/>
-            <a:ext cx="4937760" cy="365760"/>
-          </a:xfrm>
-          <a:prstGeom prst="rect">
-            <a:avLst/>
-          </a:prstGeom>
-          <a:noFill/>
-          <a:ln/>
-        </p:spPr>
-        <p:txBody>
-          <a:bodyPr wrap="square" lIns="0" tIns="0" rIns="0" bIns="0" rtlCol="0" anchor="t"/>
-          <a:lstStyle/>
-          <a:p>
-            <a:pPr marL="0" indent="0">
-              <a:buNone/>
-            </a:pPr>
-            <a:r>
-              <a:rPr lang="en-US" sz="2100" b="1" kern="0" spc="120" dirty="0">
-                <a:solidFill>
-                  <a:srgbClr val="F7F1E7"/>
-                </a:solidFill>
-                <a:latin typeface="Inter" pitchFamily="34" charset="0"/>
-                <a:ea typeface="Inter" pitchFamily="34" charset="-122"/>
-                <a:cs typeface="Inter" pitchFamily="34" charset="-120"/>
-              </a:rPr>
-              <a:t>ПОЛУЧИТЕ</a:t>
-            </a:r>
-            <a:endParaRPr lang="en-US" sz="2100" dirty="0"/>
-          </a:p>
-        </p:txBody>
-      </p:sp>
-      <p:sp>
-        <p:nvSpPr>
-          <p:cNvPr id="12" name="Text 10"/>
-          <p:cNvSpPr txBox="1"/>
-          <p:nvPr/>
-        </p:nvSpPr>
-        <p:spPr>
-          <a:xfrm>
-            <a:off x="1801368" y="5065776"/>
-            <a:ext cx="5120640" cy="603504"/>
-          </a:xfrm>
-          <a:prstGeom prst="rect">
-            <a:avLst/>
-          </a:prstGeom>
-          <a:noFill/>
-          <a:ln/>
-        </p:spPr>
-        <p:txBody>
-          <a:bodyPr wrap="square" lIns="0" tIns="0" rIns="0" bIns="0" rtlCol="0" anchor="t"/>
-          <a:lstStyle/>
-          <a:p>
-            <a:pPr marL="0" indent="0">
-              <a:lnSpc>
-                <a:spcPts val="2100"/>
-              </a:lnSpc>
-              <a:buNone/>
-            </a:pPr>
-            <a:r>
-              <a:rPr lang="en-US" sz="1500" dirty="0">
-                <a:solidFill>
-                  <a:srgbClr val="9CAAB1"/>
-                </a:solidFill>
-                <a:latin typeface="Inter" pitchFamily="34" charset="0"/>
-                <a:ea typeface="Inter" pitchFamily="34" charset="-122"/>
-                <a:cs typeface="Inter" pitchFamily="34" charset="-120"/>
-              </a:rPr>
-              <a:t>расчёт и маршрут имущества</a:t>
-            </a:r>
-            <a:endParaRPr lang="en-US" sz="1500" dirty="0"/>
-          </a:p>
-        </p:txBody>
-      </p:sp>
-      <p:sp>
-        <p:nvSpPr>
-          <p:cNvPr id="13" name="Shape 11"/>
-          <p:cNvSpPr/>
-          <p:nvPr/>
-        </p:nvSpPr>
-        <p:spPr>
-          <a:xfrm>
-            <a:off x="7379208" y="2724912"/>
-            <a:ext cx="4032504" cy="2999232"/>
-          </a:xfrm>
-          <a:prstGeom prst="roundRect">
-            <a:avLst>
-              <a:gd name="adj" fmla="val 1829"/>
-            </a:avLst>
-          </a:prstGeom>
-          <a:solidFill>
-            <a:srgbClr val="1A2F3B">
-              <a:alpha val="80000"/>
-            </a:srgbClr>
-          </a:solidFill>
-          <a:ln w="19050">
-            <a:solidFill>
-              <a:srgbClr val="C89B45"/>
-            </a:solidFill>
-            <a:prstDash val="solid"/>
-          </a:ln>
-        </p:spPr>
-        <p:txBody>
-          <a:bodyPr/>
-          <a:p/>
-        </p:txBody>
-      </p:sp>
-      <p:sp>
-        <p:nvSpPr>
-          <p:cNvPr id="15" name="Text 12"/>
-          <p:cNvSpPr txBox="1"/>
-          <p:nvPr/>
-        </p:nvSpPr>
-        <p:spPr>
-          <a:xfrm>
-            <a:off x="7653528" y="4169664"/>
-            <a:ext cx="3483864" cy="1188720"/>
-          </a:xfrm>
-          <a:prstGeom prst="rect">
-            <a:avLst/>
-          </a:prstGeom>
-          <a:noFill/>
-          <a:ln/>
-        </p:spPr>
-        <p:txBody>
-          <a:bodyPr wrap="square" lIns="0" tIns="0" rIns="0" bIns="0" rtlCol="0" anchor="t"/>
-          <a:lstStyle/>
-          <a:p>
-            <a:pPr marL="0" indent="0" algn="ctr">
-              <a:lnSpc>
-                <a:spcPts val="2600"/>
-              </a:lnSpc>
-              <a:buNone/>
-            </a:pPr>
-            <a:r>
-              <a:rPr lang="en-US" sz="1900" b="1" dirty="0">
-                <a:solidFill>
-                  <a:srgbClr val="F7F1E7"/>
-                </a:solidFill>
-                <a:latin typeface="Inter" pitchFamily="34" charset="0"/>
-                <a:ea typeface="Inter" pitchFamily="34" charset="-122"/>
-                <a:cs typeface="Inter" pitchFamily="34" charset="-120"/>
-              </a:rPr>
-              <a:t>ОЦЕНКА</a:t>
-            </a:r>
-            <a:endParaRPr lang="en-US" sz="1900" dirty="0"/>
-          </a:p>
-          <a:p>
-            <a:pPr marL="0" indent="0" algn="ctr">
-              <a:lnSpc>
-                <a:spcPts val="2600"/>
-              </a:lnSpc>
-              <a:buNone/>
-            </a:pPr>
-            <a:r>
-              <a:rPr lang="en-US" sz="1900" b="1" dirty="0">
-                <a:solidFill>
-                  <a:srgbClr val="F7F1E7"/>
-                </a:solidFill>
-                <a:latin typeface="Inter" pitchFamily="34" charset="0"/>
-                <a:ea typeface="Inter" pitchFamily="34" charset="-122"/>
-                <a:cs typeface="Inter" pitchFamily="34" charset="-120"/>
-              </a:rPr>
-              <a:t>ПО ФОТО</a:t>
-            </a:r>
-            <a:endParaRPr lang="en-US" sz="1900" dirty="0"/>
-          </a:p>
-          <a:p>
-            <a:pPr marL="0" indent="0" algn="ctr">
-              <a:lnSpc>
-                <a:spcPts val="2600"/>
-              </a:lnSpc>
-              <a:buNone/>
-            </a:pPr>
-            <a:r>
-              <a:rPr lang="en-US" sz="1900" b="1" dirty="0">
-                <a:solidFill>
-                  <a:srgbClr val="F7F1E7"/>
-                </a:solidFill>
-                <a:latin typeface="Inter" pitchFamily="34" charset="0"/>
-                <a:ea typeface="Inter" pitchFamily="34" charset="-122"/>
-                <a:cs typeface="Inter" pitchFamily="34" charset="-120"/>
-              </a:rPr>
-              <a:t>ИЛИ СПИСКУ</a:t>
-            </a:r>
-            <a:endParaRPr lang="en-US" sz="1900" dirty="0"/>
-          </a:p>
-        </p:txBody>
-      </p:sp>
-      <p:pic>
-        <p:nvPicPr>
-          <p:cNvPr id="17" name="Picture 16" descr="ic-camera2.png"/>
-          <p:cNvPicPr>
-            <a:picLocks noChangeAspect="1"/>
-          </p:cNvPicPr>
-          <p:nvPr/>
-        </p:nvPicPr>
-        <p:blipFill>
-          <a:blip r:embed="rId5"/>
-          <a:stretch>
-            <a:fillRect/>
-          </a:stretch>
-        </p:blipFill>
-        <p:spPr>
-          <a:xfrm>
-            <a:off x="9084564" y="3182112"/>
-            <a:ext cx="621792" cy="621792"/>
-          </a:xfrm>
-          <a:prstGeom prst="rect">
-            <a:avLst/>
-          </a:prstGeom>
-        </p:spPr>
-      </p:pic>
-    </p:spTree>
-  </p:cSld>
-  <p:clrMapOvr>
-    <a:masterClrMapping/>
-  </p:clrMapOvr>
-</p:sld>
-</file>
-
-<file path=ppt/slides/slide11.xml><?xml version="1.0" encoding="utf-8"?>
-<p:sld xmlns:a="http://schemas.openxmlformats.org/drawingml/2006/main" xmlns:r="http://schemas.openxmlformats.org/officeDocument/2006/relationships" xmlns:p="http://schemas.openxmlformats.org/presentationml/2006/main">
   <p:cSld name="Slide 13">
     <p:bg>
       <p:bgPr>
@@ -2636,7 +1866,7 @@
               <a:buNone/>
             </a:pPr>
             <a:r>
-              <a:rPr lang="en-US" sz="1200" b="1" kern="0" spc="140" dirty="0">
+              <a:rPr lang="en-US" sz="2000" b="1" kern="0" spc="140" dirty="0">
                 <a:solidFill>
                   <a:srgbClr val="C89B45"/>
                 </a:solidFill>
@@ -2646,7 +1876,7 @@
               </a:rPr>
               <a:t>01</a:t>
             </a:r>
-            <a:endParaRPr lang="en-US" sz="1200" dirty="0"/>
+            <a:endParaRPr lang="en-US" sz="2000" dirty="0"/>
           </a:p>
         </p:txBody>
       </p:sp>
@@ -2672,13 +1902,10 @@
           <a:lstStyle/>
           <a:p>
             <a:pPr marL="0" indent="0">
-              <a:lnSpc>
-                <a:spcPts val="2100"/>
-              </a:lnSpc>
-              <a:buNone/>
-            </a:pPr>
-            <a:r>
-              <a:rPr lang="en-US" sz="1550" b="1" dirty="0">
+              <a:buNone/>
+            </a:pPr>
+            <a:r>
+              <a:rPr lang="en-US" sz="2400" b="1" dirty="0">
                 <a:solidFill>
                   <a:srgbClr val="0C1D28"/>
                 </a:solidFill>
@@ -2688,7 +1915,7 @@
               </a:rPr>
               <a:t>Что с непроданным?</a:t>
             </a:r>
-            <a:endParaRPr lang="en-US" sz="1550" dirty="0"/>
+            <a:endParaRPr lang="en-US" sz="2400" dirty="0"/>
           </a:p>
         </p:txBody>
       </p:sp>
@@ -2714,13 +1941,10 @@
           <a:lstStyle/>
           <a:p>
             <a:pPr marL="0" indent="0">
-              <a:lnSpc>
-                <a:spcPts val="1800"/>
-              </a:lnSpc>
-              <a:buNone/>
-            </a:pPr>
-            <a:r>
-              <a:rPr lang="en-US" sz="1300" dirty="0">
+              <a:buNone/>
+            </a:pPr>
+            <a:r>
+              <a:rPr lang="en-US" sz="2000" dirty="0">
                 <a:solidFill>
                   <a:srgbClr val="6F6A62"/>
                 </a:solidFill>
@@ -2730,7 +1954,7 @@
               </a:rPr>
               <a:t>Финальный маршрут согласуем заранее: передача, вторсырьё или утилизация.</a:t>
             </a:r>
-            <a:endParaRPr lang="en-US" sz="1300" dirty="0"/>
+            <a:endParaRPr lang="en-US" sz="2000" dirty="0"/>
           </a:p>
         </p:txBody>
       </p:sp>
@@ -2742,7 +1966,7 @@
         </p:nvSpPr>
         <p:spPr>
           <a:xfrm>
-            <a:off x="777240" y="3639312"/>
+            <a:off x="777239" y="4026657"/>
             <a:ext cx="5021428" cy="10973"/>
           </a:xfrm>
           <a:prstGeom prst="rect">
@@ -2779,7 +2003,7 @@
               <a:buNone/>
             </a:pPr>
             <a:r>
-              <a:rPr lang="en-US" sz="1200" b="1" kern="0" spc="140" dirty="0">
+              <a:rPr lang="en-US" sz="2000" b="1" kern="0" spc="140" dirty="0">
                 <a:solidFill>
                   <a:srgbClr val="C89B45"/>
                 </a:solidFill>
@@ -2789,7 +2013,7 @@
               </a:rPr>
               <a:t>02</a:t>
             </a:r>
-            <a:endParaRPr lang="en-US" sz="1200" dirty="0"/>
+            <a:endParaRPr lang="en-US" sz="2000" dirty="0"/>
           </a:p>
         </p:txBody>
       </p:sp>
@@ -2815,13 +2039,10 @@
           <a:lstStyle/>
           <a:p>
             <a:pPr marL="0" indent="0">
-              <a:lnSpc>
-                <a:spcPts val="2100"/>
-              </a:lnSpc>
-              <a:buNone/>
-            </a:pPr>
-            <a:r>
-              <a:rPr lang="en-US" sz="1550" b="1" dirty="0">
+              <a:buNone/>
+            </a:pPr>
+            <a:r>
+              <a:rPr lang="en-US" sz="2400" b="1" dirty="0">
                 <a:solidFill>
                   <a:srgbClr val="0C1D28"/>
                 </a:solidFill>
@@ -2831,7 +2052,7 @@
               </a:rPr>
               <a:t>А данные на технике?</a:t>
             </a:r>
-            <a:endParaRPr lang="en-US" sz="1550" dirty="0"/>
+            <a:endParaRPr lang="en-US" sz="2400" dirty="0"/>
           </a:p>
         </p:txBody>
       </p:sp>
@@ -2857,13 +2078,10 @@
           <a:lstStyle/>
           <a:p>
             <a:pPr marL="0" indent="0">
-              <a:lnSpc>
-                <a:spcPts val="1800"/>
-              </a:lnSpc>
-              <a:buNone/>
-            </a:pPr>
-            <a:r>
-              <a:rPr lang="en-US" sz="1300" dirty="0">
+              <a:buNone/>
+            </a:pPr>
+            <a:r>
+              <a:rPr lang="en-US" sz="2000" dirty="0">
                 <a:solidFill>
                   <a:srgbClr val="6F6A62"/>
                 </a:solidFill>
@@ -2873,7 +2091,7 @@
               </a:rPr>
               <a:t>Учётки отвязываем, накопители стираем или изымаем до передачи.</a:t>
             </a:r>
-            <a:endParaRPr lang="en-US" sz="1300" dirty="0"/>
+            <a:endParaRPr lang="en-US" sz="2000" dirty="0"/>
           </a:p>
         </p:txBody>
       </p:sp>
@@ -2885,7 +2103,7 @@
         </p:nvSpPr>
         <p:spPr>
           <a:xfrm>
-            <a:off x="6393028" y="3639312"/>
+            <a:off x="6393027" y="4026657"/>
             <a:ext cx="5021428" cy="10973"/>
           </a:xfrm>
           <a:prstGeom prst="rect">
@@ -2905,7 +2123,7 @@
         </p:nvSpPr>
         <p:spPr>
           <a:xfrm>
-            <a:off x="777240" y="4078224"/>
+            <a:off x="777239" y="4645152"/>
             <a:ext cx="457200" cy="256032"/>
           </a:xfrm>
           <a:prstGeom prst="rect">
@@ -2922,7 +2140,7 @@
               <a:buNone/>
             </a:pPr>
             <a:r>
-              <a:rPr lang="en-US" sz="1200" b="1" kern="0" spc="140" dirty="0">
+              <a:rPr lang="en-US" sz="2000" b="1" kern="0" spc="140" dirty="0">
                 <a:solidFill>
                   <a:srgbClr val="C89B45"/>
                 </a:solidFill>
@@ -2932,7 +2150,7 @@
               </a:rPr>
               <a:t>03</a:t>
             </a:r>
-            <a:endParaRPr lang="en-US" sz="1200" dirty="0"/>
+            <a:endParaRPr lang="en-US" sz="2000" dirty="0"/>
           </a:p>
         </p:txBody>
       </p:sp>
@@ -2944,7 +2162,7 @@
         </p:nvSpPr>
         <p:spPr>
           <a:xfrm>
-            <a:off x="1307592" y="4041648"/>
+            <a:off x="1307591" y="4608576"/>
             <a:ext cx="4491076" cy="603504"/>
           </a:xfrm>
           <a:prstGeom prst="rect">
@@ -2958,13 +2176,10 @@
           <a:lstStyle/>
           <a:p>
             <a:pPr marL="0" indent="0">
-              <a:lnSpc>
-                <a:spcPts val="2100"/>
-              </a:lnSpc>
-              <a:buNone/>
-            </a:pPr>
-            <a:r>
-              <a:rPr lang="en-US" sz="1550" b="1" dirty="0">
+              <a:buNone/>
+            </a:pPr>
+            <a:r>
+              <a:rPr lang="en-US" sz="2400" b="1" dirty="0">
                 <a:solidFill>
                   <a:srgbClr val="0C1D28"/>
                 </a:solidFill>
@@ -2974,7 +2189,7 @@
               </a:rPr>
               <a:t>Имущество на балансе или в лизинге?</a:t>
             </a:r>
-            <a:endParaRPr lang="en-US" sz="1550" dirty="0"/>
+            <a:endParaRPr lang="en-US" sz="2400" dirty="0"/>
           </a:p>
         </p:txBody>
       </p:sp>
@@ -2986,7 +2201,7 @@
         </p:nvSpPr>
         <p:spPr>
           <a:xfrm>
-            <a:off x="1307592" y="4700016"/>
+            <a:off x="1307591" y="5451652"/>
             <a:ext cx="4491076" cy="603504"/>
           </a:xfrm>
           <a:prstGeom prst="rect">
@@ -3000,13 +2215,10 @@
           <a:lstStyle/>
           <a:p>
             <a:pPr marL="0" indent="0">
-              <a:lnSpc>
-                <a:spcPts val="1800"/>
-              </a:lnSpc>
-              <a:buNone/>
-            </a:pPr>
-            <a:r>
-              <a:rPr lang="en-US" sz="1300" dirty="0">
+              <a:buNone/>
+            </a:pPr>
+            <a:r>
+              <a:rPr lang="en-US" sz="2000" dirty="0">
                 <a:solidFill>
                   <a:srgbClr val="6F6A62"/>
                 </a:solidFill>
@@ -3016,7 +2228,7 @@
               </a:rPr>
               <a:t>Сначала разложим, чем компания вправе распоряжаться, и только потом публикуем.</a:t>
             </a:r>
-            <a:endParaRPr lang="en-US" sz="1300" dirty="0"/>
+            <a:endParaRPr lang="en-US" sz="2000" dirty="0"/>
           </a:p>
         </p:txBody>
       </p:sp>
@@ -3028,7 +2240,7 @@
         </p:nvSpPr>
         <p:spPr>
           <a:xfrm>
-            <a:off x="777240" y="5394960"/>
+            <a:off x="777239" y="6454943"/>
             <a:ext cx="5021428" cy="10973"/>
           </a:xfrm>
           <a:prstGeom prst="rect">
@@ -3048,7 +2260,7 @@
         </p:nvSpPr>
         <p:spPr>
           <a:xfrm>
-            <a:off x="6393028" y="4078224"/>
+            <a:off x="6393027" y="4645152"/>
             <a:ext cx="457200" cy="256032"/>
           </a:xfrm>
           <a:prstGeom prst="rect">
@@ -3065,7 +2277,7 @@
               <a:buNone/>
             </a:pPr>
             <a:r>
-              <a:rPr lang="en-US" sz="1200" b="1" kern="0" spc="140" dirty="0">
+              <a:rPr lang="en-US" sz="2000" b="1" kern="0" spc="140" dirty="0">
                 <a:solidFill>
                   <a:srgbClr val="C89B45"/>
                 </a:solidFill>
@@ -3075,7 +2287,7 @@
               </a:rPr>
               <a:t>04</a:t>
             </a:r>
-            <a:endParaRPr lang="en-US" sz="1200" dirty="0"/>
+            <a:endParaRPr lang="en-US" sz="2000" dirty="0"/>
           </a:p>
         </p:txBody>
       </p:sp>
@@ -3087,7 +2299,7 @@
         </p:nvSpPr>
         <p:spPr>
           <a:xfrm>
-            <a:off x="6923380" y="4041648"/>
+            <a:off x="6923379" y="4608576"/>
             <a:ext cx="4491076" cy="603504"/>
           </a:xfrm>
           <a:prstGeom prst="rect">
@@ -3101,13 +2313,10 @@
           <a:lstStyle/>
           <a:p>
             <a:pPr marL="0" indent="0">
-              <a:lnSpc>
-                <a:spcPts val="2100"/>
-              </a:lnSpc>
-              <a:buNone/>
-            </a:pPr>
-            <a:r>
-              <a:rPr lang="en-US" sz="1550" b="1" dirty="0">
+              <a:buNone/>
+            </a:pPr>
+            <a:r>
+              <a:rPr lang="en-US" sz="2400" b="1" dirty="0">
                 <a:solidFill>
                   <a:srgbClr val="0C1D28"/>
                 </a:solidFill>
@@ -3117,7 +2326,7 @@
               </a:rPr>
               <a:t>Как оформляется оплата?</a:t>
             </a:r>
-            <a:endParaRPr lang="en-US" sz="1550" dirty="0"/>
+            <a:endParaRPr lang="en-US" sz="2400" dirty="0"/>
           </a:p>
         </p:txBody>
       </p:sp>
@@ -3129,7 +2338,7 @@
         </p:nvSpPr>
         <p:spPr>
           <a:xfrm>
-            <a:off x="6923380" y="4700016"/>
+            <a:off x="6923379" y="5451652"/>
             <a:ext cx="4491076" cy="603504"/>
           </a:xfrm>
           <a:prstGeom prst="rect">
@@ -3143,13 +2352,10 @@
           <a:lstStyle/>
           <a:p>
             <a:pPr marL="0" indent="0">
-              <a:lnSpc>
-                <a:spcPts val="1800"/>
-              </a:lnSpc>
-              <a:buNone/>
-            </a:pPr>
-            <a:r>
-              <a:rPr lang="en-US" sz="1300" dirty="0">
+              <a:buNone/>
+            </a:pPr>
+            <a:r>
+              <a:rPr lang="en-US" sz="2000" dirty="0">
                 <a:solidFill>
                   <a:srgbClr val="6F6A62"/>
                 </a:solidFill>
@@ -3159,7 +2365,7 @@
               </a:rPr>
               <a:t>Договор, счёт, безналичный расчёт и закрывающие документы.</a:t>
             </a:r>
-            <a:endParaRPr lang="en-US" sz="1300" dirty="0"/>
+            <a:endParaRPr lang="en-US" sz="2000" dirty="0"/>
           </a:p>
         </p:txBody>
       </p:sp>
@@ -3171,7 +2377,7 @@
         </p:nvSpPr>
         <p:spPr>
           <a:xfrm>
-            <a:off x="6393028" y="5394960"/>
+            <a:off x="6393027" y="6454943"/>
             <a:ext cx="5021428" cy="10973"/>
           </a:xfrm>
           <a:prstGeom prst="rect">
@@ -3182,951 +2388,6 @@
           </a:solidFill>
           <a:ln/>
         </p:spPr>
-      </p:sp>
-    </p:spTree>
-  </p:cSld>
-  <p:clrMapOvr>
-    <a:masterClrMapping/>
-  </p:clrMapOvr>
-</p:sld>
-</file>
-
-<file path=ppt/slides/slide12.xml><?xml version="1.0" encoding="utf-8"?>
-<p:sld xmlns:a="http://schemas.openxmlformats.org/drawingml/2006/main" xmlns:r="http://schemas.openxmlformats.org/officeDocument/2006/relationships" xmlns:p="http://schemas.openxmlformats.org/presentationml/2006/main">
-  <p:cSld name="Slide 14">
-    <p:bg>
-      <p:bgPr>
-        <a:blipFill dpi="0" rotWithShape="1">
-          <a:blip r:embed="rId3">
-            <a:lum/>
-          </a:blip>
-          <a:srcRect/>
-          <a:stretch>
-            <a:fillRect/>
-          </a:stretch>
-        </a:blipFill>
-        <a:effectLst/>
-      </p:bgPr>
-    </p:bg>
-    <p:spTree>
-      <p:nvGrpSpPr>
-        <p:cNvPr id="1" name=""/>
-        <p:cNvGrpSpPr/>
-        <p:nvPr/>
-      </p:nvGrpSpPr>
-      <p:grpSpPr>
-        <a:xfrm>
-          <a:off x="0" y="0"/>
-          <a:ext cx="0" cy="0"/>
-          <a:chOff x="0" y="0"/>
-          <a:chExt cx="0" cy="0"/>
-        </a:xfrm>
-      </p:grpSpPr>
-      <p:pic>
-        <p:nvPicPr>
-          <p:cNvPr id="2" name="Image 0" descr="/home/user/mysteryslavic-2026-07-19_16-47-00/presentations/office-client/assets/logo.png"/>
-          <p:cNvPicPr>
-            <a:picLocks noChangeAspect="1"/>
-          </p:cNvPicPr>
-          <p:nvPr/>
-        </p:nvPicPr>
-        <p:blipFill>
-          <a:blip r:embed="rId4"/>
-          <a:stretch>
-            <a:fillRect/>
-          </a:stretch>
-        </p:blipFill>
-        <p:spPr>
-          <a:xfrm>
-            <a:off x="777240" y="457200"/>
-            <a:ext cx="457200" cy="457200"/>
-          </a:xfrm>
-          <a:prstGeom prst="rect">
-            <a:avLst/>
-          </a:prstGeom>
-        </p:spPr>
-      </p:pic>
-      <p:sp>
-        <p:nvSpPr>
-          <p:cNvPr id="3" name="Text 0"/>
-          <p:cNvSpPr txBox="1"/>
-          <p:nvPr/>
-        </p:nvSpPr>
-        <p:spPr>
-          <a:xfrm>
-            <a:off x="1417320" y="475488"/>
-            <a:ext cx="4572000" cy="219456"/>
-          </a:xfrm>
-          <a:prstGeom prst="rect">
-            <a:avLst/>
-          </a:prstGeom>
-          <a:noFill/>
-          <a:ln/>
-        </p:spPr>
-        <p:txBody>
-          <a:bodyPr wrap="square" lIns="0" tIns="0" rIns="0" bIns="0" rtlCol="0" anchor="t"/>
-          <a:lstStyle/>
-          <a:p>
-            <a:pPr marL="0" indent="0">
-              <a:buNone/>
-            </a:pPr>
-            <a:r>
-              <a:rPr lang="en-US" sz="1150" b="1" kern="0" spc="240" dirty="0">
-                <a:solidFill>
-                  <a:srgbClr val="F7F1E7"/>
-                </a:solidFill>
-                <a:latin typeface="Inter" pitchFamily="34" charset="0"/>
-                <a:ea typeface="Inter" pitchFamily="34" charset="-122"/>
-                <a:cs typeface="Inter" pitchFamily="34" charset="-120"/>
-              </a:rPr>
-              <a:t>ПРОДАЙ ЗА МЕНЯ</a:t>
-            </a:r>
-            <a:endParaRPr lang="en-US" sz="1150" dirty="0"/>
-          </a:p>
-        </p:txBody>
-      </p:sp>
-      <p:sp>
-        <p:nvSpPr>
-          <p:cNvPr id="4" name="Text 1"/>
-          <p:cNvSpPr txBox="1"/>
-          <p:nvPr/>
-        </p:nvSpPr>
-        <p:spPr>
-          <a:xfrm>
-            <a:off x="1417320" y="713232"/>
-            <a:ext cx="4572000" cy="201168"/>
-          </a:xfrm>
-          <a:prstGeom prst="rect">
-            <a:avLst/>
-          </a:prstGeom>
-          <a:noFill/>
-          <a:ln/>
-        </p:spPr>
-        <p:txBody>
-          <a:bodyPr wrap="square" lIns="0" tIns="0" rIns="0" bIns="0" rtlCol="0" anchor="t"/>
-          <a:lstStyle/>
-          <a:p>
-            <a:pPr marL="0" indent="0">
-              <a:buNone/>
-            </a:pPr>
-            <a:r>
-              <a:rPr lang="en-US" sz="1050" dirty="0">
-                <a:solidFill>
-                  <a:srgbClr val="9CAAB1"/>
-                </a:solidFill>
-                <a:latin typeface="Inter" pitchFamily="34" charset="0"/>
-                <a:ea typeface="Inter" pitchFamily="34" charset="-122"/>
-                <a:cs typeface="Inter" pitchFamily="34" charset="-120"/>
-              </a:rPr>
-              <a:t>Освобождение офиса под ключ · Казань</a:t>
-            </a:r>
-            <a:endParaRPr lang="en-US" sz="1050" dirty="0"/>
-          </a:p>
-        </p:txBody>
-      </p:sp>
-      <p:sp>
-        <p:nvSpPr>
-          <p:cNvPr id="5" name="Text 2"/>
-          <p:cNvSpPr txBox="1"/>
-          <p:nvPr/>
-        </p:nvSpPr>
-        <p:spPr>
-          <a:xfrm>
-            <a:off x="777240" y="1572768"/>
-            <a:ext cx="5669280" cy="1554480"/>
-          </a:xfrm>
-          <a:prstGeom prst="rect">
-            <a:avLst/>
-          </a:prstGeom>
-          <a:noFill/>
-          <a:ln/>
-        </p:spPr>
-        <p:txBody>
-          <a:bodyPr wrap="square" lIns="0" tIns="0" rIns="0" bIns="0" rtlCol="0" anchor="t"/>
-          <a:lstStyle/>
-          <a:p>
-            <a:pPr marL="0" indent="0">
-              <a:lnSpc>
-                <a:spcPts val="5000"/>
-              </a:lnSpc>
-              <a:buNone/>
-            </a:pPr>
-            <a:r>
-              <a:rPr lang="en-US" sz="4400" b="1" dirty="0">
-                <a:solidFill>
-                  <a:srgbClr val="F7F1E7"/>
-                </a:solidFill>
-                <a:latin typeface="Inter" pitchFamily="34" charset="0"/>
-                <a:ea typeface="Inter" pitchFamily="34" charset="-122"/>
-                <a:cs typeface="Inter" pitchFamily="34" charset="-120"/>
-              </a:rPr>
-              <a:t>ПРИШЛИТЕ</a:t>
-            </a:r>
-            <a:endParaRPr lang="en-US" sz="4400" dirty="0"/>
-          </a:p>
-          <a:p>
-            <a:pPr marL="0" indent="0">
-              <a:lnSpc>
-                <a:spcPts val="5000"/>
-              </a:lnSpc>
-              <a:buNone/>
-            </a:pPr>
-            <a:r>
-              <a:rPr lang="ru-RU" sz="4400" b="1" dirty="0">
-                <a:solidFill>
-                  <a:srgbClr val="F7F1E7"/>
-                </a:solidFill>
-                <a:latin typeface="Inter" pitchFamily="34" charset="0"/>
-                <a:ea typeface="Inter" pitchFamily="34" charset="-122"/>
-                <a:cs typeface="Inter" pitchFamily="34" charset="-120"/>
-              </a:rPr>
-              <a:t>ФОТО</a:t>
-            </a:r>
-            <a:r>
-              <a:rPr lang="en-US" sz="4400" b="1" dirty="0">
-                <a:solidFill>
-                  <a:srgbClr val="F7F1E7"/>
-                </a:solidFill>
-                <a:latin typeface="Inter" pitchFamily="34" charset="0"/>
-                <a:ea typeface="Inter" pitchFamily="34" charset="-122"/>
-                <a:cs typeface="Inter" pitchFamily="34" charset="-120"/>
-              </a:rPr>
-              <a:t> ОФИСА</a:t>
-            </a:r>
-            <a:endParaRPr lang="en-US" sz="4400" dirty="0"/>
-          </a:p>
-        </p:txBody>
-      </p:sp>
-      <p:sp>
-        <p:nvSpPr>
-          <p:cNvPr id="6" name="Shape 3"/>
-          <p:cNvSpPr/>
-          <p:nvPr/>
-        </p:nvSpPr>
-        <p:spPr>
-          <a:xfrm>
-            <a:off x="777240" y="3346704"/>
-            <a:ext cx="1371600" cy="32004"/>
-          </a:xfrm>
-          <a:prstGeom prst="rect">
-            <a:avLst/>
-          </a:prstGeom>
-          <a:solidFill>
-            <a:srgbClr val="C89B45"/>
-          </a:solidFill>
-          <a:ln/>
-        </p:spPr>
-        <p:txBody>
-          <a:bodyPr/>
-          <a:p/>
-        </p:txBody>
-      </p:sp>
-      <p:sp>
-        <p:nvSpPr>
-          <p:cNvPr id="7" name="Text 4"/>
-          <p:cNvSpPr txBox="1"/>
-          <p:nvPr/>
-        </p:nvSpPr>
-        <p:spPr>
-          <a:xfrm>
-            <a:off x="777240" y="3639312"/>
-            <a:ext cx="5486400" cy="822960"/>
-          </a:xfrm>
-          <a:prstGeom prst="rect">
-            <a:avLst/>
-          </a:prstGeom>
-          <a:noFill/>
-          <a:ln/>
-        </p:spPr>
-        <p:txBody>
-          <a:bodyPr wrap="square" lIns="0" tIns="0" rIns="0" bIns="0" rtlCol="0" anchor="t"/>
-          <a:lstStyle/>
-          <a:p>
-            <a:pPr marL="0" indent="0">
-              <a:lnSpc>
-                <a:spcPts val="2700"/>
-              </a:lnSpc>
-              <a:buNone/>
-            </a:pPr>
-            <a:r>
-              <a:rPr lang="en-US" sz="1900" b="1" dirty="0">
-                <a:solidFill>
-                  <a:srgbClr val="D9BC7A"/>
-                </a:solidFill>
-                <a:latin typeface="Inter" pitchFamily="34" charset="0"/>
-                <a:ea typeface="Inter" pitchFamily="34" charset="-122"/>
-                <a:cs typeface="Inter" pitchFamily="34" charset="-120"/>
-              </a:rPr>
-              <a:t>БЕСПЛАТНО ОЦЕНИМ,</a:t>
-            </a:r>
-            <a:endParaRPr lang="en-US" sz="1900" dirty="0"/>
-          </a:p>
-          <a:p>
-            <a:pPr marL="0" indent="0">
-              <a:lnSpc>
-                <a:spcPts val="2700"/>
-              </a:lnSpc>
-              <a:buNone/>
-            </a:pPr>
-            <a:r>
-              <a:rPr lang="en-US" sz="1900" b="1" dirty="0">
-                <a:solidFill>
-                  <a:srgbClr val="D9BC7A"/>
-                </a:solidFill>
-                <a:latin typeface="Inter" pitchFamily="34" charset="0"/>
-                <a:ea typeface="Inter" pitchFamily="34" charset="-122"/>
-                <a:cs typeface="Inter" pitchFamily="34" charset="-120"/>
-              </a:rPr>
-              <a:t>ЧТО МОЖНО ВЕРНУТЬ ДЕНЬГАМИ</a:t>
-            </a:r>
-            <a:endParaRPr lang="en-US" sz="1900" dirty="0"/>
-          </a:p>
-        </p:txBody>
-      </p:sp>
-      <p:pic>
-        <p:nvPicPr>
-          <p:cNvPr id="8" name="Image 1" descr="/home/user/mysteryslavic-2026-07-19_16-47-00/presentations/office-client/assets/ic-phone.png"/>
-          <p:cNvPicPr>
-            <a:picLocks noChangeAspect="1"/>
-          </p:cNvPicPr>
-          <p:nvPr/>
-        </p:nvPicPr>
-        <p:blipFill>
-          <a:blip r:embed="rId5"/>
-          <a:stretch>
-            <a:fillRect/>
-          </a:stretch>
-        </p:blipFill>
-        <p:spPr>
-          <a:xfrm>
-            <a:off x="777240" y="4974336"/>
-            <a:ext cx="310896" cy="310896"/>
-          </a:xfrm>
-          <a:prstGeom prst="rect">
-            <a:avLst/>
-          </a:prstGeom>
-        </p:spPr>
-      </p:pic>
-      <p:sp>
-        <p:nvSpPr>
-          <p:cNvPr id="9" name="Text 5"/>
-          <p:cNvSpPr txBox="1"/>
-          <p:nvPr/>
-        </p:nvSpPr>
-        <p:spPr>
-          <a:xfrm>
-            <a:off x="1307592" y="4956048"/>
-            <a:ext cx="4023360" cy="347472"/>
-          </a:xfrm>
-          <a:prstGeom prst="rect">
-            <a:avLst/>
-          </a:prstGeom>
-          <a:noFill/>
-          <a:ln/>
-        </p:spPr>
-        <p:txBody>
-          <a:bodyPr wrap="square" lIns="0" tIns="0" rIns="0" bIns="0" rtlCol="0" anchor="t"/>
-          <a:lstStyle/>
-          <a:p>
-            <a:pPr marL="0" indent="0">
-              <a:buNone/>
-            </a:pPr>
-            <a:r>
-              <a:rPr lang="en-US" sz="1900" b="1" dirty="0">
-                <a:solidFill>
-                  <a:srgbClr val="F7F1E7"/>
-                </a:solidFill>
-                <a:latin typeface="Inter" pitchFamily="34" charset="0"/>
-                <a:ea typeface="Inter" pitchFamily="34" charset="-122"/>
-                <a:cs typeface="Inter" pitchFamily="34" charset="-120"/>
-              </a:rPr>
-              <a:t>+7 917 896-84-83</a:t>
-            </a:r>
-            <a:endParaRPr lang="en-US" sz="1900" dirty="0"/>
-          </a:p>
-        </p:txBody>
-      </p:sp>
-      <p:pic>
-        <p:nvPicPr>
-          <p:cNvPr id="10" name="Image 2" descr="/home/user/mysteryslavic-2026-07-19_16-47-00/presentations/office-client/assets/ic-mail.png"/>
-          <p:cNvPicPr>
-            <a:picLocks noChangeAspect="1"/>
-          </p:cNvPicPr>
-          <p:nvPr/>
-        </p:nvPicPr>
-        <p:blipFill>
-          <a:blip r:embed="rId6"/>
-          <a:stretch>
-            <a:fillRect/>
-          </a:stretch>
-        </p:blipFill>
-        <p:spPr>
-          <a:xfrm>
-            <a:off x="777240" y="5632704"/>
-            <a:ext cx="310896" cy="310896"/>
-          </a:xfrm>
-          <a:prstGeom prst="rect">
-            <a:avLst/>
-          </a:prstGeom>
-        </p:spPr>
-      </p:pic>
-      <p:sp>
-        <p:nvSpPr>
-          <p:cNvPr id="11" name="Text 6"/>
-          <p:cNvSpPr txBox="1"/>
-          <p:nvPr/>
-        </p:nvSpPr>
-        <p:spPr>
-          <a:xfrm>
-            <a:off x="1307592" y="5623560"/>
-            <a:ext cx="4023360" cy="347472"/>
-          </a:xfrm>
-          <a:prstGeom prst="rect">
-            <a:avLst/>
-          </a:prstGeom>
-          <a:noFill/>
-          <a:ln/>
-        </p:spPr>
-        <p:txBody>
-          <a:bodyPr wrap="square" lIns="0" tIns="0" rIns="0" bIns="0" rtlCol="0" anchor="t"/>
-          <a:lstStyle/>
-          <a:p>
-            <a:pPr marL="0" indent="0">
-              <a:buNone/>
-            </a:pPr>
-            <a:r>
-              <a:rPr lang="en-US" sz="1700" dirty="0">
-                <a:solidFill>
-                  <a:srgbClr val="F7F1E7"/>
-                </a:solidFill>
-                <a:latin typeface="Inter" pitchFamily="34" charset="0"/>
-                <a:ea typeface="Inter" pitchFamily="34" charset="-122"/>
-                <a:cs typeface="Inter" pitchFamily="34" charset="-120"/>
-              </a:rPr>
-              <a:t>proday_za_menya@mail.ru</a:t>
-            </a:r>
-            <a:endParaRPr lang="en-US" sz="1700" dirty="0"/>
-          </a:p>
-        </p:txBody>
-      </p:sp>
-      <p:sp>
-        <p:nvSpPr>
-          <p:cNvPr id="12" name="Rounded Rectangle 11"/>
-          <p:cNvSpPr/>
-          <p:nvPr/>
-        </p:nvSpPr>
-        <p:spPr>
-          <a:xfrm>
-            <a:off x="6355080" y="2450592"/>
-            <a:ext cx="1600200" cy="2670048"/>
-          </a:xfrm>
-          <a:prstGeom prst="roundRect">
-            <a:avLst>
-              <a:gd name="adj" fmla="val 6000"/>
-            </a:avLst>
-          </a:prstGeom>
-          <a:solidFill>
-            <a:srgbClr val="0C1D28"/>
-          </a:solidFill>
-          <a:ln w="12700">
-            <a:solidFill>
-              <a:srgbClr val="6E5426"/>
-            </a:solidFill>
-          </a:ln>
-          <a:effectLst/>
-        </p:spPr>
-        <p:style>
-          <a:lnRef idx="1">
-            <a:schemeClr val="accent1"/>
-          </a:lnRef>
-          <a:fillRef idx="3">
-            <a:schemeClr val="accent1"/>
-          </a:fillRef>
-          <a:effectRef idx="2">
-            <a:schemeClr val="accent1"/>
-          </a:effectRef>
-          <a:fontRef idx="minor">
-            <a:schemeClr val="lt1"/>
-          </a:fontRef>
-        </p:style>
-        <p:txBody>
-          <a:bodyPr rtlCol="0" anchor="ctr"/>
-          <a:lstStyle/>
-          <a:p/>
-        </p:txBody>
-      </p:sp>
-      <p:pic>
-        <p:nvPicPr>
-          <p:cNvPr id="13" name="Picture 12" descr="image.png"/>
-          <p:cNvPicPr>
-            <a:picLocks noChangeAspect="1"/>
-          </p:cNvPicPr>
-          <p:nvPr/>
-        </p:nvPicPr>
-        <p:blipFill>
-          <a:blip r:embed="rId7"/>
-          <a:stretch>
-            <a:fillRect/>
-          </a:stretch>
-        </p:blipFill>
-        <p:spPr>
-          <a:xfrm>
-            <a:off x="6999732" y="2651760"/>
-            <a:ext cx="310896" cy="310896"/>
-          </a:xfrm>
-          <a:prstGeom prst="rect">
-            <a:avLst/>
-          </a:prstGeom>
-        </p:spPr>
-      </p:pic>
-      <p:sp>
-        <p:nvSpPr>
-          <p:cNvPr id="14" name="Rounded Rectangle 13"/>
-          <p:cNvSpPr/>
-          <p:nvPr/>
-        </p:nvSpPr>
-        <p:spPr>
-          <a:xfrm>
-            <a:off x="6505956" y="3127248"/>
-            <a:ext cx="1298448" cy="1298448"/>
-          </a:xfrm>
-          <a:prstGeom prst="roundRect">
-            <a:avLst>
-              <a:gd name="adj" fmla="val 5000"/>
-            </a:avLst>
-          </a:prstGeom>
-          <a:solidFill>
-            <a:srgbClr val="F7F1E7"/>
-          </a:solidFill>
-          <a:ln>
-            <a:noFill/>
-          </a:ln>
-          <a:effectLst/>
-        </p:spPr>
-        <p:style>
-          <a:lnRef idx="1">
-            <a:schemeClr val="accent1"/>
-          </a:lnRef>
-          <a:fillRef idx="3">
-            <a:schemeClr val="accent1"/>
-          </a:fillRef>
-          <a:effectRef idx="2">
-            <a:schemeClr val="accent1"/>
-          </a:effectRef>
-          <a:fontRef idx="minor">
-            <a:schemeClr val="lt1"/>
-          </a:fontRef>
-        </p:style>
-        <p:txBody>
-          <a:bodyPr rtlCol="0" anchor="ctr"/>
-          <a:lstStyle/>
-          <a:p/>
-        </p:txBody>
-      </p:sp>
-      <p:pic>
-        <p:nvPicPr>
-          <p:cNvPr id="15" name="Picture 14" descr="image.png"/>
-          <p:cNvPicPr>
-            <a:picLocks noChangeAspect="1"/>
-          </p:cNvPicPr>
-          <p:nvPr/>
-        </p:nvPicPr>
-        <p:blipFill>
-          <a:blip r:embed="rId8"/>
-          <a:stretch>
-            <a:fillRect/>
-          </a:stretch>
-        </p:blipFill>
-        <p:spPr>
-          <a:xfrm>
-            <a:off x="6533388" y="3154680"/>
-            <a:ext cx="1243584" cy="1243584"/>
-          </a:xfrm>
-          <a:prstGeom prst="rect">
-            <a:avLst/>
-          </a:prstGeom>
-        </p:spPr>
-      </p:pic>
-      <p:sp>
-        <p:nvSpPr>
-          <p:cNvPr id="16" name="TextBox 15"/>
-          <p:cNvSpPr txBox="1"/>
-          <p:nvPr/>
-        </p:nvSpPr>
-        <p:spPr>
-          <a:xfrm>
-            <a:off x="6355080" y="4626864"/>
-            <a:ext cx="1600200" cy="256032"/>
-          </a:xfrm>
-          <a:prstGeom prst="rect">
-            <a:avLst/>
-          </a:prstGeom>
-          <a:noFill/>
-        </p:spPr>
-        <p:txBody>
-          <a:bodyPr wrap="none" lIns="0" rIns="0" tIns="0" bIns="0">
-            <a:spAutoFit/>
-          </a:bodyPr>
-          <a:lstStyle/>
-          <a:p>
-            <a:pPr algn="ctr"/>
-            <a:r>
-              <a:rPr sz="1100" b="1">
-                <a:solidFill>
-                  <a:srgbClr val="D9BC7A"/>
-                </a:solidFill>
-                <a:latin typeface="Inter"/>
-              </a:rPr>
-              <a:t>TELEGRAM</a:t>
-            </a:r>
-          </a:p>
-        </p:txBody>
-      </p:sp>
-      <p:sp>
-        <p:nvSpPr>
-          <p:cNvPr id="17" name="Rounded Rectangle 16"/>
-          <p:cNvSpPr/>
-          <p:nvPr/>
-        </p:nvSpPr>
-        <p:spPr>
-          <a:xfrm>
-            <a:off x="8083296" y="2450592"/>
-            <a:ext cx="1600200" cy="2670048"/>
-          </a:xfrm>
-          <a:prstGeom prst="roundRect">
-            <a:avLst>
-              <a:gd name="adj" fmla="val 6000"/>
-            </a:avLst>
-          </a:prstGeom>
-          <a:solidFill>
-            <a:srgbClr val="0C1D28"/>
-          </a:solidFill>
-          <a:ln w="12700">
-            <a:solidFill>
-              <a:srgbClr val="6E5426"/>
-            </a:solidFill>
-          </a:ln>
-          <a:effectLst/>
-        </p:spPr>
-        <p:style>
-          <a:lnRef idx="1">
-            <a:schemeClr val="accent1"/>
-          </a:lnRef>
-          <a:fillRef idx="3">
-            <a:schemeClr val="accent1"/>
-          </a:fillRef>
-          <a:effectRef idx="2">
-            <a:schemeClr val="accent1"/>
-          </a:effectRef>
-          <a:fontRef idx="minor">
-            <a:schemeClr val="lt1"/>
-          </a:fontRef>
-        </p:style>
-        <p:txBody>
-          <a:bodyPr rtlCol="0" anchor="ctr"/>
-          <a:lstStyle/>
-          <a:p/>
-        </p:txBody>
-      </p:sp>
-      <p:pic>
-        <p:nvPicPr>
-          <p:cNvPr id="18" name="Picture 17" descr="ic-messagesquare.png"/>
-          <p:cNvPicPr>
-            <a:picLocks noChangeAspect="1"/>
-          </p:cNvPicPr>
-          <p:nvPr/>
-        </p:nvPicPr>
-        <p:blipFill>
-          <a:blip r:embed="rId11"/>
-          <a:stretch>
-            <a:fillRect/>
-          </a:stretch>
-        </p:blipFill>
-        <p:spPr>
-          <a:xfrm>
-            <a:off x="8727948" y="2651760"/>
-            <a:ext cx="310896" cy="310896"/>
-          </a:xfrm>
-          <a:prstGeom prst="rect">
-            <a:avLst/>
-          </a:prstGeom>
-        </p:spPr>
-      </p:pic>
-      <p:sp>
-        <p:nvSpPr>
-          <p:cNvPr id="19" name="Rounded Rectangle 18"/>
-          <p:cNvSpPr/>
-          <p:nvPr/>
-        </p:nvSpPr>
-        <p:spPr>
-          <a:xfrm>
-            <a:off x="8234171" y="3127248"/>
-            <a:ext cx="1298448" cy="1298448"/>
-          </a:xfrm>
-          <a:prstGeom prst="roundRect">
-            <a:avLst>
-              <a:gd name="adj" fmla="val 5000"/>
-            </a:avLst>
-          </a:prstGeom>
-          <a:solidFill>
-            <a:srgbClr val="F7F1E7"/>
-          </a:solidFill>
-          <a:ln>
-            <a:noFill/>
-          </a:ln>
-          <a:effectLst/>
-        </p:spPr>
-        <p:style>
-          <a:lnRef idx="1">
-            <a:schemeClr val="accent1"/>
-          </a:lnRef>
-          <a:fillRef idx="3">
-            <a:schemeClr val="accent1"/>
-          </a:fillRef>
-          <a:effectRef idx="2">
-            <a:schemeClr val="accent1"/>
-          </a:effectRef>
-          <a:fontRef idx="minor">
-            <a:schemeClr val="lt1"/>
-          </a:fontRef>
-        </p:style>
-        <p:txBody>
-          <a:bodyPr rtlCol="0" anchor="ctr"/>
-          <a:lstStyle/>
-          <a:p/>
-        </p:txBody>
-      </p:sp>
-      <p:pic>
-        <p:nvPicPr>
-          <p:cNvPr id="20" name="Picture 19" descr="image.png"/>
-          <p:cNvPicPr>
-            <a:picLocks noChangeAspect="1"/>
-          </p:cNvPicPr>
-          <p:nvPr/>
-        </p:nvPicPr>
-        <p:blipFill>
-          <a:blip r:embed="rId10"/>
-          <a:stretch>
-            <a:fillRect/>
-          </a:stretch>
-        </p:blipFill>
-        <p:spPr>
-          <a:xfrm>
-            <a:off x="8261604" y="3154680"/>
-            <a:ext cx="1243584" cy="1243584"/>
-          </a:xfrm>
-          <a:prstGeom prst="rect">
-            <a:avLst/>
-          </a:prstGeom>
-        </p:spPr>
-      </p:pic>
-      <p:sp>
-        <p:nvSpPr>
-          <p:cNvPr id="21" name="TextBox 20"/>
-          <p:cNvSpPr txBox="1"/>
-          <p:nvPr/>
-        </p:nvSpPr>
-        <p:spPr>
-          <a:xfrm>
-            <a:off x="8083296" y="4626864"/>
-            <a:ext cx="1600200" cy="256032"/>
-          </a:xfrm>
-          <a:prstGeom prst="rect">
-            <a:avLst/>
-          </a:prstGeom>
-          <a:noFill/>
-        </p:spPr>
-        <p:txBody>
-          <a:bodyPr wrap="none" lIns="0" rIns="0" tIns="0" bIns="0">
-            <a:spAutoFit/>
-          </a:bodyPr>
-          <a:lstStyle/>
-          <a:p>
-            <a:pPr algn="ctr"/>
-            <a:r>
-              <a:rPr sz="1100" b="1">
-                <a:solidFill>
-                  <a:srgbClr val="D9BC7A"/>
-                </a:solidFill>
-                <a:latin typeface="Inter"/>
-              </a:rPr>
-              <a:t>MAX</a:t>
-            </a:r>
-          </a:p>
-        </p:txBody>
-      </p:sp>
-      <p:sp>
-        <p:nvSpPr>
-          <p:cNvPr id="22" name="Rounded Rectangle 21"/>
-          <p:cNvSpPr/>
-          <p:nvPr/>
-        </p:nvSpPr>
-        <p:spPr>
-          <a:xfrm>
-            <a:off x="9811512" y="2450592"/>
-            <a:ext cx="1600200" cy="2670048"/>
-          </a:xfrm>
-          <a:prstGeom prst="roundRect">
-            <a:avLst>
-              <a:gd name="adj" fmla="val 6000"/>
-            </a:avLst>
-          </a:prstGeom>
-          <a:solidFill>
-            <a:srgbClr val="0C1D28"/>
-          </a:solidFill>
-          <a:ln w="12700">
-            <a:solidFill>
-              <a:srgbClr val="6E5426"/>
-            </a:solidFill>
-          </a:ln>
-          <a:effectLst/>
-        </p:spPr>
-        <p:style>
-          <a:lnRef idx="1">
-            <a:schemeClr val="accent1"/>
-          </a:lnRef>
-          <a:fillRef idx="3">
-            <a:schemeClr val="accent1"/>
-          </a:fillRef>
-          <a:effectRef idx="2">
-            <a:schemeClr val="accent1"/>
-          </a:effectRef>
-          <a:fontRef idx="minor">
-            <a:schemeClr val="lt1"/>
-          </a:fontRef>
-        </p:style>
-        <p:txBody>
-          <a:bodyPr rtlCol="0" anchor="ctr"/>
-          <a:lstStyle/>
-          <a:p/>
-        </p:txBody>
-      </p:sp>
-      <p:pic>
-        <p:nvPicPr>
-          <p:cNvPr id="23" name="Picture 22" descr="image.png"/>
-          <p:cNvPicPr>
-            <a:picLocks noChangeAspect="1"/>
-          </p:cNvPicPr>
-          <p:nvPr/>
-        </p:nvPicPr>
-        <p:blipFill>
-          <a:blip r:embed="rId9"/>
-          <a:stretch>
-            <a:fillRect/>
-          </a:stretch>
-        </p:blipFill>
-        <p:spPr>
-          <a:xfrm>
-            <a:off x="10456164" y="2651760"/>
-            <a:ext cx="310896" cy="310896"/>
-          </a:xfrm>
-          <a:prstGeom prst="rect">
-            <a:avLst/>
-          </a:prstGeom>
-        </p:spPr>
-      </p:pic>
-      <p:sp>
-        <p:nvSpPr>
-          <p:cNvPr id="24" name="Rounded Rectangle 23"/>
-          <p:cNvSpPr/>
-          <p:nvPr/>
-        </p:nvSpPr>
-        <p:spPr>
-          <a:xfrm>
-            <a:off x="9962388" y="3127248"/>
-            <a:ext cx="1298448" cy="1298448"/>
-          </a:xfrm>
-          <a:prstGeom prst="roundRect">
-            <a:avLst>
-              <a:gd name="adj" fmla="val 5000"/>
-            </a:avLst>
-          </a:prstGeom>
-          <a:solidFill>
-            <a:srgbClr val="F7F1E7"/>
-          </a:solidFill>
-          <a:ln>
-            <a:noFill/>
-          </a:ln>
-          <a:effectLst/>
-        </p:spPr>
-        <p:style>
-          <a:lnRef idx="1">
-            <a:schemeClr val="accent1"/>
-          </a:lnRef>
-          <a:fillRef idx="3">
-            <a:schemeClr val="accent1"/>
-          </a:fillRef>
-          <a:effectRef idx="2">
-            <a:schemeClr val="accent1"/>
-          </a:effectRef>
-          <a:fontRef idx="minor">
-            <a:schemeClr val="lt1"/>
-          </a:fontRef>
-        </p:style>
-        <p:txBody>
-          <a:bodyPr rtlCol="0" anchor="ctr"/>
-          <a:lstStyle/>
-          <a:p/>
-        </p:txBody>
-      </p:sp>
-      <p:pic>
-        <p:nvPicPr>
-          <p:cNvPr id="25" name="Picture 24" descr="qr-whatsapp.png"/>
-          <p:cNvPicPr>
-            <a:picLocks noChangeAspect="1"/>
-          </p:cNvPicPr>
-          <p:nvPr/>
-        </p:nvPicPr>
-        <p:blipFill>
-          <a:blip r:embed="rId12"/>
-          <a:stretch>
-            <a:fillRect/>
-          </a:stretch>
-        </p:blipFill>
-        <p:spPr>
-          <a:xfrm>
-            <a:off x="9989820" y="3154680"/>
-            <a:ext cx="1243584" cy="1243584"/>
-          </a:xfrm>
-          <a:prstGeom prst="rect">
-            <a:avLst/>
-          </a:prstGeom>
-        </p:spPr>
-      </p:pic>
-      <p:sp>
-        <p:nvSpPr>
-          <p:cNvPr id="26" name="TextBox 25"/>
-          <p:cNvSpPr txBox="1"/>
-          <p:nvPr/>
-        </p:nvSpPr>
-        <p:spPr>
-          <a:xfrm>
-            <a:off x="9811512" y="4626864"/>
-            <a:ext cx="1600200" cy="256032"/>
-          </a:xfrm>
-          <a:prstGeom prst="rect">
-            <a:avLst/>
-          </a:prstGeom>
-          <a:noFill/>
-        </p:spPr>
-        <p:txBody>
-          <a:bodyPr wrap="none" lIns="0" rIns="0" tIns="0" bIns="0">
-            <a:spAutoFit/>
-          </a:bodyPr>
-          <a:lstStyle/>
-          <a:p>
-            <a:pPr algn="ctr"/>
-            <a:r>
-              <a:rPr sz="1100" b="1">
-                <a:solidFill>
-                  <a:srgbClr val="D9BC7A"/>
-                </a:solidFill>
-                <a:latin typeface="Inter"/>
-              </a:rPr>
-              <a:t>WHATSAPP</a:t>
-            </a:r>
-          </a:p>
-        </p:txBody>
       </p:sp>
     </p:spTree>
   </p:cSld>
@@ -4301,8 +2562,8 @@
               <a:rPr lang="ru-RU" sz="4000" b="1" dirty="0">
                 <a:solidFill>
                   <a:schemeClr val="tx1">
-                    <a:lumMod val="85000"/>
-                    <a:lumOff val="15000"/>
+                    <a:lumMod val="95000"/>
+                    <a:lumOff val="5000"/>
                   </a:schemeClr>
                 </a:solidFill>
                 <a:latin typeface="Inter" pitchFamily="34" charset="0"/>
@@ -4315,8 +2576,8 @@
               <a:rPr lang="en-US" sz="4000" b="1" dirty="0" err="1">
                 <a:solidFill>
                   <a:schemeClr val="tx1">
-                    <a:lumMod val="85000"/>
-                    <a:lumOff val="15000"/>
+                    <a:lumMod val="95000"/>
+                    <a:lumOff val="5000"/>
                   </a:schemeClr>
                 </a:solidFill>
                 <a:latin typeface="Inter" pitchFamily="34" charset="0"/>
@@ -4329,8 +2590,8 @@
               <a:rPr lang="en-US" sz="4000" b="1" dirty="0">
                 <a:solidFill>
                   <a:schemeClr val="tx1">
-                    <a:lumMod val="85000"/>
-                    <a:lumOff val="15000"/>
+                    <a:lumMod val="95000"/>
+                    <a:lumOff val="5000"/>
                   </a:schemeClr>
                 </a:solidFill>
                 <a:latin typeface="Inter" pitchFamily="34" charset="0"/>
@@ -4341,7 +2602,10 @@
             </a:r>
             <a:endParaRPr lang="en-US" sz="2400" dirty="0">
               <a:solidFill>
-                <a:srgbClr val="0C1D28"/>
+                <a:schemeClr val="tx1">
+                  <a:lumMod val="95000"/>
+                  <a:lumOff val="5000"/>
+                </a:schemeClr>
               </a:solidFill>
               <a:latin typeface="Inter" pitchFamily="34" charset="0"/>
               <a:ea typeface="Inter" pitchFamily="34" charset="-122"/>
@@ -4724,7 +2988,10 @@
         </p:spPr>
         <p:txBody>
           <a:bodyPr/>
-          <a:p/>
+          <a:lstStyle/>
+          <a:p>
+            <a:endParaRPr/>
+          </a:p>
         </p:txBody>
       </p:sp>
       <p:sp>
@@ -5006,7 +3273,51 @@
                 <a:ea typeface="Inter" pitchFamily="34" charset="-122"/>
                 <a:cs typeface="Inter" pitchFamily="34" charset="-120"/>
               </a:rPr>
-              <a:t>Заплатить за вывоз</a:t>
+              <a:t>Заплатить </a:t>
+            </a:r>
+            <a:r>
+              <a:rPr lang="en-US" dirty="0" err="1">
+                <a:solidFill>
+                  <a:srgbClr val="F7F1E7"/>
+                </a:solidFill>
+                <a:latin typeface="Inter" pitchFamily="34" charset="0"/>
+                <a:ea typeface="Inter" pitchFamily="34" charset="-122"/>
+                <a:cs typeface="Inter" pitchFamily="34" charset="-120"/>
+              </a:rPr>
+              <a:t>за</a:t>
+            </a:r>
+            <a:r>
+              <a:rPr lang="en-US" dirty="0">
+                <a:solidFill>
+                  <a:srgbClr val="F7F1E7"/>
+                </a:solidFill>
+                <a:latin typeface="Inter" pitchFamily="34" charset="0"/>
+                <a:ea typeface="Inter" pitchFamily="34" charset="-122"/>
+                <a:cs typeface="Inter" pitchFamily="34" charset="-120"/>
+              </a:rPr>
+              <a:t> </a:t>
+            </a:r>
+            <a:r>
+              <a:rPr lang="en-US" dirty="0" err="1">
+                <a:solidFill>
+                  <a:srgbClr val="F7F1E7"/>
+                </a:solidFill>
+                <a:latin typeface="Inter" pitchFamily="34" charset="0"/>
+                <a:ea typeface="Inter" pitchFamily="34" charset="-122"/>
+                <a:cs typeface="Inter" pitchFamily="34" charset="-120"/>
+              </a:rPr>
+              <a:t>выво</a:t>
+            </a:r>
+            <a:r>
+              <a:rPr lang="ru-RU" dirty="0">
+                <a:solidFill>
+                  <a:srgbClr val="F7F1E7"/>
+                </a:solidFill>
+                <a:latin typeface="Inter" pitchFamily="34" charset="0"/>
+                <a:ea typeface="Inter" pitchFamily="34" charset="-122"/>
+                <a:cs typeface="Inter" pitchFamily="34" charset="-120"/>
+              </a:rPr>
+              <a:t>з..</a:t>
             </a:r>
             <a:endParaRPr lang="en-US" dirty="0">
               <a:solidFill>
@@ -5016,29 +3327,6 @@
               </a:solidFill>
             </a:endParaRPr>
           </a:p>
-          <a:p>
-            <a:pPr marL="0" indent="0" algn="ctr">
-              <a:buNone/>
-            </a:pPr>
-            <a:r>
-              <a:rPr lang="en-US" dirty="0">
-                <a:solidFill>
-                  <a:srgbClr val="F7F1E7"/>
-                </a:solidFill>
-                <a:latin typeface="Inter" pitchFamily="34" charset="0"/>
-                <a:ea typeface="Inter" pitchFamily="34" charset="-122"/>
-                <a:cs typeface="Inter" pitchFamily="34" charset="-120"/>
-              </a:rPr>
-              <a:t>и не вернуть ничего</a:t>
-            </a:r>
-            <a:endParaRPr lang="en-US" dirty="0">
-              <a:solidFill>
-                <a:schemeClr val="bg1">
-                  <a:lumMod val="95000"/>
-                </a:schemeClr>
-              </a:solidFill>
-            </a:endParaRPr>
-          </a:p>
         </p:txBody>
       </p:sp>
       <p:pic>
@@ -5200,31 +3488,8 @@
                 <a:ea typeface="Inter" pitchFamily="34" charset="-122"/>
                 <a:cs typeface="Inter" pitchFamily="34" charset="-120"/>
               </a:rPr>
-              <a:t>.. </a:t>
-            </a:r>
-          </a:p>
-          <a:p>
-            <a:pPr marL="0" indent="0" algn="ctr">
-              <a:buNone/>
-            </a:pPr>
-            <a:r>
-              <a:rPr lang="ru-RU" dirty="0">
-                <a:solidFill>
-                  <a:srgbClr val="F7F1E7"/>
-                </a:solidFill>
-                <a:latin typeface="Inter" pitchFamily="34" charset="0"/>
-                <a:ea typeface="Inter" pitchFamily="34" charset="-122"/>
-                <a:cs typeface="Inter" pitchFamily="34" charset="-120"/>
-              </a:rPr>
-              <a:t>Плюс скоро сдавать ключи!</a:t>
-            </a:r>
-            <a:endParaRPr lang="en-US" dirty="0">
-              <a:solidFill>
-                <a:schemeClr val="bg1">
-                  <a:lumMod val="95000"/>
-                </a:schemeClr>
-              </a:solidFill>
-            </a:endParaRPr>
+              <a:t>..</a:t>
+            </a:r>
           </a:p>
         </p:txBody>
       </p:sp>
@@ -5258,7 +3523,10 @@
         </p:spPr>
         <p:txBody>
           <a:bodyPr/>
-          <a:p/>
+          <a:lstStyle/>
+          <a:p>
+            <a:endParaRPr/>
+          </a:p>
         </p:txBody>
       </p:sp>
       <p:pic>
@@ -5310,6 +3578,17 @@
               <a:buNone/>
             </a:pPr>
             <a:r>
+              <a:rPr lang="ru-RU" sz="2200" b="1" kern="0" spc="80" dirty="0">
+                <a:solidFill>
+                  <a:srgbClr val="D9BC7A"/>
+                </a:solidFill>
+                <a:latin typeface="Inter" pitchFamily="34" charset="0"/>
+                <a:ea typeface="Inter" pitchFamily="34" charset="-122"/>
+                <a:cs typeface="Inter" pitchFamily="34" charset="-120"/>
+              </a:rPr>
+              <a:t>ПЕРЕДАТЬ</a:t>
+            </a:r>
+            <a:r>
               <a:rPr lang="en-US" sz="2200" b="1" kern="0" spc="80" dirty="0">
                 <a:solidFill>
                   <a:srgbClr val="D9BC7A"/>
@@ -5318,7 +3597,7 @@
                 <a:ea typeface="Inter" pitchFamily="34" charset="-122"/>
                 <a:cs typeface="Inter" pitchFamily="34" charset="-120"/>
               </a:rPr>
-              <a:t>ОТДАТЬ НАМ</a:t>
+              <a:t> НАМ</a:t>
             </a:r>
             <a:endParaRPr lang="en-US" sz="2200" dirty="0"/>
           </a:p>
@@ -5466,8 +3745,8 @@
         </p:nvSpPr>
         <p:spPr>
           <a:xfrm>
-            <a:off x="277092" y="5989320"/>
-            <a:ext cx="11637816" cy="548640"/>
+            <a:off x="777240" y="5989320"/>
+            <a:ext cx="10756087" cy="484631"/>
           </a:xfrm>
           <a:prstGeom prst="roundRect">
             <a:avLst>
@@ -5486,7 +3765,10 @@
         </p:spPr>
         <p:txBody>
           <a:bodyPr/>
-          <a:p/>
+          <a:lstStyle/>
+          <a:p>
+            <a:endParaRPr/>
+          </a:p>
         </p:txBody>
       </p:sp>
       <p:sp>
@@ -5497,7 +3779,7 @@
         </p:nvSpPr>
         <p:spPr>
           <a:xfrm>
-            <a:off x="277092" y="6144767"/>
+            <a:off x="235375" y="6126480"/>
             <a:ext cx="11720944" cy="329184"/>
           </a:xfrm>
           <a:prstGeom prst="rect">
@@ -5542,7 +3824,7 @@
                 <a:ea typeface="Inter" pitchFamily="34" charset="-122"/>
                 <a:cs typeface="Inter" pitchFamily="34" charset="-120"/>
               </a:rPr>
-              <a:t>СТОИМОСТНЫЕ И ВРЕМЕННЫЕ ЗАТРАТЫ ЗА ВАС</a:t>
+              <a:t>СТОИМОСТНЫЕ И ВРЕМЕННЫЕ ЗАТРАТЫ</a:t>
             </a:r>
             <a:endParaRPr lang="en-US" sz="2000" dirty="0"/>
           </a:p>
@@ -5620,7 +3902,7 @@
                 <a:ea typeface="Inter" pitchFamily="34" charset="-122"/>
                 <a:cs typeface="Inter" pitchFamily="34" charset="-120"/>
               </a:rPr>
-              <a:t>ПРИМЕР · ОФИС 300 м², 25 РАБОЧИХ МЕСТ, ОСВОБОДИТЬ ЗА 5 ДНЕЙ</a:t>
+              <a:t>ПРИМЕР · ОФИС 300 м², 25 РАБОЧИХ МЕСТ</a:t>
             </a:r>
             <a:endParaRPr lang="en-US" sz="1050" dirty="0"/>
           </a:p>
@@ -5659,7 +3941,73 @@
                 <a:ea typeface="Inter" pitchFamily="34" charset="-122"/>
                 <a:cs typeface="Inter" pitchFamily="34" charset="-120"/>
               </a:rPr>
-              <a:t>ТРИ ПУТИ — В ДЕНЬГАХ И ЧАСАХ</a:t>
+              <a:t>ТРИ ПУТИ </a:t>
+            </a:r>
+            <a:r>
+              <a:rPr lang="ru-RU" sz="3600" b="1" dirty="0">
+                <a:solidFill>
+                  <a:srgbClr val="0C1D28"/>
+                </a:solidFill>
+                <a:latin typeface="Inter" pitchFamily="34" charset="0"/>
+                <a:ea typeface="Inter" pitchFamily="34" charset="-122"/>
+                <a:cs typeface="Inter" pitchFamily="34" charset="-120"/>
+              </a:rPr>
+              <a:t>(</a:t>
+            </a:r>
+            <a:r>
+              <a:rPr lang="en-US" sz="3600" b="1" dirty="0" err="1">
+                <a:solidFill>
+                  <a:srgbClr val="0C1D28"/>
+                </a:solidFill>
+                <a:latin typeface="Inter" pitchFamily="34" charset="0"/>
+                <a:ea typeface="Inter" pitchFamily="34" charset="-122"/>
+                <a:cs typeface="Inter" pitchFamily="34" charset="-120"/>
+              </a:rPr>
+              <a:t>В</a:t>
+            </a:r>
+            <a:r>
+              <a:rPr lang="en-US" sz="3600" b="1" dirty="0">
+                <a:solidFill>
+                  <a:srgbClr val="0C1D28"/>
+                </a:solidFill>
+                <a:latin typeface="Inter" pitchFamily="34" charset="0"/>
+                <a:ea typeface="Inter" pitchFamily="34" charset="-122"/>
+                <a:cs typeface="Inter" pitchFamily="34" charset="-120"/>
+              </a:rPr>
+              <a:t> ДЕНЬГАХ </a:t>
+            </a:r>
+            <a:r>
+              <a:rPr lang="en-US" sz="3600" b="1" dirty="0" err="1">
+                <a:solidFill>
+                  <a:srgbClr val="0C1D28"/>
+                </a:solidFill>
+                <a:latin typeface="Inter" pitchFamily="34" charset="0"/>
+                <a:ea typeface="Inter" pitchFamily="34" charset="-122"/>
+                <a:cs typeface="Inter" pitchFamily="34" charset="-120"/>
+              </a:rPr>
+              <a:t>И</a:t>
+            </a:r>
+            <a:r>
+              <a:rPr lang="en-US" sz="3600" b="1" dirty="0">
+                <a:solidFill>
+                  <a:srgbClr val="0C1D28"/>
+                </a:solidFill>
+                <a:latin typeface="Inter" pitchFamily="34" charset="0"/>
+                <a:ea typeface="Inter" pitchFamily="34" charset="-122"/>
+                <a:cs typeface="Inter" pitchFamily="34" charset="-120"/>
+              </a:rPr>
+              <a:t> ЧАСАХ</a:t>
+            </a:r>
+            <a:r>
+              <a:rPr lang="ru-RU" sz="3600" b="1" dirty="0">
+                <a:solidFill>
+                  <a:srgbClr val="0C1D28"/>
+                </a:solidFill>
+                <a:latin typeface="Inter" pitchFamily="34" charset="0"/>
+                <a:ea typeface="Inter" pitchFamily="34" charset="-122"/>
+                <a:cs typeface="Inter" pitchFamily="34" charset="-120"/>
+              </a:rPr>
+              <a:t>)</a:t>
             </a:r>
             <a:endParaRPr lang="en-US" sz="3600" dirty="0"/>
           </a:p>
@@ -5693,7 +4041,10 @@
         </p:spPr>
         <p:txBody>
           <a:bodyPr/>
-          <a:p/>
+          <a:lstStyle/>
+          <a:p>
+            <a:endParaRPr/>
+          </a:p>
         </p:txBody>
       </p:sp>
       <p:sp>
@@ -5760,6 +4111,17 @@
               <a:buNone/>
             </a:pPr>
             <a:r>
+              <a:rPr lang="ru-RU" sz="1900" b="1" dirty="0">
+                <a:solidFill>
+                  <a:srgbClr val="0C1D28"/>
+                </a:solidFill>
+                <a:latin typeface="Inter" pitchFamily="34" charset="0"/>
+                <a:ea typeface="Inter" pitchFamily="34" charset="-122"/>
+                <a:cs typeface="Inter" pitchFamily="34" charset="-120"/>
+              </a:rPr>
+              <a:t>20</a:t>
+            </a:r>
+            <a:r>
               <a:rPr lang="en-US" sz="1900" b="1" dirty="0">
                 <a:solidFill>
                   <a:srgbClr val="0C1D28"/>
@@ -5768,7 +4130,7 @@
                 <a:ea typeface="Inter" pitchFamily="34" charset="-122"/>
                 <a:cs typeface="Inter" pitchFamily="34" charset="-120"/>
               </a:rPr>
-              <a:t>420 000 ₽</a:t>
+              <a:t>0 000 ₽</a:t>
             </a:r>
             <a:endParaRPr lang="en-US" sz="1900" dirty="0"/>
           </a:p>
@@ -5802,7 +4164,10 @@
         </p:spPr>
         <p:txBody>
           <a:bodyPr/>
-          <a:p/>
+          <a:lstStyle/>
+          <a:p>
+            <a:endParaRPr/>
+          </a:p>
         </p:txBody>
       </p:sp>
       <p:sp>
@@ -5813,7 +4178,7 @@
         </p:nvSpPr>
         <p:spPr>
           <a:xfrm>
-            <a:off x="1161288" y="2706624"/>
+            <a:off x="953470" y="2651760"/>
             <a:ext cx="365760" cy="237744"/>
           </a:xfrm>
           <a:prstGeom prst="rect">
@@ -5829,8 +4194,36 @@
             <a:pPr marL="0" indent="0">
               <a:buNone/>
             </a:pPr>
-            <a:r>
-              <a:rPr lang="en-US" sz="1100" b="1" kern="0" spc="140" dirty="0">
+            <a:endParaRPr lang="en-US" sz="1600" dirty="0"/>
+          </a:p>
+        </p:txBody>
+      </p:sp>
+      <p:sp>
+        <p:nvSpPr>
+          <p:cNvPr id="9" name="Text 7"/>
+          <p:cNvSpPr txBox="1"/>
+          <p:nvPr/>
+        </p:nvSpPr>
+        <p:spPr>
+          <a:xfrm>
+            <a:off x="1355806" y="2651760"/>
+            <a:ext cx="2192426" cy="237744"/>
+          </a:xfrm>
+          <a:prstGeom prst="rect">
+            <a:avLst/>
+          </a:prstGeom>
+          <a:noFill/>
+          <a:ln/>
+        </p:spPr>
+        <p:txBody>
+          <a:bodyPr wrap="square" lIns="0" tIns="0" rIns="0" bIns="0" rtlCol="0" anchor="t"/>
+          <a:lstStyle/>
+          <a:p>
+            <a:pPr marL="0" indent="0">
+              <a:buNone/>
+            </a:pPr>
+            <a:r>
+              <a:rPr lang="en-US" sz="1600" b="1" kern="0" spc="140" dirty="0">
                 <a:solidFill>
                   <a:srgbClr val="6E5426"/>
                 </a:solidFill>
@@ -5838,48 +4231,9 @@
                 <a:ea typeface="Inter" pitchFamily="34" charset="-122"/>
                 <a:cs typeface="Inter" pitchFamily="34" charset="-120"/>
               </a:rPr>
-              <a:t>A</a:t>
-            </a:r>
-            <a:endParaRPr lang="en-US" sz="1100" dirty="0"/>
-          </a:p>
-        </p:txBody>
-      </p:sp>
-      <p:sp>
-        <p:nvSpPr>
-          <p:cNvPr id="9" name="Text 7"/>
-          <p:cNvSpPr txBox="1"/>
-          <p:nvPr/>
-        </p:nvSpPr>
-        <p:spPr>
-          <a:xfrm>
-            <a:off x="1563624" y="2706624"/>
-            <a:ext cx="2192426" cy="237744"/>
-          </a:xfrm>
-          <a:prstGeom prst="rect">
-            <a:avLst/>
-          </a:prstGeom>
-          <a:noFill/>
-          <a:ln/>
-        </p:spPr>
-        <p:txBody>
-          <a:bodyPr wrap="square" lIns="0" tIns="0" rIns="0" bIns="0" rtlCol="0" anchor="t"/>
-          <a:lstStyle/>
-          <a:p>
-            <a:pPr marL="0" indent="0">
-              <a:buNone/>
-            </a:pPr>
-            <a:r>
-              <a:rPr lang="en-US" sz="1100" b="1" kern="0" spc="140" dirty="0">
-                <a:solidFill>
-                  <a:srgbClr val="6E5426"/>
-                </a:solidFill>
-                <a:latin typeface="Inter" pitchFamily="34" charset="0"/>
-                <a:ea typeface="Inter" pitchFamily="34" charset="-122"/>
-                <a:cs typeface="Inter" pitchFamily="34" charset="-120"/>
-              </a:rPr>
               <a:t>ВЫБРОСИТЬ ВСЁ</a:t>
             </a:r>
-            <a:endParaRPr lang="en-US" sz="1100" dirty="0"/>
+            <a:endParaRPr lang="en-US" sz="1600" dirty="0"/>
           </a:p>
         </p:txBody>
       </p:sp>
@@ -5916,7 +4270,29 @@
                 <a:ea typeface="Inter" pitchFamily="34" charset="-122"/>
                 <a:cs typeface="Inter" pitchFamily="34" charset="-120"/>
               </a:rPr>
-              <a:t>− 28 000 ₽</a:t>
+              <a:t>− </a:t>
+            </a:r>
+            <a:r>
+              <a:rPr lang="ru-RU" sz="3100" b="1" dirty="0">
+                <a:solidFill>
+                  <a:srgbClr val="6F6A62"/>
+                </a:solidFill>
+                <a:latin typeface="Inter" pitchFamily="34" charset="0"/>
+                <a:ea typeface="Inter" pitchFamily="34" charset="-122"/>
+                <a:cs typeface="Inter" pitchFamily="34" charset="-120"/>
+              </a:rPr>
+              <a:t>30</a:t>
+            </a:r>
+            <a:r>
+              <a:rPr lang="en-US" sz="3100" b="1" dirty="0">
+                <a:solidFill>
+                  <a:srgbClr val="6F6A62"/>
+                </a:solidFill>
+                <a:latin typeface="Inter" pitchFamily="34" charset="0"/>
+                <a:ea typeface="Inter" pitchFamily="34" charset="-122"/>
+                <a:cs typeface="Inter" pitchFamily="34" charset="-120"/>
+              </a:rPr>
+              <a:t> 000 ₽</a:t>
             </a:r>
             <a:endParaRPr lang="en-US" sz="3100" dirty="0"/>
           </a:p>
@@ -5930,7 +4306,7 @@
         </p:nvSpPr>
         <p:spPr>
           <a:xfrm>
-            <a:off x="1161288" y="3913632"/>
+            <a:off x="1161288" y="3785616"/>
             <a:ext cx="2594762" cy="10973"/>
           </a:xfrm>
           <a:prstGeom prst="rect">
@@ -5943,7 +4319,10 @@
         </p:spPr>
         <p:txBody>
           <a:bodyPr/>
-          <a:p/>
+          <a:lstStyle/>
+          <a:p>
+            <a:endParaRPr sz="3200"/>
+          </a:p>
         </p:txBody>
       </p:sp>
       <p:sp>
@@ -5954,7 +4333,7 @@
         </p:nvSpPr>
         <p:spPr>
           <a:xfrm>
-            <a:off x="1161288" y="4114800"/>
+            <a:off x="1161288" y="3986784"/>
             <a:ext cx="2594762" cy="219456"/>
           </a:xfrm>
           <a:prstGeom prst="rect">
@@ -5971,7 +4350,7 @@
               <a:buNone/>
             </a:pPr>
             <a:r>
-              <a:rPr lang="en-US" sz="1000" b="1" kern="0" spc="160" dirty="0">
+              <a:rPr lang="en-US" sz="1400" b="1" kern="0" spc="160" dirty="0">
                 <a:solidFill>
                   <a:srgbClr val="6F6A62"/>
                 </a:solidFill>
@@ -5981,7 +4360,7 @@
               </a:rPr>
               <a:t>ВАШЕ ВРЕМЯ</a:t>
             </a:r>
-            <a:endParaRPr lang="en-US" sz="1000" dirty="0"/>
+            <a:endParaRPr lang="en-US" sz="1400" dirty="0"/>
           </a:p>
         </p:txBody>
       </p:sp>
@@ -5993,7 +4372,7 @@
         </p:nvSpPr>
         <p:spPr>
           <a:xfrm>
-            <a:off x="1161288" y="4389120"/>
+            <a:off x="1154638" y="4351437"/>
             <a:ext cx="2594762" cy="310896"/>
           </a:xfrm>
           <a:prstGeom prst="rect">
@@ -6010,7 +4389,7 @@
               <a:buNone/>
             </a:pPr>
             <a:r>
-              <a:rPr lang="en-US" sz="1700" b="1" dirty="0">
+              <a:rPr lang="en-US" sz="2800" b="1" dirty="0">
                 <a:solidFill>
                   <a:srgbClr val="0C1D28"/>
                 </a:solidFill>
@@ -6018,9 +4397,20 @@
                 <a:ea typeface="Inter" pitchFamily="34" charset="-122"/>
                 <a:cs typeface="Inter" pitchFamily="34" charset="-120"/>
               </a:rPr>
-              <a:t>~ 1 день</a:t>
-            </a:r>
-            <a:endParaRPr lang="en-US" sz="1700" dirty="0"/>
+              <a:t>~ </a:t>
+            </a:r>
+            <a:r>
+              <a:rPr lang="ru-RU" sz="2800" b="1" dirty="0">
+                <a:solidFill>
+                  <a:srgbClr val="0C1D28"/>
+                </a:solidFill>
+                <a:latin typeface="Inter" pitchFamily="34" charset="0"/>
+                <a:ea typeface="Inter" pitchFamily="34" charset="-122"/>
+                <a:cs typeface="Inter" pitchFamily="34" charset="-120"/>
+              </a:rPr>
+              <a:t>3 часа</a:t>
+            </a:r>
+            <a:endParaRPr lang="en-US" sz="2800" dirty="0"/>
           </a:p>
         </p:txBody>
       </p:sp>
@@ -6032,7 +4422,7 @@
         </p:nvSpPr>
         <p:spPr>
           <a:xfrm>
-            <a:off x="1161288" y="4773168"/>
+            <a:off x="1161288" y="4956048"/>
             <a:ext cx="2594762" cy="713232"/>
           </a:xfrm>
           <a:prstGeom prst="rect">
@@ -6052,7 +4442,7 @@
               <a:buNone/>
             </a:pPr>
             <a:r>
-              <a:rPr lang="en-US" sz="1100" dirty="0">
+              <a:rPr lang="ru-RU" sz="1400" dirty="0">
                 <a:solidFill>
                   <a:srgbClr val="6F6A62"/>
                 </a:solidFill>
@@ -6060,29 +4450,9 @@
                 <a:ea typeface="Inter" pitchFamily="34" charset="-122"/>
                 <a:cs typeface="Inter" pitchFamily="34" charset="-120"/>
               </a:rPr>
-              <a:t>Вывоз и утилизация</a:t>
-            </a:r>
-            <a:endParaRPr lang="en-US" sz="1100" dirty="0"/>
-          </a:p>
-          <a:p>
-            <a:pPr marL="0" indent="0">
-              <a:lnSpc>
-                <a:spcPts val="1550"/>
-              </a:lnSpc>
-              <a:buNone/>
-            </a:pPr>
-            <a:r>
-              <a:rPr lang="en-US" sz="1100" dirty="0">
-                <a:solidFill>
-                  <a:srgbClr val="6F6A62"/>
-                </a:solidFill>
-                <a:latin typeface="Inter" pitchFamily="34" charset="0"/>
-                <a:ea typeface="Inter" pitchFamily="34" charset="-122"/>
-                <a:cs typeface="Inter" pitchFamily="34" charset="-120"/>
-              </a:rPr>
-              <a:t>за ваш счёт</a:t>
-            </a:r>
-            <a:endParaRPr lang="en-US" sz="1100" dirty="0"/>
+              <a:t>Объект свободен к сроку</a:t>
+            </a:r>
+            <a:endParaRPr lang="en-US" sz="1400" dirty="0"/>
           </a:p>
         </p:txBody>
       </p:sp>
@@ -6114,7 +4484,10 @@
         </p:spPr>
         <p:txBody>
           <a:bodyPr/>
-          <a:p/>
+          <a:lstStyle/>
+          <a:p>
+            <a:endParaRPr/>
+          </a:p>
         </p:txBody>
       </p:sp>
       <p:sp>
@@ -6125,7 +4498,7 @@
         </p:nvSpPr>
         <p:spPr>
           <a:xfrm>
-            <a:off x="4798466" y="2706624"/>
+            <a:off x="4590648" y="2651760"/>
             <a:ext cx="365760" cy="237744"/>
           </a:xfrm>
           <a:prstGeom prst="rect">
@@ -6141,8 +4514,36 @@
             <a:pPr marL="0" indent="0">
               <a:buNone/>
             </a:pPr>
-            <a:r>
-              <a:rPr lang="en-US" sz="1100" b="1" kern="0" spc="140" dirty="0">
+            <a:endParaRPr lang="en-US" sz="1600" dirty="0"/>
+          </a:p>
+        </p:txBody>
+      </p:sp>
+      <p:sp>
+        <p:nvSpPr>
+          <p:cNvPr id="17" name="Text 15"/>
+          <p:cNvSpPr txBox="1"/>
+          <p:nvPr/>
+        </p:nvSpPr>
+        <p:spPr>
+          <a:xfrm>
+            <a:off x="4992984" y="2651760"/>
+            <a:ext cx="2192426" cy="237744"/>
+          </a:xfrm>
+          <a:prstGeom prst="rect">
+            <a:avLst/>
+          </a:prstGeom>
+          <a:noFill/>
+          <a:ln/>
+        </p:spPr>
+        <p:txBody>
+          <a:bodyPr wrap="square" lIns="0" tIns="0" rIns="0" bIns="0" rtlCol="0" anchor="t"/>
+          <a:lstStyle/>
+          <a:p>
+            <a:pPr marL="0" indent="0">
+              <a:buNone/>
+            </a:pPr>
+            <a:r>
+              <a:rPr lang="en-US" sz="1600" b="1" kern="0" spc="140" dirty="0">
                 <a:solidFill>
                   <a:srgbClr val="6E5426"/>
                 </a:solidFill>
@@ -6150,48 +4551,9 @@
                 <a:ea typeface="Inter" pitchFamily="34" charset="-122"/>
                 <a:cs typeface="Inter" pitchFamily="34" charset="-120"/>
               </a:rPr>
-              <a:t>B</a:t>
-            </a:r>
-            <a:endParaRPr lang="en-US" sz="1100" dirty="0"/>
-          </a:p>
-        </p:txBody>
-      </p:sp>
-      <p:sp>
-        <p:nvSpPr>
-          <p:cNvPr id="17" name="Text 15"/>
-          <p:cNvSpPr txBox="1"/>
-          <p:nvPr/>
-        </p:nvSpPr>
-        <p:spPr>
-          <a:xfrm>
-            <a:off x="5200802" y="2706624"/>
-            <a:ext cx="2192426" cy="237744"/>
-          </a:xfrm>
-          <a:prstGeom prst="rect">
-            <a:avLst/>
-          </a:prstGeom>
-          <a:noFill/>
-          <a:ln/>
-        </p:spPr>
-        <p:txBody>
-          <a:bodyPr wrap="square" lIns="0" tIns="0" rIns="0" bIns="0" rtlCol="0" anchor="t"/>
-          <a:lstStyle/>
-          <a:p>
-            <a:pPr marL="0" indent="0">
-              <a:buNone/>
-            </a:pPr>
-            <a:r>
-              <a:rPr lang="en-US" sz="1100" b="1" kern="0" spc="140" dirty="0">
-                <a:solidFill>
-                  <a:srgbClr val="6E5426"/>
-                </a:solidFill>
-                <a:latin typeface="Inter" pitchFamily="34" charset="0"/>
-                <a:ea typeface="Inter" pitchFamily="34" charset="-122"/>
-                <a:cs typeface="Inter" pitchFamily="34" charset="-120"/>
-              </a:rPr>
               <a:t>ПРОДАТЬ САМИМ</a:t>
             </a:r>
-            <a:endParaRPr lang="en-US" sz="1100" dirty="0"/>
+            <a:endParaRPr lang="en-US" sz="1600" dirty="0"/>
           </a:p>
         </p:txBody>
       </p:sp>
@@ -6228,7 +4590,29 @@
                 <a:ea typeface="Inter" pitchFamily="34" charset="-122"/>
                 <a:cs typeface="Inter" pitchFamily="34" charset="-120"/>
               </a:rPr>
-              <a:t>+ 73 000 ₽</a:t>
+              <a:t>+ </a:t>
+            </a:r>
+            <a:r>
+              <a:rPr lang="ru-RU" sz="3100" b="1" dirty="0">
+                <a:solidFill>
+                  <a:srgbClr val="0C1D28"/>
+                </a:solidFill>
+                <a:latin typeface="Inter" pitchFamily="34" charset="0"/>
+                <a:ea typeface="Inter" pitchFamily="34" charset="-122"/>
+                <a:cs typeface="Inter" pitchFamily="34" charset="-120"/>
+              </a:rPr>
+              <a:t>165</a:t>
+            </a:r>
+            <a:r>
+              <a:rPr lang="en-US" sz="3100" b="1" dirty="0">
+                <a:solidFill>
+                  <a:srgbClr val="0C1D28"/>
+                </a:solidFill>
+                <a:latin typeface="Inter" pitchFamily="34" charset="0"/>
+                <a:ea typeface="Inter" pitchFamily="34" charset="-122"/>
+                <a:cs typeface="Inter" pitchFamily="34" charset="-120"/>
+              </a:rPr>
+              <a:t> 000 ₽</a:t>
             </a:r>
             <a:endParaRPr lang="en-US" sz="3100" dirty="0"/>
           </a:p>
@@ -6242,7 +4626,7 @@
         </p:nvSpPr>
         <p:spPr>
           <a:xfrm>
-            <a:off x="4798466" y="3913632"/>
+            <a:off x="4798466" y="3785616"/>
             <a:ext cx="2594762" cy="10973"/>
           </a:xfrm>
           <a:prstGeom prst="rect">
@@ -6255,7 +4639,10 @@
         </p:spPr>
         <p:txBody>
           <a:bodyPr/>
-          <a:p/>
+          <a:lstStyle/>
+          <a:p>
+            <a:endParaRPr sz="3200"/>
+          </a:p>
         </p:txBody>
       </p:sp>
       <p:sp>
@@ -6266,7 +4653,7 @@
         </p:nvSpPr>
         <p:spPr>
           <a:xfrm>
-            <a:off x="4798466" y="4114800"/>
+            <a:off x="4798466" y="3986784"/>
             <a:ext cx="2594762" cy="219456"/>
           </a:xfrm>
           <a:prstGeom prst="rect">
@@ -6283,7 +4670,7 @@
               <a:buNone/>
             </a:pPr>
             <a:r>
-              <a:rPr lang="en-US" sz="1000" b="1" kern="0" spc="160" dirty="0">
+              <a:rPr lang="en-US" sz="1400" b="1" kern="0" spc="160" dirty="0">
                 <a:solidFill>
                   <a:srgbClr val="6F6A62"/>
                 </a:solidFill>
@@ -6293,7 +4680,7 @@
               </a:rPr>
               <a:t>ВАШЕ ВРЕМЯ</a:t>
             </a:r>
-            <a:endParaRPr lang="en-US" sz="1000" dirty="0"/>
+            <a:endParaRPr lang="en-US" sz="1400" dirty="0"/>
           </a:p>
         </p:txBody>
       </p:sp>
@@ -6305,7 +4692,7 @@
         </p:nvSpPr>
         <p:spPr>
           <a:xfrm>
-            <a:off x="4798466" y="4389120"/>
+            <a:off x="4791816" y="4351437"/>
             <a:ext cx="2594762" cy="310896"/>
           </a:xfrm>
           <a:prstGeom prst="rect">
@@ -6322,7 +4709,7 @@
               <a:buNone/>
             </a:pPr>
             <a:r>
-              <a:rPr lang="en-US" sz="1700" b="1" dirty="0">
+              <a:rPr lang="en-US" sz="2800" b="1" dirty="0">
                 <a:solidFill>
                   <a:srgbClr val="0C1D28"/>
                 </a:solidFill>
@@ -6330,9 +4717,42 @@
                 <a:ea typeface="Inter" pitchFamily="34" charset="-122"/>
                 <a:cs typeface="Inter" pitchFamily="34" charset="-120"/>
               </a:rPr>
-              <a:t>~ 30 часов</a:t>
-            </a:r>
-            <a:endParaRPr lang="en-US" sz="1700" dirty="0"/>
+              <a:t>~ </a:t>
+            </a:r>
+            <a:r>
+              <a:rPr lang="ru-RU" sz="2800" b="1" u="sng" dirty="0">
+                <a:solidFill>
+                  <a:srgbClr val="0C1D28"/>
+                </a:solidFill>
+                <a:latin typeface="Inter" pitchFamily="34" charset="0"/>
+                <a:ea typeface="Inter" pitchFamily="34" charset="-122"/>
+                <a:cs typeface="Inter" pitchFamily="34" charset="-120"/>
+              </a:rPr>
+              <a:t>4</a:t>
+            </a:r>
+            <a:r>
+              <a:rPr lang="en-US" sz="2800" b="1" u="sng" dirty="0">
+                <a:solidFill>
+                  <a:srgbClr val="0C1D28"/>
+                </a:solidFill>
+                <a:latin typeface="Inter" pitchFamily="34" charset="0"/>
+                <a:ea typeface="Inter" pitchFamily="34" charset="-122"/>
+                <a:cs typeface="Inter" pitchFamily="34" charset="-120"/>
+              </a:rPr>
+              <a:t>0</a:t>
+            </a:r>
+            <a:r>
+              <a:rPr lang="en-US" sz="2800" b="1" dirty="0">
+                <a:solidFill>
+                  <a:srgbClr val="0C1D28"/>
+                </a:solidFill>
+                <a:latin typeface="Inter" pitchFamily="34" charset="0"/>
+                <a:ea typeface="Inter" pitchFamily="34" charset="-122"/>
+                <a:cs typeface="Inter" pitchFamily="34" charset="-120"/>
+              </a:rPr>
+              <a:t> часов</a:t>
+            </a:r>
+            <a:endParaRPr lang="en-US" sz="2800" dirty="0"/>
           </a:p>
         </p:txBody>
       </p:sp>
@@ -6344,7 +4764,7 @@
         </p:nvSpPr>
         <p:spPr>
           <a:xfrm>
-            <a:off x="4798466" y="4773168"/>
+            <a:off x="4798466" y="4956048"/>
             <a:ext cx="2594762" cy="713232"/>
           </a:xfrm>
           <a:prstGeom prst="rect">
@@ -6364,7 +4784,7 @@
               <a:buNone/>
             </a:pPr>
             <a:r>
-              <a:rPr lang="en-US" sz="1100" dirty="0">
+              <a:rPr lang="ru-RU" sz="1400" dirty="0">
                 <a:solidFill>
                   <a:srgbClr val="6F6A62"/>
                 </a:solidFill>
@@ -6372,29 +4792,9 @@
                 <a:ea typeface="Inter" pitchFamily="34" charset="-122"/>
                 <a:cs typeface="Inter" pitchFamily="34" charset="-120"/>
               </a:rPr>
-              <a:t>ИТ — за полцены.</a:t>
-            </a:r>
-            <a:endParaRPr lang="en-US" sz="1100" dirty="0"/>
-          </a:p>
-          <a:p>
-            <a:pPr marL="0" indent="0">
-              <a:lnSpc>
-                <a:spcPts val="1550"/>
-              </a:lnSpc>
-              <a:buNone/>
-            </a:pPr>
-            <a:r>
-              <a:rPr lang="en-US" sz="1100" dirty="0">
-                <a:solidFill>
-                  <a:srgbClr val="6F6A62"/>
-                </a:solidFill>
-                <a:latin typeface="Inter" pitchFamily="34" charset="0"/>
-                <a:ea typeface="Inter" pitchFamily="34" charset="-122"/>
-                <a:cs typeface="Inter" pitchFamily="34" charset="-120"/>
-              </a:rPr>
-              <a:t>Мебель — на вывоз</a:t>
-            </a:r>
-            <a:endParaRPr lang="en-US" sz="1100" dirty="0"/>
+              <a:t>Удобно, если нет дедлайна и есть свободные руки</a:t>
+            </a:r>
+            <a:endParaRPr lang="en-US" sz="1400" dirty="0"/>
           </a:p>
         </p:txBody>
       </p:sp>
@@ -6426,7 +4826,10 @@
         </p:spPr>
         <p:txBody>
           <a:bodyPr/>
-          <a:p/>
+          <a:lstStyle/>
+          <a:p>
+            <a:endParaRPr/>
+          </a:p>
         </p:txBody>
       </p:sp>
       <p:sp>
@@ -6437,7 +4840,7 @@
         </p:nvSpPr>
         <p:spPr>
           <a:xfrm>
-            <a:off x="8435645" y="2706624"/>
+            <a:off x="8227827" y="2651760"/>
             <a:ext cx="365760" cy="237744"/>
           </a:xfrm>
           <a:prstGeom prst="rect">
@@ -6453,8 +4856,36 @@
             <a:pPr marL="0" indent="0">
               <a:buNone/>
             </a:pPr>
-            <a:r>
-              <a:rPr lang="en-US" sz="1100" b="1" kern="0" spc="140" dirty="0">
+            <a:endParaRPr lang="en-US" sz="1600" dirty="0"/>
+          </a:p>
+        </p:txBody>
+      </p:sp>
+      <p:sp>
+        <p:nvSpPr>
+          <p:cNvPr id="25" name="Text 23"/>
+          <p:cNvSpPr txBox="1"/>
+          <p:nvPr/>
+        </p:nvSpPr>
+        <p:spPr>
+          <a:xfrm>
+            <a:off x="8630163" y="2651760"/>
+            <a:ext cx="2192426" cy="237744"/>
+          </a:xfrm>
+          <a:prstGeom prst="rect">
+            <a:avLst/>
+          </a:prstGeom>
+          <a:noFill/>
+          <a:ln/>
+        </p:spPr>
+        <p:txBody>
+          <a:bodyPr wrap="square" lIns="0" tIns="0" rIns="0" bIns="0" rtlCol="0" anchor="t"/>
+          <a:lstStyle/>
+          <a:p>
+            <a:pPr marL="0" indent="0">
+              <a:buNone/>
+            </a:pPr>
+            <a:r>
+              <a:rPr lang="ru-RU" sz="1600" b="1" kern="0" spc="140" dirty="0">
                 <a:solidFill>
                   <a:srgbClr val="C89B45"/>
                 </a:solidFill>
@@ -6462,38 +4893,10 @@
                 <a:ea typeface="Inter" pitchFamily="34" charset="-122"/>
                 <a:cs typeface="Inter" pitchFamily="34" charset="-120"/>
               </a:rPr>
-              <a:t>C</a:t>
-            </a:r>
-            <a:endParaRPr lang="en-US" sz="1100" dirty="0"/>
-          </a:p>
-        </p:txBody>
-      </p:sp>
-      <p:sp>
-        <p:nvSpPr>
-          <p:cNvPr id="25" name="Text 23"/>
-          <p:cNvSpPr txBox="1"/>
-          <p:nvPr/>
-        </p:nvSpPr>
-        <p:spPr>
-          <a:xfrm>
-            <a:off x="8837981" y="2706624"/>
-            <a:ext cx="2192426" cy="237744"/>
-          </a:xfrm>
-          <a:prstGeom prst="rect">
-            <a:avLst/>
-          </a:prstGeom>
-          <a:noFill/>
-          <a:ln/>
-        </p:spPr>
-        <p:txBody>
-          <a:bodyPr wrap="square" lIns="0" tIns="0" rIns="0" bIns="0" rtlCol="0" anchor="t"/>
-          <a:lstStyle/>
-          <a:p>
-            <a:pPr marL="0" indent="0">
-              <a:buNone/>
-            </a:pPr>
-            <a:r>
-              <a:rPr lang="en-US" sz="1100" b="1" kern="0" spc="140" dirty="0">
+              <a:t>ПЕРЕДАТЬ</a:t>
+            </a:r>
+            <a:r>
+              <a:rPr lang="en-US" sz="1600" b="1" kern="0" spc="140" dirty="0">
                 <a:solidFill>
                   <a:srgbClr val="C89B45"/>
                 </a:solidFill>
@@ -6501,9 +4904,9 @@
                 <a:ea typeface="Inter" pitchFamily="34" charset="-122"/>
                 <a:cs typeface="Inter" pitchFamily="34" charset="-120"/>
               </a:rPr>
-              <a:t>ОТДАТЬ НАМ</a:t>
-            </a:r>
-            <a:endParaRPr lang="en-US" sz="1100" dirty="0"/>
+              <a:t> НАМ</a:t>
+            </a:r>
+            <a:endParaRPr lang="en-US" sz="1600" dirty="0"/>
           </a:p>
         </p:txBody>
       </p:sp>
@@ -6534,15 +4937,53 @@
             <a:r>
               <a:rPr lang="en-US" sz="3100" b="1" dirty="0">
                 <a:solidFill>
-                  <a:srgbClr val="D9BC7A"/>
-                </a:solidFill>
-                <a:latin typeface="Inter" pitchFamily="34" charset="0"/>
-                <a:ea typeface="Inter" pitchFamily="34" charset="-122"/>
-                <a:cs typeface="Inter" pitchFamily="34" charset="-120"/>
-              </a:rPr>
-              <a:t>+ 248 000 ₽</a:t>
-            </a:r>
-            <a:endParaRPr lang="en-US" sz="3100" dirty="0"/>
+                  <a:schemeClr val="accent4">
+                    <a:lumMod val="60000"/>
+                    <a:lumOff val="40000"/>
+                  </a:schemeClr>
+                </a:solidFill>
+                <a:latin typeface="Inter" pitchFamily="34" charset="0"/>
+                <a:ea typeface="Inter" pitchFamily="34" charset="-122"/>
+                <a:cs typeface="Inter" pitchFamily="34" charset="-120"/>
+              </a:rPr>
+              <a:t>+ </a:t>
+            </a:r>
+            <a:r>
+              <a:rPr lang="ru-RU" sz="3100" b="1" dirty="0">
+                <a:solidFill>
+                  <a:schemeClr val="accent4">
+                    <a:lumMod val="60000"/>
+                    <a:lumOff val="40000"/>
+                  </a:schemeClr>
+                </a:solidFill>
+                <a:latin typeface="Inter" pitchFamily="34" charset="0"/>
+                <a:ea typeface="Inter" pitchFamily="34" charset="-122"/>
+                <a:cs typeface="Inter" pitchFamily="34" charset="-120"/>
+              </a:rPr>
+              <a:t>140</a:t>
+            </a:r>
+            <a:r>
+              <a:rPr lang="en-US" sz="3100" b="1" dirty="0">
+                <a:solidFill>
+                  <a:schemeClr val="accent4">
+                    <a:lumMod val="60000"/>
+                    <a:lumOff val="40000"/>
+                  </a:schemeClr>
+                </a:solidFill>
+                <a:latin typeface="Inter" pitchFamily="34" charset="0"/>
+                <a:ea typeface="Inter" pitchFamily="34" charset="-122"/>
+                <a:cs typeface="Inter" pitchFamily="34" charset="-120"/>
+              </a:rPr>
+              <a:t> 000 ₽</a:t>
+            </a:r>
+            <a:endParaRPr lang="en-US" sz="3100" dirty="0">
+              <a:solidFill>
+                <a:schemeClr val="accent4">
+                  <a:lumMod val="60000"/>
+                  <a:lumOff val="40000"/>
+                </a:schemeClr>
+              </a:solidFill>
+            </a:endParaRPr>
           </a:p>
         </p:txBody>
       </p:sp>
@@ -6554,7 +4995,7 @@
         </p:nvSpPr>
         <p:spPr>
           <a:xfrm>
-            <a:off x="8435645" y="3913632"/>
+            <a:off x="8435645" y="3785616"/>
             <a:ext cx="2594762" cy="10973"/>
           </a:xfrm>
           <a:prstGeom prst="rect">
@@ -6567,7 +5008,10 @@
         </p:spPr>
         <p:txBody>
           <a:bodyPr/>
-          <a:p/>
+          <a:lstStyle/>
+          <a:p>
+            <a:endParaRPr sz="3200"/>
+          </a:p>
         </p:txBody>
       </p:sp>
       <p:sp>
@@ -6578,7 +5022,7 @@
         </p:nvSpPr>
         <p:spPr>
           <a:xfrm>
-            <a:off x="8435645" y="4114800"/>
+            <a:off x="8435645" y="3986784"/>
             <a:ext cx="2594762" cy="219456"/>
           </a:xfrm>
           <a:prstGeom prst="rect">
@@ -6595,7 +5039,7 @@
               <a:buNone/>
             </a:pPr>
             <a:r>
-              <a:rPr lang="en-US" sz="1000" b="1" kern="0" spc="160" dirty="0">
+              <a:rPr lang="en-US" sz="1400" b="1" kern="0" spc="160" dirty="0">
                 <a:solidFill>
                   <a:srgbClr val="9CAAB1"/>
                 </a:solidFill>
@@ -6605,7 +5049,7 @@
               </a:rPr>
               <a:t>ВАШЕ ВРЕМЯ</a:t>
             </a:r>
-            <a:endParaRPr lang="en-US" sz="1000" dirty="0"/>
+            <a:endParaRPr lang="en-US" sz="1400" dirty="0"/>
           </a:p>
         </p:txBody>
       </p:sp>
@@ -6617,7 +5061,7 @@
         </p:nvSpPr>
         <p:spPr>
           <a:xfrm>
-            <a:off x="8435645" y="4389120"/>
+            <a:off x="8428995" y="4351437"/>
             <a:ext cx="2594762" cy="310896"/>
           </a:xfrm>
           <a:prstGeom prst="rect">
@@ -6634,17 +5078,16 @@
               <a:buNone/>
             </a:pPr>
             <a:r>
-              <a:rPr lang="en-US" sz="1700" b="1" dirty="0">
+              <a:rPr lang="ru-RU" sz="2800" b="1" dirty="0">
                 <a:solidFill>
                   <a:srgbClr val="F7F1E7"/>
                 </a:solidFill>
                 <a:latin typeface="Inter" pitchFamily="34" charset="0"/>
                 <a:ea typeface="Inter" pitchFamily="34" charset="-122"/>
-                <a:cs typeface="Inter" pitchFamily="34" charset="-120"/>
-              </a:rPr>
-              <a:t>до 90 минут</a:t>
-            </a:r>
-            <a:endParaRPr lang="en-US" sz="1700" dirty="0"/>
+              </a:rPr>
+              <a:t>1 час</a:t>
+            </a:r>
+            <a:endParaRPr lang="en-US" sz="2800" dirty="0"/>
           </a:p>
         </p:txBody>
       </p:sp>
@@ -6656,7 +5099,7 @@
         </p:nvSpPr>
         <p:spPr>
           <a:xfrm>
-            <a:off x="8435645" y="4773168"/>
+            <a:off x="8435645" y="4956048"/>
             <a:ext cx="2594762" cy="713232"/>
           </a:xfrm>
           <a:prstGeom prst="rect">
@@ -6676,7 +5119,7 @@
               <a:buNone/>
             </a:pPr>
             <a:r>
-              <a:rPr lang="en-US" sz="1100" dirty="0">
+              <a:rPr lang="en-US" sz="1400" dirty="0">
                 <a:solidFill>
                   <a:srgbClr val="9CAAB1"/>
                 </a:solidFill>
@@ -6686,7 +5129,7 @@
               </a:rPr>
               <a:t>420 000 ₽ − услуга 172 000 ₽</a:t>
             </a:r>
-            <a:endParaRPr lang="en-US" sz="1100" dirty="0"/>
+            <a:endParaRPr lang="en-US" sz="1400" dirty="0"/>
           </a:p>
           <a:p>
             <a:pPr marL="0" indent="0">
@@ -6696,7 +5139,7 @@
               <a:buNone/>
             </a:pPr>
             <a:r>
-              <a:rPr lang="en-US" sz="1100" dirty="0">
+              <a:rPr lang="en-US" sz="1400" dirty="0">
                 <a:solidFill>
                   <a:srgbClr val="9CAAB1"/>
                 </a:solidFill>
@@ -6706,46 +5149,7 @@
               </a:rPr>
               <a:t>(25 000 ₽ + 35%)</a:t>
             </a:r>
-            <a:endParaRPr lang="en-US" sz="1100" dirty="0"/>
-          </a:p>
-        </p:txBody>
-      </p:sp>
-      <p:sp>
-        <p:nvSpPr>
-          <p:cNvPr id="31" name="Text 29"/>
-          <p:cNvSpPr txBox="1"/>
-          <p:nvPr/>
-        </p:nvSpPr>
-        <p:spPr>
-          <a:xfrm>
-            <a:off x="777240" y="5870448"/>
-            <a:ext cx="10637215" cy="274320"/>
-          </a:xfrm>
-          <a:prstGeom prst="rect">
-            <a:avLst/>
-          </a:prstGeom>
-          <a:noFill/>
-          <a:ln/>
-        </p:spPr>
-        <p:txBody>
-          <a:bodyPr wrap="square" lIns="0" tIns="0" rIns="0" bIns="0" rtlCol="0" anchor="t"/>
-          <a:lstStyle/>
-          <a:p>
-            <a:pPr marL="0" indent="0">
-              <a:buNone/>
-            </a:pPr>
-            <a:r>
-              <a:rPr lang="en-US" sz="1200" i="1" dirty="0">
-                <a:solidFill>
-                  <a:srgbClr val="6F6A62"/>
-                </a:solidFill>
-                <a:latin typeface="Inter" pitchFamily="34" charset="0"/>
-                <a:ea typeface="Inter" pitchFamily="34" charset="-122"/>
-                <a:cs typeface="Inter" pitchFamily="34" charset="-120"/>
-              </a:rPr>
-              <a:t>Пример по референсному объекту.</a:t>
-            </a:r>
-            <a:endParaRPr lang="en-US" sz="1200" dirty="0"/>
+            <a:endParaRPr lang="en-US" sz="1400" dirty="0"/>
           </a:p>
         </p:txBody>
       </p:sp>
@@ -6848,7 +5252,10 @@
         </p:spPr>
         <p:txBody>
           <a:bodyPr/>
-          <a:p/>
+          <a:lstStyle/>
+          <a:p>
+            <a:endParaRPr/>
+          </a:p>
         </p:txBody>
       </p:sp>
       <p:sp>
@@ -6877,7 +5284,10 @@
         </p:spPr>
         <p:txBody>
           <a:bodyPr/>
-          <a:p/>
+          <a:lstStyle/>
+          <a:p>
+            <a:endParaRPr/>
+          </a:p>
         </p:txBody>
       </p:sp>
       <p:sp>
@@ -6905,7 +5315,7 @@
               <a:buNone/>
             </a:pPr>
             <a:r>
-              <a:rPr lang="en-US" sz="1200" b="1" kern="0" spc="160" dirty="0">
+              <a:rPr lang="en-US" sz="2000" b="1" kern="0" spc="160" dirty="0">
                 <a:solidFill>
                   <a:srgbClr val="C89B45"/>
                 </a:solidFill>
@@ -6915,7 +5325,7 @@
               </a:rPr>
               <a:t>01</a:t>
             </a:r>
-            <a:endParaRPr lang="en-US" sz="1200" dirty="0"/>
+            <a:endParaRPr lang="en-US" sz="2000" dirty="0"/>
           </a:p>
         </p:txBody>
       </p:sp>
@@ -6927,8 +5337,8 @@
         </p:nvSpPr>
         <p:spPr>
           <a:xfrm>
-            <a:off x="777240" y="4023360"/>
-            <a:ext cx="1966509" cy="603504"/>
+            <a:off x="595745" y="4151376"/>
+            <a:ext cx="2349172" cy="603504"/>
           </a:xfrm>
           <a:prstGeom prst="rect">
             <a:avLst/>
@@ -6947,7 +5357,7 @@
               <a:buNone/>
             </a:pPr>
             <a:r>
-              <a:rPr lang="ru-RU" sz="1350" b="1" dirty="0">
+              <a:rPr lang="ru-RU" sz="1600" b="1" dirty="0">
                 <a:solidFill>
                   <a:srgbClr val="0C1D28"/>
                 </a:solidFill>
@@ -6957,49 +5367,25 @@
               </a:rPr>
               <a:t>СООБЩАЕТЕ</a:t>
             </a:r>
-            <a:endParaRPr lang="en-US" sz="1350" dirty="0"/>
-          </a:p>
-        </p:txBody>
-      </p:sp>
-      <p:sp>
-        <p:nvSpPr>
-          <p:cNvPr id="9" name="Text 6"/>
-          <p:cNvSpPr txBox="1"/>
-          <p:nvPr/>
-        </p:nvSpPr>
-        <p:spPr>
-          <a:xfrm>
-            <a:off x="777240" y="4754880"/>
-            <a:ext cx="1966509" cy="786384"/>
-          </a:xfrm>
-          <a:prstGeom prst="rect">
-            <a:avLst/>
-          </a:prstGeom>
-          <a:noFill/>
-          <a:ln/>
-        </p:spPr>
-        <p:txBody>
-          <a:bodyPr wrap="square" lIns="0" tIns="0" rIns="0" bIns="0" rtlCol="0" anchor="t"/>
-          <a:lstStyle/>
+          </a:p>
           <a:p>
             <a:pPr marL="0" indent="0" algn="ctr">
               <a:lnSpc>
-                <a:spcPts val="1650"/>
+                <a:spcPts val="1900"/>
               </a:lnSpc>
               <a:buNone/>
             </a:pPr>
-            <a:endParaRPr lang="en-US" sz="1150" dirty="0"/>
-            <a:r>
-              <a:rPr lang="en-US" sz="1150" dirty="0">
-                <a:solidFill>
-                  <a:srgbClr val="6F6A62"/>
-                </a:solidFill>
-                <a:latin typeface="Inter" pitchFamily="34" charset="0"/>
-                <a:ea typeface="Inter" pitchFamily="34" charset="-122"/>
-                <a:cs typeface="Inter" pitchFamily="34" charset="-120"/>
-              </a:rPr>
-              <a:t>от чего нужно избавиться</a:t>
-            </a:r>
+            <a:r>
+              <a:rPr lang="ru-RU" sz="1600" b="1" dirty="0">
+                <a:solidFill>
+                  <a:srgbClr val="0C1D28"/>
+                </a:solidFill>
+                <a:latin typeface="Inter" pitchFamily="34" charset="0"/>
+                <a:ea typeface="Inter" pitchFamily="34" charset="-122"/>
+              </a:rPr>
+              <a:t>что нужно продать</a:t>
+            </a:r>
+            <a:endParaRPr lang="en-US" sz="1600" dirty="0"/>
           </a:p>
         </p:txBody>
       </p:sp>
@@ -7029,7 +5415,10 @@
         </p:spPr>
         <p:txBody>
           <a:bodyPr/>
-          <a:p/>
+          <a:lstStyle/>
+          <a:p>
+            <a:endParaRPr/>
+          </a:p>
         </p:txBody>
       </p:sp>
       <p:sp>
@@ -7057,7 +5446,7 @@
               <a:buNone/>
             </a:pPr>
             <a:r>
-              <a:rPr lang="en-US" sz="1200" b="1" kern="0" spc="160" dirty="0">
+              <a:rPr lang="en-US" sz="2000" b="1" kern="0" spc="160" dirty="0">
                 <a:solidFill>
                   <a:srgbClr val="C89B45"/>
                 </a:solidFill>
@@ -7067,7 +5456,7 @@
               </a:rPr>
               <a:t>02</a:t>
             </a:r>
-            <a:endParaRPr lang="en-US" sz="1200" dirty="0"/>
+            <a:endParaRPr lang="en-US" sz="2000" dirty="0"/>
           </a:p>
         </p:txBody>
       </p:sp>
@@ -7079,7 +5468,7 @@
         </p:nvSpPr>
         <p:spPr>
           <a:xfrm>
-            <a:off x="2944917" y="4023360"/>
+            <a:off x="2944916" y="4151376"/>
             <a:ext cx="1966509" cy="603504"/>
           </a:xfrm>
           <a:prstGeom prst="rect">
@@ -7099,7 +5488,7 @@
               <a:buNone/>
             </a:pPr>
             <a:r>
-              <a:rPr lang="en-US" sz="1350" b="1" dirty="0">
+              <a:rPr lang="en-US" sz="1600" b="1" dirty="0">
                 <a:solidFill>
                   <a:srgbClr val="0C1D28"/>
                 </a:solidFill>
@@ -7109,48 +5498,33 @@
               </a:rPr>
               <a:t>СЧИТАЕМ</a:t>
             </a:r>
-            <a:endParaRPr lang="en-US" sz="1350" dirty="0"/>
-          </a:p>
-        </p:txBody>
-      </p:sp>
-      <p:sp>
-        <p:nvSpPr>
-          <p:cNvPr id="14" name="Text 10"/>
-          <p:cNvSpPr txBox="1"/>
-          <p:nvPr/>
-        </p:nvSpPr>
-        <p:spPr>
-          <a:xfrm>
-            <a:off x="2944917" y="4754880"/>
-            <a:ext cx="1966509" cy="786384"/>
-          </a:xfrm>
-          <a:prstGeom prst="rect">
-            <a:avLst/>
-          </a:prstGeom>
-          <a:noFill/>
-          <a:ln/>
-        </p:spPr>
-        <p:txBody>
-          <a:bodyPr wrap="square" lIns="0" tIns="0" rIns="0" bIns="0" rtlCol="0" anchor="t"/>
-          <a:lstStyle/>
+            <a:endParaRPr lang="ru-RU" sz="1600" b="1" dirty="0">
+              <a:solidFill>
+                <a:srgbClr val="0C1D28"/>
+              </a:solidFill>
+              <a:latin typeface="Inter" pitchFamily="34" charset="0"/>
+              <a:ea typeface="Inter" pitchFamily="34" charset="-122"/>
+              <a:cs typeface="Inter" pitchFamily="34" charset="-120"/>
+            </a:endParaRPr>
+          </a:p>
           <a:p>
             <a:pPr marL="0" indent="0" algn="ctr">
               <a:lnSpc>
-                <a:spcPts val="1650"/>
+                <a:spcPts val="1900"/>
               </a:lnSpc>
               <a:buNone/>
             </a:pPr>
             <a:r>
-              <a:rPr lang="ru-RU" sz="1150" dirty="0">
-                <a:solidFill>
-                  <a:srgbClr val="6F6A62"/>
+              <a:rPr lang="ru-RU" sz="1600" b="1" dirty="0">
+                <a:solidFill>
+                  <a:srgbClr val="0C1D28"/>
                 </a:solidFill>
                 <a:latin typeface="Inter" pitchFamily="34" charset="0"/>
                 <a:ea typeface="Inter" pitchFamily="34" charset="-122"/>
               </a:rPr>
               <a:t>сколько выручим</a:t>
             </a:r>
-            <a:endParaRPr lang="en-US" sz="1150" dirty="0"/>
+            <a:endParaRPr lang="en-US" sz="1600" dirty="0"/>
           </a:p>
         </p:txBody>
       </p:sp>
@@ -7180,7 +5554,10 @@
         </p:spPr>
         <p:txBody>
           <a:bodyPr/>
-          <a:p/>
+          <a:lstStyle/>
+          <a:p>
+            <a:endParaRPr/>
+          </a:p>
         </p:txBody>
       </p:sp>
       <p:sp>
@@ -7208,7 +5585,7 @@
               <a:buNone/>
             </a:pPr>
             <a:r>
-              <a:rPr lang="en-US" sz="1200" b="1" kern="0" spc="160" dirty="0">
+              <a:rPr lang="en-US" sz="2000" b="1" kern="0" spc="160" dirty="0">
                 <a:solidFill>
                   <a:srgbClr val="C89B45"/>
                 </a:solidFill>
@@ -7218,7 +5595,7 @@
               </a:rPr>
               <a:t>03</a:t>
             </a:r>
-            <a:endParaRPr lang="en-US" sz="1200" dirty="0"/>
+            <a:endParaRPr lang="en-US" sz="2000" dirty="0"/>
           </a:p>
         </p:txBody>
       </p:sp>
@@ -7230,7 +5607,7 @@
         </p:nvSpPr>
         <p:spPr>
           <a:xfrm>
-            <a:off x="5112593" y="4023360"/>
+            <a:off x="5112592" y="4151376"/>
             <a:ext cx="1966509" cy="603504"/>
           </a:xfrm>
           <a:prstGeom prst="rect">
@@ -7250,7 +5627,7 @@
               <a:buNone/>
             </a:pPr>
             <a:r>
-              <a:rPr lang="en-US" sz="1350" b="1" dirty="0">
+              <a:rPr lang="en-US" sz="1600" b="1" dirty="0">
                 <a:solidFill>
                   <a:srgbClr val="0C1D28"/>
                 </a:solidFill>
@@ -7260,49 +5637,33 @@
               </a:rPr>
               <a:t>ПОДПИСЫВАЕМ</a:t>
             </a:r>
-            <a:endParaRPr lang="en-US" sz="1350" dirty="0"/>
-          </a:p>
-        </p:txBody>
-      </p:sp>
-      <p:sp>
-        <p:nvSpPr>
-          <p:cNvPr id="19" name="Text 14"/>
-          <p:cNvSpPr txBox="1"/>
-          <p:nvPr/>
-        </p:nvSpPr>
-        <p:spPr>
-          <a:xfrm>
-            <a:off x="5112593" y="4754880"/>
-            <a:ext cx="1966509" cy="786384"/>
-          </a:xfrm>
-          <a:prstGeom prst="rect">
-            <a:avLst/>
-          </a:prstGeom>
-          <a:noFill/>
-          <a:ln/>
-        </p:spPr>
-        <p:txBody>
-          <a:bodyPr wrap="square" lIns="0" tIns="0" rIns="0" bIns="0" rtlCol="0" anchor="t"/>
-          <a:lstStyle/>
+            <a:endParaRPr lang="ru-RU" sz="1600" b="1" dirty="0">
+              <a:solidFill>
+                <a:srgbClr val="0C1D28"/>
+              </a:solidFill>
+              <a:latin typeface="Inter" pitchFamily="34" charset="0"/>
+              <a:ea typeface="Inter" pitchFamily="34" charset="-122"/>
+              <a:cs typeface="Inter" pitchFamily="34" charset="-120"/>
+            </a:endParaRPr>
+          </a:p>
           <a:p>
             <a:pPr marL="0" indent="0" algn="ctr">
               <a:lnSpc>
-                <a:spcPts val="1650"/>
+                <a:spcPts val="1900"/>
               </a:lnSpc>
               <a:buNone/>
             </a:pPr>
             <a:r>
-              <a:rPr lang="en-US" sz="1150" dirty="0">
-                <a:solidFill>
-                  <a:srgbClr val="6F6A62"/>
-                </a:solidFill>
-                <a:latin typeface="Inter" pitchFamily="34" charset="0"/>
-                <a:ea typeface="Inter" pitchFamily="34" charset="-122"/>
-                <a:cs typeface="Inter" pitchFamily="34" charset="-120"/>
+              <a:rPr lang="ru-RU" sz="1600" b="1" dirty="0">
+                <a:solidFill>
+                  <a:srgbClr val="0C1D28"/>
+                </a:solidFill>
+                <a:latin typeface="Inter" pitchFamily="34" charset="0"/>
+                <a:ea typeface="Inter" pitchFamily="34" charset="-122"/>
               </a:rPr>
               <a:t>договор</a:t>
             </a:r>
-            <a:endParaRPr lang="en-US" sz="1150" dirty="0"/>
+            <a:endParaRPr lang="en-US" sz="1600" dirty="0"/>
           </a:p>
         </p:txBody>
       </p:sp>
@@ -7332,7 +5693,10 @@
         </p:spPr>
         <p:txBody>
           <a:bodyPr/>
-          <a:p/>
+          <a:lstStyle/>
+          <a:p>
+            <a:endParaRPr/>
+          </a:p>
         </p:txBody>
       </p:sp>
       <p:sp>
@@ -7360,7 +5724,7 @@
               <a:buNone/>
             </a:pPr>
             <a:r>
-              <a:rPr lang="en-US" sz="1200" b="1" kern="0" spc="160" dirty="0">
+              <a:rPr lang="en-US" sz="2000" b="1" kern="0" spc="160" dirty="0">
                 <a:solidFill>
                   <a:srgbClr val="C89B45"/>
                 </a:solidFill>
@@ -7370,7 +5734,7 @@
               </a:rPr>
               <a:t>04</a:t>
             </a:r>
-            <a:endParaRPr lang="en-US" sz="1200" dirty="0"/>
+            <a:endParaRPr lang="en-US" sz="2000" dirty="0"/>
           </a:p>
         </p:txBody>
       </p:sp>
@@ -7382,7 +5746,7 @@
         </p:nvSpPr>
         <p:spPr>
           <a:xfrm>
-            <a:off x="7280270" y="4023360"/>
+            <a:off x="7280269" y="4151376"/>
             <a:ext cx="1966509" cy="603504"/>
           </a:xfrm>
           <a:prstGeom prst="rect">
@@ -7402,7 +5766,7 @@
               <a:buNone/>
             </a:pPr>
             <a:r>
-              <a:rPr lang="en-US" sz="1350" b="1" dirty="0">
+              <a:rPr lang="en-US" sz="1600" b="1" dirty="0">
                 <a:solidFill>
                   <a:srgbClr val="0C1D28"/>
                 </a:solidFill>
@@ -7412,49 +5776,33 @@
               </a:rPr>
               <a:t>ПРОДАЁМ</a:t>
             </a:r>
-            <a:endParaRPr lang="en-US" sz="1350" dirty="0"/>
-          </a:p>
-        </p:txBody>
-      </p:sp>
-      <p:sp>
-        <p:nvSpPr>
-          <p:cNvPr id="24" name="Text 18"/>
-          <p:cNvSpPr txBox="1"/>
-          <p:nvPr/>
-        </p:nvSpPr>
-        <p:spPr>
-          <a:xfrm>
-            <a:off x="7280270" y="4754880"/>
-            <a:ext cx="1966509" cy="786384"/>
-          </a:xfrm>
-          <a:prstGeom prst="rect">
-            <a:avLst/>
-          </a:prstGeom>
-          <a:noFill/>
-          <a:ln/>
-        </p:spPr>
-        <p:txBody>
-          <a:bodyPr wrap="square" lIns="0" tIns="0" rIns="0" bIns="0" rtlCol="0" anchor="t"/>
-          <a:lstStyle/>
+            <a:endParaRPr lang="ru-RU" sz="1600" b="1" dirty="0">
+              <a:solidFill>
+                <a:srgbClr val="0C1D28"/>
+              </a:solidFill>
+              <a:latin typeface="Inter" pitchFamily="34" charset="0"/>
+              <a:ea typeface="Inter" pitchFamily="34" charset="-122"/>
+              <a:cs typeface="Inter" pitchFamily="34" charset="-120"/>
+            </a:endParaRPr>
+          </a:p>
           <a:p>
             <a:pPr marL="0" indent="0" algn="ctr">
               <a:lnSpc>
-                <a:spcPts val="1650"/>
+                <a:spcPts val="1900"/>
               </a:lnSpc>
               <a:buNone/>
             </a:pPr>
             <a:r>
-              <a:rPr lang="en-US" sz="1150" dirty="0">
-                <a:solidFill>
-                  <a:srgbClr val="6F6A62"/>
-                </a:solidFill>
-                <a:latin typeface="Inter" pitchFamily="34" charset="0"/>
-                <a:ea typeface="Inter" pitchFamily="34" charset="-122"/>
-                <a:cs typeface="Inter" pitchFamily="34" charset="-120"/>
-              </a:rPr>
-              <a:t>ваши вещи</a:t>
-            </a:r>
-            <a:endParaRPr lang="en-US" sz="1150" dirty="0"/>
+              <a:rPr lang="ru-RU" sz="1600" b="1" dirty="0">
+                <a:solidFill>
+                  <a:srgbClr val="0C1D28"/>
+                </a:solidFill>
+                <a:latin typeface="Inter" pitchFamily="34" charset="0"/>
+                <a:ea typeface="Inter" pitchFamily="34" charset="-122"/>
+              </a:rPr>
+              <a:t>вещи</a:t>
+            </a:r>
+            <a:endParaRPr lang="en-US" sz="1600" dirty="0"/>
           </a:p>
         </p:txBody>
       </p:sp>
@@ -7484,7 +5832,10 @@
         </p:spPr>
         <p:txBody>
           <a:bodyPr/>
-          <a:p/>
+          <a:lstStyle/>
+          <a:p>
+            <a:endParaRPr/>
+          </a:p>
         </p:txBody>
       </p:sp>
       <p:sp>
@@ -7512,7 +5863,7 @@
               <a:buNone/>
             </a:pPr>
             <a:r>
-              <a:rPr lang="en-US" sz="1200" b="1" kern="0" spc="160" dirty="0">
+              <a:rPr lang="en-US" sz="2000" b="1" kern="0" spc="160" dirty="0">
                 <a:solidFill>
                   <a:srgbClr val="C89B45"/>
                 </a:solidFill>
@@ -7522,7 +5873,7 @@
               </a:rPr>
               <a:t>05</a:t>
             </a:r>
-            <a:endParaRPr lang="en-US" sz="1200" dirty="0"/>
+            <a:endParaRPr lang="en-US" sz="2000" dirty="0"/>
           </a:p>
         </p:txBody>
       </p:sp>
@@ -7534,7 +5885,7 @@
         </p:nvSpPr>
         <p:spPr>
           <a:xfrm>
-            <a:off x="9447947" y="4023360"/>
+            <a:off x="9447946" y="4151376"/>
             <a:ext cx="1966509" cy="603504"/>
           </a:xfrm>
           <a:prstGeom prst="rect">
@@ -7554,7 +5905,7 @@
               <a:buNone/>
             </a:pPr>
             <a:r>
-              <a:rPr lang="en-US" sz="1350" b="1" dirty="0">
+              <a:rPr lang="en-US" sz="1600" b="1" dirty="0">
                 <a:solidFill>
                   <a:srgbClr val="0C1D28"/>
                 </a:solidFill>
@@ -7564,49 +5915,33 @@
               </a:rPr>
               <a:t>ОТЧИТЫВАЕМСЯ</a:t>
             </a:r>
-            <a:endParaRPr lang="en-US" sz="1350" dirty="0"/>
-          </a:p>
-        </p:txBody>
-      </p:sp>
-      <p:sp>
-        <p:nvSpPr>
-          <p:cNvPr id="29" name="Text 22"/>
-          <p:cNvSpPr txBox="1"/>
-          <p:nvPr/>
-        </p:nvSpPr>
-        <p:spPr>
-          <a:xfrm>
-            <a:off x="9447947" y="4754880"/>
-            <a:ext cx="1966509" cy="786384"/>
-          </a:xfrm>
-          <a:prstGeom prst="rect">
-            <a:avLst/>
-          </a:prstGeom>
-          <a:noFill/>
-          <a:ln/>
-        </p:spPr>
-        <p:txBody>
-          <a:bodyPr wrap="square" lIns="0" tIns="0" rIns="0" bIns="0" rtlCol="0" anchor="t"/>
-          <a:lstStyle/>
+            <a:endParaRPr lang="ru-RU" sz="1600" b="1" dirty="0">
+              <a:solidFill>
+                <a:srgbClr val="0C1D28"/>
+              </a:solidFill>
+              <a:latin typeface="Inter" pitchFamily="34" charset="0"/>
+              <a:ea typeface="Inter" pitchFamily="34" charset="-122"/>
+              <a:cs typeface="Inter" pitchFamily="34" charset="-120"/>
+            </a:endParaRPr>
+          </a:p>
           <a:p>
             <a:pPr marL="0" indent="0" algn="ctr">
               <a:lnSpc>
-                <a:spcPts val="1650"/>
+                <a:spcPts val="1900"/>
               </a:lnSpc>
               <a:buNone/>
             </a:pPr>
             <a:r>
-              <a:rPr lang="en-US" sz="1150" dirty="0">
-                <a:solidFill>
-                  <a:srgbClr val="6F6A62"/>
-                </a:solidFill>
-                <a:latin typeface="Inter" pitchFamily="34" charset="0"/>
-                <a:ea typeface="Inter" pitchFamily="34" charset="-122"/>
-                <a:cs typeface="Inter" pitchFamily="34" charset="-120"/>
+              <a:rPr lang="ru-RU" sz="1600" b="1" dirty="0">
+                <a:solidFill>
+                  <a:srgbClr val="0C1D28"/>
+                </a:solidFill>
+                <a:latin typeface="Inter" pitchFamily="34" charset="0"/>
+                <a:ea typeface="Inter" pitchFamily="34" charset="-122"/>
               </a:rPr>
               <a:t>и делим прибыль</a:t>
             </a:r>
-            <a:endParaRPr lang="en-US" sz="1150" dirty="0"/>
+            <a:endParaRPr lang="en-US" sz="1600" dirty="0"/>
           </a:p>
         </p:txBody>
       </p:sp>
@@ -7633,7 +5968,10 @@
         </p:spPr>
         <p:txBody>
           <a:bodyPr/>
-          <a:p/>
+          <a:lstStyle/>
+          <a:p>
+            <a:endParaRPr/>
+          </a:p>
         </p:txBody>
       </p:sp>
       <p:sp>
@@ -7669,7 +6007,51 @@
                 <a:ea typeface="Inter" pitchFamily="34" charset="-122"/>
                 <a:cs typeface="Inter" pitchFamily="34" charset="-120"/>
               </a:rPr>
-              <a:t>ВАШЕ УЧАСТИЕ — ДО 90 МИНУТ ЗА ВЕСЬ ПРОЕКТ</a:t>
+              <a:t>ВАШЕ УЧАСТИЕ </a:t>
+            </a:r>
+            <a:r>
+              <a:rPr lang="ru-RU" sz="1700" b="1" kern="0" spc="160" dirty="0">
+                <a:solidFill>
+                  <a:srgbClr val="F7F1E7"/>
+                </a:solidFill>
+                <a:latin typeface="Inter" pitchFamily="34" charset="0"/>
+                <a:ea typeface="Inter" pitchFamily="34" charset="-122"/>
+                <a:cs typeface="Inter" pitchFamily="34" charset="-120"/>
+              </a:rPr>
+              <a:t>–</a:t>
+            </a:r>
+            <a:r>
+              <a:rPr lang="en-US" sz="1700" b="1" kern="0" spc="160" dirty="0">
+                <a:solidFill>
+                  <a:srgbClr val="F7F1E7"/>
+                </a:solidFill>
+                <a:latin typeface="Inter" pitchFamily="34" charset="0"/>
+                <a:ea typeface="Inter" pitchFamily="34" charset="-122"/>
+                <a:cs typeface="Inter" pitchFamily="34" charset="-120"/>
+              </a:rPr>
+              <a:t> </a:t>
+            </a:r>
+            <a:r>
+              <a:rPr lang="ru-RU" sz="1700" b="1" kern="0" spc="160" dirty="0">
+                <a:solidFill>
+                  <a:srgbClr val="F7F1E7"/>
+                </a:solidFill>
+                <a:latin typeface="Inter" pitchFamily="34" charset="0"/>
+                <a:ea typeface="Inter" pitchFamily="34" charset="-122"/>
+                <a:cs typeface="Inter" pitchFamily="34" charset="-120"/>
+              </a:rPr>
+              <a:t>60 </a:t>
+            </a:r>
+            <a:r>
+              <a:rPr lang="en-US" sz="1700" b="1" kern="0" spc="160" dirty="0">
+                <a:solidFill>
+                  <a:srgbClr val="F7F1E7"/>
+                </a:solidFill>
+                <a:latin typeface="Inter" pitchFamily="34" charset="0"/>
+                <a:ea typeface="Inter" pitchFamily="34" charset="-122"/>
+                <a:cs typeface="Inter" pitchFamily="34" charset="-120"/>
+              </a:rPr>
+              <a:t>МИНУТ ЗА ВЕСЬ ПРОЕКТ</a:t>
             </a:r>
             <a:endParaRPr lang="en-US" sz="1700" dirty="0"/>
           </a:p>
@@ -7684,7 +6066,7 @@
           <p:nvPr/>
         </p:nvPicPr>
         <p:blipFill>
-          <a:blip r:embed="rId9"/>
+          <a:blip r:embed="rId4"/>
           <a:stretch>
             <a:fillRect/>
           </a:stretch>
@@ -7708,7 +6090,7 @@
           <p:nvPr/>
         </p:nvPicPr>
         <p:blipFill>
-          <a:blip r:embed="rId10"/>
+          <a:blip r:embed="rId5"/>
           <a:stretch>
             <a:fillRect/>
           </a:stretch>
@@ -7732,7 +6114,7 @@
           <p:nvPr/>
         </p:nvPicPr>
         <p:blipFill>
-          <a:blip r:embed="rId11"/>
+          <a:blip r:embed="rId6"/>
           <a:stretch>
             <a:fillRect/>
           </a:stretch>
@@ -7756,7 +6138,7 @@
           <p:nvPr/>
         </p:nvPicPr>
         <p:blipFill>
-          <a:blip r:embed="rId12"/>
+          <a:blip r:embed="rId7"/>
           <a:stretch>
             <a:fillRect/>
           </a:stretch>
@@ -7780,7 +6162,7 @@
           <p:nvPr/>
         </p:nvPicPr>
         <p:blipFill>
-          <a:blip r:embed="rId13"/>
+          <a:blip r:embed="rId8"/>
           <a:stretch>
             <a:fillRect/>
           </a:stretch>
@@ -7857,19 +6239,61 @@
         </p:spPr>
         <p:txBody>
           <a:bodyPr/>
-          <a:p/>
-        </p:txBody>
-      </p:sp>
-      <p:sp>
-        <p:nvSpPr>
-          <p:cNvPr id="3" name="Text 1"/>
+          <a:lstStyle/>
+          <a:p>
+            <a:endParaRPr/>
+          </a:p>
+        </p:txBody>
+      </p:sp>
+      <p:sp>
+        <p:nvSpPr>
+          <p:cNvPr id="4" name="Text 2"/>
           <p:cNvSpPr txBox="1"/>
           <p:nvPr/>
         </p:nvSpPr>
         <p:spPr>
           <a:xfrm>
             <a:off x="777240" y="548640"/>
-            <a:ext cx="10637215" cy="219456"/>
+            <a:ext cx="10637214" cy="640080"/>
+          </a:xfrm>
+          <a:prstGeom prst="rect">
+            <a:avLst/>
+          </a:prstGeom>
+          <a:noFill/>
+          <a:ln/>
+        </p:spPr>
+        <p:txBody>
+          <a:bodyPr wrap="square" lIns="0" tIns="0" rIns="0" bIns="0" rtlCol="0" anchor="t"/>
+          <a:lstStyle/>
+          <a:p>
+            <a:pPr marL="0" indent="0" algn="ctr">
+              <a:buNone/>
+            </a:pPr>
+            <a:r>
+              <a:rPr lang="en-US" sz="3800" b="1" dirty="0">
+                <a:solidFill>
+                  <a:srgbClr val="F7F1E7"/>
+                </a:solidFill>
+                <a:latin typeface="Inter" pitchFamily="34" charset="0"/>
+                <a:ea typeface="Inter" pitchFamily="34" charset="-122"/>
+                <a:cs typeface="Inter" pitchFamily="34" charset="-120"/>
+              </a:rPr>
+              <a:t>СТОИМОСТЬ УСЛУГИ</a:t>
+            </a:r>
+            <a:endParaRPr lang="en-US" sz="3800" dirty="0"/>
+          </a:p>
+        </p:txBody>
+      </p:sp>
+      <p:sp>
+        <p:nvSpPr>
+          <p:cNvPr id="5" name="Text 3"/>
+          <p:cNvSpPr txBox="1"/>
+          <p:nvPr/>
+        </p:nvSpPr>
+        <p:spPr>
+          <a:xfrm>
+            <a:off x="2543404" y="1536192"/>
+            <a:ext cx="8229600" cy="310896"/>
           </a:xfrm>
           <a:prstGeom prst="rect">
             <a:avLst/>
@@ -7885,46 +6309,7 @@
               <a:buNone/>
             </a:pPr>
             <a:r>
-              <a:rPr lang="en-US" sz="1050" b="1" kern="0" spc="240" dirty="0">
-                <a:solidFill>
-                  <a:srgbClr val="C89B45"/>
-                </a:solidFill>
-                <a:latin typeface="Inter" pitchFamily="34" charset="0"/>
-                <a:ea typeface="Inter" pitchFamily="34" charset="-122"/>
-                <a:cs typeface="Inter" pitchFamily="34" charset="-120"/>
-              </a:rPr>
-              <a:t>ДВА ФОРМАТА</a:t>
-            </a:r>
-            <a:endParaRPr lang="en-US" sz="1050" dirty="0"/>
-          </a:p>
-        </p:txBody>
-      </p:sp>
-      <p:sp>
-        <p:nvSpPr>
-          <p:cNvPr id="4" name="Text 2"/>
-          <p:cNvSpPr txBox="1"/>
-          <p:nvPr/>
-        </p:nvSpPr>
-        <p:spPr>
-          <a:xfrm>
-            <a:off x="777240" y="896112"/>
-            <a:ext cx="7315200" cy="640080"/>
-          </a:xfrm>
-          <a:prstGeom prst="rect">
-            <a:avLst/>
-          </a:prstGeom>
-          <a:noFill/>
-          <a:ln/>
-        </p:spPr>
-        <p:txBody>
-          <a:bodyPr wrap="square" lIns="0" tIns="0" rIns="0" bIns="0" rtlCol="0" anchor="t"/>
-          <a:lstStyle/>
-          <a:p>
-            <a:pPr marL="0" indent="0">
-              <a:buNone/>
-            </a:pPr>
-            <a:r>
-              <a:rPr lang="en-US" sz="3800" b="1" dirty="0">
+              <a:rPr lang="ru-RU" sz="2400" dirty="0">
                 <a:solidFill>
                   <a:srgbClr val="F7F1E7"/>
                 </a:solidFill>
@@ -7932,48 +6317,9 @@
                 <a:ea typeface="Inter" pitchFamily="34" charset="-122"/>
                 <a:cs typeface="Inter" pitchFamily="34" charset="-120"/>
               </a:rPr>
-              <a:t>СТОИМОСТЬ УСЛУГИ</a:t>
-            </a:r>
-            <a:endParaRPr lang="en-US" sz="3800" dirty="0"/>
-          </a:p>
-        </p:txBody>
-      </p:sp>
-      <p:sp>
-        <p:nvSpPr>
-          <p:cNvPr id="5" name="Text 3"/>
-          <p:cNvSpPr txBox="1"/>
-          <p:nvPr/>
-        </p:nvSpPr>
-        <p:spPr>
-          <a:xfrm>
-            <a:off x="777240" y="1554480"/>
-            <a:ext cx="8229600" cy="310896"/>
-          </a:xfrm>
-          <a:prstGeom prst="rect">
-            <a:avLst/>
-          </a:prstGeom>
-          <a:noFill/>
-          <a:ln/>
-        </p:spPr>
-        <p:txBody>
-          <a:bodyPr wrap="square" lIns="0" tIns="0" rIns="0" bIns="0" rtlCol="0" anchor="t"/>
-          <a:lstStyle/>
-          <a:p>
-            <a:pPr marL="0" indent="0">
-              <a:buNone/>
-            </a:pPr>
-            <a:r>
-              <a:rPr lang="en-US" sz="1450" dirty="0">
-                <a:solidFill>
-                  <a:srgbClr val="F7F1E7"/>
-                </a:solidFill>
-                <a:latin typeface="Inter" pitchFamily="34" charset="0"/>
-                <a:ea typeface="Inter" pitchFamily="34" charset="-122"/>
-                <a:cs typeface="Inter" pitchFamily="34" charset="-120"/>
-              </a:rPr>
-              <a:t>Выбираете по задаче</a:t>
-            </a:r>
-            <a:endParaRPr lang="en-US" sz="1450" dirty="0"/>
+              <a:t>ФОРМАТ 1</a:t>
+            </a:r>
+            <a:endParaRPr lang="en-US" sz="2400" dirty="0"/>
           </a:p>
         </p:txBody>
       </p:sp>
@@ -8007,7 +6353,10 @@
         </p:spPr>
         <p:txBody>
           <a:bodyPr/>
-          <a:p/>
+          <a:lstStyle/>
+          <a:p>
+            <a:endParaRPr sz="2000"/>
+          </a:p>
         </p:txBody>
       </p:sp>
       <p:pic>
@@ -8059,7 +6408,7 @@
               <a:buNone/>
             </a:pPr>
             <a:r>
-              <a:rPr lang="en-US" sz="1050" b="1" kern="0" spc="200" dirty="0">
+              <a:rPr lang="en-US" sz="1100" b="1" kern="0" spc="200" dirty="0">
                 <a:solidFill>
                   <a:srgbClr val="C89B45"/>
                 </a:solidFill>
@@ -8069,7 +6418,7 @@
               </a:rPr>
               <a:t>ДЛЯ МАКСИМАЛЬНОЙ ВЫРУЧКИ</a:t>
             </a:r>
-            <a:endParaRPr lang="en-US" sz="1050" dirty="0"/>
+            <a:endParaRPr lang="en-US" sz="1100" dirty="0"/>
           </a:p>
         </p:txBody>
       </p:sp>
@@ -8101,7 +6450,7 @@
               <a:buNone/>
             </a:pPr>
             <a:r>
-              <a:rPr lang="en-US" sz="2100" b="1" dirty="0">
+              <a:rPr lang="en-US" sz="2400" b="1" dirty="0">
                 <a:solidFill>
                   <a:srgbClr val="F7F1E7"/>
                 </a:solidFill>
@@ -8111,7 +6460,7 @@
               </a:rPr>
               <a:t>ПРОДАЖА ИЗ ОФИСА</a:t>
             </a:r>
-            <a:endParaRPr lang="en-US" sz="2100" dirty="0"/>
+            <a:endParaRPr lang="en-US" sz="2400" dirty="0"/>
           </a:p>
         </p:txBody>
       </p:sp>
@@ -8140,7 +6489,7 @@
               <a:buNone/>
             </a:pPr>
             <a:r>
-              <a:rPr lang="en-US" sz="3000" b="1" dirty="0">
+              <a:rPr lang="en-US" sz="3200" b="1" dirty="0">
                 <a:solidFill>
                   <a:srgbClr val="D9BC7A"/>
                 </a:solidFill>
@@ -8150,7 +6499,7 @@
               </a:rPr>
               <a:t>10 000 ₽ + 25%</a:t>
             </a:r>
-            <a:endParaRPr lang="en-US" sz="3000" dirty="0"/>
+            <a:endParaRPr lang="en-US" sz="3200" dirty="0"/>
           </a:p>
         </p:txBody>
       </p:sp>
@@ -8162,7 +6511,7 @@
         </p:nvSpPr>
         <p:spPr>
           <a:xfrm>
-            <a:off x="1188720" y="4261104"/>
+            <a:off x="3003666" y="4261104"/>
             <a:ext cx="4344772" cy="237744"/>
           </a:xfrm>
           <a:prstGeom prst="rect">
@@ -8179,7 +6528,7 @@
               <a:buNone/>
             </a:pPr>
             <a:r>
-              <a:rPr lang="en-US" sz="1200" dirty="0">
+              <a:rPr lang="en-US" sz="1400" dirty="0">
                 <a:solidFill>
                   <a:srgbClr val="F7F1E7"/>
                 </a:solidFill>
@@ -8189,7 +6538,7 @@
               </a:rPr>
               <a:t>от суммы продаж</a:t>
             </a:r>
-            <a:endParaRPr lang="en-US" sz="1200" dirty="0"/>
+            <a:endParaRPr lang="en-US" sz="1400" dirty="0"/>
           </a:p>
         </p:txBody>
       </p:sp>
@@ -8214,7 +6563,10 @@
         </p:spPr>
         <p:txBody>
           <a:bodyPr/>
-          <a:p/>
+          <a:lstStyle/>
+          <a:p>
+            <a:endParaRPr sz="2000"/>
+          </a:p>
         </p:txBody>
       </p:sp>
       <p:sp>
@@ -8238,7 +6590,10 @@
         </p:spPr>
         <p:txBody>
           <a:bodyPr/>
-          <a:p/>
+          <a:lstStyle/>
+          <a:p>
+            <a:endParaRPr sz="2000"/>
+          </a:p>
         </p:txBody>
       </p:sp>
       <p:sp>
@@ -8266,7 +6621,7 @@
               <a:buNone/>
             </a:pPr>
             <a:r>
-              <a:rPr lang="en-US" sz="1250" dirty="0">
+              <a:rPr lang="en-US" sz="1400" dirty="0">
                 <a:solidFill>
                   <a:srgbClr val="F7F1E7"/>
                 </a:solidFill>
@@ -8276,7 +6631,7 @@
               </a:rPr>
               <a:t>Вещи остаются в офисе до продажи</a:t>
             </a:r>
-            <a:endParaRPr lang="en-US" sz="1250" dirty="0"/>
+            <a:endParaRPr lang="en-US" sz="1400" dirty="0"/>
           </a:p>
         </p:txBody>
       </p:sp>
@@ -8301,7 +6656,10 @@
         </p:spPr>
         <p:txBody>
           <a:bodyPr/>
-          <a:p/>
+          <a:lstStyle/>
+          <a:p>
+            <a:endParaRPr sz="2000"/>
+          </a:p>
         </p:txBody>
       </p:sp>
       <p:sp>
@@ -8329,7 +6687,7 @@
               <a:buNone/>
             </a:pPr>
             <a:r>
-              <a:rPr lang="en-US" sz="1250" dirty="0">
+              <a:rPr lang="en-US" sz="1400" dirty="0" err="1">
                 <a:solidFill>
                   <a:srgbClr val="F7F1E7"/>
                 </a:solidFill>
@@ -8337,9 +6695,75 @@
                 <a:ea typeface="Inter" pitchFamily="34" charset="-122"/>
                 <a:cs typeface="Inter" pitchFamily="34" charset="-120"/>
               </a:rPr>
-              <a:t>Продаём дольше — выручаем больше</a:t>
-            </a:r>
-            <a:endParaRPr lang="en-US" sz="1250" dirty="0"/>
+              <a:t>Прода</a:t>
+            </a:r>
+            <a:r>
+              <a:rPr lang="ru-RU" sz="1400" dirty="0">
+                <a:solidFill>
+                  <a:srgbClr val="F7F1E7"/>
+                </a:solidFill>
+                <a:latin typeface="Inter" pitchFamily="34" charset="0"/>
+                <a:ea typeface="Inter" pitchFamily="34" charset="-122"/>
+                <a:cs typeface="Inter" pitchFamily="34" charset="-120"/>
+              </a:rPr>
+              <a:t>е</a:t>
+            </a:r>
+            <a:r>
+              <a:rPr lang="en-US" sz="1400" dirty="0" err="1">
+                <a:solidFill>
+                  <a:srgbClr val="F7F1E7"/>
+                </a:solidFill>
+                <a:latin typeface="Inter" pitchFamily="34" charset="0"/>
+                <a:ea typeface="Inter" pitchFamily="34" charset="-122"/>
+                <a:cs typeface="Inter" pitchFamily="34" charset="-120"/>
+              </a:rPr>
+              <a:t>м</a:t>
+            </a:r>
+            <a:r>
+              <a:rPr lang="en-US" sz="1400" dirty="0">
+                <a:solidFill>
+                  <a:srgbClr val="F7F1E7"/>
+                </a:solidFill>
+                <a:latin typeface="Inter" pitchFamily="34" charset="0"/>
+                <a:ea typeface="Inter" pitchFamily="34" charset="-122"/>
+                <a:cs typeface="Inter" pitchFamily="34" charset="-120"/>
+              </a:rPr>
+              <a:t> </a:t>
+            </a:r>
+            <a:r>
+              <a:rPr lang="en-US" sz="1400" dirty="0" err="1">
+                <a:solidFill>
+                  <a:srgbClr val="F7F1E7"/>
+                </a:solidFill>
+                <a:latin typeface="Inter" pitchFamily="34" charset="0"/>
+                <a:ea typeface="Inter" pitchFamily="34" charset="-122"/>
+                <a:cs typeface="Inter" pitchFamily="34" charset="-120"/>
+              </a:rPr>
+              <a:t>дольше</a:t>
+            </a:r>
+            <a:r>
+              <a:rPr lang="ru-RU" sz="1400" dirty="0">
+                <a:solidFill>
+                  <a:srgbClr val="F7F1E7"/>
+                </a:solidFill>
+                <a:latin typeface="Inter" pitchFamily="34" charset="0"/>
+                <a:ea typeface="Inter" pitchFamily="34" charset="-122"/>
+                <a:cs typeface="Inter" pitchFamily="34" charset="-120"/>
+              </a:rPr>
+              <a:t>,</a:t>
+            </a:r>
+            <a:r>
+              <a:rPr lang="en-US" sz="1400" dirty="0">
+                <a:solidFill>
+                  <a:srgbClr val="F7F1E7"/>
+                </a:solidFill>
+                <a:latin typeface="Inter" pitchFamily="34" charset="0"/>
+                <a:ea typeface="Inter" pitchFamily="34" charset="-122"/>
+                <a:cs typeface="Inter" pitchFamily="34" charset="-120"/>
+              </a:rPr>
+              <a:t> выручаем больше</a:t>
+            </a:r>
+            <a:endParaRPr lang="en-US" sz="1400" dirty="0"/>
           </a:p>
         </p:txBody>
       </p:sp>
@@ -8373,7 +6797,10 @@
         </p:spPr>
         <p:txBody>
           <a:bodyPr/>
-          <a:p/>
+          <a:lstStyle/>
+          <a:p>
+            <a:endParaRPr sz="2000"/>
+          </a:p>
         </p:txBody>
       </p:sp>
       <p:pic>
@@ -8425,7 +6852,7 @@
               <a:buNone/>
             </a:pPr>
             <a:r>
-              <a:rPr lang="en-US" sz="1050" b="1" kern="0" spc="200" dirty="0">
+              <a:rPr lang="en-US" sz="1100" b="1" kern="0" spc="200" dirty="0">
                 <a:solidFill>
                   <a:srgbClr val="C89B45"/>
                 </a:solidFill>
@@ -8435,7 +6862,7 @@
               </a:rPr>
               <a:t>ДЛЯ БЫСТРОГО ОСВОБОЖДЕНИЯ</a:t>
             </a:r>
-            <a:endParaRPr lang="en-US" sz="1050" dirty="0"/>
+            <a:endParaRPr lang="en-US" sz="1100" dirty="0"/>
           </a:p>
         </p:txBody>
       </p:sp>
@@ -8447,8 +6874,8 @@
         </p:nvSpPr>
         <p:spPr>
           <a:xfrm>
-            <a:off x="6658204" y="3017520"/>
-            <a:ext cx="4344772" cy="658368"/>
+            <a:off x="6562192" y="3017520"/>
+            <a:ext cx="4756251" cy="658368"/>
           </a:xfrm>
           <a:prstGeom prst="rect">
             <a:avLst/>
@@ -8467,7 +6894,7 @@
               <a:buNone/>
             </a:pPr>
             <a:r>
-              <a:rPr lang="en-US" sz="2100" b="1" dirty="0">
+              <a:rPr lang="en-US" sz="2400" b="1" dirty="0">
                 <a:solidFill>
                   <a:srgbClr val="F7F1E7"/>
                 </a:solidFill>
@@ -8477,7 +6904,7 @@
               </a:rPr>
               <a:t>ОСВОБОЖДЕНИЕ ПОД КЛЮЧ</a:t>
             </a:r>
-            <a:endParaRPr lang="en-US" sz="2100" dirty="0"/>
+            <a:endParaRPr lang="en-US" sz="2400" dirty="0"/>
           </a:p>
         </p:txBody>
       </p:sp>
@@ -8506,7 +6933,7 @@
               <a:buNone/>
             </a:pPr>
             <a:r>
-              <a:rPr lang="en-US" sz="3000" b="1" dirty="0">
+              <a:rPr lang="en-US" sz="3200" b="1" dirty="0">
                 <a:solidFill>
                   <a:srgbClr val="D9BC7A"/>
                 </a:solidFill>
@@ -8516,7 +6943,7 @@
               </a:rPr>
               <a:t>25 000 ₽ + 35%</a:t>
             </a:r>
-            <a:endParaRPr lang="en-US" sz="3000" dirty="0"/>
+            <a:endParaRPr lang="en-US" sz="3200" dirty="0"/>
           </a:p>
         </p:txBody>
       </p:sp>
@@ -8528,7 +6955,7 @@
         </p:nvSpPr>
         <p:spPr>
           <a:xfrm>
-            <a:off x="6658204" y="4261104"/>
+            <a:off x="8624163" y="4287012"/>
             <a:ext cx="4344772" cy="237744"/>
           </a:xfrm>
           <a:prstGeom prst="rect">
@@ -8545,7 +6972,7 @@
               <a:buNone/>
             </a:pPr>
             <a:r>
-              <a:rPr lang="en-US" sz="1200" dirty="0">
+              <a:rPr lang="en-US" sz="1400" dirty="0">
                 <a:solidFill>
                   <a:srgbClr val="F7F1E7"/>
                 </a:solidFill>
@@ -8555,7 +6982,7 @@
               </a:rPr>
               <a:t>от суммы продаж</a:t>
             </a:r>
-            <a:endParaRPr lang="en-US" sz="1200" dirty="0"/>
+            <a:endParaRPr lang="en-US" sz="1400" dirty="0"/>
           </a:p>
         </p:txBody>
       </p:sp>
@@ -8580,7 +7007,10 @@
         </p:spPr>
         <p:txBody>
           <a:bodyPr/>
-          <a:p/>
+          <a:lstStyle/>
+          <a:p>
+            <a:endParaRPr sz="2000"/>
+          </a:p>
         </p:txBody>
       </p:sp>
       <p:sp>
@@ -8604,7 +7034,10 @@
         </p:spPr>
         <p:txBody>
           <a:bodyPr/>
-          <a:p/>
+          <a:lstStyle/>
+          <a:p>
+            <a:endParaRPr sz="2000"/>
+          </a:p>
         </p:txBody>
       </p:sp>
       <p:sp>
@@ -8632,7 +7065,7 @@
               <a:buNone/>
             </a:pPr>
             <a:r>
-              <a:rPr lang="en-US" sz="1250" dirty="0">
+              <a:rPr lang="en-US" sz="1400" dirty="0">
                 <a:solidFill>
                   <a:srgbClr val="F7F1E7"/>
                 </a:solidFill>
@@ -8642,7 +7075,7 @@
               </a:rPr>
               <a:t>Помещение свободно к вашей дате</a:t>
             </a:r>
-            <a:endParaRPr lang="en-US" sz="1250" dirty="0"/>
+            <a:endParaRPr lang="en-US" sz="1400" dirty="0"/>
           </a:p>
         </p:txBody>
       </p:sp>
@@ -8667,7 +7100,10 @@
         </p:spPr>
         <p:txBody>
           <a:bodyPr/>
-          <a:p/>
+          <a:lstStyle/>
+          <a:p>
+            <a:endParaRPr sz="2000"/>
+          </a:p>
         </p:txBody>
       </p:sp>
       <p:sp>
@@ -8695,7 +7131,7 @@
               <a:buNone/>
             </a:pPr>
             <a:r>
-              <a:rPr lang="en-US" sz="1250" dirty="0">
+              <a:rPr lang="en-US" sz="1400" dirty="0" err="1">
                 <a:solidFill>
                   <a:srgbClr val="F7F1E7"/>
                 </a:solidFill>
@@ -8703,9 +7139,64 @@
                 <a:ea typeface="Inter" pitchFamily="34" charset="-122"/>
                 <a:cs typeface="Inter" pitchFamily="34" charset="-120"/>
               </a:rPr>
-              <a:t>Продаём дальше без вашего участия</a:t>
-            </a:r>
-            <a:endParaRPr lang="en-US" sz="1250" dirty="0"/>
+              <a:t>Прода</a:t>
+            </a:r>
+            <a:r>
+              <a:rPr lang="ru-RU" sz="1400" dirty="0">
+                <a:solidFill>
+                  <a:srgbClr val="F7F1E7"/>
+                </a:solidFill>
+                <a:latin typeface="Inter" pitchFamily="34" charset="0"/>
+                <a:ea typeface="Inter" pitchFamily="34" charset="-122"/>
+                <a:cs typeface="Inter" pitchFamily="34" charset="-120"/>
+              </a:rPr>
+              <a:t>е</a:t>
+            </a:r>
+            <a:r>
+              <a:rPr lang="en-US" sz="1400" dirty="0" err="1">
+                <a:solidFill>
+                  <a:srgbClr val="F7F1E7"/>
+                </a:solidFill>
+                <a:latin typeface="Inter" pitchFamily="34" charset="0"/>
+                <a:ea typeface="Inter" pitchFamily="34" charset="-122"/>
+                <a:cs typeface="Inter" pitchFamily="34" charset="-120"/>
+              </a:rPr>
+              <a:t>м</a:t>
+            </a:r>
+            <a:r>
+              <a:rPr lang="en-US" sz="1400" dirty="0">
+                <a:solidFill>
+                  <a:srgbClr val="F7F1E7"/>
+                </a:solidFill>
+                <a:latin typeface="Inter" pitchFamily="34" charset="0"/>
+                <a:ea typeface="Inter" pitchFamily="34" charset="-122"/>
+                <a:cs typeface="Inter" pitchFamily="34" charset="-120"/>
+              </a:rPr>
+              <a:t> </a:t>
+            </a:r>
+            <a:r>
+              <a:rPr lang="en-US" sz="1400" dirty="0" err="1">
+                <a:solidFill>
+                  <a:srgbClr val="F7F1E7"/>
+                </a:solidFill>
+                <a:latin typeface="Inter" pitchFamily="34" charset="0"/>
+                <a:ea typeface="Inter" pitchFamily="34" charset="-122"/>
+                <a:cs typeface="Inter" pitchFamily="34" charset="-120"/>
+              </a:rPr>
+              <a:t>без</a:t>
+            </a:r>
+            <a:r>
+              <a:rPr lang="en-US" sz="1400" dirty="0">
+                <a:solidFill>
+                  <a:srgbClr val="F7F1E7"/>
+                </a:solidFill>
+                <a:latin typeface="Inter" pitchFamily="34" charset="0"/>
+                <a:ea typeface="Inter" pitchFamily="34" charset="-122"/>
+                <a:cs typeface="Inter" pitchFamily="34" charset="-120"/>
+              </a:rPr>
+              <a:t> вашего участия</a:t>
+            </a:r>
+            <a:endParaRPr lang="en-US" sz="1400" dirty="0"/>
           </a:p>
         </p:txBody>
       </p:sp>
@@ -8734,7 +7225,7 @@
               <a:buNone/>
             </a:pPr>
             <a:r>
-              <a:rPr lang="en-US" sz="1350" b="1" kern="0" spc="160" dirty="0">
+              <a:rPr lang="en-US" sz="1400" b="1" kern="0" spc="160" dirty="0">
                 <a:solidFill>
                   <a:srgbClr val="D9BC7A"/>
                 </a:solidFill>
@@ -8744,7 +7235,52 @@
               </a:rPr>
               <a:t>ДЕНЬГИ ЗА ИМУЩЕСТВО ПРИХОДЯТ НАПРЯМУЮ ВАШЕЙ КОМПАНИИ</a:t>
             </a:r>
-            <a:endParaRPr lang="en-US" sz="1350" dirty="0"/>
+            <a:endParaRPr lang="en-US" sz="1400" dirty="0"/>
+          </a:p>
+        </p:txBody>
+      </p:sp>
+      <p:sp>
+        <p:nvSpPr>
+          <p:cNvPr id="17" name="Text 3">
+            <a:extLst>
+              <a:ext uri="{FF2B5EF4-FFF2-40B4-BE49-F238E27FC236}">
+                <a16:creationId xmlns:a16="http://schemas.microsoft.com/office/drawing/2014/main" id="{C4209B80-25C9-8E40-81BA-09E1DDB95125}"/>
+              </a:ext>
+            </a:extLst>
+          </p:cNvPr>
+          <p:cNvSpPr txBox="1"/>
+          <p:nvPr/>
+        </p:nvSpPr>
+        <p:spPr>
+          <a:xfrm>
+            <a:off x="8012888" y="1536191"/>
+            <a:ext cx="3537356" cy="350243"/>
+          </a:xfrm>
+          <a:prstGeom prst="rect">
+            <a:avLst/>
+          </a:prstGeom>
+          <a:noFill/>
+          <a:ln/>
+        </p:spPr>
+        <p:txBody>
+          <a:bodyPr wrap="square" lIns="0" tIns="0" rIns="0" bIns="0" rtlCol="0" anchor="t"/>
+          <a:lstStyle/>
+          <a:p>
+            <a:pPr marL="0" indent="0">
+              <a:buNone/>
+            </a:pPr>
+            <a:r>
+              <a:rPr lang="ru-RU" sz="2400" dirty="0">
+                <a:solidFill>
+                  <a:srgbClr val="F7F1E7"/>
+                </a:solidFill>
+                <a:latin typeface="Inter" pitchFamily="34" charset="0"/>
+                <a:ea typeface="Inter" pitchFamily="34" charset="-122"/>
+                <a:cs typeface="Inter" pitchFamily="34" charset="-120"/>
+              </a:rPr>
+              <a:t>ФОРМАТ 2</a:t>
+            </a:r>
+            <a:endParaRPr lang="en-US" sz="2400" dirty="0"/>
           </a:p>
         </p:txBody>
       </p:sp>
@@ -8789,184 +7325,74 @@
       </p:grpSpPr>
       <p:sp>
         <p:nvSpPr>
-          <p:cNvPr id="2" name="Text 0"/>
-          <p:cNvSpPr txBox="1"/>
-          <p:nvPr/>
-        </p:nvSpPr>
-        <p:spPr>
-          <a:xfrm>
-            <a:off x="777240" y="658368"/>
-            <a:ext cx="10637215" cy="219456"/>
-          </a:xfrm>
-          <a:prstGeom prst="rect">
-            <a:avLst/>
-          </a:prstGeom>
-          <a:noFill/>
-          <a:ln/>
-        </p:spPr>
-        <p:txBody>
-          <a:bodyPr wrap="square" lIns="0" tIns="0" rIns="0" bIns="0" rtlCol="0" anchor="t"/>
-          <a:lstStyle/>
-          <a:p>
-            <a:pPr marL="0" indent="0">
-              <a:buNone/>
-            </a:pPr>
-            <a:r>
-              <a:rPr lang="en-US" sz="1050" b="1" kern="0" spc="240" dirty="0">
-                <a:solidFill>
-                  <a:srgbClr val="6E5426"/>
-                </a:solidFill>
-                <a:latin typeface="Inter" pitchFamily="34" charset="0"/>
-                <a:ea typeface="Inter" pitchFamily="34" charset="-122"/>
-                <a:cs typeface="Inter" pitchFamily="34" charset="-120"/>
-              </a:rPr>
-              <a:t>ПРОЗРАЧНОСТЬ</a:t>
-            </a:r>
-            <a:endParaRPr lang="en-US" sz="1050" dirty="0"/>
-          </a:p>
-        </p:txBody>
-      </p:sp>
-      <p:sp>
-        <p:nvSpPr>
           <p:cNvPr id="3" name="Text 1"/>
           <p:cNvSpPr txBox="1"/>
           <p:nvPr/>
         </p:nvSpPr>
         <p:spPr>
           <a:xfrm>
-            <a:off x="777240" y="1042416"/>
-            <a:ext cx="5212080" cy="1463040"/>
-          </a:xfrm>
-          <a:prstGeom prst="rect">
-            <a:avLst/>
-          </a:prstGeom>
-          <a:noFill/>
-          <a:ln/>
-        </p:spPr>
-        <p:txBody>
-          <a:bodyPr wrap="square" lIns="0" tIns="0" rIns="0" bIns="0" rtlCol="0" anchor="t"/>
-          <a:lstStyle/>
-          <a:p>
-            <a:pPr marL="0" indent="0">
-              <a:lnSpc>
-                <a:spcPts val="4200"/>
-              </a:lnSpc>
-              <a:buNone/>
-            </a:pPr>
-            <a:r>
-              <a:rPr lang="en-US" sz="3600" b="1" dirty="0">
-                <a:solidFill>
-                  <a:srgbClr val="0C1D28"/>
-                </a:solidFill>
-                <a:latin typeface="Inter" pitchFamily="34" charset="0"/>
-                <a:ea typeface="Inter" pitchFamily="34" charset="-122"/>
-                <a:cs typeface="Inter" pitchFamily="34" charset="-120"/>
-              </a:rPr>
-              <a:t>КАЖДАЯ ПОЗИЦИЯ</a:t>
-            </a:r>
-            <a:endParaRPr lang="en-US" sz="3600" dirty="0"/>
-          </a:p>
-          <a:p>
-            <a:pPr marL="0" indent="0">
-              <a:lnSpc>
-                <a:spcPts val="4200"/>
-              </a:lnSpc>
-              <a:buNone/>
-            </a:pPr>
-            <a:r>
-              <a:rPr lang="en-US" sz="3600" b="1" dirty="0">
-                <a:solidFill>
-                  <a:srgbClr val="0C1D28"/>
-                </a:solidFill>
-                <a:latin typeface="Inter" pitchFamily="34" charset="0"/>
-                <a:ea typeface="Inter" pitchFamily="34" charset="-122"/>
-                <a:cs typeface="Inter" pitchFamily="34" charset="-120"/>
-              </a:rPr>
-              <a:t>ЗАФИКСИРОВАНА</a:t>
-            </a:r>
-            <a:endParaRPr lang="en-US" sz="3600" dirty="0"/>
-          </a:p>
-        </p:txBody>
-      </p:sp>
-      <p:sp>
-        <p:nvSpPr>
-          <p:cNvPr id="4" name="Text 2"/>
-          <p:cNvSpPr txBox="1"/>
-          <p:nvPr/>
-        </p:nvSpPr>
-        <p:spPr>
-          <a:xfrm>
-            <a:off x="777240" y="2798064"/>
-            <a:ext cx="5029200" cy="1097280"/>
-          </a:xfrm>
-          <a:prstGeom prst="rect">
-            <a:avLst/>
-          </a:prstGeom>
-          <a:noFill/>
-          <a:ln/>
-        </p:spPr>
-        <p:txBody>
-          <a:bodyPr wrap="square" lIns="0" tIns="0" rIns="0" bIns="0" rtlCol="0" anchor="t"/>
-          <a:lstStyle/>
-          <a:p>
-            <a:pPr marL="0" indent="0">
-              <a:lnSpc>
-                <a:spcPts val="2400"/>
-              </a:lnSpc>
-              <a:buNone/>
-            </a:pPr>
-            <a:r>
-              <a:rPr lang="en-US" sz="1550" dirty="0">
-                <a:solidFill>
-                  <a:srgbClr val="6F6A62"/>
-                </a:solidFill>
-                <a:latin typeface="Inter" pitchFamily="34" charset="0"/>
-                <a:ea typeface="Inter" pitchFamily="34" charset="-122"/>
-                <a:cs typeface="Inter" pitchFamily="34" charset="-120"/>
-              </a:rPr>
-              <a:t>Состояние, стартовая и минимальная цена</a:t>
-            </a:r>
-            <a:endParaRPr lang="en-US" sz="1550" dirty="0"/>
-          </a:p>
-          <a:p>
-            <a:pPr marL="0" indent="0">
-              <a:lnSpc>
-                <a:spcPts val="2400"/>
-              </a:lnSpc>
-              <a:buNone/>
-            </a:pPr>
-            <a:r>
-              <a:rPr lang="en-US" sz="1550" dirty="0">
-                <a:solidFill>
-                  <a:srgbClr val="6F6A62"/>
-                </a:solidFill>
-                <a:latin typeface="Inter" pitchFamily="34" charset="0"/>
-                <a:ea typeface="Inter" pitchFamily="34" charset="-122"/>
-                <a:cs typeface="Inter" pitchFamily="34" charset="-120"/>
-              </a:rPr>
-              <a:t>фиксируются до старта продаж.</a:t>
-            </a:r>
-            <a:endParaRPr lang="en-US" sz="1550" dirty="0"/>
-          </a:p>
-          <a:p>
-            <a:pPr marL="0" indent="0">
-              <a:lnSpc>
-                <a:spcPts val="2400"/>
-              </a:lnSpc>
-              <a:buNone/>
-            </a:pPr>
-            <a:r>
-              <a:rPr lang="en-US" sz="1550" dirty="0">
-                <a:solidFill>
-                  <a:srgbClr val="6F6A62"/>
-                </a:solidFill>
-                <a:latin typeface="Inter" pitchFamily="34" charset="0"/>
-                <a:ea typeface="Inter" pitchFamily="34" charset="-122"/>
-                <a:cs typeface="Inter" pitchFamily="34" charset="-120"/>
-              </a:rPr>
-              <a:t>Вы видите статус каждой позиции.</a:t>
-            </a:r>
-            <a:endParaRPr lang="en-US" sz="1550" dirty="0"/>
+            <a:off x="694944" y="932687"/>
+            <a:ext cx="5212080" cy="3072383"/>
+          </a:xfrm>
+          <a:prstGeom prst="rect">
+            <a:avLst/>
+          </a:prstGeom>
+          <a:noFill/>
+          <a:ln/>
+        </p:spPr>
+        <p:txBody>
+          <a:bodyPr wrap="square" lIns="0" tIns="0" rIns="0" bIns="0" rtlCol="0" anchor="t"/>
+          <a:lstStyle/>
+          <a:p>
+            <a:r>
+              <a:rPr lang="ru-RU" sz="4800" b="1" dirty="0">
+                <a:solidFill>
+                  <a:schemeClr val="tx1">
+                    <a:lumMod val="95000"/>
+                    <a:lumOff val="5000"/>
+                  </a:schemeClr>
+                </a:solidFill>
+                <a:latin typeface="Inter" pitchFamily="34" charset="0"/>
+                <a:ea typeface="Inter" pitchFamily="34" charset="-122"/>
+                <a:cs typeface="Inter" pitchFamily="34" charset="-120"/>
+              </a:rPr>
+              <a:t>Сами продаем</a:t>
+            </a:r>
+          </a:p>
+          <a:p>
+            <a:endParaRPr lang="ru-RU" sz="4800" b="1" dirty="0">
+              <a:solidFill>
+                <a:schemeClr val="tx1">
+                  <a:lumMod val="95000"/>
+                  <a:lumOff val="5000"/>
+                </a:schemeClr>
+              </a:solidFill>
+              <a:latin typeface="Inter" pitchFamily="34" charset="0"/>
+              <a:ea typeface="Inter" pitchFamily="34" charset="-122"/>
+            </a:endParaRPr>
+          </a:p>
+          <a:p>
+            <a:r>
+              <a:rPr lang="ru-RU" sz="4000" b="1" dirty="0">
+                <a:solidFill>
+                  <a:schemeClr val="tx1">
+                    <a:lumMod val="95000"/>
+                    <a:lumOff val="5000"/>
+                  </a:schemeClr>
+                </a:solidFill>
+                <a:latin typeface="Inter" pitchFamily="34" charset="0"/>
+                <a:ea typeface="Inter" pitchFamily="34" charset="-122"/>
+              </a:rPr>
+              <a:t>Если нужно – вывезем сразу</a:t>
+            </a:r>
+            <a:endParaRPr lang="en-US" sz="4000" b="1" dirty="0">
+              <a:solidFill>
+                <a:schemeClr val="tx1">
+                  <a:lumMod val="95000"/>
+                  <a:lumOff val="5000"/>
+                </a:schemeClr>
+              </a:solidFill>
+            </a:endParaRPr>
           </a:p>
         </p:txBody>
       </p:sp>
@@ -8978,8 +7404,8 @@
         </p:nvSpPr>
         <p:spPr>
           <a:xfrm>
-            <a:off x="777240" y="4626864"/>
-            <a:ext cx="5212080" cy="1133856"/>
+            <a:off x="360218" y="4462272"/>
+            <a:ext cx="5629102" cy="1216152"/>
           </a:xfrm>
           <a:prstGeom prst="roundRect">
             <a:avLst>
@@ -9008,7 +7434,7 @@
         </p:blipFill>
         <p:spPr>
           <a:xfrm>
-            <a:off x="1124712" y="5029200"/>
+            <a:off x="635647" y="4660946"/>
             <a:ext cx="365760" cy="365760"/>
           </a:xfrm>
           <a:prstGeom prst="rect">
@@ -9024,57 +7450,46 @@
         </p:nvSpPr>
         <p:spPr>
           <a:xfrm>
-            <a:off x="1673352" y="4937760"/>
-            <a:ext cx="4114800" cy="566928"/>
-          </a:xfrm>
-          <a:prstGeom prst="rect">
-            <a:avLst/>
-          </a:prstGeom>
-          <a:noFill/>
-          <a:ln/>
-        </p:spPr>
-        <p:txBody>
-          <a:bodyPr wrap="square" lIns="0" tIns="0" rIns="0" bIns="0" rtlCol="0" anchor="t"/>
-          <a:lstStyle/>
-          <a:p>
-            <a:pPr marL="0" indent="0">
-              <a:lnSpc>
-                <a:spcPts val="1900"/>
-              </a:lnSpc>
-              <a:buNone/>
-            </a:pPr>
-            <a:r>
-              <a:rPr lang="en-US" sz="1400" b="1" dirty="0">
-                <a:solidFill>
-                  <a:srgbClr val="F7F1E7"/>
-                </a:solidFill>
-                <a:latin typeface="Inter" pitchFamily="34" charset="0"/>
-                <a:ea typeface="Inter" pitchFamily="34" charset="-122"/>
-                <a:cs typeface="Inter" pitchFamily="34" charset="-120"/>
-              </a:rPr>
-              <a:t>НИЖЕ МИНИМАЛЬНОЙ ЦЕНЫ —</a:t>
-            </a:r>
-            <a:endParaRPr lang="en-US" sz="1400" dirty="0"/>
-          </a:p>
-          <a:p>
-            <a:pPr marL="0" indent="0">
-              <a:lnSpc>
-                <a:spcPts val="1900"/>
-              </a:lnSpc>
-              <a:buNone/>
-            </a:pPr>
-            <a:r>
-              <a:rPr lang="en-US" sz="1400" b="1" dirty="0">
-                <a:solidFill>
-                  <a:srgbClr val="F7F1E7"/>
-                </a:solidFill>
-                <a:latin typeface="Inter" pitchFamily="34" charset="0"/>
-                <a:ea typeface="Inter" pitchFamily="34" charset="-122"/>
-                <a:cs typeface="Inter" pitchFamily="34" charset="-120"/>
-              </a:rPr>
-              <a:t>ТОЛЬКО С ВАШЕГО СОГЛАСИЯ</a:t>
-            </a:r>
-            <a:endParaRPr lang="en-US" sz="1400" dirty="0"/>
+            <a:off x="1164336" y="4590288"/>
+            <a:ext cx="4432900" cy="786384"/>
+          </a:xfrm>
+          <a:prstGeom prst="rect">
+            <a:avLst/>
+          </a:prstGeom>
+          <a:noFill/>
+          <a:ln/>
+        </p:spPr>
+        <p:txBody>
+          <a:bodyPr wrap="square" lIns="0" tIns="0" rIns="0" bIns="0" rtlCol="0" anchor="t"/>
+          <a:lstStyle/>
+          <a:p>
+            <a:r>
+              <a:rPr lang="ru-RU" sz="3200" dirty="0">
+                <a:solidFill>
+                  <a:schemeClr val="bg1"/>
+                </a:solidFill>
+                <a:latin typeface="Inter" pitchFamily="34" charset="0"/>
+                <a:ea typeface="Inter" pitchFamily="34" charset="-122"/>
+              </a:rPr>
+              <a:t>ПО ИТОГУ – </a:t>
+            </a:r>
+          </a:p>
+          <a:p>
+            <a:r>
+              <a:rPr lang="ru-RU" sz="3200" dirty="0">
+                <a:solidFill>
+                  <a:schemeClr val="bg1"/>
+                </a:solidFill>
+                <a:latin typeface="Inter" pitchFamily="34" charset="0"/>
+                <a:ea typeface="Inter" pitchFamily="34" charset="-122"/>
+              </a:rPr>
+              <a:t>ОТЧЕТ О ПРОДАЖАХ</a:t>
+            </a:r>
+            <a:endParaRPr lang="en-US" sz="3200" dirty="0">
+              <a:solidFill>
+                <a:schemeClr val="bg1"/>
+              </a:solidFill>
+            </a:endParaRPr>
           </a:p>
         </p:txBody>
       </p:sp>
@@ -9706,7 +8121,7 @@
           <p:nvPr/>
         </p:nvPicPr>
         <p:blipFill>
-          <a:blip r:embed="rId6"/>
+          <a:blip r:embed="rId5"/>
           <a:stretch>
             <a:fillRect/>
           </a:stretch>
@@ -9730,708 +8145,6 @@
 </file>
 
 <file path=ppt/slides/slide8.xml><?xml version="1.0" encoding="utf-8"?>
-<p:sld xmlns:a="http://schemas.openxmlformats.org/drawingml/2006/main" xmlns:r="http://schemas.openxmlformats.org/officeDocument/2006/relationships" xmlns:p="http://schemas.openxmlformats.org/presentationml/2006/main">
-  <p:cSld name="Slide 10">
-    <p:bg>
-      <p:bgPr>
-        <a:blipFill dpi="0" rotWithShape="1">
-          <a:blip r:embed="rId3">
-            <a:lum/>
-          </a:blip>
-          <a:srcRect/>
-          <a:stretch>
-            <a:fillRect/>
-          </a:stretch>
-        </a:blipFill>
-        <a:effectLst/>
-      </p:bgPr>
-    </p:bg>
-    <p:spTree>
-      <p:nvGrpSpPr>
-        <p:cNvPr id="1" name=""/>
-        <p:cNvGrpSpPr/>
-        <p:nvPr/>
-      </p:nvGrpSpPr>
-      <p:grpSpPr>
-        <a:xfrm>
-          <a:off x="0" y="0"/>
-          <a:ext cx="0" cy="0"/>
-          <a:chOff x="0" y="0"/>
-          <a:chExt cx="0" cy="0"/>
-        </a:xfrm>
-      </p:grpSpPr>
-      <p:sp>
-        <p:nvSpPr>
-          <p:cNvPr id="2" name="Shape 0"/>
-          <p:cNvSpPr/>
-          <p:nvPr/>
-        </p:nvSpPr>
-        <p:spPr>
-          <a:xfrm>
-            <a:off x="0" y="0"/>
-            <a:ext cx="12191695" cy="6858000"/>
-          </a:xfrm>
-          <a:prstGeom prst="rect">
-            <a:avLst/>
-          </a:prstGeom>
-          <a:solidFill>
-            <a:srgbClr val="0C1D28">
-              <a:alpha val="88000"/>
-            </a:srgbClr>
-          </a:solidFill>
-          <a:ln/>
-        </p:spPr>
-        <p:txBody>
-          <a:bodyPr/>
-          <a:p/>
-        </p:txBody>
-      </p:sp>
-      <p:sp>
-        <p:nvSpPr>
-          <p:cNvPr id="3" name="Text 1"/>
-          <p:cNvSpPr txBox="1"/>
-          <p:nvPr/>
-        </p:nvSpPr>
-        <p:spPr>
-          <a:xfrm>
-            <a:off x="777240" y="566928"/>
-            <a:ext cx="10637215" cy="219456"/>
-          </a:xfrm>
-          <a:prstGeom prst="rect">
-            <a:avLst/>
-          </a:prstGeom>
-          <a:noFill/>
-          <a:ln/>
-        </p:spPr>
-        <p:txBody>
-          <a:bodyPr wrap="square" lIns="0" tIns="0" rIns="0" bIns="0" rtlCol="0" anchor="t"/>
-          <a:lstStyle/>
-          <a:p>
-            <a:pPr marL="0" indent="0">
-              <a:buNone/>
-            </a:pPr>
-            <a:r>
-              <a:rPr lang="en-US" sz="1050" b="1" kern="0" spc="240" dirty="0">
-                <a:solidFill>
-                  <a:srgbClr val="C89B45"/>
-                </a:solidFill>
-                <a:latin typeface="Inter" pitchFamily="34" charset="0"/>
-                <a:ea typeface="Inter" pitchFamily="34" charset="-122"/>
-                <a:cs typeface="Inter" pitchFamily="34" charset="-120"/>
-              </a:rPr>
-              <a:t>ПОСЛЕ ВЫВОЗА</a:t>
-            </a:r>
-            <a:endParaRPr lang="en-US" sz="1050" dirty="0"/>
-          </a:p>
-        </p:txBody>
-      </p:sp>
-      <p:sp>
-        <p:nvSpPr>
-          <p:cNvPr id="4" name="Text 2"/>
-          <p:cNvSpPr txBox="1"/>
-          <p:nvPr/>
-        </p:nvSpPr>
-        <p:spPr>
-          <a:xfrm>
-            <a:off x="777240" y="1060704"/>
-            <a:ext cx="4846320" cy="3200400"/>
-          </a:xfrm>
-          <a:prstGeom prst="rect">
-            <a:avLst/>
-          </a:prstGeom>
-          <a:noFill/>
-          <a:ln/>
-        </p:spPr>
-        <p:txBody>
-          <a:bodyPr wrap="square" lIns="0" tIns="0" rIns="0" bIns="0" rtlCol="0" anchor="t"/>
-          <a:lstStyle/>
-          <a:p>
-            <a:pPr marL="0" indent="0">
-              <a:lnSpc>
-                <a:spcPts val="4400"/>
-              </a:lnSpc>
-              <a:buNone/>
-            </a:pPr>
-            <a:r>
-              <a:rPr lang="en-US" sz="3400" b="1" dirty="0">
-                <a:solidFill>
-                  <a:srgbClr val="F7F1E7"/>
-                </a:solidFill>
-                <a:latin typeface="Inter" pitchFamily="34" charset="0"/>
-                <a:ea typeface="Inter" pitchFamily="34" charset="-122"/>
-                <a:cs typeface="Inter" pitchFamily="34" charset="-120"/>
-              </a:rPr>
-              <a:t>ПОМЕЩЕНИЕ</a:t>
-            </a:r>
-            <a:endParaRPr lang="en-US" sz="3400" dirty="0"/>
-          </a:p>
-          <a:p>
-            <a:pPr marL="0" indent="0">
-              <a:lnSpc>
-                <a:spcPts val="4400"/>
-              </a:lnSpc>
-              <a:buNone/>
-            </a:pPr>
-            <a:r>
-              <a:rPr lang="en-US" sz="3400" b="1" dirty="0">
-                <a:solidFill>
-                  <a:srgbClr val="F7F1E7"/>
-                </a:solidFill>
-                <a:latin typeface="Inter" pitchFamily="34" charset="0"/>
-                <a:ea typeface="Inter" pitchFamily="34" charset="-122"/>
-                <a:cs typeface="Inter" pitchFamily="34" charset="-120"/>
-              </a:rPr>
-              <a:t>БОЛЬШЕ</a:t>
-            </a:r>
-            <a:endParaRPr lang="en-US" sz="3400" dirty="0"/>
-          </a:p>
-          <a:p>
-            <a:pPr marL="0" indent="0">
-              <a:lnSpc>
-                <a:spcPts val="4400"/>
-              </a:lnSpc>
-              <a:buNone/>
-            </a:pPr>
-            <a:r>
-              <a:rPr lang="en-US" sz="3400" b="1" dirty="0">
-                <a:solidFill>
-                  <a:srgbClr val="F7F1E7"/>
-                </a:solidFill>
-                <a:latin typeface="Inter" pitchFamily="34" charset="0"/>
-                <a:ea typeface="Inter" pitchFamily="34" charset="-122"/>
-                <a:cs typeface="Inter" pitchFamily="34" charset="-120"/>
-              </a:rPr>
-              <a:t>НЕ ЗАВИСИТ</a:t>
-            </a:r>
-            <a:endParaRPr lang="en-US" sz="3400" dirty="0"/>
-          </a:p>
-          <a:p>
-            <a:pPr marL="0" indent="0">
-              <a:lnSpc>
-                <a:spcPts val="4400"/>
-              </a:lnSpc>
-              <a:buNone/>
-            </a:pPr>
-            <a:r>
-              <a:rPr lang="en-US" sz="3400" b="1" dirty="0">
-                <a:solidFill>
-                  <a:srgbClr val="F7F1E7"/>
-                </a:solidFill>
-                <a:latin typeface="Inter" pitchFamily="34" charset="0"/>
-                <a:ea typeface="Inter" pitchFamily="34" charset="-122"/>
-                <a:cs typeface="Inter" pitchFamily="34" charset="-120"/>
-              </a:rPr>
-              <a:t>ОТ ПРОДАЖ</a:t>
-            </a:r>
-            <a:endParaRPr lang="en-US" sz="3400" dirty="0"/>
-          </a:p>
-        </p:txBody>
-      </p:sp>
-      <p:sp>
-        <p:nvSpPr>
-          <p:cNvPr id="5" name="Text 3"/>
-          <p:cNvSpPr txBox="1"/>
-          <p:nvPr/>
-        </p:nvSpPr>
-        <p:spPr>
-          <a:xfrm>
-            <a:off x="777240" y="4791456"/>
-            <a:ext cx="4572000" cy="914400"/>
-          </a:xfrm>
-          <a:prstGeom prst="rect">
-            <a:avLst/>
-          </a:prstGeom>
-          <a:noFill/>
-          <a:ln/>
-        </p:spPr>
-        <p:txBody>
-          <a:bodyPr wrap="square" lIns="0" tIns="0" rIns="0" bIns="0" rtlCol="0" anchor="t"/>
-          <a:lstStyle/>
-          <a:p>
-            <a:pPr marL="0" indent="0">
-              <a:lnSpc>
-                <a:spcPts val="2100"/>
-              </a:lnSpc>
-              <a:buNone/>
-            </a:pPr>
-            <a:r>
-              <a:rPr lang="en-US" sz="1400" dirty="0">
-                <a:solidFill>
-                  <a:srgbClr val="9CAAB1"/>
-                </a:solidFill>
-                <a:latin typeface="Inter" pitchFamily="34" charset="0"/>
-                <a:ea typeface="Inter" pitchFamily="34" charset="-122"/>
-                <a:cs typeface="Inter" pitchFamily="34" charset="-120"/>
-              </a:rPr>
-              <a:t>Дата освобождения не зависит</a:t>
-            </a:r>
-            <a:endParaRPr lang="en-US" sz="1400" dirty="0"/>
-          </a:p>
-          <a:p>
-            <a:pPr marL="0" indent="0">
-              <a:lnSpc>
-                <a:spcPts val="2100"/>
-              </a:lnSpc>
-              <a:buNone/>
-            </a:pPr>
-            <a:r>
-              <a:rPr lang="en-US" sz="1400" dirty="0">
-                <a:solidFill>
-                  <a:srgbClr val="9CAAB1"/>
-                </a:solidFill>
-                <a:latin typeface="Inter" pitchFamily="34" charset="0"/>
-                <a:ea typeface="Inter" pitchFamily="34" charset="-122"/>
-                <a:cs typeface="Inter" pitchFamily="34" charset="-120"/>
-              </a:rPr>
-              <a:t>от того, успел ли продаться</a:t>
-            </a:r>
-            <a:endParaRPr lang="en-US" sz="1400" dirty="0"/>
-          </a:p>
-          <a:p>
-            <a:pPr marL="0" indent="0">
-              <a:lnSpc>
-                <a:spcPts val="2100"/>
-              </a:lnSpc>
-              <a:buNone/>
-            </a:pPr>
-            <a:r>
-              <a:rPr lang="en-US" sz="1400" dirty="0">
-                <a:solidFill>
-                  <a:srgbClr val="9CAAB1"/>
-                </a:solidFill>
-                <a:latin typeface="Inter" pitchFamily="34" charset="0"/>
-                <a:ea typeface="Inter" pitchFamily="34" charset="-122"/>
-                <a:cs typeface="Inter" pitchFamily="34" charset="-120"/>
-              </a:rPr>
-              <a:t>последний стол.</a:t>
-            </a:r>
-            <a:endParaRPr lang="en-US" sz="1400" dirty="0"/>
-          </a:p>
-        </p:txBody>
-      </p:sp>
-      <p:sp>
-        <p:nvSpPr>
-          <p:cNvPr id="6" name="Shape 4"/>
-          <p:cNvSpPr/>
-          <p:nvPr/>
-        </p:nvSpPr>
-        <p:spPr>
-          <a:xfrm>
-            <a:off x="6035040" y="1298448"/>
-            <a:ext cx="5379415" cy="1371600"/>
-          </a:xfrm>
-          <a:prstGeom prst="roundRect">
-            <a:avLst>
-              <a:gd name="adj" fmla="val 3333"/>
-            </a:avLst>
-          </a:prstGeom>
-          <a:solidFill>
-            <a:srgbClr val="1A2F3B">
-              <a:alpha val="65000"/>
-            </a:srgbClr>
-          </a:solidFill>
-          <a:ln w="12700">
-            <a:solidFill>
-              <a:srgbClr val="6E5426"/>
-            </a:solidFill>
-            <a:prstDash val="solid"/>
-          </a:ln>
-        </p:spPr>
-        <p:txBody>
-          <a:bodyPr/>
-          <a:p/>
-        </p:txBody>
-      </p:sp>
-      <p:pic>
-        <p:nvPicPr>
-          <p:cNvPr id="7" name="Image 0" descr="/home/user/mysteryslavic-2026-07-19_16-47-00/presentations/office-client/assets/ic-truck.png"/>
-          <p:cNvPicPr>
-            <a:picLocks noChangeAspect="1"/>
-          </p:cNvPicPr>
-          <p:nvPr/>
-        </p:nvPicPr>
-        <p:blipFill>
-          <a:blip r:embed="rId4"/>
-          <a:stretch>
-            <a:fillRect/>
-          </a:stretch>
-        </p:blipFill>
-        <p:spPr>
-          <a:xfrm>
-            <a:off x="6419088" y="1755648"/>
-            <a:ext cx="457200" cy="457200"/>
-          </a:xfrm>
-          <a:prstGeom prst="rect">
-            <a:avLst/>
-          </a:prstGeom>
-        </p:spPr>
-      </p:pic>
-      <p:sp>
-        <p:nvSpPr>
-          <p:cNvPr id="8" name="Text 5"/>
-          <p:cNvSpPr txBox="1"/>
-          <p:nvPr/>
-        </p:nvSpPr>
-        <p:spPr>
-          <a:xfrm>
-            <a:off x="7132320" y="1609344"/>
-            <a:ext cx="3870655" cy="274320"/>
-          </a:xfrm>
-          <a:prstGeom prst="rect">
-            <a:avLst/>
-          </a:prstGeom>
-          <a:noFill/>
-          <a:ln/>
-        </p:spPr>
-        <p:txBody>
-          <a:bodyPr wrap="square" lIns="0" tIns="0" rIns="0" bIns="0" rtlCol="0" anchor="t"/>
-          <a:lstStyle/>
-          <a:p>
-            <a:pPr marL="0" indent="0">
-              <a:buNone/>
-            </a:pPr>
-            <a:r>
-              <a:rPr lang="en-US" sz="1600" b="1" kern="0" spc="140" dirty="0">
-                <a:solidFill>
-                  <a:srgbClr val="D9BC7A"/>
-                </a:solidFill>
-                <a:latin typeface="Inter" pitchFamily="34" charset="0"/>
-                <a:ea typeface="Inter" pitchFamily="34" charset="-122"/>
-                <a:cs typeface="Inter" pitchFamily="34" charset="-120"/>
-              </a:rPr>
-              <a:t>ВЫВОЗИМ</a:t>
-            </a:r>
-            <a:endParaRPr lang="en-US" sz="1600" dirty="0"/>
-          </a:p>
-        </p:txBody>
-      </p:sp>
-      <p:sp>
-        <p:nvSpPr>
-          <p:cNvPr id="9" name="Text 6"/>
-          <p:cNvSpPr txBox="1"/>
-          <p:nvPr/>
-        </p:nvSpPr>
-        <p:spPr>
-          <a:xfrm>
-            <a:off x="7132320" y="1956816"/>
-            <a:ext cx="3870655" cy="566928"/>
-          </a:xfrm>
-          <a:prstGeom prst="rect">
-            <a:avLst/>
-          </a:prstGeom>
-          <a:noFill/>
-          <a:ln/>
-        </p:spPr>
-        <p:txBody>
-          <a:bodyPr wrap="square" lIns="0" tIns="0" rIns="0" bIns="0" rtlCol="0" anchor="t"/>
-          <a:lstStyle/>
-          <a:p>
-            <a:pPr marL="0" indent="0">
-              <a:lnSpc>
-                <a:spcPts val="1800"/>
-              </a:lnSpc>
-              <a:buNone/>
-            </a:pPr>
-            <a:r>
-              <a:rPr lang="en-US" sz="1250" dirty="0">
-                <a:solidFill>
-                  <a:srgbClr val="F7F1E7"/>
-                </a:solidFill>
-                <a:latin typeface="Inter" pitchFamily="34" charset="0"/>
-                <a:ea typeface="Inter" pitchFamily="34" charset="-122"/>
-                <a:cs typeface="Inter" pitchFamily="34" charset="-120"/>
-              </a:rPr>
-              <a:t>согласованное имущество — к вашей дате</a:t>
-            </a:r>
-            <a:endParaRPr lang="en-US" sz="1250" dirty="0"/>
-          </a:p>
-        </p:txBody>
-      </p:sp>
-      <p:sp>
-        <p:nvSpPr>
-          <p:cNvPr id="10" name="Shape 7"/>
-          <p:cNvSpPr/>
-          <p:nvPr/>
-        </p:nvSpPr>
-        <p:spPr>
-          <a:xfrm>
-            <a:off x="6035040" y="2926080"/>
-            <a:ext cx="5379415" cy="1371600"/>
-          </a:xfrm>
-          <a:prstGeom prst="roundRect">
-            <a:avLst>
-              <a:gd name="adj" fmla="val 3333"/>
-            </a:avLst>
-          </a:prstGeom>
-          <a:solidFill>
-            <a:srgbClr val="1A2F3B">
-              <a:alpha val="65000"/>
-            </a:srgbClr>
-          </a:solidFill>
-          <a:ln w="12700">
-            <a:solidFill>
-              <a:srgbClr val="6E5426"/>
-            </a:solidFill>
-            <a:prstDash val="solid"/>
-          </a:ln>
-        </p:spPr>
-        <p:txBody>
-          <a:bodyPr/>
-          <a:p/>
-        </p:txBody>
-      </p:sp>
-      <p:pic>
-        <p:nvPicPr>
-          <p:cNvPr id="11" name="Image 1" descr="/home/user/mysteryslavic-2026-07-19_16-47-00/presentations/office-client/assets/ic-tag.png"/>
-          <p:cNvPicPr>
-            <a:picLocks noChangeAspect="1"/>
-          </p:cNvPicPr>
-          <p:nvPr/>
-        </p:nvPicPr>
-        <p:blipFill>
-          <a:blip r:embed="rId5"/>
-          <a:stretch>
-            <a:fillRect/>
-          </a:stretch>
-        </p:blipFill>
-        <p:spPr>
-          <a:xfrm>
-            <a:off x="6419088" y="3383280"/>
-            <a:ext cx="457200" cy="457200"/>
-          </a:xfrm>
-          <a:prstGeom prst="rect">
-            <a:avLst/>
-          </a:prstGeom>
-        </p:spPr>
-      </p:pic>
-      <p:sp>
-        <p:nvSpPr>
-          <p:cNvPr id="12" name="Text 8"/>
-          <p:cNvSpPr txBox="1"/>
-          <p:nvPr/>
-        </p:nvSpPr>
-        <p:spPr>
-          <a:xfrm>
-            <a:off x="7132320" y="3236976"/>
-            <a:ext cx="3870655" cy="274320"/>
-          </a:xfrm>
-          <a:prstGeom prst="rect">
-            <a:avLst/>
-          </a:prstGeom>
-          <a:noFill/>
-          <a:ln/>
-        </p:spPr>
-        <p:txBody>
-          <a:bodyPr wrap="square" lIns="0" tIns="0" rIns="0" bIns="0" rtlCol="0" anchor="t"/>
-          <a:lstStyle/>
-          <a:p>
-            <a:pPr marL="0" indent="0">
-              <a:buNone/>
-            </a:pPr>
-            <a:r>
-              <a:rPr lang="en-US" sz="1600" b="1" kern="0" spc="140" dirty="0">
-                <a:solidFill>
-                  <a:srgbClr val="D9BC7A"/>
-                </a:solidFill>
-                <a:latin typeface="Inter" pitchFamily="34" charset="0"/>
-                <a:ea typeface="Inter" pitchFamily="34" charset="-122"/>
-                <a:cs typeface="Inter" pitchFamily="34" charset="-120"/>
-              </a:rPr>
-              <a:t>ПРОДАЁМ</a:t>
-            </a:r>
-            <a:endParaRPr lang="en-US" sz="1600" dirty="0"/>
-          </a:p>
-        </p:txBody>
-      </p:sp>
-      <p:sp>
-        <p:nvSpPr>
-          <p:cNvPr id="13" name="Text 9"/>
-          <p:cNvSpPr txBox="1"/>
-          <p:nvPr/>
-        </p:nvSpPr>
-        <p:spPr>
-          <a:xfrm>
-            <a:off x="7132320" y="3584448"/>
-            <a:ext cx="3870655" cy="566928"/>
-          </a:xfrm>
-          <a:prstGeom prst="rect">
-            <a:avLst/>
-          </a:prstGeom>
-          <a:noFill/>
-          <a:ln/>
-        </p:spPr>
-        <p:txBody>
-          <a:bodyPr wrap="square" lIns="0" tIns="0" rIns="0" bIns="0" rtlCol="0" anchor="t"/>
-          <a:lstStyle/>
-          <a:p>
-            <a:pPr marL="0" indent="0">
-              <a:lnSpc>
-                <a:spcPts val="1800"/>
-              </a:lnSpc>
-              <a:buNone/>
-            </a:pPr>
-            <a:r>
-              <a:rPr lang="en-US" sz="1250" dirty="0">
-                <a:solidFill>
-                  <a:srgbClr val="F7F1E7"/>
-                </a:solidFill>
-                <a:latin typeface="Inter" pitchFamily="34" charset="0"/>
-                <a:ea typeface="Inter" pitchFamily="34" charset="-122"/>
-                <a:cs typeface="Inter" pitchFamily="34" charset="-120"/>
-              </a:rPr>
-              <a:t>работаем с покупателями без вас</a:t>
-            </a:r>
-            <a:endParaRPr lang="en-US" sz="1250" dirty="0"/>
-          </a:p>
-        </p:txBody>
-      </p:sp>
-      <p:sp>
-        <p:nvSpPr>
-          <p:cNvPr id="14" name="Shape 10"/>
-          <p:cNvSpPr/>
-          <p:nvPr/>
-        </p:nvSpPr>
-        <p:spPr>
-          <a:xfrm>
-            <a:off x="6035040" y="4553712"/>
-            <a:ext cx="5379415" cy="1371600"/>
-          </a:xfrm>
-          <a:prstGeom prst="roundRect">
-            <a:avLst>
-              <a:gd name="adj" fmla="val 3333"/>
-            </a:avLst>
-          </a:prstGeom>
-          <a:solidFill>
-            <a:srgbClr val="1A2F3B">
-              <a:alpha val="65000"/>
-            </a:srgbClr>
-          </a:solidFill>
-          <a:ln w="12700">
-            <a:solidFill>
-              <a:srgbClr val="6E5426"/>
-            </a:solidFill>
-            <a:prstDash val="solid"/>
-          </a:ln>
-        </p:spPr>
-        <p:txBody>
-          <a:bodyPr/>
-          <a:p/>
-        </p:txBody>
-      </p:sp>
-      <p:pic>
-        <p:nvPicPr>
-          <p:cNvPr id="15" name="Image 2" descr="/home/user/mysteryslavic-2026-07-19_16-47-00/presentations/office-client/assets/ic-checkcircle.png"/>
-          <p:cNvPicPr>
-            <a:picLocks noChangeAspect="1"/>
-          </p:cNvPicPr>
-          <p:nvPr/>
-        </p:nvPicPr>
-        <p:blipFill>
-          <a:blip r:embed="rId6"/>
-          <a:stretch>
-            <a:fillRect/>
-          </a:stretch>
-        </p:blipFill>
-        <p:spPr>
-          <a:xfrm>
-            <a:off x="6419088" y="5010912"/>
-            <a:ext cx="457200" cy="457200"/>
-          </a:xfrm>
-          <a:prstGeom prst="rect">
-            <a:avLst/>
-          </a:prstGeom>
-        </p:spPr>
-      </p:pic>
-      <p:sp>
-        <p:nvSpPr>
-          <p:cNvPr id="16" name="Text 11"/>
-          <p:cNvSpPr txBox="1"/>
-          <p:nvPr/>
-        </p:nvSpPr>
-        <p:spPr>
-          <a:xfrm>
-            <a:off x="7132320" y="4864608"/>
-            <a:ext cx="3870655" cy="274320"/>
-          </a:xfrm>
-          <a:prstGeom prst="rect">
-            <a:avLst/>
-          </a:prstGeom>
-          <a:noFill/>
-          <a:ln/>
-        </p:spPr>
-        <p:txBody>
-          <a:bodyPr wrap="square" lIns="0" tIns="0" rIns="0" bIns="0" rtlCol="0" anchor="t"/>
-          <a:lstStyle/>
-          <a:p>
-            <a:pPr marL="0" indent="0">
-              <a:buNone/>
-            </a:pPr>
-            <a:r>
-              <a:rPr lang="en-US" sz="1600" b="1" kern="0" spc="140" dirty="0">
-                <a:solidFill>
-                  <a:srgbClr val="D9BC7A"/>
-                </a:solidFill>
-                <a:latin typeface="Inter" pitchFamily="34" charset="0"/>
-                <a:ea typeface="Inter" pitchFamily="34" charset="-122"/>
-                <a:cs typeface="Inter" pitchFamily="34" charset="-120"/>
-              </a:rPr>
-              <a:t>ОСТАТОК</a:t>
-            </a:r>
-            <a:endParaRPr lang="en-US" sz="1600" dirty="0"/>
-          </a:p>
-        </p:txBody>
-      </p:sp>
-      <p:sp>
-        <p:nvSpPr>
-          <p:cNvPr id="17" name="Text 12"/>
-          <p:cNvSpPr txBox="1"/>
-          <p:nvPr/>
-        </p:nvSpPr>
-        <p:spPr>
-          <a:xfrm>
-            <a:off x="7132320" y="5212080"/>
-            <a:ext cx="3870655" cy="566928"/>
-          </a:xfrm>
-          <a:prstGeom prst="rect">
-            <a:avLst/>
-          </a:prstGeom>
-          <a:noFill/>
-          <a:ln/>
-        </p:spPr>
-        <p:txBody>
-          <a:bodyPr wrap="square" lIns="0" tIns="0" rIns="0" bIns="0" rtlCol="0" anchor="t"/>
-          <a:lstStyle/>
-          <a:p>
-            <a:pPr marL="0" indent="0">
-              <a:lnSpc>
-                <a:spcPts val="1800"/>
-              </a:lnSpc>
-              <a:buNone/>
-            </a:pPr>
-            <a:r>
-              <a:rPr lang="en-US" sz="1250" dirty="0">
-                <a:solidFill>
-                  <a:srgbClr val="F7F1E7"/>
-                </a:solidFill>
-                <a:latin typeface="Inter" pitchFamily="34" charset="0"/>
-                <a:ea typeface="Inter" pitchFamily="34" charset="-122"/>
-                <a:cs typeface="Inter" pitchFamily="34" charset="-120"/>
-              </a:rPr>
-              <a:t>передача, вторсырьё или утилизация</a:t>
-            </a:r>
-            <a:endParaRPr lang="en-US" sz="1250" dirty="0"/>
-          </a:p>
-        </p:txBody>
-      </p:sp>
-    </p:spTree>
-  </p:cSld>
-  <p:clrMapOvr>
-    <a:masterClrMapping/>
-  </p:clrMapOvr>
-</p:sld>
-</file>
-
-<file path=ppt/slides/slide9.xml><?xml version="1.0" encoding="utf-8"?>
 <p:sld xmlns:a="http://schemas.openxmlformats.org/drawingml/2006/main" xmlns:r="http://schemas.openxmlformats.org/officeDocument/2006/relationships" xmlns:p="http://schemas.openxmlformats.org/presentationml/2006/main">
   <p:cSld name="Slide 11">
     <p:bg>
@@ -11352,6 +9065,966 @@
           </a:p>
         </p:txBody>
       </p:sp>
+    </p:spTree>
+  </p:cSld>
+  <p:clrMapOvr>
+    <a:masterClrMapping/>
+  </p:clrMapOvr>
+</p:sld>
+</file>
+
+<file path=ppt/slides/slide9.xml><?xml version="1.0" encoding="utf-8"?>
+<p:sld xmlns:a="http://schemas.openxmlformats.org/drawingml/2006/main" xmlns:r="http://schemas.openxmlformats.org/officeDocument/2006/relationships" xmlns:p="http://schemas.openxmlformats.org/presentationml/2006/main">
+  <p:cSld name="Slide 14">
+    <p:bg>
+      <p:bgPr>
+        <a:blipFill dpi="0" rotWithShape="1">
+          <a:blip r:embed="rId3">
+            <a:lum/>
+          </a:blip>
+          <a:srcRect/>
+          <a:stretch>
+            <a:fillRect/>
+          </a:stretch>
+        </a:blipFill>
+        <a:effectLst/>
+      </p:bgPr>
+    </p:bg>
+    <p:spTree>
+      <p:nvGrpSpPr>
+        <p:cNvPr id="1" name=""/>
+        <p:cNvGrpSpPr/>
+        <p:nvPr/>
+      </p:nvGrpSpPr>
+      <p:grpSpPr>
+        <a:xfrm>
+          <a:off x="0" y="0"/>
+          <a:ext cx="0" cy="0"/>
+          <a:chOff x="0" y="0"/>
+          <a:chExt cx="0" cy="0"/>
+        </a:xfrm>
+      </p:grpSpPr>
+      <p:pic>
+        <p:nvPicPr>
+          <p:cNvPr id="2" name="Image 0" descr="/home/user/mysteryslavic-2026-07-19_16-47-00/presentations/office-client/assets/logo.png"/>
+          <p:cNvPicPr>
+            <a:picLocks noChangeAspect="1"/>
+          </p:cNvPicPr>
+          <p:nvPr/>
+        </p:nvPicPr>
+        <p:blipFill>
+          <a:blip r:embed="rId4"/>
+          <a:stretch>
+            <a:fillRect/>
+          </a:stretch>
+        </p:blipFill>
+        <p:spPr>
+          <a:xfrm>
+            <a:off x="777240" y="457200"/>
+            <a:ext cx="457200" cy="457200"/>
+          </a:xfrm>
+          <a:prstGeom prst="rect">
+            <a:avLst/>
+          </a:prstGeom>
+        </p:spPr>
+      </p:pic>
+      <p:sp>
+        <p:nvSpPr>
+          <p:cNvPr id="3" name="Text 0"/>
+          <p:cNvSpPr txBox="1"/>
+          <p:nvPr/>
+        </p:nvSpPr>
+        <p:spPr>
+          <a:xfrm>
+            <a:off x="1417320" y="475488"/>
+            <a:ext cx="4572000" cy="219456"/>
+          </a:xfrm>
+          <a:prstGeom prst="rect">
+            <a:avLst/>
+          </a:prstGeom>
+          <a:noFill/>
+          <a:ln/>
+        </p:spPr>
+        <p:txBody>
+          <a:bodyPr wrap="square" lIns="0" tIns="0" rIns="0" bIns="0" rtlCol="0" anchor="t"/>
+          <a:lstStyle/>
+          <a:p>
+            <a:pPr marL="0" indent="0">
+              <a:buNone/>
+            </a:pPr>
+            <a:r>
+              <a:rPr lang="en-US" sz="1150" b="1" kern="0" spc="240" dirty="0">
+                <a:solidFill>
+                  <a:srgbClr val="F7F1E7"/>
+                </a:solidFill>
+                <a:latin typeface="Inter" pitchFamily="34" charset="0"/>
+                <a:ea typeface="Inter" pitchFamily="34" charset="-122"/>
+                <a:cs typeface="Inter" pitchFamily="34" charset="-120"/>
+              </a:rPr>
+              <a:t>ПРОДАЙ ЗА МЕНЯ</a:t>
+            </a:r>
+            <a:endParaRPr lang="en-US" sz="1150" dirty="0"/>
+          </a:p>
+        </p:txBody>
+      </p:sp>
+      <p:sp>
+        <p:nvSpPr>
+          <p:cNvPr id="4" name="Text 1"/>
+          <p:cNvSpPr txBox="1"/>
+          <p:nvPr/>
+        </p:nvSpPr>
+        <p:spPr>
+          <a:xfrm>
+            <a:off x="1417320" y="713232"/>
+            <a:ext cx="4572000" cy="201168"/>
+          </a:xfrm>
+          <a:prstGeom prst="rect">
+            <a:avLst/>
+          </a:prstGeom>
+          <a:noFill/>
+          <a:ln/>
+        </p:spPr>
+        <p:txBody>
+          <a:bodyPr wrap="square" lIns="0" tIns="0" rIns="0" bIns="0" rtlCol="0" anchor="t"/>
+          <a:lstStyle/>
+          <a:p>
+            <a:pPr marL="0" indent="0">
+              <a:buNone/>
+            </a:pPr>
+            <a:r>
+              <a:rPr lang="en-US" sz="1050" dirty="0">
+                <a:solidFill>
+                  <a:srgbClr val="9CAAB1"/>
+                </a:solidFill>
+                <a:latin typeface="Inter" pitchFamily="34" charset="0"/>
+                <a:ea typeface="Inter" pitchFamily="34" charset="-122"/>
+                <a:cs typeface="Inter" pitchFamily="34" charset="-120"/>
+              </a:rPr>
+              <a:t>Освобождение офиса под ключ · Казань</a:t>
+            </a:r>
+            <a:endParaRPr lang="en-US" sz="1050" dirty="0"/>
+          </a:p>
+        </p:txBody>
+      </p:sp>
+      <p:sp>
+        <p:nvSpPr>
+          <p:cNvPr id="5" name="Text 2"/>
+          <p:cNvSpPr txBox="1"/>
+          <p:nvPr/>
+        </p:nvSpPr>
+        <p:spPr>
+          <a:xfrm>
+            <a:off x="777240" y="1572768"/>
+            <a:ext cx="5669280" cy="1554480"/>
+          </a:xfrm>
+          <a:prstGeom prst="rect">
+            <a:avLst/>
+          </a:prstGeom>
+          <a:noFill/>
+          <a:ln/>
+        </p:spPr>
+        <p:txBody>
+          <a:bodyPr wrap="square" lIns="0" tIns="0" rIns="0" bIns="0" rtlCol="0" anchor="t"/>
+          <a:lstStyle/>
+          <a:p>
+            <a:pPr marL="0" indent="0">
+              <a:lnSpc>
+                <a:spcPts val="5000"/>
+              </a:lnSpc>
+              <a:buNone/>
+            </a:pPr>
+            <a:r>
+              <a:rPr lang="en-US" sz="4400" b="1" dirty="0">
+                <a:solidFill>
+                  <a:srgbClr val="F7F1E7"/>
+                </a:solidFill>
+                <a:latin typeface="Inter" pitchFamily="34" charset="0"/>
+                <a:ea typeface="Inter" pitchFamily="34" charset="-122"/>
+                <a:cs typeface="Inter" pitchFamily="34" charset="-120"/>
+              </a:rPr>
+              <a:t>ПРИШЛИТЕ</a:t>
+            </a:r>
+            <a:endParaRPr lang="en-US" sz="4400" dirty="0"/>
+          </a:p>
+          <a:p>
+            <a:pPr marL="0" indent="0">
+              <a:lnSpc>
+                <a:spcPts val="5000"/>
+              </a:lnSpc>
+              <a:buNone/>
+            </a:pPr>
+            <a:r>
+              <a:rPr lang="ru-RU" sz="4400" b="1" dirty="0">
+                <a:solidFill>
+                  <a:srgbClr val="F7F1E7"/>
+                </a:solidFill>
+                <a:latin typeface="Inter" pitchFamily="34" charset="0"/>
+                <a:ea typeface="Inter" pitchFamily="34" charset="-122"/>
+                <a:cs typeface="Inter" pitchFamily="34" charset="-120"/>
+              </a:rPr>
+              <a:t>ФОТО</a:t>
+            </a:r>
+            <a:r>
+              <a:rPr lang="en-US" sz="4400" b="1" dirty="0">
+                <a:solidFill>
+                  <a:srgbClr val="F7F1E7"/>
+                </a:solidFill>
+                <a:latin typeface="Inter" pitchFamily="34" charset="0"/>
+                <a:ea typeface="Inter" pitchFamily="34" charset="-122"/>
+                <a:cs typeface="Inter" pitchFamily="34" charset="-120"/>
+              </a:rPr>
+              <a:t> ОФИСА</a:t>
+            </a:r>
+            <a:endParaRPr lang="en-US" sz="4400" dirty="0"/>
+          </a:p>
+        </p:txBody>
+      </p:sp>
+      <p:sp>
+        <p:nvSpPr>
+          <p:cNvPr id="6" name="Shape 3"/>
+          <p:cNvSpPr/>
+          <p:nvPr/>
+        </p:nvSpPr>
+        <p:spPr>
+          <a:xfrm>
+            <a:off x="777240" y="3346704"/>
+            <a:ext cx="1371600" cy="32004"/>
+          </a:xfrm>
+          <a:prstGeom prst="rect">
+            <a:avLst/>
+          </a:prstGeom>
+          <a:solidFill>
+            <a:srgbClr val="C89B45"/>
+          </a:solidFill>
+          <a:ln/>
+        </p:spPr>
+        <p:txBody>
+          <a:bodyPr/>
+          <a:lstStyle/>
+          <a:p>
+            <a:endParaRPr/>
+          </a:p>
+        </p:txBody>
+      </p:sp>
+      <p:sp>
+        <p:nvSpPr>
+          <p:cNvPr id="7" name="Text 4"/>
+          <p:cNvSpPr txBox="1"/>
+          <p:nvPr/>
+        </p:nvSpPr>
+        <p:spPr>
+          <a:xfrm>
+            <a:off x="777240" y="3639312"/>
+            <a:ext cx="5486400" cy="822960"/>
+          </a:xfrm>
+          <a:prstGeom prst="rect">
+            <a:avLst/>
+          </a:prstGeom>
+          <a:noFill/>
+          <a:ln/>
+        </p:spPr>
+        <p:txBody>
+          <a:bodyPr wrap="square" lIns="0" tIns="0" rIns="0" bIns="0" rtlCol="0" anchor="t"/>
+          <a:lstStyle/>
+          <a:p>
+            <a:pPr marL="0" indent="0">
+              <a:lnSpc>
+                <a:spcPts val="2700"/>
+              </a:lnSpc>
+              <a:buNone/>
+            </a:pPr>
+            <a:r>
+              <a:rPr lang="en-US" sz="1900" b="1" dirty="0">
+                <a:solidFill>
+                  <a:srgbClr val="D9BC7A"/>
+                </a:solidFill>
+                <a:latin typeface="Inter" pitchFamily="34" charset="0"/>
+                <a:ea typeface="Inter" pitchFamily="34" charset="-122"/>
+                <a:cs typeface="Inter" pitchFamily="34" charset="-120"/>
+              </a:rPr>
+              <a:t>БЕСПЛАТНО ОЦЕНИМ,</a:t>
+            </a:r>
+            <a:endParaRPr lang="en-US" sz="1900" dirty="0"/>
+          </a:p>
+          <a:p>
+            <a:pPr marL="0" indent="0">
+              <a:lnSpc>
+                <a:spcPts val="2700"/>
+              </a:lnSpc>
+              <a:buNone/>
+            </a:pPr>
+            <a:r>
+              <a:rPr lang="en-US" sz="1900" b="1" dirty="0">
+                <a:solidFill>
+                  <a:srgbClr val="D9BC7A"/>
+                </a:solidFill>
+                <a:latin typeface="Inter" pitchFamily="34" charset="0"/>
+                <a:ea typeface="Inter" pitchFamily="34" charset="-122"/>
+                <a:cs typeface="Inter" pitchFamily="34" charset="-120"/>
+              </a:rPr>
+              <a:t>ЧТО МОЖНО ВЕРНУТЬ ДЕНЬГАМИ</a:t>
+            </a:r>
+            <a:endParaRPr lang="en-US" sz="1900" dirty="0"/>
+          </a:p>
+        </p:txBody>
+      </p:sp>
+      <p:pic>
+        <p:nvPicPr>
+          <p:cNvPr id="8" name="Image 1" descr="/home/user/mysteryslavic-2026-07-19_16-47-00/presentations/office-client/assets/ic-phone.png"/>
+          <p:cNvPicPr>
+            <a:picLocks noChangeAspect="1"/>
+          </p:cNvPicPr>
+          <p:nvPr/>
+        </p:nvPicPr>
+        <p:blipFill>
+          <a:blip r:embed="rId5"/>
+          <a:stretch>
+            <a:fillRect/>
+          </a:stretch>
+        </p:blipFill>
+        <p:spPr>
+          <a:xfrm>
+            <a:off x="777240" y="4974336"/>
+            <a:ext cx="310896" cy="310896"/>
+          </a:xfrm>
+          <a:prstGeom prst="rect">
+            <a:avLst/>
+          </a:prstGeom>
+        </p:spPr>
+      </p:pic>
+      <p:sp>
+        <p:nvSpPr>
+          <p:cNvPr id="9" name="Text 5"/>
+          <p:cNvSpPr txBox="1"/>
+          <p:nvPr/>
+        </p:nvSpPr>
+        <p:spPr>
+          <a:xfrm>
+            <a:off x="1307592" y="4956048"/>
+            <a:ext cx="4023360" cy="347472"/>
+          </a:xfrm>
+          <a:prstGeom prst="rect">
+            <a:avLst/>
+          </a:prstGeom>
+          <a:noFill/>
+          <a:ln/>
+        </p:spPr>
+        <p:txBody>
+          <a:bodyPr wrap="square" lIns="0" tIns="0" rIns="0" bIns="0" rtlCol="0" anchor="t"/>
+          <a:lstStyle/>
+          <a:p>
+            <a:pPr marL="0" indent="0">
+              <a:buNone/>
+            </a:pPr>
+            <a:r>
+              <a:rPr lang="en-US" sz="1900" b="1" dirty="0">
+                <a:solidFill>
+                  <a:srgbClr val="F7F1E7"/>
+                </a:solidFill>
+                <a:latin typeface="Inter" pitchFamily="34" charset="0"/>
+                <a:ea typeface="Inter" pitchFamily="34" charset="-122"/>
+                <a:cs typeface="Inter" pitchFamily="34" charset="-120"/>
+              </a:rPr>
+              <a:t>+7 917 896-84-83</a:t>
+            </a:r>
+            <a:endParaRPr lang="en-US" sz="1900" dirty="0"/>
+          </a:p>
+        </p:txBody>
+      </p:sp>
+      <p:pic>
+        <p:nvPicPr>
+          <p:cNvPr id="10" name="Image 2" descr="/home/user/mysteryslavic-2026-07-19_16-47-00/presentations/office-client/assets/ic-mail.png"/>
+          <p:cNvPicPr>
+            <a:picLocks noChangeAspect="1"/>
+          </p:cNvPicPr>
+          <p:nvPr/>
+        </p:nvPicPr>
+        <p:blipFill>
+          <a:blip r:embed="rId6"/>
+          <a:stretch>
+            <a:fillRect/>
+          </a:stretch>
+        </p:blipFill>
+        <p:spPr>
+          <a:xfrm>
+            <a:off x="777240" y="5632704"/>
+            <a:ext cx="310896" cy="310896"/>
+          </a:xfrm>
+          <a:prstGeom prst="rect">
+            <a:avLst/>
+          </a:prstGeom>
+        </p:spPr>
+      </p:pic>
+      <p:sp>
+        <p:nvSpPr>
+          <p:cNvPr id="11" name="Text 6"/>
+          <p:cNvSpPr txBox="1"/>
+          <p:nvPr/>
+        </p:nvSpPr>
+        <p:spPr>
+          <a:xfrm>
+            <a:off x="1307592" y="5623560"/>
+            <a:ext cx="4023360" cy="347472"/>
+          </a:xfrm>
+          <a:prstGeom prst="rect">
+            <a:avLst/>
+          </a:prstGeom>
+          <a:noFill/>
+          <a:ln/>
+        </p:spPr>
+        <p:txBody>
+          <a:bodyPr wrap="square" lIns="0" tIns="0" rIns="0" bIns="0" rtlCol="0" anchor="t"/>
+          <a:lstStyle/>
+          <a:p>
+            <a:pPr marL="0" indent="0">
+              <a:buNone/>
+            </a:pPr>
+            <a:r>
+              <a:rPr lang="en-US" sz="1700" dirty="0">
+                <a:solidFill>
+                  <a:srgbClr val="F7F1E7"/>
+                </a:solidFill>
+                <a:latin typeface="Inter" pitchFamily="34" charset="0"/>
+                <a:ea typeface="Inter" pitchFamily="34" charset="-122"/>
+                <a:cs typeface="Inter" pitchFamily="34" charset="-120"/>
+              </a:rPr>
+              <a:t>proday_za_menya@mail.ru</a:t>
+            </a:r>
+            <a:endParaRPr lang="en-US" sz="1700" dirty="0"/>
+          </a:p>
+        </p:txBody>
+      </p:sp>
+      <p:sp>
+        <p:nvSpPr>
+          <p:cNvPr id="12" name="Rounded Rectangle 11"/>
+          <p:cNvSpPr/>
+          <p:nvPr/>
+        </p:nvSpPr>
+        <p:spPr>
+          <a:xfrm>
+            <a:off x="6355080" y="2450592"/>
+            <a:ext cx="1600200" cy="2670048"/>
+          </a:xfrm>
+          <a:prstGeom prst="roundRect">
+            <a:avLst>
+              <a:gd name="adj" fmla="val 6000"/>
+            </a:avLst>
+          </a:prstGeom>
+          <a:solidFill>
+            <a:srgbClr val="0C1D28"/>
+          </a:solidFill>
+          <a:ln w="12700">
+            <a:solidFill>
+              <a:srgbClr val="6E5426"/>
+            </a:solidFill>
+          </a:ln>
+          <a:effectLst/>
+        </p:spPr>
+        <p:style>
+          <a:lnRef idx="1">
+            <a:schemeClr val="accent1"/>
+          </a:lnRef>
+          <a:fillRef idx="3">
+            <a:schemeClr val="accent1"/>
+          </a:fillRef>
+          <a:effectRef idx="2">
+            <a:schemeClr val="accent1"/>
+          </a:effectRef>
+          <a:fontRef idx="minor">
+            <a:schemeClr val="lt1"/>
+          </a:fontRef>
+        </p:style>
+        <p:txBody>
+          <a:bodyPr rtlCol="0" anchor="ctr"/>
+          <a:lstStyle/>
+          <a:p>
+            <a:endParaRPr/>
+          </a:p>
+        </p:txBody>
+      </p:sp>
+      <p:pic>
+        <p:nvPicPr>
+          <p:cNvPr id="13" name="Picture 12" descr="image.png"/>
+          <p:cNvPicPr>
+            <a:picLocks noChangeAspect="1"/>
+          </p:cNvPicPr>
+          <p:nvPr/>
+        </p:nvPicPr>
+        <p:blipFill>
+          <a:blip r:embed="rId7"/>
+          <a:stretch>
+            <a:fillRect/>
+          </a:stretch>
+        </p:blipFill>
+        <p:spPr>
+          <a:xfrm>
+            <a:off x="6999732" y="2651760"/>
+            <a:ext cx="310896" cy="310896"/>
+          </a:xfrm>
+          <a:prstGeom prst="rect">
+            <a:avLst/>
+          </a:prstGeom>
+        </p:spPr>
+      </p:pic>
+      <p:sp>
+        <p:nvSpPr>
+          <p:cNvPr id="14" name="Rounded Rectangle 13"/>
+          <p:cNvSpPr/>
+          <p:nvPr/>
+        </p:nvSpPr>
+        <p:spPr>
+          <a:xfrm>
+            <a:off x="6505956" y="3127248"/>
+            <a:ext cx="1298448" cy="1298448"/>
+          </a:xfrm>
+          <a:prstGeom prst="roundRect">
+            <a:avLst>
+              <a:gd name="adj" fmla="val 5000"/>
+            </a:avLst>
+          </a:prstGeom>
+          <a:solidFill>
+            <a:srgbClr val="F7F1E7"/>
+          </a:solidFill>
+          <a:ln>
+            <a:noFill/>
+          </a:ln>
+          <a:effectLst/>
+        </p:spPr>
+        <p:style>
+          <a:lnRef idx="1">
+            <a:schemeClr val="accent1"/>
+          </a:lnRef>
+          <a:fillRef idx="3">
+            <a:schemeClr val="accent1"/>
+          </a:fillRef>
+          <a:effectRef idx="2">
+            <a:schemeClr val="accent1"/>
+          </a:effectRef>
+          <a:fontRef idx="minor">
+            <a:schemeClr val="lt1"/>
+          </a:fontRef>
+        </p:style>
+        <p:txBody>
+          <a:bodyPr rtlCol="0" anchor="ctr"/>
+          <a:lstStyle/>
+          <a:p>
+            <a:endParaRPr/>
+          </a:p>
+        </p:txBody>
+      </p:sp>
+      <p:pic>
+        <p:nvPicPr>
+          <p:cNvPr id="15" name="Picture 14" descr="image.png"/>
+          <p:cNvPicPr>
+            <a:picLocks noChangeAspect="1"/>
+          </p:cNvPicPr>
+          <p:nvPr/>
+        </p:nvPicPr>
+        <p:blipFill>
+          <a:blip r:embed="rId8"/>
+          <a:stretch>
+            <a:fillRect/>
+          </a:stretch>
+        </p:blipFill>
+        <p:spPr>
+          <a:xfrm>
+            <a:off x="6533388" y="3154680"/>
+            <a:ext cx="1243584" cy="1243584"/>
+          </a:xfrm>
+          <a:prstGeom prst="rect">
+            <a:avLst/>
+          </a:prstGeom>
+        </p:spPr>
+      </p:pic>
+      <p:sp>
+        <p:nvSpPr>
+          <p:cNvPr id="16" name="TextBox 15"/>
+          <p:cNvSpPr txBox="1"/>
+          <p:nvPr/>
+        </p:nvSpPr>
+        <p:spPr>
+          <a:xfrm>
+            <a:off x="6355080" y="4626864"/>
+            <a:ext cx="1600200" cy="256032"/>
+          </a:xfrm>
+          <a:prstGeom prst="rect">
+            <a:avLst/>
+          </a:prstGeom>
+          <a:noFill/>
+        </p:spPr>
+        <p:txBody>
+          <a:bodyPr wrap="none" lIns="0" tIns="0" rIns="0" bIns="0">
+            <a:spAutoFit/>
+          </a:bodyPr>
+          <a:lstStyle/>
+          <a:p>
+            <a:pPr algn="ctr"/>
+            <a:r>
+              <a:rPr sz="1100" b="1">
+                <a:solidFill>
+                  <a:srgbClr val="D9BC7A"/>
+                </a:solidFill>
+                <a:latin typeface="Inter"/>
+              </a:rPr>
+              <a:t>TELEGRAM</a:t>
+            </a:r>
+          </a:p>
+        </p:txBody>
+      </p:sp>
+      <p:sp>
+        <p:nvSpPr>
+          <p:cNvPr id="17" name="Rounded Rectangle 16"/>
+          <p:cNvSpPr/>
+          <p:nvPr/>
+        </p:nvSpPr>
+        <p:spPr>
+          <a:xfrm>
+            <a:off x="8083296" y="2450592"/>
+            <a:ext cx="1600200" cy="2670048"/>
+          </a:xfrm>
+          <a:prstGeom prst="roundRect">
+            <a:avLst>
+              <a:gd name="adj" fmla="val 6000"/>
+            </a:avLst>
+          </a:prstGeom>
+          <a:solidFill>
+            <a:srgbClr val="0C1D28"/>
+          </a:solidFill>
+          <a:ln w="12700">
+            <a:solidFill>
+              <a:srgbClr val="6E5426"/>
+            </a:solidFill>
+          </a:ln>
+          <a:effectLst/>
+        </p:spPr>
+        <p:style>
+          <a:lnRef idx="1">
+            <a:schemeClr val="accent1"/>
+          </a:lnRef>
+          <a:fillRef idx="3">
+            <a:schemeClr val="accent1"/>
+          </a:fillRef>
+          <a:effectRef idx="2">
+            <a:schemeClr val="accent1"/>
+          </a:effectRef>
+          <a:fontRef idx="minor">
+            <a:schemeClr val="lt1"/>
+          </a:fontRef>
+        </p:style>
+        <p:txBody>
+          <a:bodyPr rtlCol="0" anchor="ctr"/>
+          <a:lstStyle/>
+          <a:p>
+            <a:endParaRPr/>
+          </a:p>
+        </p:txBody>
+      </p:sp>
+      <p:pic>
+        <p:nvPicPr>
+          <p:cNvPr id="18" name="Picture 17" descr="ic-messagesquare.png"/>
+          <p:cNvPicPr>
+            <a:picLocks noChangeAspect="1"/>
+          </p:cNvPicPr>
+          <p:nvPr/>
+        </p:nvPicPr>
+        <p:blipFill>
+          <a:blip r:embed="rId9"/>
+          <a:stretch>
+            <a:fillRect/>
+          </a:stretch>
+        </p:blipFill>
+        <p:spPr>
+          <a:xfrm>
+            <a:off x="8727948" y="2651760"/>
+            <a:ext cx="310896" cy="310896"/>
+          </a:xfrm>
+          <a:prstGeom prst="rect">
+            <a:avLst/>
+          </a:prstGeom>
+        </p:spPr>
+      </p:pic>
+      <p:sp>
+        <p:nvSpPr>
+          <p:cNvPr id="19" name="Rounded Rectangle 18"/>
+          <p:cNvSpPr/>
+          <p:nvPr/>
+        </p:nvSpPr>
+        <p:spPr>
+          <a:xfrm>
+            <a:off x="8234171" y="3127248"/>
+            <a:ext cx="1298448" cy="1298448"/>
+          </a:xfrm>
+          <a:prstGeom prst="roundRect">
+            <a:avLst>
+              <a:gd name="adj" fmla="val 5000"/>
+            </a:avLst>
+          </a:prstGeom>
+          <a:solidFill>
+            <a:srgbClr val="F7F1E7"/>
+          </a:solidFill>
+          <a:ln>
+            <a:noFill/>
+          </a:ln>
+          <a:effectLst/>
+        </p:spPr>
+        <p:style>
+          <a:lnRef idx="1">
+            <a:schemeClr val="accent1"/>
+          </a:lnRef>
+          <a:fillRef idx="3">
+            <a:schemeClr val="accent1"/>
+          </a:fillRef>
+          <a:effectRef idx="2">
+            <a:schemeClr val="accent1"/>
+          </a:effectRef>
+          <a:fontRef idx="minor">
+            <a:schemeClr val="lt1"/>
+          </a:fontRef>
+        </p:style>
+        <p:txBody>
+          <a:bodyPr rtlCol="0" anchor="ctr"/>
+          <a:lstStyle/>
+          <a:p>
+            <a:endParaRPr/>
+          </a:p>
+        </p:txBody>
+      </p:sp>
+      <p:sp>
+        <p:nvSpPr>
+          <p:cNvPr id="21" name="TextBox 20"/>
+          <p:cNvSpPr txBox="1"/>
+          <p:nvPr/>
+        </p:nvSpPr>
+        <p:spPr>
+          <a:xfrm>
+            <a:off x="8083296" y="4626864"/>
+            <a:ext cx="1600200" cy="256032"/>
+          </a:xfrm>
+          <a:prstGeom prst="rect">
+            <a:avLst/>
+          </a:prstGeom>
+          <a:noFill/>
+        </p:spPr>
+        <p:txBody>
+          <a:bodyPr wrap="none" lIns="0" tIns="0" rIns="0" bIns="0">
+            <a:spAutoFit/>
+          </a:bodyPr>
+          <a:lstStyle/>
+          <a:p>
+            <a:pPr algn="ctr"/>
+            <a:r>
+              <a:rPr sz="1100" b="1">
+                <a:solidFill>
+                  <a:srgbClr val="D9BC7A"/>
+                </a:solidFill>
+                <a:latin typeface="Inter"/>
+              </a:rPr>
+              <a:t>MAX</a:t>
+            </a:r>
+          </a:p>
+        </p:txBody>
+      </p:sp>
+      <p:sp>
+        <p:nvSpPr>
+          <p:cNvPr id="22" name="Rounded Rectangle 21"/>
+          <p:cNvSpPr/>
+          <p:nvPr/>
+        </p:nvSpPr>
+        <p:spPr>
+          <a:xfrm>
+            <a:off x="9811512" y="2450592"/>
+            <a:ext cx="1600200" cy="2670048"/>
+          </a:xfrm>
+          <a:prstGeom prst="roundRect">
+            <a:avLst>
+              <a:gd name="adj" fmla="val 6000"/>
+            </a:avLst>
+          </a:prstGeom>
+          <a:solidFill>
+            <a:srgbClr val="0C1D28"/>
+          </a:solidFill>
+          <a:ln w="12700">
+            <a:solidFill>
+              <a:srgbClr val="6E5426"/>
+            </a:solidFill>
+          </a:ln>
+          <a:effectLst/>
+        </p:spPr>
+        <p:style>
+          <a:lnRef idx="1">
+            <a:schemeClr val="accent1"/>
+          </a:lnRef>
+          <a:fillRef idx="3">
+            <a:schemeClr val="accent1"/>
+          </a:fillRef>
+          <a:effectRef idx="2">
+            <a:schemeClr val="accent1"/>
+          </a:effectRef>
+          <a:fontRef idx="minor">
+            <a:schemeClr val="lt1"/>
+          </a:fontRef>
+        </p:style>
+        <p:txBody>
+          <a:bodyPr rtlCol="0" anchor="ctr"/>
+          <a:lstStyle/>
+          <a:p>
+            <a:endParaRPr/>
+          </a:p>
+        </p:txBody>
+      </p:sp>
+      <p:pic>
+        <p:nvPicPr>
+          <p:cNvPr id="23" name="Picture 22" descr="image.png"/>
+          <p:cNvPicPr>
+            <a:picLocks noChangeAspect="1"/>
+          </p:cNvPicPr>
+          <p:nvPr/>
+        </p:nvPicPr>
+        <p:blipFill>
+          <a:blip r:embed="rId10"/>
+          <a:stretch>
+            <a:fillRect/>
+          </a:stretch>
+        </p:blipFill>
+        <p:spPr>
+          <a:xfrm>
+            <a:off x="10456164" y="2651760"/>
+            <a:ext cx="310896" cy="310896"/>
+          </a:xfrm>
+          <a:prstGeom prst="rect">
+            <a:avLst/>
+          </a:prstGeom>
+        </p:spPr>
+      </p:pic>
+      <p:sp>
+        <p:nvSpPr>
+          <p:cNvPr id="24" name="Rounded Rectangle 23"/>
+          <p:cNvSpPr/>
+          <p:nvPr/>
+        </p:nvSpPr>
+        <p:spPr>
+          <a:xfrm>
+            <a:off x="9962388" y="3127248"/>
+            <a:ext cx="1298448" cy="1298448"/>
+          </a:xfrm>
+          <a:prstGeom prst="roundRect">
+            <a:avLst>
+              <a:gd name="adj" fmla="val 5000"/>
+            </a:avLst>
+          </a:prstGeom>
+          <a:solidFill>
+            <a:srgbClr val="F7F1E7"/>
+          </a:solidFill>
+          <a:ln>
+            <a:noFill/>
+          </a:ln>
+          <a:effectLst/>
+        </p:spPr>
+        <p:style>
+          <a:lnRef idx="1">
+            <a:schemeClr val="accent1"/>
+          </a:lnRef>
+          <a:fillRef idx="3">
+            <a:schemeClr val="accent1"/>
+          </a:fillRef>
+          <a:effectRef idx="2">
+            <a:schemeClr val="accent1"/>
+          </a:effectRef>
+          <a:fontRef idx="minor">
+            <a:schemeClr val="lt1"/>
+          </a:fontRef>
+        </p:style>
+        <p:txBody>
+          <a:bodyPr rtlCol="0" anchor="ctr"/>
+          <a:lstStyle/>
+          <a:p>
+            <a:endParaRPr/>
+          </a:p>
+        </p:txBody>
+      </p:sp>
+      <p:pic>
+        <p:nvPicPr>
+          <p:cNvPr id="25" name="Picture 24" descr="qr-whatsapp.png"/>
+          <p:cNvPicPr>
+            <a:picLocks noChangeAspect="1"/>
+          </p:cNvPicPr>
+          <p:nvPr/>
+        </p:nvPicPr>
+        <p:blipFill>
+          <a:blip r:embed="rId11"/>
+          <a:stretch>
+            <a:fillRect/>
+          </a:stretch>
+        </p:blipFill>
+        <p:spPr>
+          <a:xfrm>
+            <a:off x="9989820" y="3154680"/>
+            <a:ext cx="1243584" cy="1243584"/>
+          </a:xfrm>
+          <a:prstGeom prst="rect">
+            <a:avLst/>
+          </a:prstGeom>
+        </p:spPr>
+      </p:pic>
+      <p:sp>
+        <p:nvSpPr>
+          <p:cNvPr id="26" name="TextBox 25"/>
+          <p:cNvSpPr txBox="1"/>
+          <p:nvPr/>
+        </p:nvSpPr>
+        <p:spPr>
+          <a:xfrm>
+            <a:off x="9811512" y="4626864"/>
+            <a:ext cx="1600200" cy="256032"/>
+          </a:xfrm>
+          <a:prstGeom prst="rect">
+            <a:avLst/>
+          </a:prstGeom>
+          <a:noFill/>
+        </p:spPr>
+        <p:txBody>
+          <a:bodyPr wrap="none" lIns="0" tIns="0" rIns="0" bIns="0">
+            <a:spAutoFit/>
+          </a:bodyPr>
+          <a:lstStyle/>
+          <a:p>
+            <a:pPr algn="ctr"/>
+            <a:r>
+              <a:rPr sz="1100" b="1">
+                <a:solidFill>
+                  <a:srgbClr val="D9BC7A"/>
+                </a:solidFill>
+                <a:latin typeface="Inter"/>
+              </a:rPr>
+              <a:t>WHATSAPP</a:t>
+            </a:r>
+          </a:p>
+        </p:txBody>
+      </p:sp>
+      <p:pic>
+        <p:nvPicPr>
+          <p:cNvPr id="27" name="Picture 26" descr="qr-max.png"/>
+          <p:cNvPicPr>
+            <a:picLocks noChangeAspect="1"/>
+          </p:cNvPicPr>
+          <p:nvPr/>
+        </p:nvPicPr>
+        <p:blipFill>
+          <a:blip r:embed="rId13"/>
+          <a:stretch>
+            <a:fillRect/>
+          </a:stretch>
+        </p:blipFill>
+        <p:spPr>
+          <a:xfrm>
+            <a:off x="8259317" y="3157728"/>
+            <a:ext cx="1248156" cy="1248156"/>
+          </a:xfrm>
+          <a:prstGeom prst="rect">
+            <a:avLst/>
+          </a:prstGeom>
+        </p:spPr>
+      </p:pic>
     </p:spTree>
   </p:cSld>
   <p:clrMapOvr>
